--- a/Curso Gas B/10 - UNE 60670 - Tuberias, accesorios y uniones/10 - UNE 60670 - Tuberias, accesorios y uniones - Vídeo 3.pptx
+++ b/Curso Gas B/10 - UNE 60670 - Tuberias, accesorios y uniones/10 - UNE 60670 - Tuberias, accesorios y uniones - Vídeo 3.pptx
@@ -19,6 +19,7 @@
     <p:sldId id="267" r:id="rId19"/>
     <p:sldId id="268" r:id="rId20"/>
     <p:sldId id="269" r:id="rId21"/>
+    <p:sldId id="270" r:id="rId22"/>
   </p:sldIdLst>
   <p:sldSz cx="12191695" cy="6858000" type="screen4x3"/>
   <p:notesSz cx="6858000" cy="9144000"/>
@@ -590,12 +591,12 @@
           <a:lstStyle/>
           <a:p>
             <a:r>
-              <a:t>N1: ¿El plomo todavía se usa en gas?</a:t>
-            </a:r>
-          </a:p>
-          <a:p>
-            <a:r>
-              <a:t>N2: Nuevo, nunca; el plomo solo aparece cuando amplías o modificas una instalación antigua que ya lo tiene puesto. Por eso sus uniones llevan tres candados que van siempre juntos: solo en instalaciones ya en servicio, solo hasta cero coma cero cinco bar de presión, y solo en uso doméstico. Fuera de ahí, prohibido. Dentro de esos límites, con el cobre sí se puede soldar el plomo, con aportación de estaño-plomo de fusión por encima de doscientos grados. Pero con el acero o el inoxidable, jamás directo: hay que intercalar siempre un manguito de aleación de cobre, otra vez el traductor. Resumen para el examen: plomo igual a instalación vieja, presión baja y uso de casa; y con acero o inox, manguito de por medio.</a:t>
+              <a:t>N1: ¿Por qué no puedo unir directamente cobre y acero?</a:t>
+            </a:r>
+          </a:p>
+          <a:p>
+            <a:r>
+              <a:t>N2: Porque dos metales distintos en contacto, con la humedad, montan una pila: es lo que se llama par galvánico. Uno de los dos se va corroyendo y la junta acaba fugando con el tiempo. Para evitarlo, la norma usa lo que yo llamo la regla del traductor: entre cobre y acero, y también entre cobre e inoxidable, nunca los unas a pelo; metes en medio un accesorio de aleación de cobre que hace de intermediario, de traductor entre los dos metales. Y para la unión de ese accesorio con el acero, apunta el tercer punto de fusión del tema: ochocientos cincuenta grados, por soldadura fuerte a tope por bordón. Ya tienes los tres números juntos: doscientos veinte, cuatrocientos cincuenta y ochocientos cincuenta grados. Si en el examen ves 'unión directa de cobre y acero', es falsa: siempre va el traductor por medio.</a:t>
             </a:r>
           </a:p>
         </p:txBody>
@@ -665,12 +666,12 @@
           <a:lstStyle/>
           <a:p>
             <a:r>
-              <a:t>N1: ¿Qué gano con una unión que se puede desmontar?</a:t>
-            </a:r>
-          </a:p>
-          <a:p>
-            <a:r>
-              <a:t>N2: Ganas poder abrirla el día que haya que cambiar la pieza sin cortar el tubo. Por eso las uniones desmontables se ponen justo donde algún día tocará desmontar: un contador, un regulador, una válvula. Son tres. La unión por junta plana, para elementos pequeños: dos caras que aprietan una junta, normalmente de goma, que hace la estanquidad. La unión por bridas, para diámetros mayores: dos platos atornillados con una junta en medio. Y la unión metal-metal, del tipo esfera-cono o de anillos cortantes, que se reserva solo a las conexiones de los conjuntos de regulación. Un dato que las abarca a todas: las uniones mecánicas se pueden usar hasta cinco bar de presión, no más. Desmontable quiere decir eso, que se afloja y se vuelve a montar.</a:t>
+              <a:t>N1: ¿El plomo todavía se usa en gas?</a:t>
+            </a:r>
+          </a:p>
+          <a:p>
+            <a:r>
+              <a:t>N2: Nuevo, nunca; el plomo solo aparece cuando amplías o modificas una instalación antigua que ya lo tiene puesto. Por eso sus uniones llevan tres candados que van siempre juntos: solo en instalaciones ya en servicio, solo hasta cero coma cero cinco bar de presión, y solo en uso doméstico. Fuera de ahí, prohibido. Dentro de esos límites, con el cobre sí se puede soldar el plomo, con aportación de estaño-plomo de fusión por encima de doscientos grados. Pero con el acero o el inoxidable, jamás directo: hay que intercalar siempre un manguito de aleación de cobre, otra vez el traductor. Resumen para el examen: plomo igual a instalación vieja, presión baja y uso de casa; y con acero o inox, manguito de por medio.</a:t>
             </a:r>
           </a:p>
         </p:txBody>
@@ -740,12 +741,12 @@
           <a:lstStyle/>
           <a:p>
             <a:r>
-              <a:t>N1: ¿Y las que no se desmontan? ¿el press-fitting qué es?</a:t>
-            </a:r>
-          </a:p>
-          <a:p>
-            <a:r>
-              <a:t>N2: Las no desmontables quedan fijas: una vez hechas, para deshacerlas hay que cortar. La más clásica es la roscada, tubo de acero con rosca, que va por la norma diecinueve mil quinientos con sus accesorios. Pero la reina de la obra rápida hoy es el press-fitting: metes el tubo en el accesorio y lo aprietas con una máquina prensadora que deforma el metal y sella; puede ser radial o axial según cómo apriete. Dentro del accesorio hay una junta tórica, una goma en forma de anillo, que es la que hace la estanquidad, y va por la norma quinientos cuarenta y nueve. También son no desmontables las uniones de multicapa y las del corrugado flexible. Un aviso de obra: si te olvidas de prensar un accesorio o maltratas la junta tórica, tienes la fuga esperando a salir en la prueba, o peor, después. Y de nuevo, todas hasta cinco bar.</a:t>
+              <a:t>N1: ¿Qué gano con una unión que se puede desmontar?</a:t>
+            </a:r>
+          </a:p>
+          <a:p>
+            <a:r>
+              <a:t>N2: Ganas poder abrirla el día que haya que cambiar la pieza sin cortar el tubo. Por eso las uniones desmontables se ponen justo donde algún día tocará desmontar: un contador, un regulador, una válvula. Son tres. La unión por junta plana, para elementos pequeños: dos caras que aprietan una junta, normalmente de goma, que hace la estanquidad. La unión por bridas, para diámetros mayores: dos platos atornillados con una junta en medio. Y la unión metal-metal, del tipo esfera-cono o de anillos cortantes, que se reserva solo a las conexiones de los conjuntos de regulación. Un dato que las abarca a todas: las uniones mecánicas se pueden usar hasta cinco bar de presión, no más. Desmontable quiere decir eso, que se afloja y se vuelve a montar.</a:t>
             </a:r>
           </a:p>
         </p:txBody>
@@ -815,12 +816,12 @@
           <a:lstStyle/>
           <a:p>
             <a:r>
-              <a:t>N1: Los enlaces que pasan de plástico a metal, ¿tienen truco?</a:t>
-            </a:r>
-          </a:p>
-          <a:p>
-            <a:r>
-              <a:t>N2: Tienen un detalle que les gusta cruzar en el examen, y es fácil si lo separas bien. Los enlaces de transición pe-metal, los que casan el plástico con el metal, se dividen en dos según se puedan abrir o no. Si el enlace es desmontable, va por las normas sesenta mil cuatrocientos cinco, parte uno y parte tres. Si es fijo, no desmontable, va por la sesenta mil cuatrocientos cinco, parte uno y parte dos. La parte uno es común; lo que cambia es la otra: la tres para desmontable, la dos para fijo. No las confundas, es justo lo que preguntan. Y para cerrar el capítulo, la norma deja una puerta abierta: se admiten también otras uniones que acepte la norma mil setecientos setenta y cinco. Con esto ya tienes todas las formas de unir tubos de la Parte tres.</a:t>
+              <a:t>N1: ¿Y las que no se desmontan? ¿el press-fitting qué es?</a:t>
+            </a:r>
+          </a:p>
+          <a:p>
+            <a:r>
+              <a:t>N2: Las no desmontables quedan fijas: una vez hechas, para deshacerlas hay que cortar. La más clásica es la roscada, tubo de acero con rosca, que va por la norma diecinueve mil quinientos con sus accesorios. Pero la reina de la obra rápida hoy es el press-fitting: metes el tubo en el accesorio y lo aprietas con una máquina prensadora que deforma el metal y sella; puede ser radial o axial según cómo apriete. Dentro del accesorio hay una junta tórica, una goma en forma de anillo, que es la que hace la estanquidad, y va por la norma quinientos cuarenta y nueve. También son no desmontables las uniones de multicapa y las del corrugado flexible. Un aviso de obra: si te olvidas de prensar un accesorio o maltratas la junta tórica, tienes la fuga esperando a salir en la prueba, o peor, después. Y de nuevo, todas hasta cinco bar.</a:t>
             </a:r>
           </a:p>
         </p:txBody>
@@ -890,6 +891,81 @@
           <a:lstStyle/>
           <a:p>
             <a:r>
+              <a:t>N1: Los enlaces que pasan de plástico a metal, ¿tienen truco?</a:t>
+            </a:r>
+          </a:p>
+          <a:p>
+            <a:r>
+              <a:t>N2: Tienen un detalle que les gusta cruzar en el examen, y es fácil si lo separas bien. Los enlaces de transición pe-metal, los que casan el plástico con el metal, se dividen en dos según se puedan abrir o no. Si el enlace es desmontable, va por las normas sesenta mil cuatrocientos cinco, parte uno y parte tres. Si es fijo, no desmontable, va por la sesenta mil cuatrocientos cinco, parte uno y parte dos. La parte uno es común; lo que cambia es la otra: la tres para desmontable, la dos para fijo. No las confundas, es justo lo que preguntan. Y para cerrar el capítulo, la norma deja una puerta abierta: se admiten también otras uniones que acepte la norma mil setecientos setenta y cinco. Con esto ya tienes todas las formas de unir tubos de la Parte tres.</a:t>
+            </a:r>
+          </a:p>
+        </p:txBody>
+      </p:sp>
+      <p:sp>
+        <p:nvSpPr>
+          <p:cNvPr id="4" name="Slide Number Placeholder 3"/>
+          <p:cNvSpPr>
+            <a:spLocks noGrp="1"/>
+          </p:cNvSpPr>
+          <p:nvPr>
+            <p:ph type="sldNum" idx="5" sz="quarter"/>
+          </p:nvPr>
+        </p:nvSpPr>
+        <p:spPr/>
+      </p:sp>
+    </p:spTree>
+  </p:cSld>
+  <p:clrMapOvr>
+    <a:masterClrMapping/>
+  </p:clrMapOvr>
+</p:notes>
+</file>
+
+<file path=ppt/notesSlides/notesSlide15.xml><?xml version="1.0" encoding="utf-8"?>
+<p:notes xmlns:a="http://schemas.openxmlformats.org/drawingml/2006/main" xmlns:p="http://schemas.openxmlformats.org/presentationml/2006/main" xmlns:r="http://schemas.openxmlformats.org/officeDocument/2006/relationships">
+  <p:cSld>
+    <p:spTree>
+      <p:nvGrpSpPr>
+        <p:cNvPr id="1" name=""/>
+        <p:cNvGrpSpPr/>
+        <p:nvPr/>
+      </p:nvGrpSpPr>
+      <p:grpSpPr>
+        <a:xfrm>
+          <a:off x="0" y="0"/>
+          <a:ext cx="0" cy="0"/>
+          <a:chOff x="0" y="0"/>
+          <a:chExt cx="0" cy="0"/>
+        </a:xfrm>
+      </p:grpSpPr>
+      <p:sp>
+        <p:nvSpPr>
+          <p:cNvPr id="2" name="Slide Image Placeholder 1"/>
+          <p:cNvSpPr>
+            <a:spLocks noGrp="1"/>
+          </p:cNvSpPr>
+          <p:nvPr>
+            <p:ph type="sldImg" idx="2"/>
+          </p:nvPr>
+        </p:nvSpPr>
+        <p:spPr/>
+      </p:sp>
+      <p:sp>
+        <p:nvSpPr>
+          <p:cNvPr id="3" name="Notes Placeholder 2"/>
+          <p:cNvSpPr>
+            <a:spLocks noGrp="1"/>
+          </p:cNvSpPr>
+          <p:nvPr>
+            <p:ph type="body" idx="3" sz="quarter"/>
+          </p:nvPr>
+        </p:nvSpPr>
+        <p:spPr/>
+        <p:txBody>
+          <a:bodyPr/>
+          <a:lstStyle/>
+          <a:p>
+            <a:r>
               <a:t>N1: Último vídeo y fin del tema. ¿Cómo lo cierro todo en la cabeza?</a:t>
             </a:r>
           </a:p>
@@ -1048,16 +1124,7 @@
         <p:txBody>
           <a:bodyPr/>
           <a:lstStyle/>
-          <a:p>
-            <a:r>
-              <a:t>N1: Antes de los tipos de unión, ¿hay una idea que las gobierne a todas?</a:t>
-            </a:r>
-          </a:p>
-          <a:p>
-            <a:r>
-              <a:t>N2: Sí, y si te la quedas, entiendes el capítulo entero. La regla es una sola: toda unión debe asegurar la estanquidad. Estanquidad, en cristiano, quiere decir que no se escape ni una burbuja de gas por la junta. Y tiene que aguantarlo pase lo que pase: aunque cambie el tipo o la presión del gas que circula, y aunque el ambiente de alrededor sea agresivo, húmedo o salino. Fíjate en que todo lo que viene después, soldar, roscar, embridar, no son más que maneras distintas de cumplir esta única regla. Por eso el juez final de tu trabajo es la prueba de estanquidad, la comprobación de fugas que se hace antes de dar gas: si una unión está chapucera, ahí se cae. Trabaja siempre pensando en esa prueba.</a:t>
-            </a:r>
-          </a:p>
+          <a:p/>
         </p:txBody>
       </p:sp>
       <p:sp>
@@ -1125,12 +1192,12 @@
           <a:lstStyle/>
           <a:p>
             <a:r>
-              <a:t>N1: ¿Soldar no es solo calentar y aplicar el metal?</a:t>
-            </a:r>
-          </a:p>
-          <a:p>
-            <a:r>
-              <a:t>N2: Ojalá fuera tan simple; la mayoría de las soldaduras que fugan fallan por lo de antes, no por el calor. La norma dice que el proceso depende de los materiales que unes y de si son iguales o distintos, y luego insiste mucho en la preparación. Primero, limpieza: las superficies tienen que estar limpias, sin grasa ni óxido, porque la soldadura no agarra sobre suciedad. Segundo, el decapante, esa pasta que ayuda a que el metal de aportación fluya y moje bien; tiene que ser el adecuado a cada tipo de soldadura. Y tercero, muy importante, eliminar después los restos del fundente, porque si los dejas, con el tiempo corroen la junta desde fuera y te crean la fuga que tanto cuidado pusiste en evitar. La lección: una buena soldadura se gana en la limpieza previa y en la limpieza posterior.</a:t>
+              <a:t>N1: Antes de los tipos de unión, ¿hay una idea que las gobierne a todas?</a:t>
+            </a:r>
+          </a:p>
+          <a:p>
+            <a:r>
+              <a:t>N2: Sí, y si te la quedas, entiendes el capítulo entero. La regla es una sola: toda unión debe asegurar la estanquidad. Estanquidad, en cristiano, quiere decir que no se escape ni una burbuja de gas por la junta. Y tiene que aguantarlo pase lo que pase: aunque cambie el tipo o la presión del gas que circula, y aunque el ambiente de alrededor sea agresivo, húmedo o salino. Fíjate en que todo lo que viene después, soldar, roscar, embridar, no son más que maneras distintas de cumplir esta única regla. Por eso el juez final de tu trabajo es la prueba de estanquidad, la comprobación de fugas que se hace antes de dar gas: si una unión está chapucera, ahí se cae. Trabaja siempre pensando en esa prueba.</a:t>
             </a:r>
           </a:p>
         </p:txBody>
@@ -1200,12 +1267,12 @@
           <a:lstStyle/>
           <a:p>
             <a:r>
-              <a:t>N1: ¿Cuándo puedo soldar blando y cuándo me obligan a fuerte?</a:t>
-            </a:r>
-          </a:p>
-          <a:p>
-            <a:r>
-              <a:t>N2: Grábate esta frontera como norma de oro, porque es de las más preguntadas. Por encima de cero coma cero cinco bar, siempre soldadura fuerte, sin excepción. La blanda solo se permite hasta cero coma cero cinco bar, y además solo en usos domésticos o en cocinas de tipo A cuya potencia sumada no pase de treinta kilovatios. ¿Y por qué esta diferencia? Porque la soldadura fuerte, que se hace a mucha más temperatura, aguanta el calor de un incendio muchísimo mejor; la blanda se funde antes. Por eso, y aquí el matiz que buscan: si el tubo cruza un aparcamiento cerrado, es soldadura fuerte obligatoria aunque la presión sea baja, porque un garaje es zona de riesgo de incendio. Piénsalo así: soldar blando donde tocaba fuerte es dejar preparada una fuga para el día del fuego.</a:t>
+              <a:t>N1: ¿Soldar no es solo calentar y aplicar el metal?</a:t>
+            </a:r>
+          </a:p>
+          <a:p>
+            <a:r>
+              <a:t>N2: Ojalá fuera tan simple; la mayoría de las soldaduras que fugan fallan por lo de antes, no por el calor. La norma dice que el proceso depende de los materiales que unes y de si son iguales o distintos, y luego insiste mucho en la preparación. Primero, limpieza: las superficies tienen que estar limpias, sin grasa ni óxido, porque la soldadura no agarra sobre suciedad. Segundo, el decapante, esa pasta que ayuda a que el metal de aportación fluya y moje bien; tiene que ser el adecuado a cada tipo de soldadura. Y tercero, muy importante, eliminar después los restos del fundente, porque si los dejas, con el tiempo corroen la junta desde fuera y te crean la fuga que tanto cuidado pusiste en evitar. La lección: una buena soldadura se gana en la limpieza previa y en la limpieza posterior.</a:t>
             </a:r>
           </a:p>
         </p:txBody>
@@ -1275,12 +1342,12 @@
           <a:lstStyle/>
           <a:p>
             <a:r>
-              <a:t>N1: El plástico no se suelda con soplete, ¿no? ¿cómo se une?</a:t>
-            </a:r>
-          </a:p>
-          <a:p>
-            <a:r>
-              <a:t>N2: Bien visto, el polietileno no se suelda con llama; se funde consigo mismo. La forma preferida es la electrofusión: el accesorio lleva por dentro una resistencia eléctrica que, al pasarle corriente, calienta y funde el plástico del tubo y el de la pieza hasta que se hacen uno solo. Es limpio y muy fiable. Para diámetros grandes, a partir de la DN ciento diez, se admite también la soldadura a tope, que enfrenta los dos extremos calientes y los presiona. En los dos casos, el accesorio tiene que ser compatible con el tubo. La idea: en el plástico no hay metal de aportación como en el cobre; lo que se une es el propio material fundido consigo mismo.</a:t>
+              <a:t>N1: ¿Cuándo puedo soldar blando y cuándo me obligan a fuerte?</a:t>
+            </a:r>
+          </a:p>
+          <a:p>
+            <a:r>
+              <a:t>N2: Grábate esta frontera como norma de oro, porque es de las más preguntadas. Por encima de cero coma cero cinco bar, siempre soldadura fuerte, sin excepción. La blanda solo se permite hasta cero coma cero cinco bar, y además solo en usos domésticos o en cocinas de tipo A cuya potencia sumada no pase de treinta kilovatios. ¿Y por qué esta diferencia? Porque la soldadura fuerte, que se hace a mucha más temperatura, aguanta el calor de un incendio muchísimo mejor; la blanda se funde antes. Por eso, y aquí el matiz que buscan: si el tubo cruza un aparcamiento cerrado, es soldadura fuerte obligatoria aunque la presión sea baja, porque un garaje es zona de riesgo de incendio. Piénsalo así: soldar blando donde tocaba fuerte es dejar preparada una fuga para el día del fuego.</a:t>
             </a:r>
           </a:p>
         </p:txBody>
@@ -1350,12 +1417,12 @@
           <a:lstStyle/>
           <a:p>
             <a:r>
-              <a:t>N1: ¿Y el acero se suelda de cualquier forma?</a:t>
-            </a:r>
-          </a:p>
-          <a:p>
-            <a:r>
-              <a:t>N2: No, tiene sus dos técnicas según el diámetro. La general es la soldadura a tope por arco eléctrico: enfrentas los dos tubos y los unes con el arco, esa soldadura de electrodo que da una junta muy resistente. Para diámetros pequeños, hasta la DN cincuenta, se admite también la soldadura oxiacetilénica, la del soplete de oxígeno y acetileno. Por encima de ese diámetro, arco. Recuerda del primer vídeo que al curvar acero tampoco se usa mandril interno, para no estrangularlo, y que sus accesorios pueden ir soldados o roscados, cada uno con su norma. La idea sencilla: acero, a tope por arco; y solo si es fino, hasta cincuenta, puedes tirar de soplete.</a:t>
+              <a:t>N1: El plástico no se suelda con soplete, ¿no? ¿cómo se une?</a:t>
+            </a:r>
+          </a:p>
+          <a:p>
+            <a:r>
+              <a:t>N2: Bien visto, el polietileno no se suelda con llama; se funde consigo mismo. La forma preferida es la electrofusión: el accesorio lleva por dentro una resistencia eléctrica que, al pasarle corriente, calienta y funde el plástico del tubo y el de la pieza hasta que se hacen uno solo. Es limpio y muy fiable. Para diámetros grandes, a partir de la DN ciento diez, se admite también la soldadura a tope, que enfrenta los dos extremos calientes y los presiona. En los dos casos, el accesorio tiene que ser compatible con el tubo. La idea: en el plástico no hay metal de aportación como en el cobre; lo que se une es el propio material fundido consigo mismo.</a:t>
             </a:r>
           </a:p>
         </p:txBody>
@@ -1425,12 +1492,12 @@
           <a:lstStyle/>
           <a:p>
             <a:r>
-              <a:t>N1: ¿Qué es la soldadura capilar y qué está prohibido en ella?</a:t>
-            </a:r>
-          </a:p>
-          <a:p>
-            <a:r>
-              <a:t>N2: La soldadura por capilaridad es la del cobre de toda la vida: metes el tubo dentro del accesorio, calientas, y el metal de aportación fundido se cuela por sí solo en la holgura, por capilaridad, como cuando una servilleta absorbe el agua. Vale para cobre y para acero inoxidable. Dos puntos de fusión que caen en examen: cuatrocientos cincuenta grados para la capilar fuerte y doscientos veinte para la blanda. Y una prohibición clara: no se usa aleación de estaño-plomo como aportación, porque el plomo es tóxico y deja la unión fuera de norma. Un detalle más, muy preguntado: no se debe abocardar el tubo, es decir, ensanchar su boca, para soldar por capilaridad; solo se permite como excepción en las baterías de contadores o colectores de llaves, y siempre que el tubo no pierda espesor al hacerlo.</a:t>
+              <a:t>N1: ¿Y el acero se suelda de cualquier forma?</a:t>
+            </a:r>
+          </a:p>
+          <a:p>
+            <a:r>
+              <a:t>N2: No, tiene sus dos técnicas según el diámetro. La general es la soldadura a tope por arco eléctrico: enfrentas los dos tubos y los unes con el arco, esa soldadura de electrodo que da una junta muy resistente. Para diámetros pequeños, hasta la DN cincuenta, se admite también la soldadura oxiacetilénica, la del soplete de oxígeno y acetileno. Por encima de ese diámetro, arco. Recuerda del primer vídeo que al curvar acero tampoco se usa mandril interno, para no estrangularlo, y que sus accesorios pueden ir soldados o roscados, cada uno con su norma. La idea sencilla: acero, a tope por arco; y solo si es fino, hasta cincuenta, puedes tirar de soplete.</a:t>
             </a:r>
           </a:p>
         </p:txBody>
@@ -1500,12 +1567,12 @@
           <a:lstStyle/>
           <a:p>
             <a:r>
-              <a:t>N1: ¿Por qué no puedo unir directamente cobre y acero?</a:t>
-            </a:r>
-          </a:p>
-          <a:p>
-            <a:r>
-              <a:t>N2: Porque dos metales distintos en contacto, con la humedad, montan una pila: es lo que se llama par galvánico. Uno de los dos se va corroyendo y la junta acaba fugando con el tiempo. Para evitarlo, la norma usa lo que yo llamo la regla del traductor: entre cobre y acero, y también entre cobre e inoxidable, nunca los unas a pelo; metes en medio un accesorio de aleación de cobre que hace de intermediario, de traductor entre los dos metales. Y para la unión de ese accesorio con el acero, apunta el tercer punto de fusión del tema: ochocientos cincuenta grados, por soldadura fuerte a tope por bordón. Ya tienes los tres números juntos: doscientos veinte, cuatrocientos cincuenta y ochocientos cincuenta grados. Si en el examen ves 'unión directa de cobre y acero', es falsa: siempre va el traductor por medio.</a:t>
+              <a:t>N1: ¿Qué es la soldadura capilar y qué está prohibido en ella?</a:t>
+            </a:r>
+          </a:p>
+          <a:p>
+            <a:r>
+              <a:t>N2: La soldadura por capilaridad es la del cobre de toda la vida: metes el tubo dentro del accesorio, calientas, y el metal de aportación fundido se cuela por sí solo en la holgura, por capilaridad, como cuando una servilleta absorbe el agua. Vale para cobre y para acero inoxidable. Dos puntos de fusión que caen en examen: cuatrocientos cincuenta grados para la capilar fuerte y doscientos veinte para la blanda. Y una prohibición clara: no se usa aleación de estaño-plomo como aportación, porque el plomo es tóxico y deja la unión fuera de norma. Un detalle más, muy preguntado: no se debe abocardar el tubo, es decir, ensanchar su boca, para soldar por capilaridad; solo se permite como excepción en las baterías de contadores o colectores de llaves, y siempre que el tubo no pierda espesor al hacerlo.</a:t>
             </a:r>
           </a:p>
         </p:txBody>
@@ -4580,7 +4647,7 @@
             <a:r>
               <a:rPr sz="1400" b="1" i="0">
                 <a:solidFill>
-                  <a:srgbClr val="CADCFC"/>
+                  <a:srgbClr val="F4A24C"/>
                 </a:solidFill>
                 <a:latin typeface="Montserrat"/>
               </a:rPr>
@@ -4591,13 +4658,57 @@
       </p:sp>
       <p:sp>
         <p:nvSpPr>
-          <p:cNvPr id="4" name="TextBox 3"/>
+          <p:cNvPr id="4" name="Rounded Rectangle 3"/>
+          <p:cNvSpPr/>
+          <p:nvPr/>
+        </p:nvSpPr>
+        <p:spPr>
+          <a:xfrm>
+            <a:off x="868680" y="2057400"/>
+            <a:ext cx="1463040" cy="82296"/>
+          </a:xfrm>
+          <a:prstGeom prst="roundRect">
+            <a:avLst/>
+          </a:prstGeom>
+          <a:solidFill>
+            <a:srgbClr val="E8801A"/>
+          </a:solidFill>
+          <a:ln>
+            <a:noFill/>
+          </a:ln>
+          <a:effectLst/>
+        </p:spPr>
+        <p:style>
+          <a:lnRef idx="1">
+            <a:schemeClr val="accent1"/>
+          </a:lnRef>
+          <a:fillRef idx="3">
+            <a:schemeClr val="accent1"/>
+          </a:fillRef>
+          <a:effectRef idx="2">
+            <a:schemeClr val="accent1"/>
+          </a:effectRef>
+          <a:fontRef idx="minor">
+            <a:schemeClr val="lt1"/>
+          </a:fontRef>
+        </p:style>
+        <p:txBody>
+          <a:bodyPr rtlCol="0" anchor="ctr"/>
+          <a:lstStyle/>
+          <a:p>
+            <a:pPr algn="ctr"/>
+          </a:p>
+        </p:txBody>
+      </p:sp>
+      <p:sp>
+        <p:nvSpPr>
+          <p:cNvPr id="5" name="TextBox 4"/>
           <p:cNvSpPr txBox="1"/>
           <p:nvPr/>
         </p:nvSpPr>
         <p:spPr>
           <a:xfrm>
-            <a:off x="822960" y="2194560"/>
+            <a:off x="822960" y="2286000"/>
             <a:ext cx="10515600" cy="2011680"/>
           </a:xfrm>
           <a:prstGeom prst="rect">
@@ -4636,7 +4747,7 @@
       </p:sp>
       <p:sp>
         <p:nvSpPr>
-          <p:cNvPr id="5" name="TextBox 4"/>
+          <p:cNvPr id="6" name="TextBox 5"/>
           <p:cNvSpPr txBox="1"/>
           <p:nvPr/>
         </p:nvSpPr>
@@ -4760,7 +4871,7 @@
                 </a:solidFill>
                 <a:latin typeface="Montserrat"/>
               </a:rPr>
-              <a:t>010 / 014</a:t>
+              <a:t>010 / 015</a:t>
             </a:r>
           </a:p>
         </p:txBody>
@@ -4808,7 +4919,7 @@
         <p:spPr>
           <a:xfrm>
             <a:off x="822960" y="457200"/>
-            <a:ext cx="8229600" cy="365760"/>
+            <a:ext cx="10058400" cy="365760"/>
           </a:xfrm>
           <a:prstGeom prst="rect">
             <a:avLst/>
@@ -4822,13 +4933,13 @@
           <a:lstStyle/>
           <a:p>
             <a:r>
-              <a:rPr sz="1200" b="1" i="0">
-                <a:solidFill>
-                  <a:srgbClr val="64748B"/>
-                </a:solidFill>
-                <a:latin typeface="Montserrat"/>
-              </a:rPr>
-              <a:t>UNIONES · PLOMO</a:t>
+              <a:rPr sz="1300" b="1" i="0">
+                <a:solidFill>
+                  <a:srgbClr val="E8801A"/>
+                </a:solidFill>
+                <a:latin typeface="Montserrat"/>
+              </a:rPr>
+              <a:t>UNIONES · METALES DISTINTOS</a:t>
             </a:r>
           </a:p>
         </p:txBody>
@@ -4856,26 +4967,70 @@
           <a:lstStyle/>
           <a:p>
             <a:r>
-              <a:rPr sz="2700" b="1" i="0">
+              <a:rPr sz="2800" b="1" i="0">
                 <a:solidFill>
                   <a:srgbClr val="1E2761"/>
                 </a:solidFill>
                 <a:latin typeface="Montserrat"/>
               </a:rPr>
-              <a:t>El plomo: solo para lo viejo</a:t>
-            </a:r>
-          </a:p>
-        </p:txBody>
-      </p:sp>
-      <p:sp>
-        <p:nvSpPr>
-          <p:cNvPr id="7" name="TextBox 6"/>
+              <a:t>La regla del traductor</a:t>
+            </a:r>
+          </a:p>
+        </p:txBody>
+      </p:sp>
+      <p:sp>
+        <p:nvSpPr>
+          <p:cNvPr id="7" name="Rounded Rectangle 6"/>
+          <p:cNvSpPr/>
+          <p:nvPr/>
+        </p:nvSpPr>
+        <p:spPr>
+          <a:xfrm>
+            <a:off x="868680" y="1627632"/>
+            <a:ext cx="2011680" cy="73152"/>
+          </a:xfrm>
+          <a:prstGeom prst="roundRect">
+            <a:avLst/>
+          </a:prstGeom>
+          <a:solidFill>
+            <a:srgbClr val="E8801A"/>
+          </a:solidFill>
+          <a:ln>
+            <a:noFill/>
+          </a:ln>
+          <a:effectLst/>
+        </p:spPr>
+        <p:style>
+          <a:lnRef idx="1">
+            <a:schemeClr val="accent1"/>
+          </a:lnRef>
+          <a:fillRef idx="3">
+            <a:schemeClr val="accent1"/>
+          </a:fillRef>
+          <a:effectRef idx="2">
+            <a:schemeClr val="accent1"/>
+          </a:effectRef>
+          <a:fontRef idx="minor">
+            <a:schemeClr val="lt1"/>
+          </a:fontRef>
+        </p:style>
+        <p:txBody>
+          <a:bodyPr rtlCol="0" anchor="ctr"/>
+          <a:lstStyle/>
+          <a:p>
+            <a:pPr algn="ctr"/>
+          </a:p>
+        </p:txBody>
+      </p:sp>
+      <p:sp>
+        <p:nvSpPr>
+          <p:cNvPr id="8" name="TextBox 7"/>
           <p:cNvSpPr txBox="1"/>
           <p:nvPr/>
         </p:nvSpPr>
         <p:spPr>
           <a:xfrm>
-            <a:off x="822960" y="1920240"/>
+            <a:off x="822960" y="1965960"/>
             <a:ext cx="4983480" cy="4206240"/>
           </a:xfrm>
           <a:prstGeom prst="rect">
@@ -4891,17 +5046,17 @@
           <a:p>
             <a:pPr>
               <a:spcAft>
-                <a:spcPts val="1000"/>
+                <a:spcPts val="1100"/>
               </a:spcAft>
             </a:pPr>
             <a:r>
               <a:rPr sz="1600" b="1" i="0">
                 <a:solidFill>
-                  <a:srgbClr val="2E3A80"/>
-                </a:solidFill>
-                <a:latin typeface="Montserrat"/>
-              </a:rPr>
-              <a:t>•  </a:t>
+                  <a:srgbClr val="E8801A"/>
+                </a:solidFill>
+                <a:latin typeface="Montserrat"/>
+              </a:rPr>
+              <a:t>▸  </a:t>
             </a:r>
             <a:r>
               <a:rPr sz="1600" b="0" i="0">
@@ -4910,23 +5065,23 @@
                 </a:solidFill>
                 <a:latin typeface="Montserrat"/>
               </a:rPr>
-              <a:t>Nada de plomo en obra nueva</a:t>
+              <a:t>Cobre y acero: nunca unión directa</a:t>
             </a:r>
           </a:p>
           <a:p>
             <a:pPr>
               <a:spcAft>
-                <a:spcPts val="1000"/>
+                <a:spcPts val="1100"/>
               </a:spcAft>
             </a:pPr>
             <a:r>
               <a:rPr sz="1600" b="1" i="0">
                 <a:solidFill>
-                  <a:srgbClr val="2E3A80"/>
-                </a:solidFill>
-                <a:latin typeface="Montserrat"/>
-              </a:rPr>
-              <a:t>•  </a:t>
+                  <a:srgbClr val="E8801A"/>
+                </a:solidFill>
+                <a:latin typeface="Montserrat"/>
+              </a:rPr>
+              <a:t>▸  </a:t>
             </a:r>
             <a:r>
               <a:rPr sz="1600" b="0" i="0">
@@ -4935,23 +5090,23 @@
                 </a:solidFill>
                 <a:latin typeface="Montserrat"/>
               </a:rPr>
-              <a:t>Solo ampliar o modificar lo ya en servicio</a:t>
+              <a:t>Cobre e inox: nunca unión directa</a:t>
             </a:r>
           </a:p>
           <a:p>
             <a:pPr>
               <a:spcAft>
-                <a:spcPts val="1000"/>
+                <a:spcPts val="1100"/>
               </a:spcAft>
             </a:pPr>
             <a:r>
               <a:rPr sz="1600" b="1" i="0">
                 <a:solidFill>
-                  <a:srgbClr val="2E3A80"/>
-                </a:solidFill>
-                <a:latin typeface="Montserrat"/>
-              </a:rPr>
-              <a:t>•  </a:t>
+                  <a:srgbClr val="E8801A"/>
+                </a:solidFill>
+                <a:latin typeface="Montserrat"/>
+              </a:rPr>
+              <a:t>▸  </a:t>
             </a:r>
             <a:r>
               <a:rPr sz="1600" b="0" i="0">
@@ -4960,23 +5115,23 @@
                 </a:solidFill>
                 <a:latin typeface="Montserrat"/>
               </a:rPr>
-              <a:t>Solo hasta 0,05 bar y uso doméstico</a:t>
+              <a:t>Se intercala un accesorio de aleación de cobre</a:t>
             </a:r>
           </a:p>
           <a:p>
             <a:pPr>
               <a:spcAft>
-                <a:spcPts val="1000"/>
+                <a:spcPts val="1100"/>
               </a:spcAft>
             </a:pPr>
             <a:r>
               <a:rPr sz="1600" b="1" i="0">
                 <a:solidFill>
-                  <a:srgbClr val="2E3A80"/>
-                </a:solidFill>
-                <a:latin typeface="Montserrat"/>
-              </a:rPr>
-              <a:t>•  </a:t>
+                  <a:srgbClr val="E8801A"/>
+                </a:solidFill>
+                <a:latin typeface="Montserrat"/>
+              </a:rPr>
+              <a:t>▸  </a:t>
             </a:r>
             <a:r>
               <a:rPr sz="1600" b="0" i="0">
@@ -4985,14 +5140,14 @@
                 </a:solidFill>
                 <a:latin typeface="Montserrat"/>
               </a:rPr>
-              <a:t>Con acero o inox: manguito de aleación de cobre</a:t>
-            </a:r>
-          </a:p>
-        </p:txBody>
-      </p:sp>
-      <p:sp>
-        <p:nvSpPr>
-          <p:cNvPr id="8" name="imgph" descr="IMGQ:old lead pipe gas installation wall"/>
+              <a:t>Cobre-acero: a tope por bordón, 850 °C</a:t>
+            </a:r>
+          </a:p>
+        </p:txBody>
+      </p:sp>
+      <p:sp>
+        <p:nvSpPr>
+          <p:cNvPr id="9" name="imgph" descr="IMGQ:brass transition fitting copper steel pipe"/>
           <p:cNvSpPr/>
           <p:nvPr/>
         </p:nvSpPr>
@@ -5038,7 +5193,7 @@
       </p:sp>
       <p:sp>
         <p:nvSpPr>
-          <p:cNvPr id="9" name="TextBox 8"/>
+          <p:cNvPr id="10" name="TextBox 9"/>
           <p:cNvSpPr txBox="1"/>
           <p:nvPr/>
         </p:nvSpPr>
@@ -5078,7 +5233,7 @@
                 </a:solidFill>
                 <a:latin typeface="Montserrat"/>
               </a:rPr>
-              <a:t>old lead pipe gas installation wall</a:t>
+              <a:t>brass transition fitting copper steel pipe</a:t>
             </a:r>
           </a:p>
         </p:txBody>
@@ -5175,7 +5330,7 @@
                 </a:solidFill>
                 <a:latin typeface="Montserrat"/>
               </a:rPr>
-              <a:t>011 / 014</a:t>
+              <a:t>011 / 015</a:t>
             </a:r>
           </a:p>
         </p:txBody>
@@ -5223,7 +5378,7 @@
         <p:spPr>
           <a:xfrm>
             <a:off x="822960" y="457200"/>
-            <a:ext cx="8229600" cy="365760"/>
+            <a:ext cx="10058400" cy="365760"/>
           </a:xfrm>
           <a:prstGeom prst="rect">
             <a:avLst/>
@@ -5237,13 +5392,13 @@
           <a:lstStyle/>
           <a:p>
             <a:r>
-              <a:rPr sz="1200" b="1" i="0">
-                <a:solidFill>
-                  <a:srgbClr val="64748B"/>
-                </a:solidFill>
-                <a:latin typeface="Montserrat"/>
-              </a:rPr>
-              <a:t>UNIONES MECÁNICAS · DESMONTABLES</a:t>
+              <a:rPr sz="1300" b="1" i="0">
+                <a:solidFill>
+                  <a:srgbClr val="E8801A"/>
+                </a:solidFill>
+                <a:latin typeface="Montserrat"/>
+              </a:rPr>
+              <a:t>UNIONES · PLOMO</a:t>
             </a:r>
           </a:p>
         </p:txBody>
@@ -5271,26 +5426,70 @@
           <a:lstStyle/>
           <a:p>
             <a:r>
-              <a:rPr sz="2700" b="1" i="0">
+              <a:rPr sz="2800" b="1" i="0">
                 <a:solidFill>
                   <a:srgbClr val="1E2761"/>
                 </a:solidFill>
                 <a:latin typeface="Montserrat"/>
               </a:rPr>
-              <a:t>Desmontables: se vuelven a abrir</a:t>
-            </a:r>
-          </a:p>
-        </p:txBody>
-      </p:sp>
-      <p:sp>
-        <p:nvSpPr>
-          <p:cNvPr id="7" name="TextBox 6"/>
+              <a:t>El plomo: solo para lo viejo</a:t>
+            </a:r>
+          </a:p>
+        </p:txBody>
+      </p:sp>
+      <p:sp>
+        <p:nvSpPr>
+          <p:cNvPr id="7" name="Rounded Rectangle 6"/>
+          <p:cNvSpPr/>
+          <p:nvPr/>
+        </p:nvSpPr>
+        <p:spPr>
+          <a:xfrm>
+            <a:off x="868680" y="1627632"/>
+            <a:ext cx="2011680" cy="73152"/>
+          </a:xfrm>
+          <a:prstGeom prst="roundRect">
+            <a:avLst/>
+          </a:prstGeom>
+          <a:solidFill>
+            <a:srgbClr val="E8801A"/>
+          </a:solidFill>
+          <a:ln>
+            <a:noFill/>
+          </a:ln>
+          <a:effectLst/>
+        </p:spPr>
+        <p:style>
+          <a:lnRef idx="1">
+            <a:schemeClr val="accent1"/>
+          </a:lnRef>
+          <a:fillRef idx="3">
+            <a:schemeClr val="accent1"/>
+          </a:fillRef>
+          <a:effectRef idx="2">
+            <a:schemeClr val="accent1"/>
+          </a:effectRef>
+          <a:fontRef idx="minor">
+            <a:schemeClr val="lt1"/>
+          </a:fontRef>
+        </p:style>
+        <p:txBody>
+          <a:bodyPr rtlCol="0" anchor="ctr"/>
+          <a:lstStyle/>
+          <a:p>
+            <a:pPr algn="ctr"/>
+          </a:p>
+        </p:txBody>
+      </p:sp>
+      <p:sp>
+        <p:nvSpPr>
+          <p:cNvPr id="8" name="TextBox 7"/>
           <p:cNvSpPr txBox="1"/>
           <p:nvPr/>
         </p:nvSpPr>
         <p:spPr>
           <a:xfrm>
-            <a:off x="822960" y="1920240"/>
+            <a:off x="822960" y="1965960"/>
             <a:ext cx="4983480" cy="4206240"/>
           </a:xfrm>
           <a:prstGeom prst="rect">
@@ -5306,17 +5505,17 @@
           <a:p>
             <a:pPr>
               <a:spcAft>
-                <a:spcPts val="1000"/>
+                <a:spcPts val="1100"/>
               </a:spcAft>
             </a:pPr>
             <a:r>
               <a:rPr sz="1600" b="1" i="0">
                 <a:solidFill>
-                  <a:srgbClr val="2E3A80"/>
-                </a:solidFill>
-                <a:latin typeface="Montserrat"/>
-              </a:rPr>
-              <a:t>•  </a:t>
+                  <a:srgbClr val="E8801A"/>
+                </a:solidFill>
+                <a:latin typeface="Montserrat"/>
+              </a:rPr>
+              <a:t>▸  </a:t>
             </a:r>
             <a:r>
               <a:rPr sz="1600" b="0" i="0">
@@ -5325,23 +5524,23 @@
                 </a:solidFill>
                 <a:latin typeface="Montserrat"/>
               </a:rPr>
-              <a:t>Junta plana, bridas y metal-metal</a:t>
+              <a:t>Nada de plomo en obra nueva</a:t>
             </a:r>
           </a:p>
           <a:p>
             <a:pPr>
               <a:spcAft>
-                <a:spcPts val="1000"/>
+                <a:spcPts val="1100"/>
               </a:spcAft>
             </a:pPr>
             <a:r>
               <a:rPr sz="1600" b="1" i="0">
                 <a:solidFill>
-                  <a:srgbClr val="2E3A80"/>
-                </a:solidFill>
-                <a:latin typeface="Montserrat"/>
-              </a:rPr>
-              <a:t>•  </a:t>
+                  <a:srgbClr val="E8801A"/>
+                </a:solidFill>
+                <a:latin typeface="Montserrat"/>
+              </a:rPr>
+              <a:t>▸  </a:t>
             </a:r>
             <a:r>
               <a:rPr sz="1600" b="0" i="0">
@@ -5350,23 +5549,23 @@
                 </a:solidFill>
                 <a:latin typeface="Montserrat"/>
               </a:rPr>
-              <a:t>Junta plana: elementos pequeños</a:t>
+              <a:t>Solo ampliar o modificar lo ya en servicio</a:t>
             </a:r>
           </a:p>
           <a:p>
             <a:pPr>
               <a:spcAft>
-                <a:spcPts val="1000"/>
+                <a:spcPts val="1100"/>
               </a:spcAft>
             </a:pPr>
             <a:r>
               <a:rPr sz="1600" b="1" i="0">
                 <a:solidFill>
-                  <a:srgbClr val="2E3A80"/>
-                </a:solidFill>
-                <a:latin typeface="Montserrat"/>
-              </a:rPr>
-              <a:t>•  </a:t>
+                  <a:srgbClr val="E8801A"/>
+                </a:solidFill>
+                <a:latin typeface="Montserrat"/>
+              </a:rPr>
+              <a:t>▸  </a:t>
             </a:r>
             <a:r>
               <a:rPr sz="1600" b="0" i="0">
@@ -5375,23 +5574,23 @@
                 </a:solidFill>
                 <a:latin typeface="Montserrat"/>
               </a:rPr>
-              <a:t>Bridas: diámetros mayores</a:t>
+              <a:t>Solo hasta 0,05 bar y uso doméstico</a:t>
             </a:r>
           </a:p>
           <a:p>
             <a:pPr>
               <a:spcAft>
-                <a:spcPts val="1000"/>
+                <a:spcPts val="1100"/>
               </a:spcAft>
             </a:pPr>
             <a:r>
               <a:rPr sz="1600" b="1" i="0">
                 <a:solidFill>
-                  <a:srgbClr val="2E3A80"/>
-                </a:solidFill>
-                <a:latin typeface="Montserrat"/>
-              </a:rPr>
-              <a:t>•  </a:t>
+                  <a:srgbClr val="E8801A"/>
+                </a:solidFill>
+                <a:latin typeface="Montserrat"/>
+              </a:rPr>
+              <a:t>▸  </a:t>
             </a:r>
             <a:r>
               <a:rPr sz="1600" b="0" i="0">
@@ -5400,14 +5599,14 @@
                 </a:solidFill>
                 <a:latin typeface="Montserrat"/>
               </a:rPr>
-              <a:t>Metal-metal solo en conjuntos de regulación</a:t>
-            </a:r>
-          </a:p>
-        </p:txBody>
-      </p:sp>
-      <p:sp>
-        <p:nvSpPr>
-          <p:cNvPr id="8" name="imgph" descr="IMGQ:flanged gas pipe connection bolts"/>
+              <a:t>Con acero o inox: manguito de aleación de cobre</a:t>
+            </a:r>
+          </a:p>
+        </p:txBody>
+      </p:sp>
+      <p:sp>
+        <p:nvSpPr>
+          <p:cNvPr id="9" name="imgph" descr="IMGQ:old lead pipe gas installation wall"/>
           <p:cNvSpPr/>
           <p:nvPr/>
         </p:nvSpPr>
@@ -5453,7 +5652,7 @@
       </p:sp>
       <p:sp>
         <p:nvSpPr>
-          <p:cNvPr id="9" name="TextBox 8"/>
+          <p:cNvPr id="10" name="TextBox 9"/>
           <p:cNvSpPr txBox="1"/>
           <p:nvPr/>
         </p:nvSpPr>
@@ -5493,7 +5692,7 @@
                 </a:solidFill>
                 <a:latin typeface="Montserrat"/>
               </a:rPr>
-              <a:t>flanged gas pipe connection bolts</a:t>
+              <a:t>old lead pipe gas installation wall</a:t>
             </a:r>
           </a:p>
         </p:txBody>
@@ -5590,7 +5789,7 @@
                 </a:solidFill>
                 <a:latin typeface="Montserrat"/>
               </a:rPr>
-              <a:t>012 / 014</a:t>
+              <a:t>012 / 015</a:t>
             </a:r>
           </a:p>
         </p:txBody>
@@ -5638,7 +5837,7 @@
         <p:spPr>
           <a:xfrm>
             <a:off x="822960" y="457200"/>
-            <a:ext cx="8229600" cy="365760"/>
+            <a:ext cx="10058400" cy="365760"/>
           </a:xfrm>
           <a:prstGeom prst="rect">
             <a:avLst/>
@@ -5652,13 +5851,13 @@
           <a:lstStyle/>
           <a:p>
             <a:r>
-              <a:rPr sz="1200" b="1" i="0">
-                <a:solidFill>
-                  <a:srgbClr val="64748B"/>
-                </a:solidFill>
-                <a:latin typeface="Montserrat"/>
-              </a:rPr>
-              <a:t>UNIONES MECÁNICAS · NO DESMONTABLES</a:t>
+              <a:rPr sz="1300" b="1" i="0">
+                <a:solidFill>
+                  <a:srgbClr val="E8801A"/>
+                </a:solidFill>
+                <a:latin typeface="Montserrat"/>
+              </a:rPr>
+              <a:t>UNIONES MECÁNICAS · DESMONTABLES</a:t>
             </a:r>
           </a:p>
         </p:txBody>
@@ -5686,26 +5885,70 @@
           <a:lstStyle/>
           <a:p>
             <a:r>
-              <a:rPr sz="2700" b="1" i="0">
+              <a:rPr sz="2800" b="1" i="0">
                 <a:solidFill>
                   <a:srgbClr val="1E2761"/>
                 </a:solidFill>
                 <a:latin typeface="Montserrat"/>
               </a:rPr>
-              <a:t>No desmontables: quedan fijas</a:t>
-            </a:r>
-          </a:p>
-        </p:txBody>
-      </p:sp>
-      <p:sp>
-        <p:nvSpPr>
-          <p:cNvPr id="7" name="TextBox 6"/>
+              <a:t>Desmontables: se vuelven a abrir</a:t>
+            </a:r>
+          </a:p>
+        </p:txBody>
+      </p:sp>
+      <p:sp>
+        <p:nvSpPr>
+          <p:cNvPr id="7" name="Rounded Rectangle 6"/>
+          <p:cNvSpPr/>
+          <p:nvPr/>
+        </p:nvSpPr>
+        <p:spPr>
+          <a:xfrm>
+            <a:off x="868680" y="1627632"/>
+            <a:ext cx="2011680" cy="73152"/>
+          </a:xfrm>
+          <a:prstGeom prst="roundRect">
+            <a:avLst/>
+          </a:prstGeom>
+          <a:solidFill>
+            <a:srgbClr val="E8801A"/>
+          </a:solidFill>
+          <a:ln>
+            <a:noFill/>
+          </a:ln>
+          <a:effectLst/>
+        </p:spPr>
+        <p:style>
+          <a:lnRef idx="1">
+            <a:schemeClr val="accent1"/>
+          </a:lnRef>
+          <a:fillRef idx="3">
+            <a:schemeClr val="accent1"/>
+          </a:fillRef>
+          <a:effectRef idx="2">
+            <a:schemeClr val="accent1"/>
+          </a:effectRef>
+          <a:fontRef idx="minor">
+            <a:schemeClr val="lt1"/>
+          </a:fontRef>
+        </p:style>
+        <p:txBody>
+          <a:bodyPr rtlCol="0" anchor="ctr"/>
+          <a:lstStyle/>
+          <a:p>
+            <a:pPr algn="ctr"/>
+          </a:p>
+        </p:txBody>
+      </p:sp>
+      <p:sp>
+        <p:nvSpPr>
+          <p:cNvPr id="8" name="TextBox 7"/>
           <p:cNvSpPr txBox="1"/>
           <p:nvPr/>
         </p:nvSpPr>
         <p:spPr>
           <a:xfrm>
-            <a:off x="822960" y="1920240"/>
+            <a:off x="822960" y="1965960"/>
             <a:ext cx="4983480" cy="4206240"/>
           </a:xfrm>
           <a:prstGeom prst="rect">
@@ -5721,17 +5964,17 @@
           <a:p>
             <a:pPr>
               <a:spcAft>
-                <a:spcPts val="1000"/>
+                <a:spcPts val="1100"/>
               </a:spcAft>
             </a:pPr>
             <a:r>
               <a:rPr sz="1600" b="1" i="0">
                 <a:solidFill>
-                  <a:srgbClr val="2E3A80"/>
-                </a:solidFill>
-                <a:latin typeface="Montserrat"/>
-              </a:rPr>
-              <a:t>•  </a:t>
+                  <a:srgbClr val="E8801A"/>
+                </a:solidFill>
+                <a:latin typeface="Montserrat"/>
+              </a:rPr>
+              <a:t>▸  </a:t>
             </a:r>
             <a:r>
               <a:rPr sz="1600" b="0" i="0">
@@ -5740,23 +5983,23 @@
                 </a:solidFill>
                 <a:latin typeface="Montserrat"/>
               </a:rPr>
-              <a:t>Roscadas (UNE 19500 / UNE-EN 10242)</a:t>
+              <a:t>Junta plana, bridas y metal-metal</a:t>
             </a:r>
           </a:p>
           <a:p>
             <a:pPr>
               <a:spcAft>
-                <a:spcPts val="1000"/>
+                <a:spcPts val="1100"/>
               </a:spcAft>
             </a:pPr>
             <a:r>
               <a:rPr sz="1600" b="1" i="0">
                 <a:solidFill>
-                  <a:srgbClr val="2E3A80"/>
-                </a:solidFill>
-                <a:latin typeface="Montserrat"/>
-              </a:rPr>
-              <a:t>•  </a:t>
+                  <a:srgbClr val="E8801A"/>
+                </a:solidFill>
+                <a:latin typeface="Montserrat"/>
+              </a:rPr>
+              <a:t>▸  </a:t>
             </a:r>
             <a:r>
               <a:rPr sz="1600" b="0" i="0">
@@ -5765,23 +6008,23 @@
                 </a:solidFill>
                 <a:latin typeface="Montserrat"/>
               </a:rPr>
-              <a:t>Press-fitting radial y axial</a:t>
+              <a:t>Junta plana: elementos pequeños</a:t>
             </a:r>
           </a:p>
           <a:p>
             <a:pPr>
               <a:spcAft>
-                <a:spcPts val="1000"/>
+                <a:spcPts val="1100"/>
               </a:spcAft>
             </a:pPr>
             <a:r>
               <a:rPr sz="1600" b="1" i="0">
                 <a:solidFill>
-                  <a:srgbClr val="2E3A80"/>
-                </a:solidFill>
-                <a:latin typeface="Montserrat"/>
-              </a:rPr>
-              <a:t>•  </a:t>
+                  <a:srgbClr val="E8801A"/>
+                </a:solidFill>
+                <a:latin typeface="Montserrat"/>
+              </a:rPr>
+              <a:t>▸  </a:t>
             </a:r>
             <a:r>
               <a:rPr sz="1600" b="0" i="0">
@@ -5790,23 +6033,23 @@
                 </a:solidFill>
                 <a:latin typeface="Montserrat"/>
               </a:rPr>
-              <a:t>Multicapa y corrugado flexible</a:t>
+              <a:t>Bridas: diámetros mayores</a:t>
             </a:r>
           </a:p>
           <a:p>
             <a:pPr>
               <a:spcAft>
-                <a:spcPts val="1000"/>
+                <a:spcPts val="1100"/>
               </a:spcAft>
             </a:pPr>
             <a:r>
               <a:rPr sz="1600" b="1" i="0">
                 <a:solidFill>
-                  <a:srgbClr val="2E3A80"/>
-                </a:solidFill>
-                <a:latin typeface="Montserrat"/>
-              </a:rPr>
-              <a:t>•  </a:t>
+                  <a:srgbClr val="E8801A"/>
+                </a:solidFill>
+                <a:latin typeface="Montserrat"/>
+              </a:rPr>
+              <a:t>▸  </a:t>
             </a:r>
             <a:r>
               <a:rPr sz="1600" b="0" i="0">
@@ -5815,14 +6058,14 @@
                 </a:solidFill>
                 <a:latin typeface="Montserrat"/>
               </a:rPr>
-              <a:t>Junta tórica UNE-EN 549; hasta 5 bar</a:t>
-            </a:r>
-          </a:p>
-        </p:txBody>
-      </p:sp>
-      <p:sp>
-        <p:nvSpPr>
-          <p:cNvPr id="8" name="imgph" descr="IMGQ:press fitting tool crimping gas pipe"/>
+              <a:t>Metal-metal solo en conjuntos de regulación</a:t>
+            </a:r>
+          </a:p>
+        </p:txBody>
+      </p:sp>
+      <p:sp>
+        <p:nvSpPr>
+          <p:cNvPr id="9" name="imgph" descr="IMGQ:flanged gas pipe connection bolts"/>
           <p:cNvSpPr/>
           <p:nvPr/>
         </p:nvSpPr>
@@ -5868,7 +6111,7 @@
       </p:sp>
       <p:sp>
         <p:nvSpPr>
-          <p:cNvPr id="9" name="TextBox 8"/>
+          <p:cNvPr id="10" name="TextBox 9"/>
           <p:cNvSpPr txBox="1"/>
           <p:nvPr/>
         </p:nvSpPr>
@@ -5908,7 +6151,7 @@
                 </a:solidFill>
                 <a:latin typeface="Montserrat"/>
               </a:rPr>
-              <a:t>press fitting tool crimping gas pipe</a:t>
+              <a:t>flanged gas pipe connection bolts</a:t>
             </a:r>
           </a:p>
         </p:txBody>
@@ -6005,7 +6248,7 @@
                 </a:solidFill>
                 <a:latin typeface="Montserrat"/>
               </a:rPr>
-              <a:t>013 / 014</a:t>
+              <a:t>013 / 015</a:t>
             </a:r>
           </a:p>
         </p:txBody>
@@ -6053,7 +6296,7 @@
         <p:spPr>
           <a:xfrm>
             <a:off x="822960" y="457200"/>
-            <a:ext cx="8229600" cy="365760"/>
+            <a:ext cx="10058400" cy="365760"/>
           </a:xfrm>
           <a:prstGeom prst="rect">
             <a:avLst/>
@@ -6067,13 +6310,13 @@
           <a:lstStyle/>
           <a:p>
             <a:r>
-              <a:rPr sz="1200" b="1" i="0">
-                <a:solidFill>
-                  <a:srgbClr val="64748B"/>
-                </a:solidFill>
-                <a:latin typeface="Montserrat"/>
-              </a:rPr>
-              <a:t>TRANSICIÓN PE-METAL · OTRAS</a:t>
+              <a:rPr sz="1300" b="1" i="0">
+                <a:solidFill>
+                  <a:srgbClr val="E8801A"/>
+                </a:solidFill>
+                <a:latin typeface="Montserrat"/>
+              </a:rPr>
+              <a:t>UNIONES MECÁNICAS · NO DESMONTABLES</a:t>
             </a:r>
           </a:p>
         </p:txBody>
@@ -6101,26 +6344,70 @@
           <a:lstStyle/>
           <a:p>
             <a:r>
-              <a:rPr sz="2700" b="1" i="0">
+              <a:rPr sz="2800" b="1" i="0">
                 <a:solidFill>
                   <a:srgbClr val="1E2761"/>
                 </a:solidFill>
                 <a:latin typeface="Montserrat"/>
               </a:rPr>
-              <a:t>Enlaces PE-metal y otras uniones</a:t>
-            </a:r>
-          </a:p>
-        </p:txBody>
-      </p:sp>
-      <p:sp>
-        <p:nvSpPr>
-          <p:cNvPr id="7" name="TextBox 6"/>
+              <a:t>No desmontables: quedan fijas</a:t>
+            </a:r>
+          </a:p>
+        </p:txBody>
+      </p:sp>
+      <p:sp>
+        <p:nvSpPr>
+          <p:cNvPr id="7" name="Rounded Rectangle 6"/>
+          <p:cNvSpPr/>
+          <p:nvPr/>
+        </p:nvSpPr>
+        <p:spPr>
+          <a:xfrm>
+            <a:off x="868680" y="1627632"/>
+            <a:ext cx="2011680" cy="73152"/>
+          </a:xfrm>
+          <a:prstGeom prst="roundRect">
+            <a:avLst/>
+          </a:prstGeom>
+          <a:solidFill>
+            <a:srgbClr val="E8801A"/>
+          </a:solidFill>
+          <a:ln>
+            <a:noFill/>
+          </a:ln>
+          <a:effectLst/>
+        </p:spPr>
+        <p:style>
+          <a:lnRef idx="1">
+            <a:schemeClr val="accent1"/>
+          </a:lnRef>
+          <a:fillRef idx="3">
+            <a:schemeClr val="accent1"/>
+          </a:fillRef>
+          <a:effectRef idx="2">
+            <a:schemeClr val="accent1"/>
+          </a:effectRef>
+          <a:fontRef idx="minor">
+            <a:schemeClr val="lt1"/>
+          </a:fontRef>
+        </p:style>
+        <p:txBody>
+          <a:bodyPr rtlCol="0" anchor="ctr"/>
+          <a:lstStyle/>
+          <a:p>
+            <a:pPr algn="ctr"/>
+          </a:p>
+        </p:txBody>
+      </p:sp>
+      <p:sp>
+        <p:nvSpPr>
+          <p:cNvPr id="8" name="TextBox 7"/>
           <p:cNvSpPr txBox="1"/>
           <p:nvPr/>
         </p:nvSpPr>
         <p:spPr>
           <a:xfrm>
-            <a:off x="822960" y="1920240"/>
+            <a:off x="822960" y="1965960"/>
             <a:ext cx="4983480" cy="4206240"/>
           </a:xfrm>
           <a:prstGeom prst="rect">
@@ -6136,17 +6423,17 @@
           <a:p>
             <a:pPr>
               <a:spcAft>
-                <a:spcPts val="1000"/>
+                <a:spcPts val="1100"/>
               </a:spcAft>
             </a:pPr>
             <a:r>
               <a:rPr sz="1600" b="1" i="0">
                 <a:solidFill>
-                  <a:srgbClr val="2E3A80"/>
-                </a:solidFill>
-                <a:latin typeface="Montserrat"/>
-              </a:rPr>
-              <a:t>•  </a:t>
+                  <a:srgbClr val="E8801A"/>
+                </a:solidFill>
+                <a:latin typeface="Montserrat"/>
+              </a:rPr>
+              <a:t>▸  </a:t>
             </a:r>
             <a:r>
               <a:rPr sz="1600" b="0" i="0">
@@ -6155,23 +6442,23 @@
                 </a:solidFill>
                 <a:latin typeface="Montserrat"/>
               </a:rPr>
-              <a:t>Desmontable → UNE 60405-1 y -3</a:t>
+              <a:t>Roscadas (UNE 19500 / UNE-EN 10242)</a:t>
             </a:r>
           </a:p>
           <a:p>
             <a:pPr>
               <a:spcAft>
-                <a:spcPts val="1000"/>
+                <a:spcPts val="1100"/>
               </a:spcAft>
             </a:pPr>
             <a:r>
               <a:rPr sz="1600" b="1" i="0">
                 <a:solidFill>
-                  <a:srgbClr val="2E3A80"/>
-                </a:solidFill>
-                <a:latin typeface="Montserrat"/>
-              </a:rPr>
-              <a:t>•  </a:t>
+                  <a:srgbClr val="E8801A"/>
+                </a:solidFill>
+                <a:latin typeface="Montserrat"/>
+              </a:rPr>
+              <a:t>▸  </a:t>
             </a:r>
             <a:r>
               <a:rPr sz="1600" b="0" i="0">
@@ -6180,23 +6467,23 @@
                 </a:solidFill>
                 <a:latin typeface="Montserrat"/>
               </a:rPr>
-              <a:t>Fijo → UNE 60405-1 y -2</a:t>
+              <a:t>Press-fitting radial y axial</a:t>
             </a:r>
           </a:p>
           <a:p>
             <a:pPr>
               <a:spcAft>
-                <a:spcPts val="1000"/>
+                <a:spcPts val="1100"/>
               </a:spcAft>
             </a:pPr>
             <a:r>
               <a:rPr sz="1600" b="1" i="0">
                 <a:solidFill>
-                  <a:srgbClr val="2E3A80"/>
-                </a:solidFill>
-                <a:latin typeface="Montserrat"/>
-              </a:rPr>
-              <a:t>•  </a:t>
+                  <a:srgbClr val="E8801A"/>
+                </a:solidFill>
+                <a:latin typeface="Montserrat"/>
+              </a:rPr>
+              <a:t>▸  </a:t>
             </a:r>
             <a:r>
               <a:rPr sz="1600" b="0" i="0">
@@ -6205,23 +6492,23 @@
                 </a:solidFill>
                 <a:latin typeface="Montserrat"/>
               </a:rPr>
-              <a:t>No confundas desmontable con fijo</a:t>
+              <a:t>Multicapa y corrugado flexible</a:t>
             </a:r>
           </a:p>
           <a:p>
             <a:pPr>
               <a:spcAft>
-                <a:spcPts val="1000"/>
+                <a:spcPts val="1100"/>
               </a:spcAft>
             </a:pPr>
             <a:r>
               <a:rPr sz="1600" b="1" i="0">
                 <a:solidFill>
-                  <a:srgbClr val="2E3A80"/>
-                </a:solidFill>
-                <a:latin typeface="Montserrat"/>
-              </a:rPr>
-              <a:t>•  </a:t>
+                  <a:srgbClr val="E8801A"/>
+                </a:solidFill>
+                <a:latin typeface="Montserrat"/>
+              </a:rPr>
+              <a:t>▸  </a:t>
             </a:r>
             <a:r>
               <a:rPr sz="1600" b="0" i="0">
@@ -6230,14 +6517,14 @@
                 </a:solidFill>
                 <a:latin typeface="Montserrat"/>
               </a:rPr>
-              <a:t>Otras aceptadas: UNE-EN 1775</a:t>
-            </a:r>
-          </a:p>
-        </p:txBody>
-      </p:sp>
-      <p:sp>
-        <p:nvSpPr>
-          <p:cNvPr id="8" name="imgph" descr="IMGQ:polyethylene to metal transition fitting"/>
+              <a:t>Junta tórica UNE-EN 549; hasta 5 bar</a:t>
+            </a:r>
+          </a:p>
+        </p:txBody>
+      </p:sp>
+      <p:sp>
+        <p:nvSpPr>
+          <p:cNvPr id="9" name="imgph" descr="IMGQ:press fitting tool crimping gas pipe"/>
           <p:cNvSpPr/>
           <p:nvPr/>
         </p:nvSpPr>
@@ -6283,7 +6570,7 @@
       </p:sp>
       <p:sp>
         <p:nvSpPr>
-          <p:cNvPr id="9" name="TextBox 8"/>
+          <p:cNvPr id="10" name="TextBox 9"/>
           <p:cNvSpPr txBox="1"/>
           <p:nvPr/>
         </p:nvSpPr>
@@ -6323,7 +6610,7 @@
                 </a:solidFill>
                 <a:latin typeface="Montserrat"/>
               </a:rPr>
-              <a:t>polyethylene to metal transition fitting</a:t>
+              <a:t>press fitting tool crimping gas pipe</a:t>
             </a:r>
           </a:p>
         </p:txBody>
@@ -6361,6 +6648,465 @@
             <a:avLst/>
           </a:prstGeom>
           <a:solidFill>
+            <a:srgbClr val="FFFFFF"/>
+          </a:solidFill>
+          <a:ln>
+            <a:noFill/>
+          </a:ln>
+          <a:effectLst/>
+        </p:spPr>
+        <p:style>
+          <a:lnRef idx="1">
+            <a:schemeClr val="accent1"/>
+          </a:lnRef>
+          <a:fillRef idx="3">
+            <a:schemeClr val="accent1"/>
+          </a:fillRef>
+          <a:effectRef idx="2">
+            <a:schemeClr val="accent1"/>
+          </a:effectRef>
+          <a:fontRef idx="minor">
+            <a:schemeClr val="lt1"/>
+          </a:fontRef>
+        </p:style>
+        <p:txBody>
+          <a:bodyPr rtlCol="0" anchor="ctr"/>
+          <a:lstStyle/>
+          <a:p>
+            <a:pPr algn="ctr"/>
+          </a:p>
+        </p:txBody>
+      </p:sp>
+      <p:sp>
+        <p:nvSpPr>
+          <p:cNvPr id="3" name="TextBox 2"/>
+          <p:cNvSpPr txBox="1"/>
+          <p:nvPr/>
+        </p:nvSpPr>
+        <p:spPr>
+          <a:xfrm>
+            <a:off x="10607040" y="320040"/>
+            <a:ext cx="1371600" cy="365760"/>
+          </a:xfrm>
+          <a:prstGeom prst="rect">
+            <a:avLst/>
+          </a:prstGeom>
+          <a:noFill/>
+        </p:spPr>
+        <p:txBody>
+          <a:bodyPr wrap="square">
+            <a:spAutoFit/>
+          </a:bodyPr>
+          <a:lstStyle/>
+          <a:p>
+            <a:pPr algn="r"/>
+            <a:r>
+              <a:rPr sz="1000" b="1" i="0">
+                <a:solidFill>
+                  <a:srgbClr val="64748B"/>
+                </a:solidFill>
+                <a:latin typeface="Montserrat"/>
+              </a:rPr>
+              <a:t>014 / 015</a:t>
+            </a:r>
+          </a:p>
+        </p:txBody>
+      </p:sp>
+      <p:sp>
+        <p:nvSpPr>
+          <p:cNvPr id="4" name="TextBox 3"/>
+          <p:cNvSpPr txBox="1"/>
+          <p:nvPr/>
+        </p:nvSpPr>
+        <p:spPr>
+          <a:xfrm>
+            <a:off x="457200" y="6419088"/>
+            <a:ext cx="8229600" cy="365760"/>
+          </a:xfrm>
+          <a:prstGeom prst="rect">
+            <a:avLst/>
+          </a:prstGeom>
+          <a:noFill/>
+        </p:spPr>
+        <p:txBody>
+          <a:bodyPr wrap="square">
+            <a:spAutoFit/>
+          </a:bodyPr>
+          <a:lstStyle/>
+          <a:p>
+            <a:r>
+              <a:rPr sz="900" b="0" i="0">
+                <a:solidFill>
+                  <a:srgbClr val="64748B"/>
+                </a:solidFill>
+                <a:latin typeface="Montserrat"/>
+              </a:rPr>
+              <a:t>Curso Gas B · Tema 10 · UNE 60670-3</a:t>
+            </a:r>
+          </a:p>
+        </p:txBody>
+      </p:sp>
+      <p:sp>
+        <p:nvSpPr>
+          <p:cNvPr id="5" name="TextBox 4"/>
+          <p:cNvSpPr txBox="1"/>
+          <p:nvPr/>
+        </p:nvSpPr>
+        <p:spPr>
+          <a:xfrm>
+            <a:off x="822960" y="457200"/>
+            <a:ext cx="10058400" cy="365760"/>
+          </a:xfrm>
+          <a:prstGeom prst="rect">
+            <a:avLst/>
+          </a:prstGeom>
+          <a:noFill/>
+        </p:spPr>
+        <p:txBody>
+          <a:bodyPr wrap="square">
+            <a:spAutoFit/>
+          </a:bodyPr>
+          <a:lstStyle/>
+          <a:p>
+            <a:r>
+              <a:rPr sz="1300" b="1" i="0">
+                <a:solidFill>
+                  <a:srgbClr val="E8801A"/>
+                </a:solidFill>
+                <a:latin typeface="Montserrat"/>
+              </a:rPr>
+              <a:t>TRANSICIÓN PE-METAL · OTRAS</a:t>
+            </a:r>
+          </a:p>
+        </p:txBody>
+      </p:sp>
+      <p:sp>
+        <p:nvSpPr>
+          <p:cNvPr id="6" name="TextBox 5"/>
+          <p:cNvSpPr txBox="1"/>
+          <p:nvPr/>
+        </p:nvSpPr>
+        <p:spPr>
+          <a:xfrm>
+            <a:off x="822960" y="868680"/>
+            <a:ext cx="10515600" cy="914400"/>
+          </a:xfrm>
+          <a:prstGeom prst="rect">
+            <a:avLst/>
+          </a:prstGeom>
+          <a:noFill/>
+        </p:spPr>
+        <p:txBody>
+          <a:bodyPr wrap="square">
+            <a:spAutoFit/>
+          </a:bodyPr>
+          <a:lstStyle/>
+          <a:p>
+            <a:r>
+              <a:rPr sz="2800" b="1" i="0">
+                <a:solidFill>
+                  <a:srgbClr val="1E2761"/>
+                </a:solidFill>
+                <a:latin typeface="Montserrat"/>
+              </a:rPr>
+              <a:t>Enlaces PE-metal y otras uniones</a:t>
+            </a:r>
+          </a:p>
+        </p:txBody>
+      </p:sp>
+      <p:sp>
+        <p:nvSpPr>
+          <p:cNvPr id="7" name="Rounded Rectangle 6"/>
+          <p:cNvSpPr/>
+          <p:nvPr/>
+        </p:nvSpPr>
+        <p:spPr>
+          <a:xfrm>
+            <a:off x="868680" y="1627632"/>
+            <a:ext cx="2011680" cy="73152"/>
+          </a:xfrm>
+          <a:prstGeom prst="roundRect">
+            <a:avLst/>
+          </a:prstGeom>
+          <a:solidFill>
+            <a:srgbClr val="E8801A"/>
+          </a:solidFill>
+          <a:ln>
+            <a:noFill/>
+          </a:ln>
+          <a:effectLst/>
+        </p:spPr>
+        <p:style>
+          <a:lnRef idx="1">
+            <a:schemeClr val="accent1"/>
+          </a:lnRef>
+          <a:fillRef idx="3">
+            <a:schemeClr val="accent1"/>
+          </a:fillRef>
+          <a:effectRef idx="2">
+            <a:schemeClr val="accent1"/>
+          </a:effectRef>
+          <a:fontRef idx="minor">
+            <a:schemeClr val="lt1"/>
+          </a:fontRef>
+        </p:style>
+        <p:txBody>
+          <a:bodyPr rtlCol="0" anchor="ctr"/>
+          <a:lstStyle/>
+          <a:p>
+            <a:pPr algn="ctr"/>
+          </a:p>
+        </p:txBody>
+      </p:sp>
+      <p:sp>
+        <p:nvSpPr>
+          <p:cNvPr id="8" name="TextBox 7"/>
+          <p:cNvSpPr txBox="1"/>
+          <p:nvPr/>
+        </p:nvSpPr>
+        <p:spPr>
+          <a:xfrm>
+            <a:off x="822960" y="1965960"/>
+            <a:ext cx="4983480" cy="4206240"/>
+          </a:xfrm>
+          <a:prstGeom prst="rect">
+            <a:avLst/>
+          </a:prstGeom>
+          <a:noFill/>
+        </p:spPr>
+        <p:txBody>
+          <a:bodyPr wrap="square">
+            <a:spAutoFit/>
+          </a:bodyPr>
+          <a:lstStyle/>
+          <a:p>
+            <a:pPr>
+              <a:spcAft>
+                <a:spcPts val="1100"/>
+              </a:spcAft>
+            </a:pPr>
+            <a:r>
+              <a:rPr sz="1600" b="1" i="0">
+                <a:solidFill>
+                  <a:srgbClr val="E8801A"/>
+                </a:solidFill>
+                <a:latin typeface="Montserrat"/>
+              </a:rPr>
+              <a:t>▸  </a:t>
+            </a:r>
+            <a:r>
+              <a:rPr sz="1600" b="0" i="0">
+                <a:solidFill>
+                  <a:srgbClr val="1B2330"/>
+                </a:solidFill>
+                <a:latin typeface="Montserrat"/>
+              </a:rPr>
+              <a:t>Desmontable → UNE 60405-1 y -3</a:t>
+            </a:r>
+          </a:p>
+          <a:p>
+            <a:pPr>
+              <a:spcAft>
+                <a:spcPts val="1100"/>
+              </a:spcAft>
+            </a:pPr>
+            <a:r>
+              <a:rPr sz="1600" b="1" i="0">
+                <a:solidFill>
+                  <a:srgbClr val="E8801A"/>
+                </a:solidFill>
+                <a:latin typeface="Montserrat"/>
+              </a:rPr>
+              <a:t>▸  </a:t>
+            </a:r>
+            <a:r>
+              <a:rPr sz="1600" b="0" i="0">
+                <a:solidFill>
+                  <a:srgbClr val="1B2330"/>
+                </a:solidFill>
+                <a:latin typeface="Montserrat"/>
+              </a:rPr>
+              <a:t>Fijo → UNE 60405-1 y -2</a:t>
+            </a:r>
+          </a:p>
+          <a:p>
+            <a:pPr>
+              <a:spcAft>
+                <a:spcPts val="1100"/>
+              </a:spcAft>
+            </a:pPr>
+            <a:r>
+              <a:rPr sz="1600" b="1" i="0">
+                <a:solidFill>
+                  <a:srgbClr val="E8801A"/>
+                </a:solidFill>
+                <a:latin typeface="Montserrat"/>
+              </a:rPr>
+              <a:t>▸  </a:t>
+            </a:r>
+            <a:r>
+              <a:rPr sz="1600" b="0" i="0">
+                <a:solidFill>
+                  <a:srgbClr val="1B2330"/>
+                </a:solidFill>
+                <a:latin typeface="Montserrat"/>
+              </a:rPr>
+              <a:t>No confundas desmontable con fijo</a:t>
+            </a:r>
+          </a:p>
+          <a:p>
+            <a:pPr>
+              <a:spcAft>
+                <a:spcPts val="1100"/>
+              </a:spcAft>
+            </a:pPr>
+            <a:r>
+              <a:rPr sz="1600" b="1" i="0">
+                <a:solidFill>
+                  <a:srgbClr val="E8801A"/>
+                </a:solidFill>
+                <a:latin typeface="Montserrat"/>
+              </a:rPr>
+              <a:t>▸  </a:t>
+            </a:r>
+            <a:r>
+              <a:rPr sz="1600" b="0" i="0">
+                <a:solidFill>
+                  <a:srgbClr val="1B2330"/>
+                </a:solidFill>
+                <a:latin typeface="Montserrat"/>
+              </a:rPr>
+              <a:t>Otras aceptadas: UNE-EN 1775</a:t>
+            </a:r>
+          </a:p>
+        </p:txBody>
+      </p:sp>
+      <p:sp>
+        <p:nvSpPr>
+          <p:cNvPr id="9" name="imgph" descr="IMGQ:polyethylene to metal transition fitting"/>
+          <p:cNvSpPr/>
+          <p:nvPr/>
+        </p:nvSpPr>
+        <p:spPr>
+          <a:xfrm>
+            <a:off x="5806440" y="1051560"/>
+            <a:ext cx="5298947" cy="4629150"/>
+          </a:xfrm>
+          <a:prstGeom prst="roundRect">
+            <a:avLst/>
+          </a:prstGeom>
+          <a:solidFill>
+            <a:srgbClr val="F3F6FB"/>
+          </a:solidFill>
+          <a:ln w="12700">
+            <a:solidFill>
+              <a:srgbClr val="C7D2E6"/>
+            </a:solidFill>
+          </a:ln>
+          <a:effectLst/>
+        </p:spPr>
+        <p:style>
+          <a:lnRef idx="1">
+            <a:schemeClr val="accent1"/>
+          </a:lnRef>
+          <a:fillRef idx="3">
+            <a:schemeClr val="accent1"/>
+          </a:fillRef>
+          <a:effectRef idx="2">
+            <a:schemeClr val="accent1"/>
+          </a:effectRef>
+          <a:fontRef idx="minor">
+            <a:schemeClr val="lt1"/>
+          </a:fontRef>
+        </p:style>
+        <p:txBody>
+          <a:bodyPr rtlCol="0" anchor="ctr"/>
+          <a:lstStyle/>
+          <a:p>
+            <a:pPr algn="ctr"/>
+          </a:p>
+        </p:txBody>
+      </p:sp>
+      <p:sp>
+        <p:nvSpPr>
+          <p:cNvPr id="10" name="TextBox 9"/>
+          <p:cNvSpPr txBox="1"/>
+          <p:nvPr/>
+        </p:nvSpPr>
+        <p:spPr>
+          <a:xfrm>
+            <a:off x="6080760" y="2726055"/>
+            <a:ext cx="4750307" cy="1280160"/>
+          </a:xfrm>
+          <a:prstGeom prst="rect">
+            <a:avLst/>
+          </a:prstGeom>
+          <a:noFill/>
+        </p:spPr>
+        <p:txBody>
+          <a:bodyPr wrap="square">
+            <a:spAutoFit/>
+          </a:bodyPr>
+          <a:lstStyle/>
+          <a:p>
+            <a:pPr algn="ctr"/>
+            <a:r>
+              <a:rPr sz="1400" b="1" i="0">
+                <a:solidFill>
+                  <a:srgbClr val="64748B"/>
+                </a:solidFill>
+                <a:latin typeface="Montserrat"/>
+              </a:rPr>
+              <a:t>IMAGEN REALISTA</a:t>
+            </a:r>
+          </a:p>
+          <a:p>
+            <a:pPr algn="ctr"/>
+            <a:r>
+              <a:rPr sz="1100" b="0" i="1">
+                <a:solidFill>
+                  <a:srgbClr val="64748B"/>
+                </a:solidFill>
+                <a:latin typeface="Montserrat"/>
+              </a:rPr>
+              <a:t>polyethylene to metal transition fitting</a:t>
+            </a:r>
+          </a:p>
+        </p:txBody>
+      </p:sp>
+    </p:spTree>
+  </p:cSld>
+  <p:clrMapOvr>
+    <a:masterClrMapping/>
+  </p:clrMapOvr>
+</p:sld>
+</file>
+
+<file path=ppt/slides/slide15.xml><?xml version="1.0" encoding="utf-8"?>
+<p:sld xmlns:a="http://schemas.openxmlformats.org/drawingml/2006/main" xmlns:p="http://schemas.openxmlformats.org/presentationml/2006/main" xmlns:r="http://schemas.openxmlformats.org/officeDocument/2006/relationships">
+  <p:cSld>
+    <p:spTree>
+      <p:nvGrpSpPr>
+        <p:cNvPr id="1" name=""/>
+        <p:cNvGrpSpPr/>
+        <p:nvPr/>
+      </p:nvGrpSpPr>
+      <p:grpSpPr/>
+      <p:sp>
+        <p:nvSpPr>
+          <p:cNvPr id="2" name="Rectangle 1"/>
+          <p:cNvSpPr/>
+          <p:nvPr/>
+        </p:nvSpPr>
+        <p:spPr>
+          <a:xfrm>
+            <a:off x="0" y="0"/>
+            <a:ext cx="12191695" cy="6858000"/>
+          </a:xfrm>
+          <a:prstGeom prst="rect">
+            <a:avLst/>
+          </a:prstGeom>
+          <a:solidFill>
             <a:srgbClr val="1E2761"/>
           </a:solidFill>
           <a:ln>
@@ -6415,7 +7161,7 @@
             <a:r>
               <a:rPr sz="1400" b="1" i="0">
                 <a:solidFill>
-                  <a:srgbClr val="CADCFC"/>
+                  <a:srgbClr val="F4A24C"/>
                 </a:solidFill>
                 <a:latin typeface="Montserrat"/>
               </a:rPr>
@@ -6426,13 +7172,57 @@
       </p:sp>
       <p:sp>
         <p:nvSpPr>
-          <p:cNvPr id="4" name="TextBox 3"/>
+          <p:cNvPr id="4" name="Rounded Rectangle 3"/>
+          <p:cNvSpPr/>
+          <p:nvPr/>
+        </p:nvSpPr>
+        <p:spPr>
+          <a:xfrm>
+            <a:off x="868680" y="1051560"/>
+            <a:ext cx="1463040" cy="82296"/>
+          </a:xfrm>
+          <a:prstGeom prst="roundRect">
+            <a:avLst/>
+          </a:prstGeom>
+          <a:solidFill>
+            <a:srgbClr val="E8801A"/>
+          </a:solidFill>
+          <a:ln>
+            <a:noFill/>
+          </a:ln>
+          <a:effectLst/>
+        </p:spPr>
+        <p:style>
+          <a:lnRef idx="1">
+            <a:schemeClr val="accent1"/>
+          </a:lnRef>
+          <a:fillRef idx="3">
+            <a:schemeClr val="accent1"/>
+          </a:fillRef>
+          <a:effectRef idx="2">
+            <a:schemeClr val="accent1"/>
+          </a:effectRef>
+          <a:fontRef idx="minor">
+            <a:schemeClr val="lt1"/>
+          </a:fontRef>
+        </p:style>
+        <p:txBody>
+          <a:bodyPr rtlCol="0" anchor="ctr"/>
+          <a:lstStyle/>
+          <a:p>
+            <a:pPr algn="ctr"/>
+          </a:p>
+        </p:txBody>
+      </p:sp>
+      <p:sp>
+        <p:nvSpPr>
+          <p:cNvPr id="5" name="TextBox 4"/>
           <p:cNvSpPr txBox="1"/>
           <p:nvPr/>
         </p:nvSpPr>
         <p:spPr>
           <a:xfrm>
-            <a:off x="822960" y="1143000"/>
+            <a:off x="822960" y="1234440"/>
             <a:ext cx="10515600" cy="1097280"/>
           </a:xfrm>
           <a:prstGeom prst="rect">
@@ -6460,14 +7250,14 @@
       </p:sp>
       <p:sp>
         <p:nvSpPr>
-          <p:cNvPr id="5" name="TextBox 4"/>
+          <p:cNvPr id="6" name="TextBox 5"/>
           <p:cNvSpPr txBox="1"/>
           <p:nvPr/>
         </p:nvSpPr>
         <p:spPr>
           <a:xfrm>
-            <a:off x="822960" y="2514600"/>
-            <a:ext cx="10515600" cy="2834640"/>
+            <a:off x="822960" y="2606040"/>
+            <a:ext cx="10515600" cy="2743200"/>
           </a:xfrm>
           <a:prstGeom prst="rect">
             <a:avLst/>
@@ -6488,7 +7278,7 @@
             <a:r>
               <a:rPr sz="2000" b="1" i="0">
                 <a:solidFill>
-                  <a:srgbClr val="CADCFC"/>
+                  <a:srgbClr val="F4A24C"/>
                 </a:solidFill>
                 <a:latin typeface="Montserrat"/>
               </a:rPr>
@@ -6513,7 +7303,7 @@
             <a:r>
               <a:rPr sz="2000" b="1" i="0">
                 <a:solidFill>
-                  <a:srgbClr val="CADCFC"/>
+                  <a:srgbClr val="F4A24C"/>
                 </a:solidFill>
                 <a:latin typeface="Montserrat"/>
               </a:rPr>
@@ -6538,7 +7328,7 @@
             <a:r>
               <a:rPr sz="2000" b="1" i="0">
                 <a:solidFill>
-                  <a:srgbClr val="CADCFC"/>
+                  <a:srgbClr val="F4A24C"/>
                 </a:solidFill>
                 <a:latin typeface="Montserrat"/>
               </a:rPr>
@@ -6563,7 +7353,7 @@
             <a:r>
               <a:rPr sz="2000" b="1" i="0">
                 <a:solidFill>
-                  <a:srgbClr val="CADCFC"/>
+                  <a:srgbClr val="F4A24C"/>
                 </a:solidFill>
                 <a:latin typeface="Montserrat"/>
               </a:rPr>
@@ -6583,20 +7373,20 @@
       </p:sp>
       <p:sp>
         <p:nvSpPr>
-          <p:cNvPr id="6" name="Rounded Rectangle 5"/>
+          <p:cNvPr id="7" name="Rounded Rectangle 6"/>
           <p:cNvSpPr/>
           <p:nvPr/>
         </p:nvSpPr>
         <p:spPr>
           <a:xfrm>
             <a:off x="822960" y="5532120"/>
-            <a:ext cx="10515600" cy="777240"/>
+            <a:ext cx="10515600" cy="822960"/>
           </a:xfrm>
           <a:prstGeom prst="roundRect">
             <a:avLst/>
           </a:prstGeom>
           <a:solidFill>
-            <a:srgbClr val="2E3A80"/>
+            <a:srgbClr val="E8801A"/>
           </a:solidFill>
           <a:ln>
             <a:noFill/>
@@ -6627,13 +7417,13 @@
       </p:sp>
       <p:sp>
         <p:nvSpPr>
-          <p:cNvPr id="7" name="TextBox 6"/>
+          <p:cNvPr id="8" name="TextBox 7"/>
           <p:cNvSpPr txBox="1"/>
           <p:nvPr/>
         </p:nvSpPr>
         <p:spPr>
           <a:xfrm>
-            <a:off x="1051560" y="5605272"/>
+            <a:off x="1051560" y="5623560"/>
             <a:ext cx="10058400" cy="640080"/>
           </a:xfrm>
           <a:prstGeom prst="rect">
@@ -6650,7 +7440,7 @@
             <a:r>
               <a:rPr sz="1500" b="1" i="1">
                 <a:solidFill>
-                  <a:srgbClr val="CADCFC"/>
+                  <a:srgbClr val="1E2761"/>
                 </a:solidFill>
                 <a:latin typeface="Montserrat"/>
               </a:rPr>
@@ -6751,7 +7541,7 @@
                 </a:solidFill>
                 <a:latin typeface="Montserrat"/>
               </a:rPr>
-              <a:t>002 / 014</a:t>
+              <a:t>002 / 015</a:t>
             </a:r>
           </a:p>
         </p:txBody>
@@ -6815,7 +7605,7 @@
             <a:r>
               <a:rPr sz="2700" b="1" i="0">
                 <a:solidFill>
-                  <a:srgbClr val="1E2761"/>
+                  <a:srgbClr val="E8801A"/>
                 </a:solidFill>
                 <a:latin typeface="Montserrat"/>
               </a:rPr>
@@ -6827,6 +7617,50 @@
       <p:sp>
         <p:nvSpPr>
           <p:cNvPr id="6" name="Rounded Rectangle 5"/>
+          <p:cNvSpPr/>
+          <p:nvPr/>
+        </p:nvSpPr>
+        <p:spPr>
+          <a:xfrm>
+            <a:off x="868680" y="1234440"/>
+            <a:ext cx="1463040" cy="73152"/>
+          </a:xfrm>
+          <a:prstGeom prst="roundRect">
+            <a:avLst/>
+          </a:prstGeom>
+          <a:solidFill>
+            <a:srgbClr val="1E2761"/>
+          </a:solidFill>
+          <a:ln>
+            <a:noFill/>
+          </a:ln>
+          <a:effectLst/>
+        </p:spPr>
+        <p:style>
+          <a:lnRef idx="1">
+            <a:schemeClr val="accent1"/>
+          </a:lnRef>
+          <a:fillRef idx="3">
+            <a:schemeClr val="accent1"/>
+          </a:fillRef>
+          <a:effectRef idx="2">
+            <a:schemeClr val="accent1"/>
+          </a:effectRef>
+          <a:fontRef idx="minor">
+            <a:schemeClr val="lt1"/>
+          </a:fontRef>
+        </p:style>
+        <p:txBody>
+          <a:bodyPr rtlCol="0" anchor="ctr"/>
+          <a:lstStyle/>
+          <a:p>
+            <a:pPr algn="ctr"/>
+          </a:p>
+        </p:txBody>
+      </p:sp>
+      <p:sp>
+        <p:nvSpPr>
+          <p:cNvPr id="7" name="Rounded Rectangle 6"/>
           <p:cNvSpPr/>
           <p:nvPr/>
         </p:nvSpPr>
@@ -6872,7 +7706,7 @@
       </p:sp>
       <p:sp>
         <p:nvSpPr>
-          <p:cNvPr id="7" name="TextBox 6"/>
+          <p:cNvPr id="8" name="TextBox 7"/>
           <p:cNvSpPr txBox="1"/>
           <p:nvPr/>
         </p:nvSpPr>
@@ -6907,7 +7741,7 @@
       </p:sp>
       <p:sp>
         <p:nvSpPr>
-          <p:cNvPr id="8" name="TextBox 7"/>
+          <p:cNvPr id="9" name="TextBox 8"/>
           <p:cNvSpPr txBox="1"/>
           <p:nvPr/>
         </p:nvSpPr>
@@ -6942,7 +7776,7 @@
       </p:sp>
       <p:sp>
         <p:nvSpPr>
-          <p:cNvPr id="9" name="Rounded Rectangle 8"/>
+          <p:cNvPr id="10" name="Rounded Rectangle 9"/>
           <p:cNvSpPr/>
           <p:nvPr/>
         </p:nvSpPr>
@@ -6988,7 +7822,7 @@
       </p:sp>
       <p:sp>
         <p:nvSpPr>
-          <p:cNvPr id="10" name="TextBox 9"/>
+          <p:cNvPr id="11" name="TextBox 10"/>
           <p:cNvSpPr txBox="1"/>
           <p:nvPr/>
         </p:nvSpPr>
@@ -7023,7 +7857,7 @@
       </p:sp>
       <p:sp>
         <p:nvSpPr>
-          <p:cNvPr id="11" name="TextBox 10"/>
+          <p:cNvPr id="12" name="TextBox 11"/>
           <p:cNvSpPr txBox="1"/>
           <p:nvPr/>
         </p:nvSpPr>
@@ -7058,7 +7892,7 @@
       </p:sp>
       <p:sp>
         <p:nvSpPr>
-          <p:cNvPr id="12" name="Rounded Rectangle 11"/>
+          <p:cNvPr id="13" name="Rounded Rectangle 12"/>
           <p:cNvSpPr/>
           <p:nvPr/>
         </p:nvSpPr>
@@ -7104,7 +7938,7 @@
       </p:sp>
       <p:sp>
         <p:nvSpPr>
-          <p:cNvPr id="13" name="TextBox 12"/>
+          <p:cNvPr id="14" name="TextBox 13"/>
           <p:cNvSpPr txBox="1"/>
           <p:nvPr/>
         </p:nvSpPr>
@@ -7139,7 +7973,7 @@
       </p:sp>
       <p:sp>
         <p:nvSpPr>
-          <p:cNvPr id="14" name="TextBox 13"/>
+          <p:cNvPr id="15" name="TextBox 14"/>
           <p:cNvSpPr txBox="1"/>
           <p:nvPr/>
         </p:nvSpPr>
@@ -7264,7 +8098,7 @@
                 </a:solidFill>
                 <a:latin typeface="Montserrat"/>
               </a:rPr>
-              <a:t>003 / 014</a:t>
+              <a:t>003 / 015</a:t>
             </a:r>
           </a:p>
         </p:txBody>
@@ -7311,7 +8145,7 @@
         </p:nvSpPr>
         <p:spPr>
           <a:xfrm>
-            <a:off x="822960" y="457200"/>
+            <a:off x="822960" y="502920"/>
             <a:ext cx="8229600" cy="365760"/>
           </a:xfrm>
           <a:prstGeom prst="rect">
@@ -7326,13 +8160,13 @@
           <a:lstStyle/>
           <a:p>
             <a:r>
-              <a:rPr sz="1200" b="1" i="0">
-                <a:solidFill>
-                  <a:srgbClr val="64748B"/>
-                </a:solidFill>
-                <a:latin typeface="Montserrat"/>
-              </a:rPr>
-              <a:t>UNIONES · REGLA GENERAL</a:t>
+              <a:rPr sz="1300" b="1" i="0">
+                <a:solidFill>
+                  <a:srgbClr val="E8801A"/>
+                </a:solidFill>
+                <a:latin typeface="Montserrat"/>
+              </a:rPr>
+              <a:t>PARTES DE ESTE VÍDEO</a:t>
             </a:r>
           </a:p>
         </p:txBody>
@@ -7345,7 +8179,7 @@
         </p:nvSpPr>
         <p:spPr>
           <a:xfrm>
-            <a:off x="822960" y="868680"/>
+            <a:off x="822960" y="914400"/>
             <a:ext cx="10515600" cy="914400"/>
           </a:xfrm>
           <a:prstGeom prst="rect">
@@ -7366,155 +8200,30 @@
                 </a:solidFill>
                 <a:latin typeface="Montserrat"/>
               </a:rPr>
-              <a:t>Una sola regla manda</a:t>
-            </a:r>
-          </a:p>
-        </p:txBody>
-      </p:sp>
-      <p:sp>
-        <p:nvSpPr>
-          <p:cNvPr id="7" name="TextBox 6"/>
-          <p:cNvSpPr txBox="1"/>
-          <p:nvPr/>
-        </p:nvSpPr>
-        <p:spPr>
-          <a:xfrm>
-            <a:off x="822960" y="1920240"/>
-            <a:ext cx="4983480" cy="4206240"/>
-          </a:xfrm>
-          <a:prstGeom prst="rect">
-            <a:avLst/>
-          </a:prstGeom>
-          <a:noFill/>
-        </p:spPr>
-        <p:txBody>
-          <a:bodyPr wrap="square">
-            <a:spAutoFit/>
-          </a:bodyPr>
-          <a:lstStyle/>
-          <a:p>
-            <a:pPr>
-              <a:spcAft>
-                <a:spcPts val="1000"/>
-              </a:spcAft>
-            </a:pPr>
-            <a:r>
-              <a:rPr sz="1600" b="1" i="0">
-                <a:solidFill>
-                  <a:srgbClr val="2E3A80"/>
-                </a:solidFill>
-                <a:latin typeface="Montserrat"/>
-              </a:rPr>
-              <a:t>•  </a:t>
-            </a:r>
-            <a:r>
-              <a:rPr sz="1600" b="0" i="0">
-                <a:solidFill>
-                  <a:srgbClr val="1B2330"/>
-                </a:solidFill>
-                <a:latin typeface="Montserrat"/>
-              </a:rPr>
-              <a:t>Toda unión debe asegurar la estanquidad</a:t>
-            </a:r>
-          </a:p>
-          <a:p>
-            <a:pPr>
-              <a:spcAft>
-                <a:spcPts val="1000"/>
-              </a:spcAft>
-            </a:pPr>
-            <a:r>
-              <a:rPr sz="1600" b="1" i="0">
-                <a:solidFill>
-                  <a:srgbClr val="2E3A80"/>
-                </a:solidFill>
-                <a:latin typeface="Montserrat"/>
-              </a:rPr>
-              <a:t>•  </a:t>
-            </a:r>
-            <a:r>
-              <a:rPr sz="1600" b="0" i="0">
-                <a:solidFill>
-                  <a:srgbClr val="1B2330"/>
-                </a:solidFill>
-                <a:latin typeface="Montserrat"/>
-              </a:rPr>
-              <a:t>Aunque cambie el gas o la presión</a:t>
-            </a:r>
-          </a:p>
-          <a:p>
-            <a:pPr>
-              <a:spcAft>
-                <a:spcPts val="1000"/>
-              </a:spcAft>
-            </a:pPr>
-            <a:r>
-              <a:rPr sz="1600" b="1" i="0">
-                <a:solidFill>
-                  <a:srgbClr val="2E3A80"/>
-                </a:solidFill>
-                <a:latin typeface="Montserrat"/>
-              </a:rPr>
-              <a:t>•  </a:t>
-            </a:r>
-            <a:r>
-              <a:rPr sz="1600" b="0" i="0">
-                <a:solidFill>
-                  <a:srgbClr val="1B2330"/>
-                </a:solidFill>
-                <a:latin typeface="Montserrat"/>
-              </a:rPr>
-              <a:t>Aunque el ambiente sea agresivo</a:t>
-            </a:r>
-          </a:p>
-          <a:p>
-            <a:pPr>
-              <a:spcAft>
-                <a:spcPts val="1000"/>
-              </a:spcAft>
-            </a:pPr>
-            <a:r>
-              <a:rPr sz="1600" b="1" i="0">
-                <a:solidFill>
-                  <a:srgbClr val="2E3A80"/>
-                </a:solidFill>
-                <a:latin typeface="Montserrat"/>
-              </a:rPr>
-              <a:t>•  </a:t>
-            </a:r>
-            <a:r>
-              <a:rPr sz="1600" b="0" i="0">
-                <a:solidFill>
-                  <a:srgbClr val="1B2330"/>
-                </a:solidFill>
-                <a:latin typeface="Montserrat"/>
-              </a:rPr>
-              <a:t>Lo demás son formas de cumplirla</a:t>
-            </a:r>
-          </a:p>
-        </p:txBody>
-      </p:sp>
-      <p:sp>
-        <p:nvSpPr>
-          <p:cNvPr id="8" name="imgph" descr="IMGQ:gas leak test soapy water pipe joint"/>
+              <a:t>En este vídeo</a:t>
+            </a:r>
+          </a:p>
+        </p:txBody>
+      </p:sp>
+      <p:sp>
+        <p:nvSpPr>
+          <p:cNvPr id="7" name="Rounded Rectangle 6"/>
           <p:cNvSpPr/>
           <p:nvPr/>
         </p:nvSpPr>
         <p:spPr>
           <a:xfrm>
-            <a:off x="5806440" y="1051560"/>
-            <a:ext cx="5298947" cy="4629150"/>
+            <a:off x="868680" y="1673352"/>
+            <a:ext cx="2011680" cy="73152"/>
           </a:xfrm>
           <a:prstGeom prst="roundRect">
             <a:avLst/>
           </a:prstGeom>
           <a:solidFill>
-            <a:srgbClr val="F3F6FB"/>
+            <a:srgbClr val="E8801A"/>
           </a:solidFill>
-          <a:ln w="12700">
-            <a:solidFill>
-              <a:srgbClr val="C7D2E6"/>
-            </a:solidFill>
+          <a:ln>
+            <a:noFill/>
           </a:ln>
           <a:effectLst/>
         </p:spPr>
@@ -7542,14 +8251,14 @@
       </p:sp>
       <p:sp>
         <p:nvSpPr>
-          <p:cNvPr id="9" name="TextBox 8"/>
+          <p:cNvPr id="8" name="TextBox 7"/>
           <p:cNvSpPr txBox="1"/>
           <p:nvPr/>
         </p:nvSpPr>
         <p:spPr>
           <a:xfrm>
-            <a:off x="6080760" y="2726055"/>
-            <a:ext cx="4750307" cy="1280160"/>
+            <a:off x="822960" y="2103120"/>
+            <a:ext cx="10515600" cy="4023360"/>
           </a:xfrm>
           <a:prstGeom prst="rect">
             <a:avLst/>
@@ -7562,27 +8271,103 @@
           </a:bodyPr>
           <a:lstStyle/>
           <a:p>
-            <a:pPr algn="ctr"/>
-            <a:r>
-              <a:rPr sz="1400" b="1" i="0">
-                <a:solidFill>
-                  <a:srgbClr val="64748B"/>
-                </a:solidFill>
-                <a:latin typeface="Montserrat"/>
-              </a:rPr>
-              <a:t>IMAGEN REALISTA</a:t>
-            </a:r>
-          </a:p>
-          <a:p>
-            <a:pPr algn="ctr"/>
-            <a:r>
-              <a:rPr sz="1100" b="0" i="1">
-                <a:solidFill>
-                  <a:srgbClr val="64748B"/>
-                </a:solidFill>
-                <a:latin typeface="Montserrat"/>
-              </a:rPr>
-              <a:t>gas leak test soapy water pipe joint</a:t>
+            <a:pPr>
+              <a:spcAft>
+                <a:spcPts val="900"/>
+              </a:spcAft>
+            </a:pPr>
+            <a:r>
+              <a:rPr sz="1800" b="1" i="0">
+                <a:solidFill>
+                  <a:srgbClr val="E8801A"/>
+                </a:solidFill>
+                <a:latin typeface="Montserrat"/>
+              </a:rPr>
+              <a:t>01   </a:t>
+            </a:r>
+            <a:r>
+              <a:rPr sz="1700" b="0" i="0">
+                <a:solidFill>
+                  <a:srgbClr val="1B2330"/>
+                </a:solidFill>
+                <a:latin typeface="Montserrat"/>
+              </a:rPr>
+              <a:t>Uniones</a:t>
+            </a:r>
+          </a:p>
+          <a:p>
+            <a:pPr>
+              <a:spcAft>
+                <a:spcPts val="900"/>
+              </a:spcAft>
+            </a:pPr>
+            <a:r>
+              <a:rPr sz="1800" b="1" i="0">
+                <a:solidFill>
+                  <a:srgbClr val="E8801A"/>
+                </a:solidFill>
+                <a:latin typeface="Montserrat"/>
+              </a:rPr>
+              <a:t>02   </a:t>
+            </a:r>
+            <a:r>
+              <a:rPr sz="1700" b="0" i="0">
+                <a:solidFill>
+                  <a:srgbClr val="1B2330"/>
+                </a:solidFill>
+                <a:latin typeface="Montserrat"/>
+              </a:rPr>
+              <a:t>Soldadura</a:t>
+            </a:r>
+          </a:p>
+          <a:p>
+            <a:pPr>
+              <a:spcAft>
+                <a:spcPts val="900"/>
+              </a:spcAft>
+            </a:pPr>
+            <a:r>
+              <a:rPr sz="1800" b="1" i="0">
+                <a:solidFill>
+                  <a:srgbClr val="E8801A"/>
+                </a:solidFill>
+                <a:latin typeface="Montserrat"/>
+              </a:rPr>
+              <a:t>03   </a:t>
+            </a:r>
+            <a:r>
+              <a:rPr sz="1700" b="0" i="0">
+                <a:solidFill>
+                  <a:srgbClr val="1B2330"/>
+                </a:solidFill>
+                <a:latin typeface="Montserrat"/>
+              </a:rPr>
+              <a:t>Uniones mecánicas</a:t>
+            </a:r>
+          </a:p>
+          <a:p>
+            <a:pPr>
+              <a:spcAft>
+                <a:spcPts val="900"/>
+              </a:spcAft>
+            </a:pPr>
+            <a:r>
+              <a:rPr sz="1800" b="1" i="0">
+                <a:solidFill>
+                  <a:srgbClr val="E8801A"/>
+                </a:solidFill>
+                <a:latin typeface="Montserrat"/>
+              </a:rPr>
+              <a:t>04   </a:t>
+            </a:r>
+            <a:r>
+              <a:rPr sz="1700" b="0" i="0">
+                <a:solidFill>
+                  <a:srgbClr val="1B2330"/>
+                </a:solidFill>
+                <a:latin typeface="Montserrat"/>
+              </a:rPr>
+              <a:t>Transición PE-metal</a:t>
             </a:r>
           </a:p>
         </p:txBody>
@@ -7679,7 +8464,7 @@
                 </a:solidFill>
                 <a:latin typeface="Montserrat"/>
               </a:rPr>
-              <a:t>004 / 014</a:t>
+              <a:t>004 / 015</a:t>
             </a:r>
           </a:p>
         </p:txBody>
@@ -7727,7 +8512,7 @@
         <p:spPr>
           <a:xfrm>
             <a:off x="822960" y="457200"/>
-            <a:ext cx="8229600" cy="365760"/>
+            <a:ext cx="10058400" cy="365760"/>
           </a:xfrm>
           <a:prstGeom prst="rect">
             <a:avLst/>
@@ -7741,13 +8526,13 @@
           <a:lstStyle/>
           <a:p>
             <a:r>
-              <a:rPr sz="1200" b="1" i="0">
-                <a:solidFill>
-                  <a:srgbClr val="64748B"/>
-                </a:solidFill>
-                <a:latin typeface="Montserrat"/>
-              </a:rPr>
-              <a:t>SOLDADURA · GENERALIDADES</a:t>
+              <a:rPr sz="1300" b="1" i="0">
+                <a:solidFill>
+                  <a:srgbClr val="E8801A"/>
+                </a:solidFill>
+                <a:latin typeface="Montserrat"/>
+              </a:rPr>
+              <a:t>UNIONES · REGLA GENERAL</a:t>
             </a:r>
           </a:p>
         </p:txBody>
@@ -7775,26 +8560,70 @@
           <a:lstStyle/>
           <a:p>
             <a:r>
-              <a:rPr sz="2700" b="1" i="0">
+              <a:rPr sz="2800" b="1" i="0">
                 <a:solidFill>
                   <a:srgbClr val="1E2761"/>
                 </a:solidFill>
                 <a:latin typeface="Montserrat"/>
               </a:rPr>
-              <a:t>Soldar bien empieza antes de soldar</a:t>
-            </a:r>
-          </a:p>
-        </p:txBody>
-      </p:sp>
-      <p:sp>
-        <p:nvSpPr>
-          <p:cNvPr id="7" name="TextBox 6"/>
+              <a:t>Una sola regla manda</a:t>
+            </a:r>
+          </a:p>
+        </p:txBody>
+      </p:sp>
+      <p:sp>
+        <p:nvSpPr>
+          <p:cNvPr id="7" name="Rounded Rectangle 6"/>
+          <p:cNvSpPr/>
+          <p:nvPr/>
+        </p:nvSpPr>
+        <p:spPr>
+          <a:xfrm>
+            <a:off x="868680" y="1627632"/>
+            <a:ext cx="2011680" cy="73152"/>
+          </a:xfrm>
+          <a:prstGeom prst="roundRect">
+            <a:avLst/>
+          </a:prstGeom>
+          <a:solidFill>
+            <a:srgbClr val="E8801A"/>
+          </a:solidFill>
+          <a:ln>
+            <a:noFill/>
+          </a:ln>
+          <a:effectLst/>
+        </p:spPr>
+        <p:style>
+          <a:lnRef idx="1">
+            <a:schemeClr val="accent1"/>
+          </a:lnRef>
+          <a:fillRef idx="3">
+            <a:schemeClr val="accent1"/>
+          </a:fillRef>
+          <a:effectRef idx="2">
+            <a:schemeClr val="accent1"/>
+          </a:effectRef>
+          <a:fontRef idx="minor">
+            <a:schemeClr val="lt1"/>
+          </a:fontRef>
+        </p:style>
+        <p:txBody>
+          <a:bodyPr rtlCol="0" anchor="ctr"/>
+          <a:lstStyle/>
+          <a:p>
+            <a:pPr algn="ctr"/>
+          </a:p>
+        </p:txBody>
+      </p:sp>
+      <p:sp>
+        <p:nvSpPr>
+          <p:cNvPr id="8" name="TextBox 7"/>
           <p:cNvSpPr txBox="1"/>
           <p:nvPr/>
         </p:nvSpPr>
         <p:spPr>
           <a:xfrm>
-            <a:off x="822960" y="1920240"/>
+            <a:off x="822960" y="1965960"/>
             <a:ext cx="4983480" cy="4206240"/>
           </a:xfrm>
           <a:prstGeom prst="rect">
@@ -7810,17 +8639,17 @@
           <a:p>
             <a:pPr>
               <a:spcAft>
-                <a:spcPts val="1000"/>
+                <a:spcPts val="1100"/>
               </a:spcAft>
             </a:pPr>
             <a:r>
               <a:rPr sz="1600" b="1" i="0">
                 <a:solidFill>
-                  <a:srgbClr val="2E3A80"/>
-                </a:solidFill>
-                <a:latin typeface="Montserrat"/>
-              </a:rPr>
-              <a:t>•  </a:t>
+                  <a:srgbClr val="E8801A"/>
+                </a:solidFill>
+                <a:latin typeface="Montserrat"/>
+              </a:rPr>
+              <a:t>▸  </a:t>
             </a:r>
             <a:r>
               <a:rPr sz="1600" b="0" i="0">
@@ -7829,23 +8658,23 @@
                 </a:solidFill>
                 <a:latin typeface="Montserrat"/>
               </a:rPr>
-              <a:t>El proceso depende de los materiales</a:t>
+              <a:t>Toda unión debe asegurar la estanquidad</a:t>
             </a:r>
           </a:p>
           <a:p>
             <a:pPr>
               <a:spcAft>
-                <a:spcPts val="1000"/>
+                <a:spcPts val="1100"/>
               </a:spcAft>
             </a:pPr>
             <a:r>
               <a:rPr sz="1600" b="1" i="0">
                 <a:solidFill>
-                  <a:srgbClr val="2E3A80"/>
-                </a:solidFill>
-                <a:latin typeface="Montserrat"/>
-              </a:rPr>
-              <a:t>•  </a:t>
+                  <a:srgbClr val="E8801A"/>
+                </a:solidFill>
+                <a:latin typeface="Montserrat"/>
+              </a:rPr>
+              <a:t>▸  </a:t>
             </a:r>
             <a:r>
               <a:rPr sz="1600" b="0" i="0">
@@ -7854,23 +8683,23 @@
                 </a:solidFill>
                 <a:latin typeface="Montserrat"/>
               </a:rPr>
-              <a:t>Limpieza previa de las superficies</a:t>
+              <a:t>Aunque cambie el gas o la presión</a:t>
             </a:r>
           </a:p>
           <a:p>
             <a:pPr>
               <a:spcAft>
-                <a:spcPts val="1000"/>
+                <a:spcPts val="1100"/>
               </a:spcAft>
             </a:pPr>
             <a:r>
               <a:rPr sz="1600" b="1" i="0">
                 <a:solidFill>
-                  <a:srgbClr val="2E3A80"/>
-                </a:solidFill>
-                <a:latin typeface="Montserrat"/>
-              </a:rPr>
-              <a:t>•  </a:t>
+                  <a:srgbClr val="E8801A"/>
+                </a:solidFill>
+                <a:latin typeface="Montserrat"/>
+              </a:rPr>
+              <a:t>▸  </a:t>
             </a:r>
             <a:r>
               <a:rPr sz="1600" b="0" i="0">
@@ -7879,23 +8708,23 @@
                 </a:solidFill>
                 <a:latin typeface="Montserrat"/>
               </a:rPr>
-              <a:t>Decapante adecuado a cada soldadura</a:t>
+              <a:t>Aunque el ambiente sea agresivo</a:t>
             </a:r>
           </a:p>
           <a:p>
             <a:pPr>
               <a:spcAft>
-                <a:spcPts val="1000"/>
+                <a:spcPts val="1100"/>
               </a:spcAft>
             </a:pPr>
             <a:r>
               <a:rPr sz="1600" b="1" i="0">
                 <a:solidFill>
-                  <a:srgbClr val="2E3A80"/>
-                </a:solidFill>
-                <a:latin typeface="Montserrat"/>
-              </a:rPr>
-              <a:t>•  </a:t>
+                  <a:srgbClr val="E8801A"/>
+                </a:solidFill>
+                <a:latin typeface="Montserrat"/>
+              </a:rPr>
+              <a:t>▸  </a:t>
             </a:r>
             <a:r>
               <a:rPr sz="1600" b="0" i="0">
@@ -7904,14 +8733,14 @@
                 </a:solidFill>
                 <a:latin typeface="Montserrat"/>
               </a:rPr>
-              <a:t>Eliminar los residuos del fundente</a:t>
-            </a:r>
-          </a:p>
-        </p:txBody>
-      </p:sp>
-      <p:sp>
-        <p:nvSpPr>
-          <p:cNvPr id="8" name="imgph" descr="IMGQ:brazing copper pipe torch flame closeup"/>
+              <a:t>Lo demás son formas de cumplirla</a:t>
+            </a:r>
+          </a:p>
+        </p:txBody>
+      </p:sp>
+      <p:sp>
+        <p:nvSpPr>
+          <p:cNvPr id="9" name="imgph" descr="IMGQ:gas leak test soapy water pipe joint"/>
           <p:cNvSpPr/>
           <p:nvPr/>
         </p:nvSpPr>
@@ -7957,7 +8786,7 @@
       </p:sp>
       <p:sp>
         <p:nvSpPr>
-          <p:cNvPr id="9" name="TextBox 8"/>
+          <p:cNvPr id="10" name="TextBox 9"/>
           <p:cNvSpPr txBox="1"/>
           <p:nvPr/>
         </p:nvSpPr>
@@ -7997,7 +8826,7 @@
                 </a:solidFill>
                 <a:latin typeface="Montserrat"/>
               </a:rPr>
-              <a:t>brazing copper pipe torch flame closeup</a:t>
+              <a:t>gas leak test soapy water pipe joint</a:t>
             </a:r>
           </a:p>
         </p:txBody>
@@ -8094,7 +8923,7 @@
                 </a:solidFill>
                 <a:latin typeface="Montserrat"/>
               </a:rPr>
-              <a:t>005 / 014</a:t>
+              <a:t>005 / 015</a:t>
             </a:r>
           </a:p>
         </p:txBody>
@@ -8142,7 +8971,7 @@
         <p:spPr>
           <a:xfrm>
             <a:off x="822960" y="457200"/>
-            <a:ext cx="8229600" cy="365760"/>
+            <a:ext cx="10058400" cy="365760"/>
           </a:xfrm>
           <a:prstGeom prst="rect">
             <a:avLst/>
@@ -8156,13 +8985,13 @@
           <a:lstStyle/>
           <a:p>
             <a:r>
-              <a:rPr sz="1200" b="1" i="0">
-                <a:solidFill>
-                  <a:srgbClr val="64748B"/>
-                </a:solidFill>
-                <a:latin typeface="Montserrat"/>
-              </a:rPr>
-              <a:t>SOLDADURA · BLANDA O FUERTE</a:t>
+              <a:rPr sz="1300" b="1" i="0">
+                <a:solidFill>
+                  <a:srgbClr val="E8801A"/>
+                </a:solidFill>
+                <a:latin typeface="Montserrat"/>
+              </a:rPr>
+              <a:t>SOLDADURA · GENERALIDADES</a:t>
             </a:r>
           </a:p>
         </p:txBody>
@@ -8190,26 +9019,70 @@
           <a:lstStyle/>
           <a:p>
             <a:r>
-              <a:rPr sz="2700" b="1" i="0">
+              <a:rPr sz="2800" b="1" i="0">
                 <a:solidFill>
                   <a:srgbClr val="1E2761"/>
                 </a:solidFill>
                 <a:latin typeface="Montserrat"/>
               </a:rPr>
-              <a:t>La frontera está en 0,05 bar</a:t>
-            </a:r>
-          </a:p>
-        </p:txBody>
-      </p:sp>
-      <p:sp>
-        <p:nvSpPr>
-          <p:cNvPr id="7" name="TextBox 6"/>
+              <a:t>Soldar bien empieza antes de soldar</a:t>
+            </a:r>
+          </a:p>
+        </p:txBody>
+      </p:sp>
+      <p:sp>
+        <p:nvSpPr>
+          <p:cNvPr id="7" name="Rounded Rectangle 6"/>
+          <p:cNvSpPr/>
+          <p:nvPr/>
+        </p:nvSpPr>
+        <p:spPr>
+          <a:xfrm>
+            <a:off x="868680" y="1627632"/>
+            <a:ext cx="2011680" cy="73152"/>
+          </a:xfrm>
+          <a:prstGeom prst="roundRect">
+            <a:avLst/>
+          </a:prstGeom>
+          <a:solidFill>
+            <a:srgbClr val="E8801A"/>
+          </a:solidFill>
+          <a:ln>
+            <a:noFill/>
+          </a:ln>
+          <a:effectLst/>
+        </p:spPr>
+        <p:style>
+          <a:lnRef idx="1">
+            <a:schemeClr val="accent1"/>
+          </a:lnRef>
+          <a:fillRef idx="3">
+            <a:schemeClr val="accent1"/>
+          </a:fillRef>
+          <a:effectRef idx="2">
+            <a:schemeClr val="accent1"/>
+          </a:effectRef>
+          <a:fontRef idx="minor">
+            <a:schemeClr val="lt1"/>
+          </a:fontRef>
+        </p:style>
+        <p:txBody>
+          <a:bodyPr rtlCol="0" anchor="ctr"/>
+          <a:lstStyle/>
+          <a:p>
+            <a:pPr algn="ctr"/>
+          </a:p>
+        </p:txBody>
+      </p:sp>
+      <p:sp>
+        <p:nvSpPr>
+          <p:cNvPr id="8" name="TextBox 7"/>
           <p:cNvSpPr txBox="1"/>
           <p:nvPr/>
         </p:nvSpPr>
         <p:spPr>
           <a:xfrm>
-            <a:off x="822960" y="1920240"/>
+            <a:off x="822960" y="1965960"/>
             <a:ext cx="4983480" cy="4206240"/>
           </a:xfrm>
           <a:prstGeom prst="rect">
@@ -8225,17 +9098,17 @@
           <a:p>
             <a:pPr>
               <a:spcAft>
-                <a:spcPts val="1000"/>
+                <a:spcPts val="1100"/>
               </a:spcAft>
             </a:pPr>
             <a:r>
               <a:rPr sz="1600" b="1" i="0">
                 <a:solidFill>
-                  <a:srgbClr val="2E3A80"/>
-                </a:solidFill>
-                <a:latin typeface="Montserrat"/>
-              </a:rPr>
-              <a:t>•  </a:t>
+                  <a:srgbClr val="E8801A"/>
+                </a:solidFill>
+                <a:latin typeface="Montserrat"/>
+              </a:rPr>
+              <a:t>▸  </a:t>
             </a:r>
             <a:r>
               <a:rPr sz="1600" b="0" i="0">
@@ -8244,23 +9117,23 @@
                 </a:solidFill>
                 <a:latin typeface="Montserrat"/>
               </a:rPr>
-              <a:t>&gt; 0,05 bar → soldadura fuerte, siempre</a:t>
+              <a:t>El proceso depende de los materiales</a:t>
             </a:r>
           </a:p>
           <a:p>
             <a:pPr>
               <a:spcAft>
-                <a:spcPts val="1000"/>
+                <a:spcPts val="1100"/>
               </a:spcAft>
             </a:pPr>
             <a:r>
               <a:rPr sz="1600" b="1" i="0">
                 <a:solidFill>
-                  <a:srgbClr val="2E3A80"/>
-                </a:solidFill>
-                <a:latin typeface="Montserrat"/>
-              </a:rPr>
-              <a:t>•  </a:t>
+                  <a:srgbClr val="E8801A"/>
+                </a:solidFill>
+                <a:latin typeface="Montserrat"/>
+              </a:rPr>
+              <a:t>▸  </a:t>
             </a:r>
             <a:r>
               <a:rPr sz="1600" b="0" i="0">
@@ -8269,23 +9142,23 @@
                 </a:solidFill>
                 <a:latin typeface="Montserrat"/>
               </a:rPr>
-              <a:t>≤ 0,05 bar → se admite la blanda</a:t>
+              <a:t>Limpieza previa de las superficies</a:t>
             </a:r>
           </a:p>
           <a:p>
             <a:pPr>
               <a:spcAft>
-                <a:spcPts val="1000"/>
+                <a:spcPts val="1100"/>
               </a:spcAft>
             </a:pPr>
             <a:r>
               <a:rPr sz="1600" b="1" i="0">
                 <a:solidFill>
-                  <a:srgbClr val="2E3A80"/>
-                </a:solidFill>
-                <a:latin typeface="Montserrat"/>
-              </a:rPr>
-              <a:t>•  </a:t>
+                  <a:srgbClr val="E8801A"/>
+                </a:solidFill>
+                <a:latin typeface="Montserrat"/>
+              </a:rPr>
+              <a:t>▸  </a:t>
             </a:r>
             <a:r>
               <a:rPr sz="1600" b="0" i="0">
@@ -8294,23 +9167,23 @@
                 </a:solidFill>
                 <a:latin typeface="Montserrat"/>
               </a:rPr>
-              <a:t>Solo doméstico o cocina tipo A ≤ 30 kW</a:t>
+              <a:t>Decapante adecuado a cada soldadura</a:t>
             </a:r>
           </a:p>
           <a:p>
             <a:pPr>
               <a:spcAft>
-                <a:spcPts val="1000"/>
+                <a:spcPts val="1100"/>
               </a:spcAft>
             </a:pPr>
             <a:r>
               <a:rPr sz="1600" b="1" i="0">
                 <a:solidFill>
-                  <a:srgbClr val="2E3A80"/>
-                </a:solidFill>
-                <a:latin typeface="Montserrat"/>
-              </a:rPr>
-              <a:t>•  </a:t>
+                  <a:srgbClr val="E8801A"/>
+                </a:solidFill>
+                <a:latin typeface="Montserrat"/>
+              </a:rPr>
+              <a:t>▸  </a:t>
             </a:r>
             <a:r>
               <a:rPr sz="1600" b="0" i="0">
@@ -8319,14 +9192,14 @@
                 </a:solidFill>
                 <a:latin typeface="Montserrat"/>
               </a:rPr>
-              <a:t>Aparcamiento cerrado: fuerte aunque baje</a:t>
-            </a:r>
-          </a:p>
-        </p:txBody>
-      </p:sp>
-      <p:sp>
-        <p:nvSpPr>
-          <p:cNvPr id="8" name="imgph" descr="IMGQ:brazing gas pipe joint blue flame"/>
+              <a:t>Eliminar los residuos del fundente</a:t>
+            </a:r>
+          </a:p>
+        </p:txBody>
+      </p:sp>
+      <p:sp>
+        <p:nvSpPr>
+          <p:cNvPr id="9" name="imgph" descr="IMGQ:brazing copper pipe torch flame closeup"/>
           <p:cNvSpPr/>
           <p:nvPr/>
         </p:nvSpPr>
@@ -8372,7 +9245,7 @@
       </p:sp>
       <p:sp>
         <p:nvSpPr>
-          <p:cNvPr id="9" name="TextBox 8"/>
+          <p:cNvPr id="10" name="TextBox 9"/>
           <p:cNvSpPr txBox="1"/>
           <p:nvPr/>
         </p:nvSpPr>
@@ -8412,7 +9285,7 @@
                 </a:solidFill>
                 <a:latin typeface="Montserrat"/>
               </a:rPr>
-              <a:t>brazing gas pipe joint blue flame</a:t>
+              <a:t>brazing copper pipe torch flame closeup</a:t>
             </a:r>
           </a:p>
         </p:txBody>
@@ -8509,7 +9382,7 @@
                 </a:solidFill>
                 <a:latin typeface="Montserrat"/>
               </a:rPr>
-              <a:t>006 / 014</a:t>
+              <a:t>006 / 015</a:t>
             </a:r>
           </a:p>
         </p:txBody>
@@ -8557,7 +9430,7 @@
         <p:spPr>
           <a:xfrm>
             <a:off x="822960" y="457200"/>
-            <a:ext cx="8229600" cy="365760"/>
+            <a:ext cx="10058400" cy="365760"/>
           </a:xfrm>
           <a:prstGeom prst="rect">
             <a:avLst/>
@@ -8571,13 +9444,13 @@
           <a:lstStyle/>
           <a:p>
             <a:r>
-              <a:rPr sz="1200" b="1" i="0">
-                <a:solidFill>
-                  <a:srgbClr val="64748B"/>
-                </a:solidFill>
-                <a:latin typeface="Montserrat"/>
-              </a:rPr>
-              <a:t>SOLDADURA · POLIETILENO</a:t>
+              <a:rPr sz="1300" b="1" i="0">
+                <a:solidFill>
+                  <a:srgbClr val="E8801A"/>
+                </a:solidFill>
+                <a:latin typeface="Montserrat"/>
+              </a:rPr>
+              <a:t>SOLDADURA · BLANDA O FUERTE</a:t>
             </a:r>
           </a:p>
         </p:txBody>
@@ -8605,26 +9478,70 @@
           <a:lstStyle/>
           <a:p>
             <a:r>
-              <a:rPr sz="2700" b="1" i="0">
+              <a:rPr sz="2800" b="1" i="0">
                 <a:solidFill>
                   <a:srgbClr val="1E2761"/>
                 </a:solidFill>
                 <a:latin typeface="Montserrat"/>
               </a:rPr>
-              <a:t>Polietileno con polietileno</a:t>
-            </a:r>
-          </a:p>
-        </p:txBody>
-      </p:sp>
-      <p:sp>
-        <p:nvSpPr>
-          <p:cNvPr id="7" name="TextBox 6"/>
+              <a:t>La frontera está en 0,05 bar</a:t>
+            </a:r>
+          </a:p>
+        </p:txBody>
+      </p:sp>
+      <p:sp>
+        <p:nvSpPr>
+          <p:cNvPr id="7" name="Rounded Rectangle 6"/>
+          <p:cNvSpPr/>
+          <p:nvPr/>
+        </p:nvSpPr>
+        <p:spPr>
+          <a:xfrm>
+            <a:off x="868680" y="1627632"/>
+            <a:ext cx="2011680" cy="73152"/>
+          </a:xfrm>
+          <a:prstGeom prst="roundRect">
+            <a:avLst/>
+          </a:prstGeom>
+          <a:solidFill>
+            <a:srgbClr val="E8801A"/>
+          </a:solidFill>
+          <a:ln>
+            <a:noFill/>
+          </a:ln>
+          <a:effectLst/>
+        </p:spPr>
+        <p:style>
+          <a:lnRef idx="1">
+            <a:schemeClr val="accent1"/>
+          </a:lnRef>
+          <a:fillRef idx="3">
+            <a:schemeClr val="accent1"/>
+          </a:fillRef>
+          <a:effectRef idx="2">
+            <a:schemeClr val="accent1"/>
+          </a:effectRef>
+          <a:fontRef idx="minor">
+            <a:schemeClr val="lt1"/>
+          </a:fontRef>
+        </p:style>
+        <p:txBody>
+          <a:bodyPr rtlCol="0" anchor="ctr"/>
+          <a:lstStyle/>
+          <a:p>
+            <a:pPr algn="ctr"/>
+          </a:p>
+        </p:txBody>
+      </p:sp>
+      <p:sp>
+        <p:nvSpPr>
+          <p:cNvPr id="8" name="TextBox 7"/>
           <p:cNvSpPr txBox="1"/>
           <p:nvPr/>
         </p:nvSpPr>
         <p:spPr>
           <a:xfrm>
-            <a:off x="822960" y="1920240"/>
+            <a:off x="822960" y="1965960"/>
             <a:ext cx="4983480" cy="4206240"/>
           </a:xfrm>
           <a:prstGeom prst="rect">
@@ -8640,17 +9557,17 @@
           <a:p>
             <a:pPr>
               <a:spcAft>
-                <a:spcPts val="1000"/>
+                <a:spcPts val="1100"/>
               </a:spcAft>
             </a:pPr>
             <a:r>
               <a:rPr sz="1600" b="1" i="0">
                 <a:solidFill>
-                  <a:srgbClr val="2E3A80"/>
-                </a:solidFill>
-                <a:latin typeface="Montserrat"/>
-              </a:rPr>
-              <a:t>•  </a:t>
+                  <a:srgbClr val="E8801A"/>
+                </a:solidFill>
+                <a:latin typeface="Montserrat"/>
+              </a:rPr>
+              <a:t>▸  </a:t>
             </a:r>
             <a:r>
               <a:rPr sz="1600" b="0" i="0">
@@ -8659,23 +9576,23 @@
                 </a:solidFill>
                 <a:latin typeface="Montserrat"/>
               </a:rPr>
-              <a:t>Preferentemente por electrofusión</a:t>
+              <a:t>&gt; 0,05 bar → soldadura fuerte, siempre</a:t>
             </a:r>
           </a:p>
           <a:p>
             <a:pPr>
               <a:spcAft>
-                <a:spcPts val="1000"/>
+                <a:spcPts val="1100"/>
               </a:spcAft>
             </a:pPr>
             <a:r>
               <a:rPr sz="1600" b="1" i="0">
                 <a:solidFill>
-                  <a:srgbClr val="2E3A80"/>
-                </a:solidFill>
-                <a:latin typeface="Montserrat"/>
-              </a:rPr>
-              <a:t>•  </a:t>
+                  <a:srgbClr val="E8801A"/>
+                </a:solidFill>
+                <a:latin typeface="Montserrat"/>
+              </a:rPr>
+              <a:t>▸  </a:t>
             </a:r>
             <a:r>
               <a:rPr sz="1600" b="0" i="0">
@@ -8684,23 +9601,23 @@
                 </a:solidFill>
                 <a:latin typeface="Montserrat"/>
               </a:rPr>
-              <a:t>A tope si DN ≥ 110</a:t>
+              <a:t>≤ 0,05 bar → se admite la blanda</a:t>
             </a:r>
           </a:p>
           <a:p>
             <a:pPr>
               <a:spcAft>
-                <a:spcPts val="1000"/>
+                <a:spcPts val="1100"/>
               </a:spcAft>
             </a:pPr>
             <a:r>
               <a:rPr sz="1600" b="1" i="0">
                 <a:solidFill>
-                  <a:srgbClr val="2E3A80"/>
-                </a:solidFill>
-                <a:latin typeface="Montserrat"/>
-              </a:rPr>
-              <a:t>•  </a:t>
+                  <a:srgbClr val="E8801A"/>
+                </a:solidFill>
+                <a:latin typeface="Montserrat"/>
+              </a:rPr>
+              <a:t>▸  </a:t>
             </a:r>
             <a:r>
               <a:rPr sz="1600" b="0" i="0">
@@ -8709,23 +9626,23 @@
                 </a:solidFill>
                 <a:latin typeface="Montserrat"/>
               </a:rPr>
-              <a:t>Accesorios compatibles con el tubo</a:t>
+              <a:t>Solo doméstico o cocina tipo A ≤ 30 kW</a:t>
             </a:r>
           </a:p>
           <a:p>
             <a:pPr>
               <a:spcAft>
-                <a:spcPts val="1000"/>
+                <a:spcPts val="1100"/>
               </a:spcAft>
             </a:pPr>
             <a:r>
               <a:rPr sz="1600" b="1" i="0">
                 <a:solidFill>
-                  <a:srgbClr val="2E3A80"/>
-                </a:solidFill>
-                <a:latin typeface="Montserrat"/>
-              </a:rPr>
-              <a:t>•  </a:t>
+                  <a:srgbClr val="E8801A"/>
+                </a:solidFill>
+                <a:latin typeface="Montserrat"/>
+              </a:rPr>
+              <a:t>▸  </a:t>
             </a:r>
             <a:r>
               <a:rPr sz="1600" b="0" i="0">
@@ -8734,14 +9651,14 @@
                 </a:solidFill>
                 <a:latin typeface="Montserrat"/>
               </a:rPr>
-              <a:t>Se funde el material consigo mismo</a:t>
-            </a:r>
-          </a:p>
-        </p:txBody>
-      </p:sp>
-      <p:sp>
-        <p:nvSpPr>
-          <p:cNvPr id="8" name="imgph" descr="IMGQ:polyethylene pipe electrofusion welding"/>
+              <a:t>Aparcamiento cerrado: fuerte aunque baje</a:t>
+            </a:r>
+          </a:p>
+        </p:txBody>
+      </p:sp>
+      <p:sp>
+        <p:nvSpPr>
+          <p:cNvPr id="9" name="imgph" descr="IMGQ:brazing gas pipe joint blue flame"/>
           <p:cNvSpPr/>
           <p:nvPr/>
         </p:nvSpPr>
@@ -8787,7 +9704,7 @@
       </p:sp>
       <p:sp>
         <p:nvSpPr>
-          <p:cNvPr id="9" name="TextBox 8"/>
+          <p:cNvPr id="10" name="TextBox 9"/>
           <p:cNvSpPr txBox="1"/>
           <p:nvPr/>
         </p:nvSpPr>
@@ -8827,7 +9744,7 @@
                 </a:solidFill>
                 <a:latin typeface="Montserrat"/>
               </a:rPr>
-              <a:t>polyethylene pipe electrofusion welding</a:t>
+              <a:t>brazing gas pipe joint blue flame</a:t>
             </a:r>
           </a:p>
         </p:txBody>
@@ -8924,7 +9841,7 @@
                 </a:solidFill>
                 <a:latin typeface="Montserrat"/>
               </a:rPr>
-              <a:t>007 / 014</a:t>
+              <a:t>007 / 015</a:t>
             </a:r>
           </a:p>
         </p:txBody>
@@ -8972,7 +9889,7 @@
         <p:spPr>
           <a:xfrm>
             <a:off x="822960" y="457200"/>
-            <a:ext cx="8229600" cy="365760"/>
+            <a:ext cx="10058400" cy="365760"/>
           </a:xfrm>
           <a:prstGeom prst="rect">
             <a:avLst/>
@@ -8986,13 +9903,13 @@
           <a:lstStyle/>
           <a:p>
             <a:r>
-              <a:rPr sz="1200" b="1" i="0">
-                <a:solidFill>
-                  <a:srgbClr val="64748B"/>
-                </a:solidFill>
-                <a:latin typeface="Montserrat"/>
-              </a:rPr>
-              <a:t>SOLDADURA · ACERO</a:t>
+              <a:rPr sz="1300" b="1" i="0">
+                <a:solidFill>
+                  <a:srgbClr val="E8801A"/>
+                </a:solidFill>
+                <a:latin typeface="Montserrat"/>
+              </a:rPr>
+              <a:t>SOLDADURA · POLIETILENO</a:t>
             </a:r>
           </a:p>
         </p:txBody>
@@ -9020,26 +9937,70 @@
           <a:lstStyle/>
           <a:p>
             <a:r>
-              <a:rPr sz="2700" b="1" i="0">
+              <a:rPr sz="2800" b="1" i="0">
                 <a:solidFill>
                   <a:srgbClr val="1E2761"/>
                 </a:solidFill>
                 <a:latin typeface="Montserrat"/>
               </a:rPr>
-              <a:t>Acero con acero</a:t>
-            </a:r>
-          </a:p>
-        </p:txBody>
-      </p:sp>
-      <p:sp>
-        <p:nvSpPr>
-          <p:cNvPr id="7" name="TextBox 6"/>
+              <a:t>Polietileno con polietileno</a:t>
+            </a:r>
+          </a:p>
+        </p:txBody>
+      </p:sp>
+      <p:sp>
+        <p:nvSpPr>
+          <p:cNvPr id="7" name="Rounded Rectangle 6"/>
+          <p:cNvSpPr/>
+          <p:nvPr/>
+        </p:nvSpPr>
+        <p:spPr>
+          <a:xfrm>
+            <a:off x="868680" y="1627632"/>
+            <a:ext cx="2011680" cy="73152"/>
+          </a:xfrm>
+          <a:prstGeom prst="roundRect">
+            <a:avLst/>
+          </a:prstGeom>
+          <a:solidFill>
+            <a:srgbClr val="E8801A"/>
+          </a:solidFill>
+          <a:ln>
+            <a:noFill/>
+          </a:ln>
+          <a:effectLst/>
+        </p:spPr>
+        <p:style>
+          <a:lnRef idx="1">
+            <a:schemeClr val="accent1"/>
+          </a:lnRef>
+          <a:fillRef idx="3">
+            <a:schemeClr val="accent1"/>
+          </a:fillRef>
+          <a:effectRef idx="2">
+            <a:schemeClr val="accent1"/>
+          </a:effectRef>
+          <a:fontRef idx="minor">
+            <a:schemeClr val="lt1"/>
+          </a:fontRef>
+        </p:style>
+        <p:txBody>
+          <a:bodyPr rtlCol="0" anchor="ctr"/>
+          <a:lstStyle/>
+          <a:p>
+            <a:pPr algn="ctr"/>
+          </a:p>
+        </p:txBody>
+      </p:sp>
+      <p:sp>
+        <p:nvSpPr>
+          <p:cNvPr id="8" name="TextBox 7"/>
           <p:cNvSpPr txBox="1"/>
           <p:nvPr/>
         </p:nvSpPr>
         <p:spPr>
           <a:xfrm>
-            <a:off x="822960" y="1920240"/>
+            <a:off x="822960" y="1965960"/>
             <a:ext cx="4983480" cy="4206240"/>
           </a:xfrm>
           <a:prstGeom prst="rect">
@@ -9055,17 +10016,17 @@
           <a:p>
             <a:pPr>
               <a:spcAft>
-                <a:spcPts val="1000"/>
+                <a:spcPts val="1100"/>
               </a:spcAft>
             </a:pPr>
             <a:r>
               <a:rPr sz="1600" b="1" i="0">
                 <a:solidFill>
-                  <a:srgbClr val="2E3A80"/>
-                </a:solidFill>
-                <a:latin typeface="Montserrat"/>
-              </a:rPr>
-              <a:t>•  </a:t>
+                  <a:srgbClr val="E8801A"/>
+                </a:solidFill>
+                <a:latin typeface="Montserrat"/>
+              </a:rPr>
+              <a:t>▸  </a:t>
             </a:r>
             <a:r>
               <a:rPr sz="1600" b="0" i="0">
@@ -9074,23 +10035,23 @@
                 </a:solidFill>
                 <a:latin typeface="Montserrat"/>
               </a:rPr>
-              <a:t>Soldadura a tope por arco eléctrico</a:t>
+              <a:t>Preferentemente por electrofusión</a:t>
             </a:r>
           </a:p>
           <a:p>
             <a:pPr>
               <a:spcAft>
-                <a:spcPts val="1000"/>
+                <a:spcPts val="1100"/>
               </a:spcAft>
             </a:pPr>
             <a:r>
               <a:rPr sz="1600" b="1" i="0">
                 <a:solidFill>
-                  <a:srgbClr val="2E3A80"/>
-                </a:solidFill>
-                <a:latin typeface="Montserrat"/>
-              </a:rPr>
-              <a:t>•  </a:t>
+                  <a:srgbClr val="E8801A"/>
+                </a:solidFill>
+                <a:latin typeface="Montserrat"/>
+              </a:rPr>
+              <a:t>▸  </a:t>
             </a:r>
             <a:r>
               <a:rPr sz="1600" b="0" i="0">
@@ -9099,23 +10060,23 @@
                 </a:solidFill>
                 <a:latin typeface="Montserrat"/>
               </a:rPr>
-              <a:t>Oxiacetilénica solo si DN ≤ 50</a:t>
+              <a:t>A tope si DN ≥ 110</a:t>
             </a:r>
           </a:p>
           <a:p>
             <a:pPr>
               <a:spcAft>
-                <a:spcPts val="1000"/>
+                <a:spcPts val="1100"/>
               </a:spcAft>
             </a:pPr>
             <a:r>
               <a:rPr sz="1600" b="1" i="0">
                 <a:solidFill>
-                  <a:srgbClr val="2E3A80"/>
-                </a:solidFill>
-                <a:latin typeface="Montserrat"/>
-              </a:rPr>
-              <a:t>•  </a:t>
+                  <a:srgbClr val="E8801A"/>
+                </a:solidFill>
+                <a:latin typeface="Montserrat"/>
+              </a:rPr>
+              <a:t>▸  </a:t>
             </a:r>
             <a:r>
               <a:rPr sz="1600" b="0" i="0">
@@ -9124,23 +10085,23 @@
                 </a:solidFill>
                 <a:latin typeface="Montserrat"/>
               </a:rPr>
-              <a:t>Sin mandril interno al curvar</a:t>
+              <a:t>Accesorios compatibles con el tubo</a:t>
             </a:r>
           </a:p>
           <a:p>
             <a:pPr>
               <a:spcAft>
-                <a:spcPts val="1000"/>
+                <a:spcPts val="1100"/>
               </a:spcAft>
             </a:pPr>
             <a:r>
               <a:rPr sz="1600" b="1" i="0">
                 <a:solidFill>
-                  <a:srgbClr val="2E3A80"/>
-                </a:solidFill>
-                <a:latin typeface="Montserrat"/>
-              </a:rPr>
-              <a:t>•  </a:t>
+                  <a:srgbClr val="E8801A"/>
+                </a:solidFill>
+                <a:latin typeface="Montserrat"/>
+              </a:rPr>
+              <a:t>▸  </a:t>
             </a:r>
             <a:r>
               <a:rPr sz="1600" b="0" i="0">
@@ -9149,14 +10110,14 @@
                 </a:solidFill>
                 <a:latin typeface="Montserrat"/>
               </a:rPr>
-              <a:t>Accesorios soldados o roscados</a:t>
-            </a:r>
-          </a:p>
-        </p:txBody>
-      </p:sp>
-      <p:sp>
-        <p:nvSpPr>
-          <p:cNvPr id="8" name="imgph" descr="IMGQ:arc welding steel pipe joint sparks"/>
+              <a:t>Se funde el material consigo mismo</a:t>
+            </a:r>
+          </a:p>
+        </p:txBody>
+      </p:sp>
+      <p:sp>
+        <p:nvSpPr>
+          <p:cNvPr id="9" name="imgph" descr="IMGQ:polyethylene pipe electrofusion welding"/>
           <p:cNvSpPr/>
           <p:nvPr/>
         </p:nvSpPr>
@@ -9202,7 +10163,7 @@
       </p:sp>
       <p:sp>
         <p:nvSpPr>
-          <p:cNvPr id="9" name="TextBox 8"/>
+          <p:cNvPr id="10" name="TextBox 9"/>
           <p:cNvSpPr txBox="1"/>
           <p:nvPr/>
         </p:nvSpPr>
@@ -9242,7 +10203,7 @@
                 </a:solidFill>
                 <a:latin typeface="Montserrat"/>
               </a:rPr>
-              <a:t>arc welding steel pipe joint sparks</a:t>
+              <a:t>polyethylene pipe electrofusion welding</a:t>
             </a:r>
           </a:p>
         </p:txBody>
@@ -9339,7 +10300,7 @@
                 </a:solidFill>
                 <a:latin typeface="Montserrat"/>
               </a:rPr>
-              <a:t>008 / 014</a:t>
+              <a:t>008 / 015</a:t>
             </a:r>
           </a:p>
         </p:txBody>
@@ -9387,7 +10348,7 @@
         <p:spPr>
           <a:xfrm>
             <a:off x="822960" y="457200"/>
-            <a:ext cx="8229600" cy="365760"/>
+            <a:ext cx="10058400" cy="365760"/>
           </a:xfrm>
           <a:prstGeom prst="rect">
             <a:avLst/>
@@ -9401,13 +10362,13 @@
           <a:lstStyle/>
           <a:p>
             <a:r>
-              <a:rPr sz="1200" b="1" i="0">
-                <a:solidFill>
-                  <a:srgbClr val="64748B"/>
-                </a:solidFill>
-                <a:latin typeface="Montserrat"/>
-              </a:rPr>
-              <a:t>SOLDADURA · COBRE E INOX</a:t>
+              <a:rPr sz="1300" b="1" i="0">
+                <a:solidFill>
+                  <a:srgbClr val="E8801A"/>
+                </a:solidFill>
+                <a:latin typeface="Montserrat"/>
+              </a:rPr>
+              <a:t>SOLDADURA · ACERO</a:t>
             </a:r>
           </a:p>
         </p:txBody>
@@ -9435,26 +10396,70 @@
           <a:lstStyle/>
           <a:p>
             <a:r>
-              <a:rPr sz="2700" b="1" i="0">
+              <a:rPr sz="2800" b="1" i="0">
                 <a:solidFill>
                   <a:srgbClr val="1E2761"/>
                 </a:solidFill>
                 <a:latin typeface="Montserrat"/>
               </a:rPr>
-              <a:t>Capilaridad: cobre e inoxidable</a:t>
-            </a:r>
-          </a:p>
-        </p:txBody>
-      </p:sp>
-      <p:sp>
-        <p:nvSpPr>
-          <p:cNvPr id="7" name="TextBox 6"/>
+              <a:t>Acero con acero</a:t>
+            </a:r>
+          </a:p>
+        </p:txBody>
+      </p:sp>
+      <p:sp>
+        <p:nvSpPr>
+          <p:cNvPr id="7" name="Rounded Rectangle 6"/>
+          <p:cNvSpPr/>
+          <p:nvPr/>
+        </p:nvSpPr>
+        <p:spPr>
+          <a:xfrm>
+            <a:off x="868680" y="1627632"/>
+            <a:ext cx="2011680" cy="73152"/>
+          </a:xfrm>
+          <a:prstGeom prst="roundRect">
+            <a:avLst/>
+          </a:prstGeom>
+          <a:solidFill>
+            <a:srgbClr val="E8801A"/>
+          </a:solidFill>
+          <a:ln>
+            <a:noFill/>
+          </a:ln>
+          <a:effectLst/>
+        </p:spPr>
+        <p:style>
+          <a:lnRef idx="1">
+            <a:schemeClr val="accent1"/>
+          </a:lnRef>
+          <a:fillRef idx="3">
+            <a:schemeClr val="accent1"/>
+          </a:fillRef>
+          <a:effectRef idx="2">
+            <a:schemeClr val="accent1"/>
+          </a:effectRef>
+          <a:fontRef idx="minor">
+            <a:schemeClr val="lt1"/>
+          </a:fontRef>
+        </p:style>
+        <p:txBody>
+          <a:bodyPr rtlCol="0" anchor="ctr"/>
+          <a:lstStyle/>
+          <a:p>
+            <a:pPr algn="ctr"/>
+          </a:p>
+        </p:txBody>
+      </p:sp>
+      <p:sp>
+        <p:nvSpPr>
+          <p:cNvPr id="8" name="TextBox 7"/>
           <p:cNvSpPr txBox="1"/>
           <p:nvPr/>
         </p:nvSpPr>
         <p:spPr>
           <a:xfrm>
-            <a:off x="822960" y="1920240"/>
+            <a:off x="822960" y="1965960"/>
             <a:ext cx="4983480" cy="4206240"/>
           </a:xfrm>
           <a:prstGeom prst="rect">
@@ -9470,17 +10475,17 @@
           <a:p>
             <a:pPr>
               <a:spcAft>
-                <a:spcPts val="1000"/>
+                <a:spcPts val="1100"/>
               </a:spcAft>
             </a:pPr>
             <a:r>
               <a:rPr sz="1600" b="1" i="0">
                 <a:solidFill>
-                  <a:srgbClr val="2E3A80"/>
-                </a:solidFill>
-                <a:latin typeface="Montserrat"/>
-              </a:rPr>
-              <a:t>•  </a:t>
+                  <a:srgbClr val="E8801A"/>
+                </a:solidFill>
+                <a:latin typeface="Montserrat"/>
+              </a:rPr>
+              <a:t>▸  </a:t>
             </a:r>
             <a:r>
               <a:rPr sz="1600" b="0" i="0">
@@ -9489,23 +10494,23 @@
                 </a:solidFill>
                 <a:latin typeface="Montserrat"/>
               </a:rPr>
-              <a:t>Unión por soldadura capilar</a:t>
+              <a:t>Soldadura a tope por arco eléctrico</a:t>
             </a:r>
           </a:p>
           <a:p>
             <a:pPr>
               <a:spcAft>
-                <a:spcPts val="1000"/>
+                <a:spcPts val="1100"/>
               </a:spcAft>
             </a:pPr>
             <a:r>
               <a:rPr sz="1600" b="1" i="0">
                 <a:solidFill>
-                  <a:srgbClr val="2E3A80"/>
-                </a:solidFill>
-                <a:latin typeface="Montserrat"/>
-              </a:rPr>
-              <a:t>•  </a:t>
+                  <a:srgbClr val="E8801A"/>
+                </a:solidFill>
+                <a:latin typeface="Montserrat"/>
+              </a:rPr>
+              <a:t>▸  </a:t>
             </a:r>
             <a:r>
               <a:rPr sz="1600" b="0" i="0">
@@ -9514,23 +10519,23 @@
                 </a:solidFill>
                 <a:latin typeface="Montserrat"/>
               </a:rPr>
-              <a:t>Fuerte 450 °C · blanda 220 °C</a:t>
+              <a:t>Oxiacetilénica solo si DN ≤ 50</a:t>
             </a:r>
           </a:p>
           <a:p>
             <a:pPr>
               <a:spcAft>
-                <a:spcPts val="1000"/>
+                <a:spcPts val="1100"/>
               </a:spcAft>
             </a:pPr>
             <a:r>
               <a:rPr sz="1600" b="1" i="0">
                 <a:solidFill>
-                  <a:srgbClr val="2E3A80"/>
-                </a:solidFill>
-                <a:latin typeface="Montserrat"/>
-              </a:rPr>
-              <a:t>•  </a:t>
+                  <a:srgbClr val="E8801A"/>
+                </a:solidFill>
+                <a:latin typeface="Montserrat"/>
+              </a:rPr>
+              <a:t>▸  </a:t>
             </a:r>
             <a:r>
               <a:rPr sz="1600" b="0" i="0">
@@ -9539,23 +10544,23 @@
                 </a:solidFill>
                 <a:latin typeface="Montserrat"/>
               </a:rPr>
-              <a:t>Prohibido el estaño-plomo</a:t>
+              <a:t>Sin mandril interno al curvar</a:t>
             </a:r>
           </a:p>
           <a:p>
             <a:pPr>
               <a:spcAft>
-                <a:spcPts val="1000"/>
+                <a:spcPts val="1100"/>
               </a:spcAft>
             </a:pPr>
             <a:r>
               <a:rPr sz="1600" b="1" i="0">
                 <a:solidFill>
-                  <a:srgbClr val="2E3A80"/>
-                </a:solidFill>
-                <a:latin typeface="Montserrat"/>
-              </a:rPr>
-              <a:t>•  </a:t>
+                  <a:srgbClr val="E8801A"/>
+                </a:solidFill>
+                <a:latin typeface="Montserrat"/>
+              </a:rPr>
+              <a:t>▸  </a:t>
             </a:r>
             <a:r>
               <a:rPr sz="1600" b="0" i="0">
@@ -9564,14 +10569,14 @@
                 </a:solidFill>
                 <a:latin typeface="Montserrat"/>
               </a:rPr>
-              <a:t>No abocardar (salvo baterías de contadores)</a:t>
-            </a:r>
-          </a:p>
-        </p:txBody>
-      </p:sp>
-      <p:sp>
-        <p:nvSpPr>
-          <p:cNvPr id="8" name="imgph" descr="IMGQ:capillary solder copper fitting joint"/>
+              <a:t>Accesorios soldados o roscados</a:t>
+            </a:r>
+          </a:p>
+        </p:txBody>
+      </p:sp>
+      <p:sp>
+        <p:nvSpPr>
+          <p:cNvPr id="9" name="imgph" descr="IMGQ:arc welding steel pipe joint sparks"/>
           <p:cNvSpPr/>
           <p:nvPr/>
         </p:nvSpPr>
@@ -9617,7 +10622,7 @@
       </p:sp>
       <p:sp>
         <p:nvSpPr>
-          <p:cNvPr id="9" name="TextBox 8"/>
+          <p:cNvPr id="10" name="TextBox 9"/>
           <p:cNvSpPr txBox="1"/>
           <p:nvPr/>
         </p:nvSpPr>
@@ -9657,7 +10662,7 @@
                 </a:solidFill>
                 <a:latin typeface="Montserrat"/>
               </a:rPr>
-              <a:t>capillary solder copper fitting joint</a:t>
+              <a:t>arc welding steel pipe joint sparks</a:t>
             </a:r>
           </a:p>
         </p:txBody>
@@ -9754,7 +10759,7 @@
                 </a:solidFill>
                 <a:latin typeface="Montserrat"/>
               </a:rPr>
-              <a:t>009 / 014</a:t>
+              <a:t>009 / 015</a:t>
             </a:r>
           </a:p>
         </p:txBody>
@@ -9802,7 +10807,7 @@
         <p:spPr>
           <a:xfrm>
             <a:off x="822960" y="457200"/>
-            <a:ext cx="8229600" cy="365760"/>
+            <a:ext cx="10058400" cy="365760"/>
           </a:xfrm>
           <a:prstGeom prst="rect">
             <a:avLst/>
@@ -9816,13 +10821,13 @@
           <a:lstStyle/>
           <a:p>
             <a:r>
-              <a:rPr sz="1200" b="1" i="0">
-                <a:solidFill>
-                  <a:srgbClr val="64748B"/>
-                </a:solidFill>
-                <a:latin typeface="Montserrat"/>
-              </a:rPr>
-              <a:t>UNIONES · METALES DISTINTOS</a:t>
+              <a:rPr sz="1300" b="1" i="0">
+                <a:solidFill>
+                  <a:srgbClr val="E8801A"/>
+                </a:solidFill>
+                <a:latin typeface="Montserrat"/>
+              </a:rPr>
+              <a:t>SOLDADURA · COBRE E INOX</a:t>
             </a:r>
           </a:p>
         </p:txBody>
@@ -9850,26 +10855,70 @@
           <a:lstStyle/>
           <a:p>
             <a:r>
-              <a:rPr sz="2700" b="1" i="0">
+              <a:rPr sz="2800" b="1" i="0">
                 <a:solidFill>
                   <a:srgbClr val="1E2761"/>
                 </a:solidFill>
                 <a:latin typeface="Montserrat"/>
               </a:rPr>
-              <a:t>La regla del traductor</a:t>
-            </a:r>
-          </a:p>
-        </p:txBody>
-      </p:sp>
-      <p:sp>
-        <p:nvSpPr>
-          <p:cNvPr id="7" name="TextBox 6"/>
+              <a:t>Capilaridad: cobre e inoxidable</a:t>
+            </a:r>
+          </a:p>
+        </p:txBody>
+      </p:sp>
+      <p:sp>
+        <p:nvSpPr>
+          <p:cNvPr id="7" name="Rounded Rectangle 6"/>
+          <p:cNvSpPr/>
+          <p:nvPr/>
+        </p:nvSpPr>
+        <p:spPr>
+          <a:xfrm>
+            <a:off x="868680" y="1627632"/>
+            <a:ext cx="2011680" cy="73152"/>
+          </a:xfrm>
+          <a:prstGeom prst="roundRect">
+            <a:avLst/>
+          </a:prstGeom>
+          <a:solidFill>
+            <a:srgbClr val="E8801A"/>
+          </a:solidFill>
+          <a:ln>
+            <a:noFill/>
+          </a:ln>
+          <a:effectLst/>
+        </p:spPr>
+        <p:style>
+          <a:lnRef idx="1">
+            <a:schemeClr val="accent1"/>
+          </a:lnRef>
+          <a:fillRef idx="3">
+            <a:schemeClr val="accent1"/>
+          </a:fillRef>
+          <a:effectRef idx="2">
+            <a:schemeClr val="accent1"/>
+          </a:effectRef>
+          <a:fontRef idx="minor">
+            <a:schemeClr val="lt1"/>
+          </a:fontRef>
+        </p:style>
+        <p:txBody>
+          <a:bodyPr rtlCol="0" anchor="ctr"/>
+          <a:lstStyle/>
+          <a:p>
+            <a:pPr algn="ctr"/>
+          </a:p>
+        </p:txBody>
+      </p:sp>
+      <p:sp>
+        <p:nvSpPr>
+          <p:cNvPr id="8" name="TextBox 7"/>
           <p:cNvSpPr txBox="1"/>
           <p:nvPr/>
         </p:nvSpPr>
         <p:spPr>
           <a:xfrm>
-            <a:off x="822960" y="1920240"/>
+            <a:off x="822960" y="1965960"/>
             <a:ext cx="4983480" cy="4206240"/>
           </a:xfrm>
           <a:prstGeom prst="rect">
@@ -9885,17 +10934,17 @@
           <a:p>
             <a:pPr>
               <a:spcAft>
-                <a:spcPts val="1000"/>
+                <a:spcPts val="1100"/>
               </a:spcAft>
             </a:pPr>
             <a:r>
               <a:rPr sz="1600" b="1" i="0">
                 <a:solidFill>
-                  <a:srgbClr val="2E3A80"/>
-                </a:solidFill>
-                <a:latin typeface="Montserrat"/>
-              </a:rPr>
-              <a:t>•  </a:t>
+                  <a:srgbClr val="E8801A"/>
+                </a:solidFill>
+                <a:latin typeface="Montserrat"/>
+              </a:rPr>
+              <a:t>▸  </a:t>
             </a:r>
             <a:r>
               <a:rPr sz="1600" b="0" i="0">
@@ -9904,23 +10953,23 @@
                 </a:solidFill>
                 <a:latin typeface="Montserrat"/>
               </a:rPr>
-              <a:t>Cobre y acero: nunca unión directa</a:t>
+              <a:t>Unión por soldadura capilar</a:t>
             </a:r>
           </a:p>
           <a:p>
             <a:pPr>
               <a:spcAft>
-                <a:spcPts val="1000"/>
+                <a:spcPts val="1100"/>
               </a:spcAft>
             </a:pPr>
             <a:r>
               <a:rPr sz="1600" b="1" i="0">
                 <a:solidFill>
-                  <a:srgbClr val="2E3A80"/>
-                </a:solidFill>
-                <a:latin typeface="Montserrat"/>
-              </a:rPr>
-              <a:t>•  </a:t>
+                  <a:srgbClr val="E8801A"/>
+                </a:solidFill>
+                <a:latin typeface="Montserrat"/>
+              </a:rPr>
+              <a:t>▸  </a:t>
             </a:r>
             <a:r>
               <a:rPr sz="1600" b="0" i="0">
@@ -9929,23 +10978,23 @@
                 </a:solidFill>
                 <a:latin typeface="Montserrat"/>
               </a:rPr>
-              <a:t>Cobre e inox: nunca unión directa</a:t>
+              <a:t>Fuerte 450 °C · blanda 220 °C</a:t>
             </a:r>
           </a:p>
           <a:p>
             <a:pPr>
               <a:spcAft>
-                <a:spcPts val="1000"/>
+                <a:spcPts val="1100"/>
               </a:spcAft>
             </a:pPr>
             <a:r>
               <a:rPr sz="1600" b="1" i="0">
                 <a:solidFill>
-                  <a:srgbClr val="2E3A80"/>
-                </a:solidFill>
-                <a:latin typeface="Montserrat"/>
-              </a:rPr>
-              <a:t>•  </a:t>
+                  <a:srgbClr val="E8801A"/>
+                </a:solidFill>
+                <a:latin typeface="Montserrat"/>
+              </a:rPr>
+              <a:t>▸  </a:t>
             </a:r>
             <a:r>
               <a:rPr sz="1600" b="0" i="0">
@@ -9954,23 +11003,23 @@
                 </a:solidFill>
                 <a:latin typeface="Montserrat"/>
               </a:rPr>
-              <a:t>Se intercala un accesorio de aleación de cobre</a:t>
+              <a:t>Prohibido el estaño-plomo</a:t>
             </a:r>
           </a:p>
           <a:p>
             <a:pPr>
               <a:spcAft>
-                <a:spcPts val="1000"/>
+                <a:spcPts val="1100"/>
               </a:spcAft>
             </a:pPr>
             <a:r>
               <a:rPr sz="1600" b="1" i="0">
                 <a:solidFill>
-                  <a:srgbClr val="2E3A80"/>
-                </a:solidFill>
-                <a:latin typeface="Montserrat"/>
-              </a:rPr>
-              <a:t>•  </a:t>
+                  <a:srgbClr val="E8801A"/>
+                </a:solidFill>
+                <a:latin typeface="Montserrat"/>
+              </a:rPr>
+              <a:t>▸  </a:t>
             </a:r>
             <a:r>
               <a:rPr sz="1600" b="0" i="0">
@@ -9979,14 +11028,14 @@
                 </a:solidFill>
                 <a:latin typeface="Montserrat"/>
               </a:rPr>
-              <a:t>Cobre-acero: a tope por bordón, 850 °C</a:t>
-            </a:r>
-          </a:p>
-        </p:txBody>
-      </p:sp>
-      <p:sp>
-        <p:nvSpPr>
-          <p:cNvPr id="8" name="imgph" descr="IMGQ:brass transition fitting copper steel pipe"/>
+              <a:t>No abocardar (salvo baterías de contadores)</a:t>
+            </a:r>
+          </a:p>
+        </p:txBody>
+      </p:sp>
+      <p:sp>
+        <p:nvSpPr>
+          <p:cNvPr id="9" name="imgph" descr="IMGQ:capillary solder copper fitting joint"/>
           <p:cNvSpPr/>
           <p:nvPr/>
         </p:nvSpPr>
@@ -10032,7 +11081,7 @@
       </p:sp>
       <p:sp>
         <p:nvSpPr>
-          <p:cNvPr id="9" name="TextBox 8"/>
+          <p:cNvPr id="10" name="TextBox 9"/>
           <p:cNvSpPr txBox="1"/>
           <p:nvPr/>
         </p:nvSpPr>
@@ -10072,7 +11121,7 @@
                 </a:solidFill>
                 <a:latin typeface="Montserrat"/>
               </a:rPr>
-              <a:t>brass transition fitting copper steel pipe</a:t>
+              <a:t>capillary solder copper fitting joint</a:t>
             </a:r>
           </a:p>
         </p:txBody>

--- a/Curso Gas B/10 - UNE 60670 - Tuberias, accesorios y uniones/10 - UNE 60670 - Tuberias, accesorios y uniones - Vídeo 3.pptx
+++ b/Curso Gas B/10 - UNE 60670 - Tuberias, accesorios y uniones/10 - UNE 60670 - Tuberias, accesorios y uniones - Vídeo 3.pptx
@@ -20,6 +20,12 @@
     <p:sldId id="268" r:id="rId20"/>
     <p:sldId id="269" r:id="rId21"/>
     <p:sldId id="270" r:id="rId22"/>
+    <p:sldId id="271" r:id="rId23"/>
+    <p:sldId id="272" r:id="rId24"/>
+    <p:sldId id="273" r:id="rId25"/>
+    <p:sldId id="274" r:id="rId26"/>
+    <p:sldId id="275" r:id="rId27"/>
+    <p:sldId id="276" r:id="rId28"/>
   </p:sldIdLst>
   <p:sldSz cx="12191695" cy="6858000" type="screen4x3"/>
   <p:notesSz cx="6858000" cy="9144000"/>
@@ -591,12 +597,12 @@
           <a:lstStyle/>
           <a:p>
             <a:r>
-              <a:t>N1: ¿Por qué no puedo unir directamente cobre y acero?</a:t>
-            </a:r>
-          </a:p>
-          <a:p>
-            <a:r>
-              <a:t>N2: Porque dos metales distintos en contacto, con la humedad, montan una pila: es lo que se llama par galvánico. Uno de los dos se va corroyendo y la junta acaba fugando con el tiempo. Para evitarlo, la norma usa lo que yo llamo la regla del traductor: entre cobre y acero, y también entre cobre e inoxidable, nunca los unas a pelo; metes en medio un accesorio de aleación de cobre que hace de intermediario, de traductor entre los dos metales. Y para la unión de ese accesorio con el acero, apunta el tercer punto de fusión del tema: ochocientos cincuenta grados, por soldadura fuerte a tope por bordón. Ya tienes los tres números juntos: doscientos veinte, cuatrocientos cincuenta y ochocientos cincuenta grados. Si en el examen ves 'unión directa de cobre y acero', es falsa: siempre va el traductor por medio.</a:t>
+              <a:t>N1: ¿Y el acero se suelda de cualquier forma?</a:t>
+            </a:r>
+          </a:p>
+          <a:p>
+            <a:r>
+              <a:t>N2: No, tiene sus dos técnicas según el diámetro. La general es la soldadura a tope por arco eléctrico: enfrentas los dos tubos y los unes con el arco, esa soldadura de electrodo que da una junta muy resistente. Para diámetros pequeños, hasta la DN cincuenta, se admite también la soldadura oxiacetilénica, la del soplete de oxígeno y acetileno. Por encima de ese diámetro, arco. Recuerda del primer vídeo que al curvar acero tampoco se usa mandril interno, para no estrangularlo, y que sus accesorios pueden ir soldados o roscados, cada uno con su norma. La idea sencilla: acero, a tope por arco; y solo si es fino, hasta cincuenta, puedes tirar de soplete.</a:t>
             </a:r>
           </a:p>
         </p:txBody>
@@ -666,12 +672,12 @@
           <a:lstStyle/>
           <a:p>
             <a:r>
-              <a:t>N1: ¿El plomo todavía se usa en gas?</a:t>
-            </a:r>
-          </a:p>
-          <a:p>
-            <a:r>
-              <a:t>N2: Nuevo, nunca; el plomo solo aparece cuando amplías o modificas una instalación antigua que ya lo tiene puesto. Por eso sus uniones llevan tres candados que van siempre juntos: solo en instalaciones ya en servicio, solo hasta cero coma cero cinco bar de presión, y solo en uso doméstico. Fuera de ahí, prohibido. Dentro de esos límites, con el cobre sí se puede soldar el plomo, con aportación de estaño-plomo de fusión por encima de doscientos grados. Pero con el acero o el inoxidable, jamás directo: hay que intercalar siempre un manguito de aleación de cobre, otra vez el traductor. Resumen para el examen: plomo igual a instalación vieja, presión baja y uso de casa; y con acero o inox, manguito de por medio.</a:t>
+              <a:t>N1: ¿Qué es la soldadura capilar y qué está prohibido en ella?</a:t>
+            </a:r>
+          </a:p>
+          <a:p>
+            <a:r>
+              <a:t>N2: La soldadura por capilaridad es la del cobre de toda la vida: metes el tubo dentro del accesorio, calientas, y el metal de aportación fundido se cuela por sí solo en la holgura, por capilaridad, como cuando una servilleta absorbe el agua. Vale para cobre y para acero inoxidable. Dos puntos de fusión que caen en examen: cuatrocientos cincuenta grados para la capilar fuerte y doscientos veinte para la blanda. Y una prohibición clara: no se usa aleación de estaño-plomo como aportación, porque el plomo es tóxico y deja la unión fuera de norma. Un detalle más, muy preguntado: no se debe abocardar el tubo, es decir, ensanchar su boca, para soldar por capilaridad; solo se permite como excepción en las baterías de contadores o colectores de llaves, y siempre que el tubo no pierda espesor al hacerlo.</a:t>
             </a:r>
           </a:p>
         </p:txBody>
@@ -741,12 +747,12 @@
           <a:lstStyle/>
           <a:p>
             <a:r>
-              <a:t>N1: ¿Qué gano con una unión que se puede desmontar?</a:t>
-            </a:r>
-          </a:p>
-          <a:p>
-            <a:r>
-              <a:t>N2: Ganas poder abrirla el día que haya que cambiar la pieza sin cortar el tubo. Por eso las uniones desmontables se ponen justo donde algún día tocará desmontar: un contador, un regulador, una válvula. Son tres. La unión por junta plana, para elementos pequeños: dos caras que aprietan una junta, normalmente de goma, que hace la estanquidad. La unión por bridas, para diámetros mayores: dos platos atornillados con una junta en medio. Y la unión metal-metal, del tipo esfera-cono o de anillos cortantes, que se reserva solo a las conexiones de los conjuntos de regulación. Un dato que las abarca a todas: las uniones mecánicas se pueden usar hasta cinco bar de presión, no más. Desmontable quiere decir eso, que se afloja y se vuelve a montar.</a:t>
+              <a:t>N1: ¿Por qué no puedo unir directamente cobre y acero?</a:t>
+            </a:r>
+          </a:p>
+          <a:p>
+            <a:r>
+              <a:t>N2: Porque dos metales distintos en contacto, con la humedad, montan una pila: es lo que se llama par galvánico. Uno de los dos se va corroyendo y la junta acaba fugando con el tiempo. Para evitarlo, la norma usa lo que yo llamo la regla del traductor: entre cobre y acero, y también entre cobre e inoxidable, nunca los unas a pelo; metes en medio un accesorio de aleación de cobre que hace de intermediario, de traductor entre los dos metales. Y para la unión de ese accesorio con el acero, apunta el tercer punto de fusión del tema: ochocientos cincuenta grados, por soldadura fuerte a tope por bordón. Ya tienes los tres números juntos: doscientos veinte, cuatrocientos cincuenta y ochocientos cincuenta grados. Si en el examen ves 'unión directa de cobre y acero', es falsa: siempre va el traductor por medio.</a:t>
             </a:r>
           </a:p>
         </p:txBody>
@@ -816,12 +822,12 @@
           <a:lstStyle/>
           <a:p>
             <a:r>
-              <a:t>N1: ¿Y las que no se desmontan? ¿el press-fitting qué es?</a:t>
-            </a:r>
-          </a:p>
-          <a:p>
-            <a:r>
-              <a:t>N2: Las no desmontables quedan fijas: una vez hechas, para deshacerlas hay que cortar. La más clásica es la roscada, tubo de acero con rosca, que va por la norma diecinueve mil quinientos con sus accesorios. Pero la reina de la obra rápida hoy es el press-fitting: metes el tubo en el accesorio y lo aprietas con una máquina prensadora que deforma el metal y sella; puede ser radial o axial según cómo apriete. Dentro del accesorio hay una junta tórica, una goma en forma de anillo, que es la que hace la estanquidad, y va por la norma quinientos cuarenta y nueve. También son no desmontables las uniones de multicapa y las del corrugado flexible. Un aviso de obra: si te olvidas de prensar un accesorio o maltratas la junta tórica, tienes la fuga esperando a salir en la prueba, o peor, después. Y de nuevo, todas hasta cinco bar.</a:t>
+              <a:t>N1: Pregunta de las que caen seguro. Cobre con acero, ¿se pueden soldar directamente el uno al otro?</a:t>
+            </a:r>
+          </a:p>
+          <a:p>
+            <a:r>
+              <a:t>N2: Recuerda la regla del traductor: entre metales distintos siempre va algo por medio.</a:t>
             </a:r>
           </a:p>
         </p:txBody>
@@ -891,12 +897,12 @@
           <a:lstStyle/>
           <a:p>
             <a:r>
-              <a:t>N1: Los enlaces que pasan de plástico a metal, ¿tienen truco?</a:t>
-            </a:r>
-          </a:p>
-          <a:p>
-            <a:r>
-              <a:t>N2: Tienen un detalle que les gusta cruzar en el examen, y es fácil si lo separas bien. Los enlaces de transición pe-metal, los que casan el plástico con el metal, se dividen en dos según se puedan abrir o no. Si el enlace es desmontable, va por las normas sesenta mil cuatrocientos cinco, parte uno y parte tres. Si es fijo, no desmontable, va por la sesenta mil cuatrocientos cinco, parte uno y parte dos. La parte uno es común; lo que cambia es la otra: la tres para desmontable, la dos para fijo. No las confundas, es justo lo que preguntan. Y para cerrar el capítulo, la norma deja una puerta abierta: se admiten también otras uniones que acepte la norma mil setecientos setenta y cinco. Con esto ya tienes todas las formas de unir tubos de la Parte tres.</a:t>
+              <a:t>N1: ¿Por qué no directo?</a:t>
+            </a:r>
+          </a:p>
+          <a:p>
+            <a:r>
+              <a:t>N2: Porque dos metales distintos con humedad forman una pila, un par galvánico, y uno se corroe hasta que la junta fuga. Por eso se mete de intermediario un accesorio de aleación de cobre, el traductor. Si ves 'unión directa de cobre y acero', es falsa.</a:t>
             </a:r>
           </a:p>
         </p:txBody>
@@ -966,22 +972,312 @@
           <a:lstStyle/>
           <a:p>
             <a:r>
-              <a:t>N1: Último vídeo y fin del tema. ¿Cómo lo cierro todo en la cabeza?</a:t>
-            </a:r>
-          </a:p>
-          <a:p>
-            <a:r>
-              <a:t>N2: Reconstruyamos el hilo, porque hoy has puesto la última pieza del tema. Todo colgaba de una sola regla: cualquier unión debe asegurar la estanquidad, no escaparse ni una burbuja, pase lo que pase. A partir de ahí vimos las tres familias. La soldadura, con su frontera de oro en cero coma cero cinco bar: por encima, siempre fuerte, y fuerte también en aparcamiento cerrado, porque aguanta mejor el fuego. Los tres puntos de fusión que se preguntan, doscientos veinte, cuatrocientos cincuenta y ochocientos cincuenta grados, y el estaño-plomo desterrado por tóxico. La regla del traductor: entre metales distintos, siempre un accesorio de aleación de cobre por medio, para que no se corroan formando pila. El plomo, solo para parchear lo viejo. Y las uniones mecánicas, desmontables y no desmontables, todas hasta cinco bar, con el press-fitting y su junta tórica como estrella de la obra rápida.</a:t>
-            </a:r>
-          </a:p>
-          <a:p>
-            <a:r>
-              <a:t>N1: ¿Y cómo se traduce esto en el examen y en la obra?</a:t>
-            </a:r>
-          </a:p>
-          <a:p>
-            <a:r>
-              <a:t>N2: En el examen, este es el capítulo que más se pregunta: te darán una presión, dos metales o una técnica y tendrás que decir qué se admite y qué está prohibido; con lo de hoy, esas preguntas son tuyas. Y en la obra, todo esto lo juzga la prueba de estanquidad antes de dar gas: una unión que gotea es lo que convierte un boletín, el certificado que firma la empresa instaladora, en un problema con tu firma detrás. Con este vídeo cierras la Parte tres entera de la sesenta mil seiscientos setenta: sabes con qué se construye, con qué elementos y con qué uniones. Hoy no eres un poco más gasista: has terminado un tema completo y puedes explicárselo a otro de principio a fin. Enhorabuena, y nos vemos en el siguiente tema.</a:t>
+              <a:t>N1: ¿El plomo todavía se usa en gas?</a:t>
+            </a:r>
+          </a:p>
+          <a:p>
+            <a:r>
+              <a:t>N2: Nuevo, nunca; el plomo solo aparece cuando amplías o modificas una instalación antigua que ya lo tiene puesto. Por eso sus uniones llevan tres candados que van siempre juntos: solo en instalaciones ya en servicio, solo hasta cero coma cero cinco bar de presión, y solo en uso doméstico. Fuera de ahí, prohibido. Dentro de esos límites, con el cobre sí se puede soldar el plomo, con aportación de estaño-plomo de fusión por encima de doscientos grados. Pero con el acero o el inoxidable, jamás directo: hay que intercalar siempre un manguito de aleación de cobre, otra vez el traductor. Resumen para el examen: plomo igual a instalación vieja, presión baja y uso de casa; y con acero o inox, manguito de por medio.</a:t>
+            </a:r>
+          </a:p>
+        </p:txBody>
+      </p:sp>
+      <p:sp>
+        <p:nvSpPr>
+          <p:cNvPr id="4" name="Slide Number Placeholder 3"/>
+          <p:cNvSpPr>
+            <a:spLocks noGrp="1"/>
+          </p:cNvSpPr>
+          <p:nvPr>
+            <p:ph type="sldNum" idx="5" sz="quarter"/>
+          </p:nvPr>
+        </p:nvSpPr>
+        <p:spPr/>
+      </p:sp>
+    </p:spTree>
+  </p:cSld>
+  <p:clrMapOvr>
+    <a:masterClrMapping/>
+  </p:clrMapOvr>
+</p:notes>
+</file>
+
+<file path=ppt/notesSlides/notesSlide16.xml><?xml version="1.0" encoding="utf-8"?>
+<p:notes xmlns:a="http://schemas.openxmlformats.org/drawingml/2006/main" xmlns:p="http://schemas.openxmlformats.org/presentationml/2006/main" xmlns:r="http://schemas.openxmlformats.org/officeDocument/2006/relationships">
+  <p:cSld>
+    <p:spTree>
+      <p:nvGrpSpPr>
+        <p:cNvPr id="1" name=""/>
+        <p:cNvGrpSpPr/>
+        <p:nvPr/>
+      </p:nvGrpSpPr>
+      <p:grpSpPr>
+        <a:xfrm>
+          <a:off x="0" y="0"/>
+          <a:ext cx="0" cy="0"/>
+          <a:chOff x="0" y="0"/>
+          <a:chExt cx="0" cy="0"/>
+        </a:xfrm>
+      </p:grpSpPr>
+      <p:sp>
+        <p:nvSpPr>
+          <p:cNvPr id="2" name="Slide Image Placeholder 1"/>
+          <p:cNvSpPr>
+            <a:spLocks noGrp="1"/>
+          </p:cNvSpPr>
+          <p:nvPr>
+            <p:ph type="sldImg" idx="2"/>
+          </p:nvPr>
+        </p:nvSpPr>
+        <p:spPr/>
+      </p:sp>
+      <p:sp>
+        <p:nvSpPr>
+          <p:cNvPr id="3" name="Notes Placeholder 2"/>
+          <p:cNvSpPr>
+            <a:spLocks noGrp="1"/>
+          </p:cNvSpPr>
+          <p:nvPr>
+            <p:ph type="body" idx="3" sz="quarter"/>
+          </p:nvPr>
+        </p:nvSpPr>
+        <p:spPr/>
+        <p:txBody>
+          <a:bodyPr/>
+          <a:lstStyle/>
+          <a:p>
+            <a:r>
+              <a:t>N1: ¿Qué gano con una unión que se puede desmontar?</a:t>
+            </a:r>
+          </a:p>
+          <a:p>
+            <a:r>
+              <a:t>N2: Ganas poder abrirla el día que haya que cambiar la pieza sin cortar el tubo. Por eso las uniones desmontables se ponen justo donde algún día tocará desmontar: un contador, un regulador, una válvula. Son tres. La unión por junta plana, para elementos pequeños: dos caras que aprietan una junta, normalmente de goma, que hace la estanquidad. La unión por bridas, para diámetros mayores: dos platos atornillados con una junta en medio. Y la unión metal-metal, del tipo esfera-cono o de anillos cortantes, que se reserva solo a las conexiones de los conjuntos de regulación. Un dato que las abarca a todas: las uniones mecánicas se pueden usar hasta cinco bar de presión, no más. Desmontable quiere decir eso, que se afloja y se vuelve a montar.</a:t>
+            </a:r>
+          </a:p>
+        </p:txBody>
+      </p:sp>
+      <p:sp>
+        <p:nvSpPr>
+          <p:cNvPr id="4" name="Slide Number Placeholder 3"/>
+          <p:cNvSpPr>
+            <a:spLocks noGrp="1"/>
+          </p:cNvSpPr>
+          <p:nvPr>
+            <p:ph type="sldNum" idx="5" sz="quarter"/>
+          </p:nvPr>
+        </p:nvSpPr>
+        <p:spPr/>
+      </p:sp>
+    </p:spTree>
+  </p:cSld>
+  <p:clrMapOvr>
+    <a:masterClrMapping/>
+  </p:clrMapOvr>
+</p:notes>
+</file>
+
+<file path=ppt/notesSlides/notesSlide17.xml><?xml version="1.0" encoding="utf-8"?>
+<p:notes xmlns:a="http://schemas.openxmlformats.org/drawingml/2006/main" xmlns:p="http://schemas.openxmlformats.org/presentationml/2006/main" xmlns:r="http://schemas.openxmlformats.org/officeDocument/2006/relationships">
+  <p:cSld>
+    <p:spTree>
+      <p:nvGrpSpPr>
+        <p:cNvPr id="1" name=""/>
+        <p:cNvGrpSpPr/>
+        <p:nvPr/>
+      </p:nvGrpSpPr>
+      <p:grpSpPr>
+        <a:xfrm>
+          <a:off x="0" y="0"/>
+          <a:ext cx="0" cy="0"/>
+          <a:chOff x="0" y="0"/>
+          <a:chExt cx="0" cy="0"/>
+        </a:xfrm>
+      </p:grpSpPr>
+      <p:sp>
+        <p:nvSpPr>
+          <p:cNvPr id="2" name="Slide Image Placeholder 1"/>
+          <p:cNvSpPr>
+            <a:spLocks noGrp="1"/>
+          </p:cNvSpPr>
+          <p:nvPr>
+            <p:ph type="sldImg" idx="2"/>
+          </p:nvPr>
+        </p:nvSpPr>
+        <p:spPr/>
+      </p:sp>
+      <p:sp>
+        <p:nvSpPr>
+          <p:cNvPr id="3" name="Notes Placeholder 2"/>
+          <p:cNvSpPr>
+            <a:spLocks noGrp="1"/>
+          </p:cNvSpPr>
+          <p:nvPr>
+            <p:ph type="body" idx="3" sz="quarter"/>
+          </p:nvPr>
+        </p:nvSpPr>
+        <p:spPr/>
+        <p:txBody>
+          <a:bodyPr/>
+          <a:lstStyle/>
+          <a:p>
+            <a:r>
+              <a:t>N1: ¿Y las que no se desmontan? ¿el press-fitting qué es?</a:t>
+            </a:r>
+          </a:p>
+          <a:p>
+            <a:r>
+              <a:t>N2: Las no desmontables quedan fijas: una vez hechas, para deshacerlas hay que cortar. La más clásica es la roscada, tubo de acero con rosca, que va por la norma diecinueve mil quinientos con sus accesorios. Pero la reina de la obra rápida hoy es el press-fitting: metes el tubo en el accesorio y lo aprietas con una máquina prensadora que deforma el metal y sella; puede ser radial o axial según cómo apriete. Dentro del accesorio hay una junta tórica, una goma en forma de anillo, que es la que hace la estanquidad, y va por la norma quinientos cuarenta y nueve. También son no desmontables las uniones de multicapa y las del corrugado flexible. Un aviso de obra: si te olvidas de prensar un accesorio o maltratas la junta tórica, tienes la fuga esperando a salir en la prueba, o peor, después. Y de nuevo, todas hasta cinco bar.</a:t>
+            </a:r>
+          </a:p>
+        </p:txBody>
+      </p:sp>
+      <p:sp>
+        <p:nvSpPr>
+          <p:cNvPr id="4" name="Slide Number Placeholder 3"/>
+          <p:cNvSpPr>
+            <a:spLocks noGrp="1"/>
+          </p:cNvSpPr>
+          <p:nvPr>
+            <p:ph type="sldNum" idx="5" sz="quarter"/>
+          </p:nvPr>
+        </p:nvSpPr>
+        <p:spPr/>
+      </p:sp>
+    </p:spTree>
+  </p:cSld>
+  <p:clrMapOvr>
+    <a:masterClrMapping/>
+  </p:clrMapOvr>
+</p:notes>
+</file>
+
+<file path=ppt/notesSlides/notesSlide18.xml><?xml version="1.0" encoding="utf-8"?>
+<p:notes xmlns:a="http://schemas.openxmlformats.org/drawingml/2006/main" xmlns:p="http://schemas.openxmlformats.org/presentationml/2006/main" xmlns:r="http://schemas.openxmlformats.org/officeDocument/2006/relationships">
+  <p:cSld>
+    <p:spTree>
+      <p:nvGrpSpPr>
+        <p:cNvPr id="1" name=""/>
+        <p:cNvGrpSpPr/>
+        <p:nvPr/>
+      </p:nvGrpSpPr>
+      <p:grpSpPr>
+        <a:xfrm>
+          <a:off x="0" y="0"/>
+          <a:ext cx="0" cy="0"/>
+          <a:chOff x="0" y="0"/>
+          <a:chExt cx="0" cy="0"/>
+        </a:xfrm>
+      </p:grpSpPr>
+      <p:sp>
+        <p:nvSpPr>
+          <p:cNvPr id="2" name="Slide Image Placeholder 1"/>
+          <p:cNvSpPr>
+            <a:spLocks noGrp="1"/>
+          </p:cNvSpPr>
+          <p:nvPr>
+            <p:ph type="sldImg" idx="2"/>
+          </p:nvPr>
+        </p:nvSpPr>
+        <p:spPr/>
+      </p:sp>
+      <p:sp>
+        <p:nvSpPr>
+          <p:cNvPr id="3" name="Notes Placeholder 2"/>
+          <p:cNvSpPr>
+            <a:spLocks noGrp="1"/>
+          </p:cNvSpPr>
+          <p:nvPr>
+            <p:ph type="body" idx="3" sz="quarter"/>
+          </p:nvPr>
+        </p:nvSpPr>
+        <p:spPr/>
+        <p:txBody>
+          <a:bodyPr/>
+          <a:lstStyle/>
+          <a:p>
+            <a:r>
+              <a:t>N1: Una tapa que vale para todas las mecánicas. ¿Hasta qué presión se pueden usar?</a:t>
+            </a:r>
+          </a:p>
+          <a:p>
+            <a:r>
+              <a:t>N2: Coincide con el techo de aplicación de toda esta norma; piensa en el valor más alto de la escalera.</a:t>
+            </a:r>
+          </a:p>
+        </p:txBody>
+      </p:sp>
+      <p:sp>
+        <p:nvSpPr>
+          <p:cNvPr id="4" name="Slide Number Placeholder 3"/>
+          <p:cNvSpPr>
+            <a:spLocks noGrp="1"/>
+          </p:cNvSpPr>
+          <p:nvPr>
+            <p:ph type="sldNum" idx="5" sz="quarter"/>
+          </p:nvPr>
+        </p:nvSpPr>
+        <p:spPr/>
+      </p:sp>
+    </p:spTree>
+  </p:cSld>
+  <p:clrMapOvr>
+    <a:masterClrMapping/>
+  </p:clrMapOvr>
+</p:notes>
+</file>
+
+<file path=ppt/notesSlides/notesSlide19.xml><?xml version="1.0" encoding="utf-8"?>
+<p:notes xmlns:a="http://schemas.openxmlformats.org/drawingml/2006/main" xmlns:p="http://schemas.openxmlformats.org/presentationml/2006/main" xmlns:r="http://schemas.openxmlformats.org/officeDocument/2006/relationships">
+  <p:cSld>
+    <p:spTree>
+      <p:nvGrpSpPr>
+        <p:cNvPr id="1" name=""/>
+        <p:cNvGrpSpPr/>
+        <p:nvPr/>
+      </p:nvGrpSpPr>
+      <p:grpSpPr>
+        <a:xfrm>
+          <a:off x="0" y="0"/>
+          <a:ext cx="0" cy="0"/>
+          <a:chOff x="0" y="0"/>
+          <a:chExt cx="0" cy="0"/>
+        </a:xfrm>
+      </p:grpSpPr>
+      <p:sp>
+        <p:nvSpPr>
+          <p:cNvPr id="2" name="Slide Image Placeholder 1"/>
+          <p:cNvSpPr>
+            <a:spLocks noGrp="1"/>
+          </p:cNvSpPr>
+          <p:nvPr>
+            <p:ph type="sldImg" idx="2"/>
+          </p:nvPr>
+        </p:nvSpPr>
+        <p:spPr/>
+      </p:sp>
+      <p:sp>
+        <p:nvSpPr>
+          <p:cNvPr id="3" name="Notes Placeholder 2"/>
+          <p:cNvSpPr>
+            <a:spLocks noGrp="1"/>
+          </p:cNvSpPr>
+          <p:nvPr>
+            <p:ph type="body" idx="3" sz="quarter"/>
+          </p:nvPr>
+        </p:nvSpPr>
+        <p:spPr/>
+        <p:txBody>
+          <a:bodyPr/>
+          <a:lstStyle/>
+          <a:p>
+            <a:r>
+              <a:t>N1: ¿Por qué ese tope y no otro?</a:t>
+            </a:r>
+          </a:p>
+          <a:p>
+            <a:r>
+              <a:t>N2: Porque es el límite de aplicación de toda la norma seis-cero-seis-siete-cero, y las uniones mecánicas no van más allá. Da igual que sean desmontables o no desmontables: todas, hasta cinco bar.</a:t>
             </a:r>
           </a:p>
         </p:txBody>
@@ -1081,6 +1377,166 @@
 </p:notes>
 </file>
 
+<file path=ppt/notesSlides/notesSlide20.xml><?xml version="1.0" encoding="utf-8"?>
+<p:notes xmlns:a="http://schemas.openxmlformats.org/drawingml/2006/main" xmlns:p="http://schemas.openxmlformats.org/presentationml/2006/main" xmlns:r="http://schemas.openxmlformats.org/officeDocument/2006/relationships">
+  <p:cSld>
+    <p:spTree>
+      <p:nvGrpSpPr>
+        <p:cNvPr id="1" name=""/>
+        <p:cNvGrpSpPr/>
+        <p:nvPr/>
+      </p:nvGrpSpPr>
+      <p:grpSpPr>
+        <a:xfrm>
+          <a:off x="0" y="0"/>
+          <a:ext cx="0" cy="0"/>
+          <a:chOff x="0" y="0"/>
+          <a:chExt cx="0" cy="0"/>
+        </a:xfrm>
+      </p:grpSpPr>
+      <p:sp>
+        <p:nvSpPr>
+          <p:cNvPr id="2" name="Slide Image Placeholder 1"/>
+          <p:cNvSpPr>
+            <a:spLocks noGrp="1"/>
+          </p:cNvSpPr>
+          <p:nvPr>
+            <p:ph type="sldImg" idx="2"/>
+          </p:nvPr>
+        </p:nvSpPr>
+        <p:spPr/>
+      </p:sp>
+      <p:sp>
+        <p:nvSpPr>
+          <p:cNvPr id="3" name="Notes Placeholder 2"/>
+          <p:cNvSpPr>
+            <a:spLocks noGrp="1"/>
+          </p:cNvSpPr>
+          <p:nvPr>
+            <p:ph type="body" idx="3" sz="quarter"/>
+          </p:nvPr>
+        </p:nvSpPr>
+        <p:spPr/>
+        <p:txBody>
+          <a:bodyPr/>
+          <a:lstStyle/>
+          <a:p>
+            <a:r>
+              <a:t>N1: Los enlaces que pasan de plástico a metal, ¿tienen truco?</a:t>
+            </a:r>
+          </a:p>
+          <a:p>
+            <a:r>
+              <a:t>N2: Tienen un detalle que les gusta cruzar en el examen, y es fácil si lo separas bien. Los enlaces de transición pe-metal, los que casan el plástico con el metal, se dividen en dos según se puedan abrir o no. Si el enlace es desmontable, va por las normas sesenta mil cuatrocientos cinco, parte uno y parte tres. Si es fijo, no desmontable, va por la sesenta mil cuatrocientos cinco, parte uno y parte dos. La parte uno es común; lo que cambia es la otra: la tres para desmontable, la dos para fijo. No las confundas, es justo lo que preguntan. Y para cerrar el capítulo, la norma deja una puerta abierta: se admiten también otras uniones que acepte la norma mil setecientos setenta y cinco. Con esto ya tienes todas las formas de unir tubos de la Parte tres.</a:t>
+            </a:r>
+          </a:p>
+        </p:txBody>
+      </p:sp>
+      <p:sp>
+        <p:nvSpPr>
+          <p:cNvPr id="4" name="Slide Number Placeholder 3"/>
+          <p:cNvSpPr>
+            <a:spLocks noGrp="1"/>
+          </p:cNvSpPr>
+          <p:nvPr>
+            <p:ph type="sldNum" idx="5" sz="quarter"/>
+          </p:nvPr>
+        </p:nvSpPr>
+        <p:spPr/>
+      </p:sp>
+    </p:spTree>
+  </p:cSld>
+  <p:clrMapOvr>
+    <a:masterClrMapping/>
+  </p:clrMapOvr>
+</p:notes>
+</file>
+
+<file path=ppt/notesSlides/notesSlide21.xml><?xml version="1.0" encoding="utf-8"?>
+<p:notes xmlns:a="http://schemas.openxmlformats.org/drawingml/2006/main" xmlns:p="http://schemas.openxmlformats.org/presentationml/2006/main" xmlns:r="http://schemas.openxmlformats.org/officeDocument/2006/relationships">
+  <p:cSld>
+    <p:spTree>
+      <p:nvGrpSpPr>
+        <p:cNvPr id="1" name=""/>
+        <p:cNvGrpSpPr/>
+        <p:nvPr/>
+      </p:nvGrpSpPr>
+      <p:grpSpPr>
+        <a:xfrm>
+          <a:off x="0" y="0"/>
+          <a:ext cx="0" cy="0"/>
+          <a:chOff x="0" y="0"/>
+          <a:chExt cx="0" cy="0"/>
+        </a:xfrm>
+      </p:grpSpPr>
+      <p:sp>
+        <p:nvSpPr>
+          <p:cNvPr id="2" name="Slide Image Placeholder 1"/>
+          <p:cNvSpPr>
+            <a:spLocks noGrp="1"/>
+          </p:cNvSpPr>
+          <p:nvPr>
+            <p:ph type="sldImg" idx="2"/>
+          </p:nvPr>
+        </p:nvSpPr>
+        <p:spPr/>
+      </p:sp>
+      <p:sp>
+        <p:nvSpPr>
+          <p:cNvPr id="3" name="Notes Placeholder 2"/>
+          <p:cNvSpPr>
+            <a:spLocks noGrp="1"/>
+          </p:cNvSpPr>
+          <p:nvPr>
+            <p:ph type="body" idx="3" sz="quarter"/>
+          </p:nvPr>
+        </p:nvSpPr>
+        <p:spPr/>
+        <p:txBody>
+          <a:bodyPr/>
+          <a:lstStyle/>
+          <a:p>
+            <a:r>
+              <a:t>N1: Último vídeo y fin del tema. ¿Cómo lo cierro todo en la cabeza?</a:t>
+            </a:r>
+          </a:p>
+          <a:p>
+            <a:r>
+              <a:t>N2: Reconstruyamos el hilo, porque hoy has puesto la última pieza del tema. Todo colgaba de una sola regla: cualquier unión debe asegurar la estanquidad, no escaparse ni una burbuja, pase lo que pase. A partir de ahí vimos las tres familias. La soldadura, con su frontera de oro en cero coma cero cinco bar: por encima, siempre fuerte, y fuerte también en aparcamiento cerrado, porque aguanta mejor el fuego. Los tres puntos de fusión que se preguntan, doscientos veinte, cuatrocientos cincuenta y ochocientos cincuenta grados, y el estaño-plomo desterrado por tóxico. La regla del traductor: entre metales distintos, siempre un accesorio de aleación de cobre por medio, para que no se corroan formando pila. El plomo, solo para parchear lo viejo. Y las uniones mecánicas, desmontables y no desmontables, todas hasta cinco bar, con el press-fitting y su junta tórica como estrella de la obra rápida.</a:t>
+            </a:r>
+          </a:p>
+          <a:p>
+            <a:r>
+              <a:t>N1: ¿Y cómo se traduce esto en el examen y en la obra?</a:t>
+            </a:r>
+          </a:p>
+          <a:p>
+            <a:r>
+              <a:t>N2: En el examen, este es el capítulo que más se pregunta: te darán una presión, dos metales o una técnica y tendrás que decir qué se admite y qué está prohibido; con lo de hoy, esas preguntas son tuyas. Y en la obra, todo esto lo juzga la prueba de estanquidad antes de dar gas: una unión que gotea es lo que convierte un boletín, el certificado que firma la empresa instaladora, en un problema con tu firma detrás. Con este vídeo cierras la Parte tres entera de la sesenta mil seiscientos setenta: sabes con qué se construye, con qué elementos y con qué uniones. Hoy no eres un poco más gasista: has terminado un tema completo y puedes explicárselo a otro de principio a fin. Enhorabuena, y nos vemos en el siguiente tema.</a:t>
+            </a:r>
+          </a:p>
+        </p:txBody>
+      </p:sp>
+      <p:sp>
+        <p:nvSpPr>
+          <p:cNvPr id="4" name="Slide Number Placeholder 3"/>
+          <p:cNvSpPr>
+            <a:spLocks noGrp="1"/>
+          </p:cNvSpPr>
+          <p:nvPr>
+            <p:ph type="sldNum" idx="5" sz="quarter"/>
+          </p:nvPr>
+        </p:nvSpPr>
+        <p:spPr/>
+      </p:sp>
+    </p:spTree>
+  </p:cSld>
+  <p:clrMapOvr>
+    <a:masterClrMapping/>
+  </p:clrMapOvr>
+</p:notes>
+</file>
+
 <file path=ppt/notesSlides/notesSlide3.xml><?xml version="1.0" encoding="utf-8"?>
 <p:notes xmlns:a="http://schemas.openxmlformats.org/drawingml/2006/main" xmlns:p="http://schemas.openxmlformats.org/presentationml/2006/main" xmlns:r="http://schemas.openxmlformats.org/officeDocument/2006/relationships">
   <p:cSld>
@@ -1417,12 +1873,12 @@
           <a:lstStyle/>
           <a:p>
             <a:r>
-              <a:t>N1: El plástico no se suelda con soplete, ¿no? ¿cómo se une?</a:t>
-            </a:r>
-          </a:p>
-          <a:p>
-            <a:r>
-              <a:t>N2: Bien visto, el polietileno no se suelda con llama; se funde consigo mismo. La forma preferida es la electrofusión: el accesorio lleva por dentro una resistencia eléctrica que, al pasarle corriente, calienta y funde el plástico del tubo y el de la pieza hasta que se hacen uno solo. Es limpio y muy fiable. Para diámetros grandes, a partir de la DN ciento diez, se admite también la soldadura a tope, que enfrenta los dos extremos calientes y los presiona. En los dos casos, el accesorio tiene que ser compatible con el tubo. La idea: en el plástico no hay metal de aportación como en el cobre; lo que se une es el propio material fundido consigo mismo.</a:t>
+              <a:t>N1: La frontera de oro del vídeo. ¿A partir de qué presión te obligan a soldadura fuerte sí o sí?</a:t>
+            </a:r>
+          </a:p>
+          <a:p>
+            <a:r>
+              <a:t>N2: Es el escalón más bajo de la escalera de presiones; piensa en cero coma cero cinco bar.</a:t>
             </a:r>
           </a:p>
         </p:txBody>
@@ -1492,12 +1948,12 @@
           <a:lstStyle/>
           <a:p>
             <a:r>
-              <a:t>N1: ¿Y el acero se suelda de cualquier forma?</a:t>
-            </a:r>
-          </a:p>
-          <a:p>
-            <a:r>
-              <a:t>N2: No, tiene sus dos técnicas según el diámetro. La general es la soldadura a tope por arco eléctrico: enfrentas los dos tubos y los unes con el arco, esa soldadura de electrodo que da una junta muy resistente. Para diámetros pequeños, hasta la DN cincuenta, se admite también la soldadura oxiacetilénica, la del soplete de oxígeno y acetileno. Por encima de ese diámetro, arco. Recuerda del primer vídeo que al curvar acero tampoco se usa mandril interno, para no estrangularlo, y que sus accesorios pueden ir soldados o roscados, cada uno con su norma. La idea sencilla: acero, a tope por arco; y solo si es fino, hasta cincuenta, puedes tirar de soplete.</a:t>
+              <a:t>N1: ¿Por qué justo en ese punto?</a:t>
+            </a:r>
+          </a:p>
+          <a:p>
+            <a:r>
+              <a:t>N2: Porque la soldadura fuerte, hecha a mucha más temperatura, aguanta el calor de un incendio muchísimo mejor que la blanda. Por encima de cero coma cero cinco bar, siempre fuerte. Y ojo al matiz: en un aparcamiento cerrado es fuerte aunque la presión sea baja, porque es zona de riesgo.</a:t>
             </a:r>
           </a:p>
         </p:txBody>
@@ -1567,12 +2023,12 @@
           <a:lstStyle/>
           <a:p>
             <a:r>
-              <a:t>N1: ¿Qué es la soldadura capilar y qué está prohibido en ella?</a:t>
-            </a:r>
-          </a:p>
-          <a:p>
-            <a:r>
-              <a:t>N2: La soldadura por capilaridad es la del cobre de toda la vida: metes el tubo dentro del accesorio, calientas, y el metal de aportación fundido se cuela por sí solo en la holgura, por capilaridad, como cuando una servilleta absorbe el agua. Vale para cobre y para acero inoxidable. Dos puntos de fusión que caen en examen: cuatrocientos cincuenta grados para la capilar fuerte y doscientos veinte para la blanda. Y una prohibición clara: no se usa aleación de estaño-plomo como aportación, porque el plomo es tóxico y deja la unión fuera de norma. Un detalle más, muy preguntado: no se debe abocardar el tubo, es decir, ensanchar su boca, para soldar por capilaridad; solo se permite como excepción en las baterías de contadores o colectores de llaves, y siempre que el tubo no pierda espesor al hacerlo.</a:t>
+              <a:t>N1: El plástico no se suelda con soplete, ¿no? ¿cómo se une?</a:t>
+            </a:r>
+          </a:p>
+          <a:p>
+            <a:r>
+              <a:t>N2: Bien visto, el polietileno no se suelda con llama; se funde consigo mismo. La forma preferida es la electrofusión: el accesorio lleva por dentro una resistencia eléctrica que, al pasarle corriente, calienta y funde el plástico del tubo y el de la pieza hasta que se hacen uno solo. Es limpio y muy fiable. Para diámetros grandes, a partir de la DN ciento diez, se admite también la soldadura a tope, que enfrenta los dos extremos calientes y los presiona. En los dos casos, el accesorio tiene que ser compatible con el tubo. La idea: en el plástico no hay metal de aportación como en el cobre; lo que se une es el propio material fundido consigo mismo.</a:t>
             </a:r>
           </a:p>
         </p:txBody>
@@ -4658,7 +5114,7 @@
       </p:sp>
       <p:sp>
         <p:nvSpPr>
-          <p:cNvPr id="4" name="Rounded Rectangle 3"/>
+          <p:cNvPr id="4" name="Rectangle 3"/>
           <p:cNvSpPr/>
           <p:nvPr/>
         </p:nvSpPr>
@@ -4667,7 +5123,7 @@
             <a:off x="868680" y="2057400"/>
             <a:ext cx="1463040" cy="82296"/>
           </a:xfrm>
-          <a:prstGeom prst="roundRect">
+          <a:prstGeom prst="rect">
             <a:avLst/>
           </a:prstGeom>
           <a:solidFill>
@@ -4784,6 +5240,18 @@
   <p:clrMapOvr>
     <a:masterClrMapping/>
   </p:clrMapOvr>
+  <mc:AlternateContent xmlns:mc="http://schemas.openxmlformats.org/markup-compatibility/2006">
+    <mc:Choice xmlns:p14="http://schemas.microsoft.com/office/powerpoint/2010/main" Requires="p14">
+      <p:transition spd="med" p14:dur="700">
+        <p14:cube dir="l"/>
+      </p:transition>
+    </mc:Choice>
+    <mc:Fallback>
+      <p:transition spd="med">
+        <p:push dir="l"/>
+      </p:transition>
+    </mc:Fallback>
+  </mc:AlternateContent>
 </p:sld>
 </file>
 
@@ -4871,7 +5339,7 @@
                 </a:solidFill>
                 <a:latin typeface="Montserrat"/>
               </a:rPr>
-              <a:t>010 / 015</a:t>
+              <a:t>010 / 021</a:t>
             </a:r>
           </a:p>
         </p:txBody>
@@ -4939,7 +5407,7 @@
                 </a:solidFill>
                 <a:latin typeface="Montserrat"/>
               </a:rPr>
-              <a:t>UNIONES · METALES DISTINTOS</a:t>
+              <a:t>SOLDADURA · ACERO</a:t>
             </a:r>
           </a:p>
         </p:txBody>
@@ -4973,14 +5441,14 @@
                 </a:solidFill>
                 <a:latin typeface="Montserrat"/>
               </a:rPr>
-              <a:t>La regla del traductor</a:t>
-            </a:r>
-          </a:p>
-        </p:txBody>
-      </p:sp>
-      <p:sp>
-        <p:nvSpPr>
-          <p:cNvPr id="7" name="Rounded Rectangle 6"/>
+              <a:t>Acero con acero</a:t>
+            </a:r>
+          </a:p>
+        </p:txBody>
+      </p:sp>
+      <p:sp>
+        <p:nvSpPr>
+          <p:cNvPr id="7" name="Rectangle 6"/>
           <p:cNvSpPr/>
           <p:nvPr/>
         </p:nvSpPr>
@@ -4989,7 +5457,7 @@
             <a:off x="868680" y="1627632"/>
             <a:ext cx="2011680" cy="73152"/>
           </a:xfrm>
-          <a:prstGeom prst="roundRect">
+          <a:prstGeom prst="rect">
             <a:avLst/>
           </a:prstGeom>
           <a:solidFill>
@@ -5031,7 +5499,7 @@
         <p:spPr>
           <a:xfrm>
             <a:off x="822960" y="1965960"/>
-            <a:ext cx="4983480" cy="4206240"/>
+            <a:ext cx="5029200" cy="4206240"/>
           </a:xfrm>
           <a:prstGeom prst="rect">
             <a:avLst/>
@@ -5065,7 +5533,7 @@
                 </a:solidFill>
                 <a:latin typeface="Montserrat"/>
               </a:rPr>
-              <a:t>Cobre y acero: nunca unión directa</a:t>
+              <a:t>Soldadura a tope por arco eléctrico</a:t>
             </a:r>
           </a:p>
           <a:p>
@@ -5090,7 +5558,7 @@
                 </a:solidFill>
                 <a:latin typeface="Montserrat"/>
               </a:rPr>
-              <a:t>Cobre e inox: nunca unión directa</a:t>
+              <a:t>Oxiacetilénica solo si DN ≤ 50</a:t>
             </a:r>
           </a:p>
           <a:p>
@@ -5115,7 +5583,7 @@
                 </a:solidFill>
                 <a:latin typeface="Montserrat"/>
               </a:rPr>
-              <a:t>Se intercala un accesorio de aleación de cobre</a:t>
+              <a:t>Sin mandril interno al curvar</a:t>
             </a:r>
           </a:p>
           <a:p>
@@ -5140,21 +5608,21 @@
                 </a:solidFill>
                 <a:latin typeface="Montserrat"/>
               </a:rPr>
-              <a:t>Cobre-acero: a tope por bordón, 850 °C</a:t>
-            </a:r>
-          </a:p>
-        </p:txBody>
-      </p:sp>
-      <p:sp>
-        <p:nvSpPr>
-          <p:cNvPr id="9" name="imgph" descr="IMGQ:brass transition fitting copper steel pipe"/>
+              <a:t>Accesorios soldados o roscados</a:t>
+            </a:r>
+          </a:p>
+        </p:txBody>
+      </p:sp>
+      <p:sp>
+        <p:nvSpPr>
+          <p:cNvPr id="9" name="imgph" descr="IMGQ:arc welding steel pipe joint sparks"/>
           <p:cNvSpPr/>
           <p:nvPr/>
         </p:nvSpPr>
         <p:spPr>
           <a:xfrm>
-            <a:off x="5806440" y="1051560"/>
-            <a:ext cx="5298947" cy="4629150"/>
+            <a:off x="6080760" y="1965960"/>
+            <a:ext cx="5303520" cy="4572000"/>
           </a:xfrm>
           <a:prstGeom prst="roundRect">
             <a:avLst/>
@@ -5199,8 +5667,8 @@
         </p:nvSpPr>
         <p:spPr>
           <a:xfrm>
-            <a:off x="6080760" y="2726055"/>
-            <a:ext cx="4750307" cy="1280160"/>
+            <a:off x="6355080" y="3611880"/>
+            <a:ext cx="4754880" cy="1280160"/>
           </a:xfrm>
           <a:prstGeom prst="rect">
             <a:avLst/>
@@ -5221,7 +5689,7 @@
                 </a:solidFill>
                 <a:latin typeface="Montserrat"/>
               </a:rPr>
-              <a:t>IMAGEN REALISTA</a:t>
+              <a:t>IMAGEN</a:t>
             </a:r>
           </a:p>
           <a:p>
@@ -5233,7 +5701,7 @@
                 </a:solidFill>
                 <a:latin typeface="Montserrat"/>
               </a:rPr>
-              <a:t>brass transition fitting copper steel pipe</a:t>
+              <a:t>arc welding steel pipe joint sparks</a:t>
             </a:r>
           </a:p>
         </p:txBody>
@@ -5243,6 +5711,18 @@
   <p:clrMapOvr>
     <a:masterClrMapping/>
   </p:clrMapOvr>
+  <mc:AlternateContent xmlns:mc="http://schemas.openxmlformats.org/markup-compatibility/2006">
+    <mc:Choice xmlns:p14="http://schemas.microsoft.com/office/powerpoint/2010/main" Requires="p14">
+      <p:transition spd="med" p14:dur="700">
+        <p14:cube dir="r"/>
+      </p:transition>
+    </mc:Choice>
+    <mc:Fallback>
+      <p:transition spd="med">
+        <p:push dir="r"/>
+      </p:transition>
+    </mc:Fallback>
+  </mc:AlternateContent>
 </p:sld>
 </file>
 
@@ -5330,7 +5810,7 @@
                 </a:solidFill>
                 <a:latin typeface="Montserrat"/>
               </a:rPr>
-              <a:t>011 / 015</a:t>
+              <a:t>011 / 021</a:t>
             </a:r>
           </a:p>
         </p:txBody>
@@ -5398,7 +5878,7 @@
                 </a:solidFill>
                 <a:latin typeface="Montserrat"/>
               </a:rPr>
-              <a:t>UNIONES · PLOMO</a:t>
+              <a:t>SOLDADURA · COBRE E INOX</a:t>
             </a:r>
           </a:p>
         </p:txBody>
@@ -5432,14 +5912,14 @@
                 </a:solidFill>
                 <a:latin typeface="Montserrat"/>
               </a:rPr>
-              <a:t>El plomo: solo para lo viejo</a:t>
-            </a:r>
-          </a:p>
-        </p:txBody>
-      </p:sp>
-      <p:sp>
-        <p:nvSpPr>
-          <p:cNvPr id="7" name="Rounded Rectangle 6"/>
+              <a:t>Capilaridad: cobre e inoxidable</a:t>
+            </a:r>
+          </a:p>
+        </p:txBody>
+      </p:sp>
+      <p:sp>
+        <p:nvSpPr>
+          <p:cNvPr id="7" name="Rectangle 6"/>
           <p:cNvSpPr/>
           <p:nvPr/>
         </p:nvSpPr>
@@ -5448,7 +5928,7 @@
             <a:off x="868680" y="1627632"/>
             <a:ext cx="2011680" cy="73152"/>
           </a:xfrm>
-          <a:prstGeom prst="roundRect">
+          <a:prstGeom prst="rect">
             <a:avLst/>
           </a:prstGeom>
           <a:solidFill>
@@ -5489,8 +5969,8 @@
         </p:nvSpPr>
         <p:spPr>
           <a:xfrm>
-            <a:off x="822960" y="1965960"/>
-            <a:ext cx="4983480" cy="4206240"/>
+            <a:off x="6355080" y="1965960"/>
+            <a:ext cx="5029200" cy="4206240"/>
           </a:xfrm>
           <a:prstGeom prst="rect">
             <a:avLst/>
@@ -5524,7 +6004,7 @@
                 </a:solidFill>
                 <a:latin typeface="Montserrat"/>
               </a:rPr>
-              <a:t>Nada de plomo en obra nueva</a:t>
+              <a:t>Unión por soldadura capilar</a:t>
             </a:r>
           </a:p>
           <a:p>
@@ -5549,7 +6029,7 @@
                 </a:solidFill>
                 <a:latin typeface="Montserrat"/>
               </a:rPr>
-              <a:t>Solo ampliar o modificar lo ya en servicio</a:t>
+              <a:t>Fuerte 450 °C · blanda 220 °C</a:t>
             </a:r>
           </a:p>
           <a:p>
@@ -5574,7 +6054,7 @@
                 </a:solidFill>
                 <a:latin typeface="Montserrat"/>
               </a:rPr>
-              <a:t>Solo hasta 0,05 bar y uso doméstico</a:t>
+              <a:t>Prohibido el estaño-plomo</a:t>
             </a:r>
           </a:p>
           <a:p>
@@ -5599,21 +6079,21 @@
                 </a:solidFill>
                 <a:latin typeface="Montserrat"/>
               </a:rPr>
-              <a:t>Con acero o inox: manguito de aleación de cobre</a:t>
-            </a:r>
-          </a:p>
-        </p:txBody>
-      </p:sp>
-      <p:sp>
-        <p:nvSpPr>
-          <p:cNvPr id="9" name="imgph" descr="IMGQ:old lead pipe gas installation wall"/>
+              <a:t>No abocardar (salvo baterías de contadores)</a:t>
+            </a:r>
+          </a:p>
+        </p:txBody>
+      </p:sp>
+      <p:sp>
+        <p:nvSpPr>
+          <p:cNvPr id="9" name="imgph" descr="IMGQ:capillary solder copper fitting joint"/>
           <p:cNvSpPr/>
           <p:nvPr/>
         </p:nvSpPr>
         <p:spPr>
           <a:xfrm>
-            <a:off x="5806440" y="1051560"/>
-            <a:ext cx="5298947" cy="4629150"/>
+            <a:off x="822960" y="1965960"/>
+            <a:ext cx="5303520" cy="4572000"/>
           </a:xfrm>
           <a:prstGeom prst="roundRect">
             <a:avLst/>
@@ -5658,8 +6138,8 @@
         </p:nvSpPr>
         <p:spPr>
           <a:xfrm>
-            <a:off x="6080760" y="2726055"/>
-            <a:ext cx="4750307" cy="1280160"/>
+            <a:off x="1097280" y="3611880"/>
+            <a:ext cx="4754880" cy="1280160"/>
           </a:xfrm>
           <a:prstGeom prst="rect">
             <a:avLst/>
@@ -5680,7 +6160,7 @@
                 </a:solidFill>
                 <a:latin typeface="Montserrat"/>
               </a:rPr>
-              <a:t>IMAGEN REALISTA</a:t>
+              <a:t>IMAGEN</a:t>
             </a:r>
           </a:p>
           <a:p>
@@ -5692,7 +6172,7 @@
                 </a:solidFill>
                 <a:latin typeface="Montserrat"/>
               </a:rPr>
-              <a:t>old lead pipe gas installation wall</a:t>
+              <a:t>capillary solder copper fitting joint</a:t>
             </a:r>
           </a:p>
         </p:txBody>
@@ -5702,6 +6182,18 @@
   <p:clrMapOvr>
     <a:masterClrMapping/>
   </p:clrMapOvr>
+  <mc:AlternateContent xmlns:mc="http://schemas.openxmlformats.org/markup-compatibility/2006">
+    <mc:Choice xmlns:p14="http://schemas.microsoft.com/office/powerpoint/2010/main" Requires="p14">
+      <p:transition spd="med" p14:dur="700">
+        <p14:cube dir="l"/>
+      </p:transition>
+    </mc:Choice>
+    <mc:Fallback>
+      <p:transition spd="med">
+        <p:push dir="l"/>
+      </p:transition>
+    </mc:Fallback>
+  </mc:AlternateContent>
 </p:sld>
 </file>
 
@@ -5789,7 +6281,7 @@
                 </a:solidFill>
                 <a:latin typeface="Montserrat"/>
               </a:rPr>
-              <a:t>012 / 015</a:t>
+              <a:t>012 / 021</a:t>
             </a:r>
           </a:p>
         </p:txBody>
@@ -5857,7 +6349,7 @@
                 </a:solidFill>
                 <a:latin typeface="Montserrat"/>
               </a:rPr>
-              <a:t>UNIONES MECÁNICAS · DESMONTABLES</a:t>
+              <a:t>UNIONES · METALES DISTINTOS</a:t>
             </a:r>
           </a:p>
         </p:txBody>
@@ -5891,14 +6383,14 @@
                 </a:solidFill>
                 <a:latin typeface="Montserrat"/>
               </a:rPr>
-              <a:t>Desmontables: se vuelven a abrir</a:t>
-            </a:r>
-          </a:p>
-        </p:txBody>
-      </p:sp>
-      <p:sp>
-        <p:nvSpPr>
-          <p:cNvPr id="7" name="Rounded Rectangle 6"/>
+              <a:t>La regla del traductor</a:t>
+            </a:r>
+          </a:p>
+        </p:txBody>
+      </p:sp>
+      <p:sp>
+        <p:nvSpPr>
+          <p:cNvPr id="7" name="Rectangle 6"/>
           <p:cNvSpPr/>
           <p:nvPr/>
         </p:nvSpPr>
@@ -5907,7 +6399,7 @@
             <a:off x="868680" y="1627632"/>
             <a:ext cx="2011680" cy="73152"/>
           </a:xfrm>
-          <a:prstGeom prst="roundRect">
+          <a:prstGeom prst="rect">
             <a:avLst/>
           </a:prstGeom>
           <a:solidFill>
@@ -5949,7 +6441,7 @@
         <p:spPr>
           <a:xfrm>
             <a:off x="822960" y="1965960"/>
-            <a:ext cx="4983480" cy="4206240"/>
+            <a:ext cx="5029200" cy="4206240"/>
           </a:xfrm>
           <a:prstGeom prst="rect">
             <a:avLst/>
@@ -5983,7 +6475,7 @@
                 </a:solidFill>
                 <a:latin typeface="Montserrat"/>
               </a:rPr>
-              <a:t>Junta plana, bridas y metal-metal</a:t>
+              <a:t>Cobre y acero: nunca unión directa</a:t>
             </a:r>
           </a:p>
           <a:p>
@@ -6008,7 +6500,7 @@
                 </a:solidFill>
                 <a:latin typeface="Montserrat"/>
               </a:rPr>
-              <a:t>Junta plana: elementos pequeños</a:t>
+              <a:t>Cobre e inox: nunca unión directa</a:t>
             </a:r>
           </a:p>
           <a:p>
@@ -6033,7 +6525,7 @@
                 </a:solidFill>
                 <a:latin typeface="Montserrat"/>
               </a:rPr>
-              <a:t>Bridas: diámetros mayores</a:t>
+              <a:t>Se intercala un accesorio de aleación de cobre</a:t>
             </a:r>
           </a:p>
           <a:p>
@@ -6058,21 +6550,21 @@
                 </a:solidFill>
                 <a:latin typeface="Montserrat"/>
               </a:rPr>
-              <a:t>Metal-metal solo en conjuntos de regulación</a:t>
-            </a:r>
-          </a:p>
-        </p:txBody>
-      </p:sp>
-      <p:sp>
-        <p:nvSpPr>
-          <p:cNvPr id="9" name="imgph" descr="IMGQ:flanged gas pipe connection bolts"/>
+              <a:t>Cobre-acero: a tope por bordón, 850 °C</a:t>
+            </a:r>
+          </a:p>
+        </p:txBody>
+      </p:sp>
+      <p:sp>
+        <p:nvSpPr>
+          <p:cNvPr id="9" name="imgph" descr="IMGQ:brass transition fitting copper steel pipe"/>
           <p:cNvSpPr/>
           <p:nvPr/>
         </p:nvSpPr>
         <p:spPr>
           <a:xfrm>
-            <a:off x="5806440" y="1051560"/>
-            <a:ext cx="5298947" cy="4629150"/>
+            <a:off x="6080760" y="1965960"/>
+            <a:ext cx="5303520" cy="4572000"/>
           </a:xfrm>
           <a:prstGeom prst="roundRect">
             <a:avLst/>
@@ -6117,8 +6609,8 @@
         </p:nvSpPr>
         <p:spPr>
           <a:xfrm>
-            <a:off x="6080760" y="2726055"/>
-            <a:ext cx="4750307" cy="1280160"/>
+            <a:off x="6355080" y="3611880"/>
+            <a:ext cx="4754880" cy="1280160"/>
           </a:xfrm>
           <a:prstGeom prst="rect">
             <a:avLst/>
@@ -6139,7 +6631,7 @@
                 </a:solidFill>
                 <a:latin typeface="Montserrat"/>
               </a:rPr>
-              <a:t>IMAGEN REALISTA</a:t>
+              <a:t>IMAGEN</a:t>
             </a:r>
           </a:p>
           <a:p>
@@ -6151,7 +6643,7 @@
                 </a:solidFill>
                 <a:latin typeface="Montserrat"/>
               </a:rPr>
-              <a:t>flanged gas pipe connection bolts</a:t>
+              <a:t>brass transition fitting copper steel pipe</a:t>
             </a:r>
           </a:p>
         </p:txBody>
@@ -6161,6 +6653,18 @@
   <p:clrMapOvr>
     <a:masterClrMapping/>
   </p:clrMapOvr>
+  <mc:AlternateContent xmlns:mc="http://schemas.openxmlformats.org/markup-compatibility/2006">
+    <mc:Choice xmlns:p14="http://schemas.microsoft.com/office/powerpoint/2010/main" Requires="p14">
+      <p:transition spd="med" p14:dur="700">
+        <p14:cube dir="r"/>
+      </p:transition>
+    </mc:Choice>
+    <mc:Fallback>
+      <p:transition spd="med">
+        <p:push dir="r"/>
+      </p:transition>
+    </mc:Fallback>
+  </mc:AlternateContent>
 </p:sld>
 </file>
 
@@ -6248,7 +6752,7 @@
                 </a:solidFill>
                 <a:latin typeface="Montserrat"/>
               </a:rPr>
-              <a:t>013 / 015</a:t>
+              <a:t>013 / 021</a:t>
             </a:r>
           </a:p>
         </p:txBody>
@@ -6289,84 +6793,16 @@
       </p:sp>
       <p:sp>
         <p:nvSpPr>
-          <p:cNvPr id="5" name="TextBox 4"/>
-          <p:cNvSpPr txBox="1"/>
-          <p:nvPr/>
-        </p:nvSpPr>
-        <p:spPr>
-          <a:xfrm>
-            <a:off x="822960" y="457200"/>
-            <a:ext cx="10058400" cy="365760"/>
-          </a:xfrm>
-          <a:prstGeom prst="rect">
-            <a:avLst/>
-          </a:prstGeom>
-          <a:noFill/>
-        </p:spPr>
-        <p:txBody>
-          <a:bodyPr wrap="square">
-            <a:spAutoFit/>
-          </a:bodyPr>
-          <a:lstStyle/>
-          <a:p>
-            <a:r>
-              <a:rPr sz="1300" b="1" i="0">
-                <a:solidFill>
-                  <a:srgbClr val="E8801A"/>
-                </a:solidFill>
-                <a:latin typeface="Montserrat"/>
-              </a:rPr>
-              <a:t>UNIONES MECÁNICAS · NO DESMONTABLES</a:t>
-            </a:r>
-          </a:p>
-        </p:txBody>
-      </p:sp>
-      <p:sp>
-        <p:nvSpPr>
-          <p:cNvPr id="6" name="TextBox 5"/>
-          <p:cNvSpPr txBox="1"/>
-          <p:nvPr/>
-        </p:nvSpPr>
-        <p:spPr>
-          <a:xfrm>
-            <a:off x="822960" y="868680"/>
-            <a:ext cx="10515600" cy="914400"/>
-          </a:xfrm>
-          <a:prstGeom prst="rect">
-            <a:avLst/>
-          </a:prstGeom>
-          <a:noFill/>
-        </p:spPr>
-        <p:txBody>
-          <a:bodyPr wrap="square">
-            <a:spAutoFit/>
-          </a:bodyPr>
-          <a:lstStyle/>
-          <a:p>
-            <a:r>
-              <a:rPr sz="2800" b="1" i="0">
-                <a:solidFill>
-                  <a:srgbClr val="1E2761"/>
-                </a:solidFill>
-                <a:latin typeface="Montserrat"/>
-              </a:rPr>
-              <a:t>No desmontables: quedan fijas</a:t>
-            </a:r>
-          </a:p>
-        </p:txBody>
-      </p:sp>
-      <p:sp>
-        <p:nvSpPr>
-          <p:cNvPr id="7" name="Rounded Rectangle 6"/>
+          <p:cNvPr id="5" name="Rectangle 4"/>
           <p:cNvSpPr/>
           <p:nvPr/>
         </p:nvSpPr>
         <p:spPr>
           <a:xfrm>
-            <a:off x="868680" y="1627632"/>
-            <a:ext cx="2011680" cy="73152"/>
-          </a:xfrm>
-          <a:prstGeom prst="roundRect">
+            <a:off x="0" y="0"/>
+            <a:ext cx="12191695" cy="1143000"/>
+          </a:xfrm>
+          <a:prstGeom prst="rect">
             <a:avLst/>
           </a:prstGeom>
           <a:solidFill>
@@ -6401,14 +6837,14 @@
       </p:sp>
       <p:sp>
         <p:nvSpPr>
-          <p:cNvPr id="8" name="TextBox 7"/>
+          <p:cNvPr id="6" name="TextBox 5"/>
           <p:cNvSpPr txBox="1"/>
           <p:nvPr/>
         </p:nvSpPr>
         <p:spPr>
           <a:xfrm>
-            <a:off x="822960" y="1965960"/>
-            <a:ext cx="4983480" cy="4206240"/>
+            <a:off x="822960" y="274320"/>
+            <a:ext cx="10515600" cy="640080"/>
           </a:xfrm>
           <a:prstGeom prst="rect">
             <a:avLst/>
@@ -6421,117 +6857,62 @@
           </a:bodyPr>
           <a:lstStyle/>
           <a:p>
-            <a:pPr>
-              <a:spcAft>
-                <a:spcPts val="1100"/>
-              </a:spcAft>
-            </a:pPr>
-            <a:r>
-              <a:rPr sz="1600" b="1" i="0">
-                <a:solidFill>
-                  <a:srgbClr val="E8801A"/>
-                </a:solidFill>
-                <a:latin typeface="Montserrat"/>
-              </a:rPr>
-              <a:t>▸  </a:t>
-            </a:r>
-            <a:r>
-              <a:rPr sz="1600" b="0" i="0">
-                <a:solidFill>
-                  <a:srgbClr val="1B2330"/>
-                </a:solidFill>
-                <a:latin typeface="Montserrat"/>
-              </a:rPr>
-              <a:t>Roscadas (UNE 19500 / UNE-EN 10242)</a:t>
-            </a:r>
-          </a:p>
-          <a:p>
-            <a:pPr>
-              <a:spcAft>
-                <a:spcPts val="1100"/>
-              </a:spcAft>
-            </a:pPr>
-            <a:r>
-              <a:rPr sz="1600" b="1" i="0">
-                <a:solidFill>
-                  <a:srgbClr val="E8801A"/>
-                </a:solidFill>
-                <a:latin typeface="Montserrat"/>
-              </a:rPr>
-              <a:t>▸  </a:t>
-            </a:r>
-            <a:r>
-              <a:rPr sz="1600" b="0" i="0">
-                <a:solidFill>
-                  <a:srgbClr val="1B2330"/>
-                </a:solidFill>
-                <a:latin typeface="Montserrat"/>
-              </a:rPr>
-              <a:t>Press-fitting radial y axial</a:t>
-            </a:r>
-          </a:p>
-          <a:p>
-            <a:pPr>
-              <a:spcAft>
-                <a:spcPts val="1100"/>
-              </a:spcAft>
-            </a:pPr>
-            <a:r>
-              <a:rPr sz="1600" b="1" i="0">
-                <a:solidFill>
-                  <a:srgbClr val="E8801A"/>
-                </a:solidFill>
-                <a:latin typeface="Montserrat"/>
-              </a:rPr>
-              <a:t>▸  </a:t>
-            </a:r>
-            <a:r>
-              <a:rPr sz="1600" b="0" i="0">
-                <a:solidFill>
-                  <a:srgbClr val="1B2330"/>
-                </a:solidFill>
-                <a:latin typeface="Montserrat"/>
-              </a:rPr>
-              <a:t>Multicapa y corrugado flexible</a:t>
-            </a:r>
-          </a:p>
-          <a:p>
-            <a:pPr>
-              <a:spcAft>
-                <a:spcPts val="1100"/>
-              </a:spcAft>
-            </a:pPr>
-            <a:r>
-              <a:rPr sz="1600" b="1" i="0">
-                <a:solidFill>
-                  <a:srgbClr val="E8801A"/>
-                </a:solidFill>
-                <a:latin typeface="Montserrat"/>
-              </a:rPr>
-              <a:t>▸  </a:t>
-            </a:r>
-            <a:r>
-              <a:rPr sz="1600" b="0" i="0">
-                <a:solidFill>
-                  <a:srgbClr val="1B2330"/>
-                </a:solidFill>
-                <a:latin typeface="Montserrat"/>
-              </a:rPr>
-              <a:t>Junta tórica UNE-EN 549; hasta 5 bar</a:t>
-            </a:r>
-          </a:p>
-        </p:txBody>
-      </p:sp>
-      <p:sp>
-        <p:nvSpPr>
-          <p:cNvPr id="9" name="imgph" descr="IMGQ:press fitting tool crimping gas pipe"/>
+            <a:r>
+              <a:rPr sz="2400" b="1" i="0">
+                <a:solidFill>
+                  <a:srgbClr val="FFFFFF"/>
+                </a:solidFill>
+                <a:latin typeface="Montserrat"/>
+              </a:rPr>
+              <a:t>⚡  PREGUNTA RÁPIDA</a:t>
+            </a:r>
+          </a:p>
+        </p:txBody>
+      </p:sp>
+      <p:sp>
+        <p:nvSpPr>
+          <p:cNvPr id="7" name="TextBox 6"/>
+          <p:cNvSpPr txBox="1"/>
+          <p:nvPr/>
+        </p:nvSpPr>
+        <p:spPr>
+          <a:xfrm>
+            <a:off x="822960" y="1508760"/>
+            <a:ext cx="10515600" cy="1371600"/>
+          </a:xfrm>
+          <a:prstGeom prst="rect">
+            <a:avLst/>
+          </a:prstGeom>
+          <a:noFill/>
+        </p:spPr>
+        <p:txBody>
+          <a:bodyPr wrap="square">
+            <a:spAutoFit/>
+          </a:bodyPr>
+          <a:lstStyle/>
+          <a:p>
+            <a:r>
+              <a:rPr sz="2400" b="1" i="0">
+                <a:solidFill>
+                  <a:srgbClr val="1E2761"/>
+                </a:solidFill>
+                <a:latin typeface="Montserrat"/>
+              </a:rPr>
+              <a:t>Para unir un tubo de cobre con uno de acero, la norma exige...</a:t>
+            </a:r>
+          </a:p>
+        </p:txBody>
+      </p:sp>
+      <p:sp>
+        <p:nvSpPr>
+          <p:cNvPr id="8" name="Rounded Rectangle 7"/>
           <p:cNvSpPr/>
           <p:nvPr/>
         </p:nvSpPr>
         <p:spPr>
           <a:xfrm>
-            <a:off x="5806440" y="1051560"/>
-            <a:ext cx="5298947" cy="4629150"/>
+            <a:off x="822960" y="3291840"/>
+            <a:ext cx="4983480" cy="1143000"/>
           </a:xfrm>
           <a:prstGeom prst="roundRect">
             <a:avLst/>
@@ -6570,14 +6951,58 @@
       </p:sp>
       <p:sp>
         <p:nvSpPr>
+          <p:cNvPr id="9" name="Rectangle 8"/>
+          <p:cNvSpPr/>
+          <p:nvPr/>
+        </p:nvSpPr>
+        <p:spPr>
+          <a:xfrm>
+            <a:off x="822960" y="3291840"/>
+            <a:ext cx="640080" cy="1143000"/>
+          </a:xfrm>
+          <a:prstGeom prst="rect">
+            <a:avLst/>
+          </a:prstGeom>
+          <a:solidFill>
+            <a:srgbClr val="1E2761"/>
+          </a:solidFill>
+          <a:ln>
+            <a:noFill/>
+          </a:ln>
+          <a:effectLst/>
+        </p:spPr>
+        <p:style>
+          <a:lnRef idx="1">
+            <a:schemeClr val="accent1"/>
+          </a:lnRef>
+          <a:fillRef idx="3">
+            <a:schemeClr val="accent1"/>
+          </a:fillRef>
+          <a:effectRef idx="2">
+            <a:schemeClr val="accent1"/>
+          </a:effectRef>
+          <a:fontRef idx="minor">
+            <a:schemeClr val="lt1"/>
+          </a:fontRef>
+        </p:style>
+        <p:txBody>
+          <a:bodyPr rtlCol="0" anchor="ctr"/>
+          <a:lstStyle/>
+          <a:p>
+            <a:pPr algn="ctr"/>
+          </a:p>
+        </p:txBody>
+      </p:sp>
+      <p:sp>
+        <p:nvSpPr>
           <p:cNvPr id="10" name="TextBox 9"/>
           <p:cNvSpPr txBox="1"/>
           <p:nvPr/>
         </p:nvSpPr>
         <p:spPr>
           <a:xfrm>
-            <a:off x="6080760" y="2726055"/>
-            <a:ext cx="4750307" cy="1280160"/>
+            <a:off x="822960" y="3611880"/>
+            <a:ext cx="640080" cy="548640"/>
           </a:xfrm>
           <a:prstGeom prst="rect">
             <a:avLst/>
@@ -6592,25 +7017,524 @@
           <a:p>
             <a:pPr algn="ctr"/>
             <a:r>
-              <a:rPr sz="1400" b="1" i="0">
-                <a:solidFill>
-                  <a:srgbClr val="64748B"/>
-                </a:solidFill>
-                <a:latin typeface="Montserrat"/>
-              </a:rPr>
-              <a:t>IMAGEN REALISTA</a:t>
-            </a:r>
-          </a:p>
+              <a:rPr sz="2200" b="1" i="0">
+                <a:solidFill>
+                  <a:srgbClr val="FFFFFF"/>
+                </a:solidFill>
+                <a:latin typeface="Montserrat"/>
+              </a:rPr>
+              <a:t>A</a:t>
+            </a:r>
+          </a:p>
+        </p:txBody>
+      </p:sp>
+      <p:sp>
+        <p:nvSpPr>
+          <p:cNvPr id="11" name="TextBox 10"/>
+          <p:cNvSpPr txBox="1"/>
+          <p:nvPr/>
+        </p:nvSpPr>
+        <p:spPr>
+          <a:xfrm>
+            <a:off x="1600200" y="3474720"/>
+            <a:ext cx="4114800" cy="868680"/>
+          </a:xfrm>
+          <a:prstGeom prst="rect">
+            <a:avLst/>
+          </a:prstGeom>
+          <a:noFill/>
+        </p:spPr>
+        <p:txBody>
+          <a:bodyPr wrap="square">
+            <a:spAutoFit/>
+          </a:bodyPr>
+          <a:lstStyle/>
+          <a:p>
+            <a:r>
+              <a:rPr sz="1400" b="0" i="0">
+                <a:solidFill>
+                  <a:srgbClr val="1B2330"/>
+                </a:solidFill>
+                <a:latin typeface="Montserrat"/>
+              </a:rPr>
+              <a:t>Soldarlos directamente por capilaridad</a:t>
+            </a:r>
+          </a:p>
+        </p:txBody>
+      </p:sp>
+      <p:sp>
+        <p:nvSpPr>
+          <p:cNvPr id="12" name="Rounded Rectangle 11"/>
+          <p:cNvSpPr/>
+          <p:nvPr/>
+        </p:nvSpPr>
+        <p:spPr>
+          <a:xfrm>
+            <a:off x="6355080" y="3291840"/>
+            <a:ext cx="4983480" cy="1143000"/>
+          </a:xfrm>
+          <a:prstGeom prst="roundRect">
+            <a:avLst/>
+          </a:prstGeom>
+          <a:solidFill>
+            <a:srgbClr val="F3F6FB"/>
+          </a:solidFill>
+          <a:ln w="12700">
+            <a:solidFill>
+              <a:srgbClr val="C7D2E6"/>
+            </a:solidFill>
+          </a:ln>
+          <a:effectLst/>
+        </p:spPr>
+        <p:style>
+          <a:lnRef idx="1">
+            <a:schemeClr val="accent1"/>
+          </a:lnRef>
+          <a:fillRef idx="3">
+            <a:schemeClr val="accent1"/>
+          </a:fillRef>
+          <a:effectRef idx="2">
+            <a:schemeClr val="accent1"/>
+          </a:effectRef>
+          <a:fontRef idx="minor">
+            <a:schemeClr val="lt1"/>
+          </a:fontRef>
+        </p:style>
+        <p:txBody>
+          <a:bodyPr rtlCol="0" anchor="ctr"/>
+          <a:lstStyle/>
           <a:p>
             <a:pPr algn="ctr"/>
-            <a:r>
-              <a:rPr sz="1100" b="0" i="1">
-                <a:solidFill>
-                  <a:srgbClr val="64748B"/>
-                </a:solidFill>
-                <a:latin typeface="Montserrat"/>
-              </a:rPr>
-              <a:t>press fitting tool crimping gas pipe</a:t>
+          </a:p>
+        </p:txBody>
+      </p:sp>
+      <p:sp>
+        <p:nvSpPr>
+          <p:cNvPr id="13" name="Rectangle 12"/>
+          <p:cNvSpPr/>
+          <p:nvPr/>
+        </p:nvSpPr>
+        <p:spPr>
+          <a:xfrm>
+            <a:off x="6355080" y="3291840"/>
+            <a:ext cx="640080" cy="1143000"/>
+          </a:xfrm>
+          <a:prstGeom prst="rect">
+            <a:avLst/>
+          </a:prstGeom>
+          <a:solidFill>
+            <a:srgbClr val="1E2761"/>
+          </a:solidFill>
+          <a:ln>
+            <a:noFill/>
+          </a:ln>
+          <a:effectLst/>
+        </p:spPr>
+        <p:style>
+          <a:lnRef idx="1">
+            <a:schemeClr val="accent1"/>
+          </a:lnRef>
+          <a:fillRef idx="3">
+            <a:schemeClr val="accent1"/>
+          </a:fillRef>
+          <a:effectRef idx="2">
+            <a:schemeClr val="accent1"/>
+          </a:effectRef>
+          <a:fontRef idx="minor">
+            <a:schemeClr val="lt1"/>
+          </a:fontRef>
+        </p:style>
+        <p:txBody>
+          <a:bodyPr rtlCol="0" anchor="ctr"/>
+          <a:lstStyle/>
+          <a:p>
+            <a:pPr algn="ctr"/>
+          </a:p>
+        </p:txBody>
+      </p:sp>
+      <p:sp>
+        <p:nvSpPr>
+          <p:cNvPr id="14" name="TextBox 13"/>
+          <p:cNvSpPr txBox="1"/>
+          <p:nvPr/>
+        </p:nvSpPr>
+        <p:spPr>
+          <a:xfrm>
+            <a:off x="6355080" y="3611880"/>
+            <a:ext cx="640080" cy="548640"/>
+          </a:xfrm>
+          <a:prstGeom prst="rect">
+            <a:avLst/>
+          </a:prstGeom>
+          <a:noFill/>
+        </p:spPr>
+        <p:txBody>
+          <a:bodyPr wrap="square">
+            <a:spAutoFit/>
+          </a:bodyPr>
+          <a:lstStyle/>
+          <a:p>
+            <a:pPr algn="ctr"/>
+            <a:r>
+              <a:rPr sz="2200" b="1" i="0">
+                <a:solidFill>
+                  <a:srgbClr val="FFFFFF"/>
+                </a:solidFill>
+                <a:latin typeface="Montserrat"/>
+              </a:rPr>
+              <a:t>B</a:t>
+            </a:r>
+          </a:p>
+        </p:txBody>
+      </p:sp>
+      <p:sp>
+        <p:nvSpPr>
+          <p:cNvPr id="15" name="TextBox 14"/>
+          <p:cNvSpPr txBox="1"/>
+          <p:nvPr/>
+        </p:nvSpPr>
+        <p:spPr>
+          <a:xfrm>
+            <a:off x="7132320" y="3474720"/>
+            <a:ext cx="4114800" cy="868680"/>
+          </a:xfrm>
+          <a:prstGeom prst="rect">
+            <a:avLst/>
+          </a:prstGeom>
+          <a:noFill/>
+        </p:spPr>
+        <p:txBody>
+          <a:bodyPr wrap="square">
+            <a:spAutoFit/>
+          </a:bodyPr>
+          <a:lstStyle/>
+          <a:p>
+            <a:r>
+              <a:rPr sz="1400" b="0" i="0">
+                <a:solidFill>
+                  <a:srgbClr val="1B2330"/>
+                </a:solidFill>
+                <a:latin typeface="Montserrat"/>
+              </a:rPr>
+              <a:t>Intercalar un accesorio de aleación de cobre</a:t>
+            </a:r>
+          </a:p>
+        </p:txBody>
+      </p:sp>
+      <p:sp>
+        <p:nvSpPr>
+          <p:cNvPr id="16" name="Rounded Rectangle 15"/>
+          <p:cNvSpPr/>
+          <p:nvPr/>
+        </p:nvSpPr>
+        <p:spPr>
+          <a:xfrm>
+            <a:off x="822960" y="4617720"/>
+            <a:ext cx="4983480" cy="1143000"/>
+          </a:xfrm>
+          <a:prstGeom prst="roundRect">
+            <a:avLst/>
+          </a:prstGeom>
+          <a:solidFill>
+            <a:srgbClr val="F3F6FB"/>
+          </a:solidFill>
+          <a:ln w="12700">
+            <a:solidFill>
+              <a:srgbClr val="C7D2E6"/>
+            </a:solidFill>
+          </a:ln>
+          <a:effectLst/>
+        </p:spPr>
+        <p:style>
+          <a:lnRef idx="1">
+            <a:schemeClr val="accent1"/>
+          </a:lnRef>
+          <a:fillRef idx="3">
+            <a:schemeClr val="accent1"/>
+          </a:fillRef>
+          <a:effectRef idx="2">
+            <a:schemeClr val="accent1"/>
+          </a:effectRef>
+          <a:fontRef idx="minor">
+            <a:schemeClr val="lt1"/>
+          </a:fontRef>
+        </p:style>
+        <p:txBody>
+          <a:bodyPr rtlCol="0" anchor="ctr"/>
+          <a:lstStyle/>
+          <a:p>
+            <a:pPr algn="ctr"/>
+          </a:p>
+        </p:txBody>
+      </p:sp>
+      <p:sp>
+        <p:nvSpPr>
+          <p:cNvPr id="17" name="Rectangle 16"/>
+          <p:cNvSpPr/>
+          <p:nvPr/>
+        </p:nvSpPr>
+        <p:spPr>
+          <a:xfrm>
+            <a:off x="822960" y="4617720"/>
+            <a:ext cx="640080" cy="1143000"/>
+          </a:xfrm>
+          <a:prstGeom prst="rect">
+            <a:avLst/>
+          </a:prstGeom>
+          <a:solidFill>
+            <a:srgbClr val="1E2761"/>
+          </a:solidFill>
+          <a:ln>
+            <a:noFill/>
+          </a:ln>
+          <a:effectLst/>
+        </p:spPr>
+        <p:style>
+          <a:lnRef idx="1">
+            <a:schemeClr val="accent1"/>
+          </a:lnRef>
+          <a:fillRef idx="3">
+            <a:schemeClr val="accent1"/>
+          </a:fillRef>
+          <a:effectRef idx="2">
+            <a:schemeClr val="accent1"/>
+          </a:effectRef>
+          <a:fontRef idx="minor">
+            <a:schemeClr val="lt1"/>
+          </a:fontRef>
+        </p:style>
+        <p:txBody>
+          <a:bodyPr rtlCol="0" anchor="ctr"/>
+          <a:lstStyle/>
+          <a:p>
+            <a:pPr algn="ctr"/>
+          </a:p>
+        </p:txBody>
+      </p:sp>
+      <p:sp>
+        <p:nvSpPr>
+          <p:cNvPr id="18" name="TextBox 17"/>
+          <p:cNvSpPr txBox="1"/>
+          <p:nvPr/>
+        </p:nvSpPr>
+        <p:spPr>
+          <a:xfrm>
+            <a:off x="822960" y="4937760"/>
+            <a:ext cx="640080" cy="548640"/>
+          </a:xfrm>
+          <a:prstGeom prst="rect">
+            <a:avLst/>
+          </a:prstGeom>
+          <a:noFill/>
+        </p:spPr>
+        <p:txBody>
+          <a:bodyPr wrap="square">
+            <a:spAutoFit/>
+          </a:bodyPr>
+          <a:lstStyle/>
+          <a:p>
+            <a:pPr algn="ctr"/>
+            <a:r>
+              <a:rPr sz="2200" b="1" i="0">
+                <a:solidFill>
+                  <a:srgbClr val="FFFFFF"/>
+                </a:solidFill>
+                <a:latin typeface="Montserrat"/>
+              </a:rPr>
+              <a:t>C</a:t>
+            </a:r>
+          </a:p>
+        </p:txBody>
+      </p:sp>
+      <p:sp>
+        <p:nvSpPr>
+          <p:cNvPr id="19" name="TextBox 18"/>
+          <p:cNvSpPr txBox="1"/>
+          <p:nvPr/>
+        </p:nvSpPr>
+        <p:spPr>
+          <a:xfrm>
+            <a:off x="1600200" y="4800600"/>
+            <a:ext cx="4114800" cy="868680"/>
+          </a:xfrm>
+          <a:prstGeom prst="rect">
+            <a:avLst/>
+          </a:prstGeom>
+          <a:noFill/>
+        </p:spPr>
+        <p:txBody>
+          <a:bodyPr wrap="square">
+            <a:spAutoFit/>
+          </a:bodyPr>
+          <a:lstStyle/>
+          <a:p>
+            <a:r>
+              <a:rPr sz="1400" b="0" i="0">
+                <a:solidFill>
+                  <a:srgbClr val="1B2330"/>
+                </a:solidFill>
+                <a:latin typeface="Montserrat"/>
+              </a:rPr>
+              <a:t>Unirlos con una junta de elastómero</a:t>
+            </a:r>
+          </a:p>
+        </p:txBody>
+      </p:sp>
+      <p:sp>
+        <p:nvSpPr>
+          <p:cNvPr id="20" name="Rounded Rectangle 19"/>
+          <p:cNvSpPr/>
+          <p:nvPr/>
+        </p:nvSpPr>
+        <p:spPr>
+          <a:xfrm>
+            <a:off x="6355080" y="4617720"/>
+            <a:ext cx="4983480" cy="1143000"/>
+          </a:xfrm>
+          <a:prstGeom prst="roundRect">
+            <a:avLst/>
+          </a:prstGeom>
+          <a:solidFill>
+            <a:srgbClr val="F3F6FB"/>
+          </a:solidFill>
+          <a:ln w="12700">
+            <a:solidFill>
+              <a:srgbClr val="C7D2E6"/>
+            </a:solidFill>
+          </a:ln>
+          <a:effectLst/>
+        </p:spPr>
+        <p:style>
+          <a:lnRef idx="1">
+            <a:schemeClr val="accent1"/>
+          </a:lnRef>
+          <a:fillRef idx="3">
+            <a:schemeClr val="accent1"/>
+          </a:fillRef>
+          <a:effectRef idx="2">
+            <a:schemeClr val="accent1"/>
+          </a:effectRef>
+          <a:fontRef idx="minor">
+            <a:schemeClr val="lt1"/>
+          </a:fontRef>
+        </p:style>
+        <p:txBody>
+          <a:bodyPr rtlCol="0" anchor="ctr"/>
+          <a:lstStyle/>
+          <a:p>
+            <a:pPr algn="ctr"/>
+          </a:p>
+        </p:txBody>
+      </p:sp>
+      <p:sp>
+        <p:nvSpPr>
+          <p:cNvPr id="21" name="Rectangle 20"/>
+          <p:cNvSpPr/>
+          <p:nvPr/>
+        </p:nvSpPr>
+        <p:spPr>
+          <a:xfrm>
+            <a:off x="6355080" y="4617720"/>
+            <a:ext cx="640080" cy="1143000"/>
+          </a:xfrm>
+          <a:prstGeom prst="rect">
+            <a:avLst/>
+          </a:prstGeom>
+          <a:solidFill>
+            <a:srgbClr val="1E2761"/>
+          </a:solidFill>
+          <a:ln>
+            <a:noFill/>
+          </a:ln>
+          <a:effectLst/>
+        </p:spPr>
+        <p:style>
+          <a:lnRef idx="1">
+            <a:schemeClr val="accent1"/>
+          </a:lnRef>
+          <a:fillRef idx="3">
+            <a:schemeClr val="accent1"/>
+          </a:fillRef>
+          <a:effectRef idx="2">
+            <a:schemeClr val="accent1"/>
+          </a:effectRef>
+          <a:fontRef idx="minor">
+            <a:schemeClr val="lt1"/>
+          </a:fontRef>
+        </p:style>
+        <p:txBody>
+          <a:bodyPr rtlCol="0" anchor="ctr"/>
+          <a:lstStyle/>
+          <a:p>
+            <a:pPr algn="ctr"/>
+          </a:p>
+        </p:txBody>
+      </p:sp>
+      <p:sp>
+        <p:nvSpPr>
+          <p:cNvPr id="22" name="TextBox 21"/>
+          <p:cNvSpPr txBox="1"/>
+          <p:nvPr/>
+        </p:nvSpPr>
+        <p:spPr>
+          <a:xfrm>
+            <a:off x="6355080" y="4937760"/>
+            <a:ext cx="640080" cy="548640"/>
+          </a:xfrm>
+          <a:prstGeom prst="rect">
+            <a:avLst/>
+          </a:prstGeom>
+          <a:noFill/>
+        </p:spPr>
+        <p:txBody>
+          <a:bodyPr wrap="square">
+            <a:spAutoFit/>
+          </a:bodyPr>
+          <a:lstStyle/>
+          <a:p>
+            <a:pPr algn="ctr"/>
+            <a:r>
+              <a:rPr sz="2200" b="1" i="0">
+                <a:solidFill>
+                  <a:srgbClr val="FFFFFF"/>
+                </a:solidFill>
+                <a:latin typeface="Montserrat"/>
+              </a:rPr>
+              <a:t>D</a:t>
+            </a:r>
+          </a:p>
+        </p:txBody>
+      </p:sp>
+      <p:sp>
+        <p:nvSpPr>
+          <p:cNvPr id="23" name="TextBox 22"/>
+          <p:cNvSpPr txBox="1"/>
+          <p:nvPr/>
+        </p:nvSpPr>
+        <p:spPr>
+          <a:xfrm>
+            <a:off x="7132320" y="4800600"/>
+            <a:ext cx="4114800" cy="868680"/>
+          </a:xfrm>
+          <a:prstGeom prst="rect">
+            <a:avLst/>
+          </a:prstGeom>
+          <a:noFill/>
+        </p:spPr>
+        <p:txBody>
+          <a:bodyPr wrap="square">
+            <a:spAutoFit/>
+          </a:bodyPr>
+          <a:lstStyle/>
+          <a:p>
+            <a:r>
+              <a:rPr sz="1400" b="0" i="0">
+                <a:solidFill>
+                  <a:srgbClr val="1B2330"/>
+                </a:solidFill>
+                <a:latin typeface="Montserrat"/>
+              </a:rPr>
+              <a:t>Usar soldadura blanda de estaño-plomo</a:t>
             </a:r>
           </a:p>
         </p:txBody>
@@ -6620,6 +7544,18 @@
   <p:clrMapOvr>
     <a:masterClrMapping/>
   </p:clrMapOvr>
+  <mc:AlternateContent xmlns:mc="http://schemas.openxmlformats.org/markup-compatibility/2006">
+    <mc:Choice xmlns:p14="http://schemas.microsoft.com/office/powerpoint/2010/main" Requires="p14">
+      <p:transition spd="med" p14:dur="700">
+        <p14:cube dir="l"/>
+      </p:transition>
+    </mc:Choice>
+    <mc:Fallback>
+      <p:transition spd="med">
+        <p:push dir="l"/>
+      </p:transition>
+    </mc:Fallback>
+  </mc:AlternateContent>
 </p:sld>
 </file>
 
@@ -6707,7 +7643,7 @@
                 </a:solidFill>
                 <a:latin typeface="Montserrat"/>
               </a:rPr>
-              <a:t>014 / 015</a:t>
+              <a:t>014 / 021</a:t>
             </a:r>
           </a:p>
         </p:txBody>
@@ -6748,88 +7684,20 @@
       </p:sp>
       <p:sp>
         <p:nvSpPr>
-          <p:cNvPr id="5" name="TextBox 4"/>
-          <p:cNvSpPr txBox="1"/>
-          <p:nvPr/>
-        </p:nvSpPr>
-        <p:spPr>
-          <a:xfrm>
-            <a:off x="822960" y="457200"/>
-            <a:ext cx="10058400" cy="365760"/>
-          </a:xfrm>
-          <a:prstGeom prst="rect">
-            <a:avLst/>
-          </a:prstGeom>
-          <a:noFill/>
-        </p:spPr>
-        <p:txBody>
-          <a:bodyPr wrap="square">
-            <a:spAutoFit/>
-          </a:bodyPr>
-          <a:lstStyle/>
-          <a:p>
-            <a:r>
-              <a:rPr sz="1300" b="1" i="0">
-                <a:solidFill>
-                  <a:srgbClr val="E8801A"/>
-                </a:solidFill>
-                <a:latin typeface="Montserrat"/>
-              </a:rPr>
-              <a:t>TRANSICIÓN PE-METAL · OTRAS</a:t>
-            </a:r>
-          </a:p>
-        </p:txBody>
-      </p:sp>
-      <p:sp>
-        <p:nvSpPr>
-          <p:cNvPr id="6" name="TextBox 5"/>
-          <p:cNvSpPr txBox="1"/>
-          <p:nvPr/>
-        </p:nvSpPr>
-        <p:spPr>
-          <a:xfrm>
-            <a:off x="822960" y="868680"/>
-            <a:ext cx="10515600" cy="914400"/>
-          </a:xfrm>
-          <a:prstGeom prst="rect">
-            <a:avLst/>
-          </a:prstGeom>
-          <a:noFill/>
-        </p:spPr>
-        <p:txBody>
-          <a:bodyPr wrap="square">
-            <a:spAutoFit/>
-          </a:bodyPr>
-          <a:lstStyle/>
-          <a:p>
-            <a:r>
-              <a:rPr sz="2800" b="1" i="0">
-                <a:solidFill>
-                  <a:srgbClr val="1E2761"/>
-                </a:solidFill>
-                <a:latin typeface="Montserrat"/>
-              </a:rPr>
-              <a:t>Enlaces PE-metal y otras uniones</a:t>
-            </a:r>
-          </a:p>
-        </p:txBody>
-      </p:sp>
-      <p:sp>
-        <p:nvSpPr>
-          <p:cNvPr id="7" name="Rounded Rectangle 6"/>
+          <p:cNvPr id="5" name="Rectangle 4"/>
           <p:cNvSpPr/>
           <p:nvPr/>
         </p:nvSpPr>
         <p:spPr>
           <a:xfrm>
-            <a:off x="868680" y="1627632"/>
-            <a:ext cx="2011680" cy="73152"/>
-          </a:xfrm>
-          <a:prstGeom prst="roundRect">
+            <a:off x="0" y="0"/>
+            <a:ext cx="12191695" cy="1143000"/>
+          </a:xfrm>
+          <a:prstGeom prst="rect">
             <a:avLst/>
           </a:prstGeom>
           <a:solidFill>
-            <a:srgbClr val="E8801A"/>
+            <a:srgbClr val="1E8E4B"/>
           </a:solidFill>
           <a:ln>
             <a:noFill/>
@@ -6860,14 +7728,14 @@
       </p:sp>
       <p:sp>
         <p:nvSpPr>
-          <p:cNvPr id="8" name="TextBox 7"/>
+          <p:cNvPr id="6" name="TextBox 5"/>
           <p:cNvSpPr txBox="1"/>
           <p:nvPr/>
         </p:nvSpPr>
         <p:spPr>
           <a:xfrm>
-            <a:off x="822960" y="1965960"/>
-            <a:ext cx="4983480" cy="4206240"/>
+            <a:off x="822960" y="274320"/>
+            <a:ext cx="10515600" cy="640080"/>
           </a:xfrm>
           <a:prstGeom prst="rect">
             <a:avLst/>
@@ -6880,127 +7748,72 @@
           </a:bodyPr>
           <a:lstStyle/>
           <a:p>
-            <a:pPr>
-              <a:spcAft>
-                <a:spcPts val="1100"/>
-              </a:spcAft>
-            </a:pPr>
-            <a:r>
-              <a:rPr sz="1600" b="1" i="0">
-                <a:solidFill>
-                  <a:srgbClr val="E8801A"/>
-                </a:solidFill>
-                <a:latin typeface="Montserrat"/>
-              </a:rPr>
-              <a:t>▸  </a:t>
-            </a:r>
-            <a:r>
-              <a:rPr sz="1600" b="0" i="0">
-                <a:solidFill>
-                  <a:srgbClr val="1B2330"/>
-                </a:solidFill>
-                <a:latin typeface="Montserrat"/>
-              </a:rPr>
-              <a:t>Desmontable → UNE 60405-1 y -3</a:t>
-            </a:r>
-          </a:p>
-          <a:p>
-            <a:pPr>
-              <a:spcAft>
-                <a:spcPts val="1100"/>
-              </a:spcAft>
-            </a:pPr>
-            <a:r>
-              <a:rPr sz="1600" b="1" i="0">
-                <a:solidFill>
-                  <a:srgbClr val="E8801A"/>
-                </a:solidFill>
-                <a:latin typeface="Montserrat"/>
-              </a:rPr>
-              <a:t>▸  </a:t>
-            </a:r>
-            <a:r>
-              <a:rPr sz="1600" b="0" i="0">
-                <a:solidFill>
-                  <a:srgbClr val="1B2330"/>
-                </a:solidFill>
-                <a:latin typeface="Montserrat"/>
-              </a:rPr>
-              <a:t>Fijo → UNE 60405-1 y -2</a:t>
-            </a:r>
-          </a:p>
-          <a:p>
-            <a:pPr>
-              <a:spcAft>
-                <a:spcPts val="1100"/>
-              </a:spcAft>
-            </a:pPr>
-            <a:r>
-              <a:rPr sz="1600" b="1" i="0">
-                <a:solidFill>
-                  <a:srgbClr val="E8801A"/>
-                </a:solidFill>
-                <a:latin typeface="Montserrat"/>
-              </a:rPr>
-              <a:t>▸  </a:t>
-            </a:r>
-            <a:r>
-              <a:rPr sz="1600" b="0" i="0">
-                <a:solidFill>
-                  <a:srgbClr val="1B2330"/>
-                </a:solidFill>
-                <a:latin typeface="Montserrat"/>
-              </a:rPr>
-              <a:t>No confundas desmontable con fijo</a:t>
-            </a:r>
-          </a:p>
-          <a:p>
-            <a:pPr>
-              <a:spcAft>
-                <a:spcPts val="1100"/>
-              </a:spcAft>
-            </a:pPr>
-            <a:r>
-              <a:rPr sz="1600" b="1" i="0">
-                <a:solidFill>
-                  <a:srgbClr val="E8801A"/>
-                </a:solidFill>
-                <a:latin typeface="Montserrat"/>
-              </a:rPr>
-              <a:t>▸  </a:t>
-            </a:r>
-            <a:r>
-              <a:rPr sz="1600" b="0" i="0">
-                <a:solidFill>
-                  <a:srgbClr val="1B2330"/>
-                </a:solidFill>
-                <a:latin typeface="Montserrat"/>
-              </a:rPr>
-              <a:t>Otras aceptadas: UNE-EN 1775</a:t>
-            </a:r>
-          </a:p>
-        </p:txBody>
-      </p:sp>
-      <p:sp>
-        <p:nvSpPr>
-          <p:cNvPr id="9" name="imgph" descr="IMGQ:polyethylene to metal transition fitting"/>
+            <a:r>
+              <a:rPr sz="2400" b="1" i="0">
+                <a:solidFill>
+                  <a:srgbClr val="FFFFFF"/>
+                </a:solidFill>
+                <a:latin typeface="Montserrat"/>
+              </a:rPr>
+              <a:t>✔  RESPUESTA:  B</a:t>
+            </a:r>
+          </a:p>
+        </p:txBody>
+      </p:sp>
+      <p:sp>
+        <p:nvSpPr>
+          <p:cNvPr id="7" name="TextBox 6"/>
+          <p:cNvSpPr txBox="1"/>
+          <p:nvPr/>
+        </p:nvSpPr>
+        <p:spPr>
+          <a:xfrm>
+            <a:off x="822960" y="1417320"/>
+            <a:ext cx="10515600" cy="914400"/>
+          </a:xfrm>
+          <a:prstGeom prst="rect">
+            <a:avLst/>
+          </a:prstGeom>
+          <a:noFill/>
+        </p:spPr>
+        <p:txBody>
+          <a:bodyPr wrap="square">
+            <a:spAutoFit/>
+          </a:bodyPr>
+          <a:lstStyle/>
+          <a:p>
+            <a:r>
+              <a:rPr sz="1800" b="1" i="0">
+                <a:solidFill>
+                  <a:srgbClr val="64748B"/>
+                </a:solidFill>
+                <a:latin typeface="Montserrat"/>
+              </a:rPr>
+              <a:t>Para unir un tubo de cobre con uno de acero, la norma exige...</a:t>
+            </a:r>
+          </a:p>
+        </p:txBody>
+      </p:sp>
+      <p:sp>
+        <p:nvSpPr>
+          <p:cNvPr id="8" name="Rounded Rectangle 7"/>
           <p:cNvSpPr/>
           <p:nvPr/>
         </p:nvSpPr>
         <p:spPr>
           <a:xfrm>
-            <a:off x="5806440" y="1051560"/>
-            <a:ext cx="5298947" cy="4629150"/>
+            <a:off x="822960" y="2514600"/>
+            <a:ext cx="10515600" cy="914400"/>
           </a:xfrm>
           <a:prstGeom prst="roundRect">
             <a:avLst/>
           </a:prstGeom>
           <a:solidFill>
-            <a:srgbClr val="F3F6FB"/>
+            <a:srgbClr val="E9F6EE"/>
           </a:solidFill>
           <a:ln w="12700">
             <a:solidFill>
-              <a:srgbClr val="C7D2E6"/>
+              <a:srgbClr val="1E8E4B"/>
             </a:solidFill>
           </a:ln>
           <a:effectLst/>
@@ -7029,14 +7842,14 @@
       </p:sp>
       <p:sp>
         <p:nvSpPr>
-          <p:cNvPr id="10" name="TextBox 9"/>
+          <p:cNvPr id="9" name="TextBox 8"/>
           <p:cNvSpPr txBox="1"/>
           <p:nvPr/>
         </p:nvSpPr>
         <p:spPr>
           <a:xfrm>
-            <a:off x="6080760" y="2726055"/>
-            <a:ext cx="4750307" cy="1280160"/>
+            <a:off x="1097280" y="2697480"/>
+            <a:ext cx="10058400" cy="640080"/>
           </a:xfrm>
           <a:prstGeom prst="rect">
             <a:avLst/>
@@ -7049,27 +7862,66 @@
           </a:bodyPr>
           <a:lstStyle/>
           <a:p>
-            <a:pPr algn="ctr"/>
-            <a:r>
-              <a:rPr sz="1400" b="1" i="0">
-                <a:solidFill>
-                  <a:srgbClr val="64748B"/>
-                </a:solidFill>
-                <a:latin typeface="Montserrat"/>
-              </a:rPr>
-              <a:t>IMAGEN REALISTA</a:t>
-            </a:r>
-          </a:p>
-          <a:p>
-            <a:pPr algn="ctr"/>
-            <a:r>
-              <a:rPr sz="1100" b="0" i="1">
-                <a:solidFill>
-                  <a:srgbClr val="64748B"/>
-                </a:solidFill>
-                <a:latin typeface="Montserrat"/>
-              </a:rPr>
-              <a:t>polyethylene to metal transition fitting</a:t>
+            <a:r>
+              <a:rPr sz="1800" b="1" i="0">
+                <a:solidFill>
+                  <a:srgbClr val="1E8E4B"/>
+                </a:solidFill>
+                <a:latin typeface="Montserrat"/>
+              </a:rPr>
+              <a:t>B.  </a:t>
+            </a:r>
+            <a:r>
+              <a:rPr sz="1800" b="1" i="0">
+                <a:solidFill>
+                  <a:srgbClr val="1E2761"/>
+                </a:solidFill>
+                <a:latin typeface="Montserrat"/>
+              </a:rPr>
+              <a:t>Intercalar un accesorio de aleación de cobre</a:t>
+            </a:r>
+          </a:p>
+        </p:txBody>
+      </p:sp>
+      <p:sp>
+        <p:nvSpPr>
+          <p:cNvPr id="10" name="TextBox 9"/>
+          <p:cNvSpPr txBox="1"/>
+          <p:nvPr/>
+        </p:nvSpPr>
+        <p:spPr>
+          <a:xfrm>
+            <a:off x="822960" y="3749039"/>
+            <a:ext cx="10515600" cy="2194560"/>
+          </a:xfrm>
+          <a:prstGeom prst="rect">
+            <a:avLst/>
+          </a:prstGeom>
+          <a:noFill/>
+        </p:spPr>
+        <p:txBody>
+          <a:bodyPr wrap="square">
+            <a:spAutoFit/>
+          </a:bodyPr>
+          <a:lstStyle/>
+          <a:p>
+            <a:r>
+              <a:rPr sz="1500" b="1" i="0">
+                <a:solidFill>
+                  <a:srgbClr val="E8801A"/>
+                </a:solidFill>
+                <a:latin typeface="Montserrat"/>
+              </a:rPr>
+              <a:t>Por qué:  </a:t>
+            </a:r>
+            <a:r>
+              <a:rPr sz="1500" b="0" i="0">
+                <a:solidFill>
+                  <a:srgbClr val="1B2330"/>
+                </a:solidFill>
+                <a:latin typeface="Montserrat"/>
+              </a:rPr>
+              <a:t>Cobre y acero nunca se unen directos (formarían un par galvánico que corroe la junta); se intercala un accesorio de aleación de cobre, soldado al acero a tope por bordón a 850 °C.</a:t>
             </a:r>
           </a:p>
         </p:txBody>
@@ -7079,6 +7931,18 @@
   <p:clrMapOvr>
     <a:masterClrMapping/>
   </p:clrMapOvr>
+  <mc:AlternateContent xmlns:mc="http://schemas.openxmlformats.org/markup-compatibility/2006">
+    <mc:Choice xmlns:p14="http://schemas.microsoft.com/office/powerpoint/2010/main" Requires="p14">
+      <p:transition spd="med" p14:dur="700">
+        <p14:cube dir="r"/>
+      </p:transition>
+    </mc:Choice>
+    <mc:Fallback>
+      <p:transition spd="med">
+        <p:push dir="r"/>
+      </p:transition>
+    </mc:Fallback>
+  </mc:AlternateContent>
 </p:sld>
 </file>
 
@@ -7107,7 +7971,7 @@
             <a:avLst/>
           </a:prstGeom>
           <a:solidFill>
-            <a:srgbClr val="1E2761"/>
+            <a:srgbClr val="FFFFFF"/>
           </a:solidFill>
           <a:ln>
             <a:noFill/>
@@ -7144,8 +8008,8 @@
         </p:nvSpPr>
         <p:spPr>
           <a:xfrm>
-            <a:off x="822960" y="640080"/>
-            <a:ext cx="10515600" cy="457200"/>
+            <a:off x="10607040" y="320040"/>
+            <a:ext cx="1371600" cy="365760"/>
           </a:xfrm>
           <a:prstGeom prst="rect">
             <a:avLst/>
@@ -7158,30 +8022,133 @@
           </a:bodyPr>
           <a:lstStyle/>
           <a:p>
-            <a:r>
-              <a:rPr sz="1400" b="1" i="0">
-                <a:solidFill>
-                  <a:srgbClr val="F4A24C"/>
-                </a:solidFill>
-                <a:latin typeface="Montserrat"/>
-              </a:rPr>
-              <a:t>LO QUE YA DOMINAS</a:t>
-            </a:r>
-          </a:p>
-        </p:txBody>
-      </p:sp>
-      <p:sp>
-        <p:nvSpPr>
-          <p:cNvPr id="4" name="Rounded Rectangle 3"/>
+            <a:pPr algn="r"/>
+            <a:r>
+              <a:rPr sz="1000" b="1" i="0">
+                <a:solidFill>
+                  <a:srgbClr val="64748B"/>
+                </a:solidFill>
+                <a:latin typeface="Montserrat"/>
+              </a:rPr>
+              <a:t>015 / 021</a:t>
+            </a:r>
+          </a:p>
+        </p:txBody>
+      </p:sp>
+      <p:sp>
+        <p:nvSpPr>
+          <p:cNvPr id="4" name="TextBox 3"/>
+          <p:cNvSpPr txBox="1"/>
+          <p:nvPr/>
+        </p:nvSpPr>
+        <p:spPr>
+          <a:xfrm>
+            <a:off x="457200" y="6419088"/>
+            <a:ext cx="8229600" cy="365760"/>
+          </a:xfrm>
+          <a:prstGeom prst="rect">
+            <a:avLst/>
+          </a:prstGeom>
+          <a:noFill/>
+        </p:spPr>
+        <p:txBody>
+          <a:bodyPr wrap="square">
+            <a:spAutoFit/>
+          </a:bodyPr>
+          <a:lstStyle/>
+          <a:p>
+            <a:r>
+              <a:rPr sz="900" b="0" i="0">
+                <a:solidFill>
+                  <a:srgbClr val="64748B"/>
+                </a:solidFill>
+                <a:latin typeface="Montserrat"/>
+              </a:rPr>
+              <a:t>Curso Gas B · Tema 10 · UNE 60670-3</a:t>
+            </a:r>
+          </a:p>
+        </p:txBody>
+      </p:sp>
+      <p:sp>
+        <p:nvSpPr>
+          <p:cNvPr id="5" name="TextBox 4"/>
+          <p:cNvSpPr txBox="1"/>
+          <p:nvPr/>
+        </p:nvSpPr>
+        <p:spPr>
+          <a:xfrm>
+            <a:off x="822960" y="457200"/>
+            <a:ext cx="10058400" cy="365760"/>
+          </a:xfrm>
+          <a:prstGeom prst="rect">
+            <a:avLst/>
+          </a:prstGeom>
+          <a:noFill/>
+        </p:spPr>
+        <p:txBody>
+          <a:bodyPr wrap="square">
+            <a:spAutoFit/>
+          </a:bodyPr>
+          <a:lstStyle/>
+          <a:p>
+            <a:r>
+              <a:rPr sz="1300" b="1" i="0">
+                <a:solidFill>
+                  <a:srgbClr val="E8801A"/>
+                </a:solidFill>
+                <a:latin typeface="Montserrat"/>
+              </a:rPr>
+              <a:t>UNIONES · PLOMO</a:t>
+            </a:r>
+          </a:p>
+        </p:txBody>
+      </p:sp>
+      <p:sp>
+        <p:nvSpPr>
+          <p:cNvPr id="6" name="TextBox 5"/>
+          <p:cNvSpPr txBox="1"/>
+          <p:nvPr/>
+        </p:nvSpPr>
+        <p:spPr>
+          <a:xfrm>
+            <a:off x="822960" y="868680"/>
+            <a:ext cx="10515600" cy="914400"/>
+          </a:xfrm>
+          <a:prstGeom prst="rect">
+            <a:avLst/>
+          </a:prstGeom>
+          <a:noFill/>
+        </p:spPr>
+        <p:txBody>
+          <a:bodyPr wrap="square">
+            <a:spAutoFit/>
+          </a:bodyPr>
+          <a:lstStyle/>
+          <a:p>
+            <a:r>
+              <a:rPr sz="2800" b="1" i="0">
+                <a:solidFill>
+                  <a:srgbClr val="1E2761"/>
+                </a:solidFill>
+                <a:latin typeface="Montserrat"/>
+              </a:rPr>
+              <a:t>El plomo: solo para lo viejo</a:t>
+            </a:r>
+          </a:p>
+        </p:txBody>
+      </p:sp>
+      <p:sp>
+        <p:nvSpPr>
+          <p:cNvPr id="7" name="Rectangle 6"/>
           <p:cNvSpPr/>
           <p:nvPr/>
         </p:nvSpPr>
         <p:spPr>
           <a:xfrm>
-            <a:off x="868680" y="1051560"/>
-            <a:ext cx="1463040" cy="82296"/>
-          </a:xfrm>
-          <a:prstGeom prst="roundRect">
+            <a:off x="868680" y="1627632"/>
+            <a:ext cx="2011680" cy="73152"/>
+          </a:xfrm>
+          <a:prstGeom prst="rect">
             <a:avLst/>
           </a:prstGeom>
           <a:solidFill>
@@ -7216,14 +8183,14 @@
       </p:sp>
       <p:sp>
         <p:nvSpPr>
-          <p:cNvPr id="5" name="TextBox 4"/>
+          <p:cNvPr id="8" name="TextBox 7"/>
           <p:cNvSpPr txBox="1"/>
           <p:nvPr/>
         </p:nvSpPr>
         <p:spPr>
           <a:xfrm>
-            <a:off x="822960" y="1234440"/>
-            <a:ext cx="10515600" cy="1097280"/>
+            <a:off x="6355080" y="1965960"/>
+            <a:ext cx="5029200" cy="4206240"/>
           </a:xfrm>
           <a:prstGeom prst="rect">
             <a:avLst/>
@@ -7236,28 +8203,163 @@
           </a:bodyPr>
           <a:lstStyle/>
           <a:p>
-            <a:r>
-              <a:rPr sz="3400" b="1" i="0">
-                <a:solidFill>
-                  <a:srgbClr val="FFFFFF"/>
-                </a:solidFill>
-                <a:latin typeface="Montserrat"/>
-              </a:rPr>
-              <a:t>Ya sabes por qué no fuga una instalación</a:t>
-            </a:r>
-          </a:p>
-        </p:txBody>
-      </p:sp>
-      <p:sp>
-        <p:nvSpPr>
-          <p:cNvPr id="6" name="TextBox 5"/>
+            <a:pPr>
+              <a:spcAft>
+                <a:spcPts val="1100"/>
+              </a:spcAft>
+            </a:pPr>
+            <a:r>
+              <a:rPr sz="1600" b="1" i="0">
+                <a:solidFill>
+                  <a:srgbClr val="E8801A"/>
+                </a:solidFill>
+                <a:latin typeface="Montserrat"/>
+              </a:rPr>
+              <a:t>▸  </a:t>
+            </a:r>
+            <a:r>
+              <a:rPr sz="1600" b="0" i="0">
+                <a:solidFill>
+                  <a:srgbClr val="1B2330"/>
+                </a:solidFill>
+                <a:latin typeface="Montserrat"/>
+              </a:rPr>
+              <a:t>Nada de plomo en obra nueva</a:t>
+            </a:r>
+          </a:p>
+          <a:p>
+            <a:pPr>
+              <a:spcAft>
+                <a:spcPts val="1100"/>
+              </a:spcAft>
+            </a:pPr>
+            <a:r>
+              <a:rPr sz="1600" b="1" i="0">
+                <a:solidFill>
+                  <a:srgbClr val="E8801A"/>
+                </a:solidFill>
+                <a:latin typeface="Montserrat"/>
+              </a:rPr>
+              <a:t>▸  </a:t>
+            </a:r>
+            <a:r>
+              <a:rPr sz="1600" b="0" i="0">
+                <a:solidFill>
+                  <a:srgbClr val="1B2330"/>
+                </a:solidFill>
+                <a:latin typeface="Montserrat"/>
+              </a:rPr>
+              <a:t>Solo ampliar o modificar lo ya en servicio</a:t>
+            </a:r>
+          </a:p>
+          <a:p>
+            <a:pPr>
+              <a:spcAft>
+                <a:spcPts val="1100"/>
+              </a:spcAft>
+            </a:pPr>
+            <a:r>
+              <a:rPr sz="1600" b="1" i="0">
+                <a:solidFill>
+                  <a:srgbClr val="E8801A"/>
+                </a:solidFill>
+                <a:latin typeface="Montserrat"/>
+              </a:rPr>
+              <a:t>▸  </a:t>
+            </a:r>
+            <a:r>
+              <a:rPr sz="1600" b="0" i="0">
+                <a:solidFill>
+                  <a:srgbClr val="1B2330"/>
+                </a:solidFill>
+                <a:latin typeface="Montserrat"/>
+              </a:rPr>
+              <a:t>Solo hasta 0,05 bar y uso doméstico</a:t>
+            </a:r>
+          </a:p>
+          <a:p>
+            <a:pPr>
+              <a:spcAft>
+                <a:spcPts val="1100"/>
+              </a:spcAft>
+            </a:pPr>
+            <a:r>
+              <a:rPr sz="1600" b="1" i="0">
+                <a:solidFill>
+                  <a:srgbClr val="E8801A"/>
+                </a:solidFill>
+                <a:latin typeface="Montserrat"/>
+              </a:rPr>
+              <a:t>▸  </a:t>
+            </a:r>
+            <a:r>
+              <a:rPr sz="1600" b="0" i="0">
+                <a:solidFill>
+                  <a:srgbClr val="1B2330"/>
+                </a:solidFill>
+                <a:latin typeface="Montserrat"/>
+              </a:rPr>
+              <a:t>Con acero o inox: manguito de aleación de cobre</a:t>
+            </a:r>
+          </a:p>
+        </p:txBody>
+      </p:sp>
+      <p:sp>
+        <p:nvSpPr>
+          <p:cNvPr id="9" name="imgph" descr="IMGQ:old lead pipe gas installation wall"/>
+          <p:cNvSpPr/>
+          <p:nvPr/>
+        </p:nvSpPr>
+        <p:spPr>
+          <a:xfrm>
+            <a:off x="822960" y="1965960"/>
+            <a:ext cx="5303520" cy="4572000"/>
+          </a:xfrm>
+          <a:prstGeom prst="roundRect">
+            <a:avLst/>
+          </a:prstGeom>
+          <a:solidFill>
+            <a:srgbClr val="F3F6FB"/>
+          </a:solidFill>
+          <a:ln w="12700">
+            <a:solidFill>
+              <a:srgbClr val="C7D2E6"/>
+            </a:solidFill>
+          </a:ln>
+          <a:effectLst/>
+        </p:spPr>
+        <p:style>
+          <a:lnRef idx="1">
+            <a:schemeClr val="accent1"/>
+          </a:lnRef>
+          <a:fillRef idx="3">
+            <a:schemeClr val="accent1"/>
+          </a:fillRef>
+          <a:effectRef idx="2">
+            <a:schemeClr val="accent1"/>
+          </a:effectRef>
+          <a:fontRef idx="minor">
+            <a:schemeClr val="lt1"/>
+          </a:fontRef>
+        </p:style>
+        <p:txBody>
+          <a:bodyPr rtlCol="0" anchor="ctr"/>
+          <a:lstStyle/>
+          <a:p>
+            <a:pPr algn="ctr"/>
+          </a:p>
+        </p:txBody>
+      </p:sp>
+      <p:sp>
+        <p:nvSpPr>
+          <p:cNvPr id="10" name="TextBox 9"/>
           <p:cNvSpPr txBox="1"/>
           <p:nvPr/>
         </p:nvSpPr>
         <p:spPr>
           <a:xfrm>
-            <a:off x="822960" y="2606040"/>
-            <a:ext cx="10515600" cy="2743200"/>
+            <a:off x="1097280" y="3611880"/>
+            <a:ext cx="4754880" cy="1280160"/>
           </a:xfrm>
           <a:prstGeom prst="rect">
             <a:avLst/>
@@ -7270,119 +8372,254 @@
           </a:bodyPr>
           <a:lstStyle/>
           <a:p>
-            <a:pPr>
-              <a:spcAft>
-                <a:spcPts val="1200"/>
-              </a:spcAft>
-            </a:pPr>
-            <a:r>
-              <a:rPr sz="2000" b="1" i="0">
-                <a:solidFill>
-                  <a:srgbClr val="F4A24C"/>
-                </a:solidFill>
-                <a:latin typeface="Montserrat"/>
-              </a:rPr>
-              <a:t>✓  </a:t>
-            </a:r>
-            <a:r>
-              <a:rPr sz="1900" b="0" i="0">
-                <a:solidFill>
-                  <a:srgbClr val="FFFFFF"/>
-                </a:solidFill>
-                <a:latin typeface="Montserrat"/>
-              </a:rPr>
-              <a:t>Estanquidad: la única regla que manda</a:t>
-            </a:r>
-          </a:p>
-          <a:p>
-            <a:pPr>
-              <a:spcAft>
-                <a:spcPts val="1200"/>
-              </a:spcAft>
-            </a:pPr>
-            <a:r>
-              <a:rPr sz="2000" b="1" i="0">
-                <a:solidFill>
-                  <a:srgbClr val="F4A24C"/>
-                </a:solidFill>
-                <a:latin typeface="Montserrat"/>
-              </a:rPr>
-              <a:t>✓  </a:t>
-            </a:r>
-            <a:r>
-              <a:rPr sz="1900" b="0" i="0">
-                <a:solidFill>
-                  <a:srgbClr val="FFFFFF"/>
-                </a:solidFill>
-                <a:latin typeface="Montserrat"/>
-              </a:rPr>
-              <a:t>Frontera blanda / fuerte en 0,05 bar</a:t>
-            </a:r>
-          </a:p>
-          <a:p>
-            <a:pPr>
-              <a:spcAft>
-                <a:spcPts val="1200"/>
-              </a:spcAft>
-            </a:pPr>
-            <a:r>
-              <a:rPr sz="2000" b="1" i="0">
-                <a:solidFill>
-                  <a:srgbClr val="F4A24C"/>
-                </a:solidFill>
-                <a:latin typeface="Montserrat"/>
-              </a:rPr>
-              <a:t>✓  </a:t>
-            </a:r>
-            <a:r>
-              <a:rPr sz="1900" b="0" i="0">
-                <a:solidFill>
-                  <a:srgbClr val="FFFFFF"/>
-                </a:solidFill>
-                <a:latin typeface="Montserrat"/>
-              </a:rPr>
-              <a:t>Fusión: 220 – 450 – 850 °C</a:t>
-            </a:r>
-          </a:p>
-          <a:p>
-            <a:pPr>
-              <a:spcAft>
-                <a:spcPts val="1200"/>
-              </a:spcAft>
-            </a:pPr>
-            <a:r>
-              <a:rPr sz="2000" b="1" i="0">
-                <a:solidFill>
-                  <a:srgbClr val="F4A24C"/>
-                </a:solidFill>
-                <a:latin typeface="Montserrat"/>
-              </a:rPr>
-              <a:t>✓  </a:t>
-            </a:r>
-            <a:r>
-              <a:rPr sz="1900" b="0" i="0">
-                <a:solidFill>
-                  <a:srgbClr val="FFFFFF"/>
-                </a:solidFill>
-                <a:latin typeface="Montserrat"/>
-              </a:rPr>
-              <a:t>Metales distintos: siempre el traductor</a:t>
-            </a:r>
-          </a:p>
-        </p:txBody>
-      </p:sp>
-      <p:sp>
-        <p:nvSpPr>
-          <p:cNvPr id="7" name="Rounded Rectangle 6"/>
+            <a:pPr algn="ctr"/>
+            <a:r>
+              <a:rPr sz="1400" b="1" i="0">
+                <a:solidFill>
+                  <a:srgbClr val="64748B"/>
+                </a:solidFill>
+                <a:latin typeface="Montserrat"/>
+              </a:rPr>
+              <a:t>IMAGEN</a:t>
+            </a:r>
+          </a:p>
+          <a:p>
+            <a:pPr algn="ctr"/>
+            <a:r>
+              <a:rPr sz="1100" b="0" i="1">
+                <a:solidFill>
+                  <a:srgbClr val="64748B"/>
+                </a:solidFill>
+                <a:latin typeface="Montserrat"/>
+              </a:rPr>
+              <a:t>old lead pipe gas installation wall</a:t>
+            </a:r>
+          </a:p>
+        </p:txBody>
+      </p:sp>
+    </p:spTree>
+  </p:cSld>
+  <p:clrMapOvr>
+    <a:masterClrMapping/>
+  </p:clrMapOvr>
+  <mc:AlternateContent xmlns:mc="http://schemas.openxmlformats.org/markup-compatibility/2006">
+    <mc:Choice xmlns:p14="http://schemas.microsoft.com/office/powerpoint/2010/main" Requires="p14">
+      <p:transition spd="med" p14:dur="700">
+        <p14:cube dir="l"/>
+      </p:transition>
+    </mc:Choice>
+    <mc:Fallback>
+      <p:transition spd="med">
+        <p:push dir="l"/>
+      </p:transition>
+    </mc:Fallback>
+  </mc:AlternateContent>
+</p:sld>
+</file>
+
+<file path=ppt/slides/slide16.xml><?xml version="1.0" encoding="utf-8"?>
+<p:sld xmlns:a="http://schemas.openxmlformats.org/drawingml/2006/main" xmlns:p="http://schemas.openxmlformats.org/presentationml/2006/main" xmlns:r="http://schemas.openxmlformats.org/officeDocument/2006/relationships">
+  <p:cSld>
+    <p:spTree>
+      <p:nvGrpSpPr>
+        <p:cNvPr id="1" name=""/>
+        <p:cNvGrpSpPr/>
+        <p:nvPr/>
+      </p:nvGrpSpPr>
+      <p:grpSpPr/>
+      <p:sp>
+        <p:nvSpPr>
+          <p:cNvPr id="2" name="Rectangle 1"/>
           <p:cNvSpPr/>
           <p:nvPr/>
         </p:nvSpPr>
         <p:spPr>
           <a:xfrm>
-            <a:off x="822960" y="5532120"/>
-            <a:ext cx="10515600" cy="822960"/>
-          </a:xfrm>
-          <a:prstGeom prst="roundRect">
+            <a:off x="0" y="0"/>
+            <a:ext cx="12191695" cy="6858000"/>
+          </a:xfrm>
+          <a:prstGeom prst="rect">
+            <a:avLst/>
+          </a:prstGeom>
+          <a:solidFill>
+            <a:srgbClr val="FFFFFF"/>
+          </a:solidFill>
+          <a:ln>
+            <a:noFill/>
+          </a:ln>
+          <a:effectLst/>
+        </p:spPr>
+        <p:style>
+          <a:lnRef idx="1">
+            <a:schemeClr val="accent1"/>
+          </a:lnRef>
+          <a:fillRef idx="3">
+            <a:schemeClr val="accent1"/>
+          </a:fillRef>
+          <a:effectRef idx="2">
+            <a:schemeClr val="accent1"/>
+          </a:effectRef>
+          <a:fontRef idx="minor">
+            <a:schemeClr val="lt1"/>
+          </a:fontRef>
+        </p:style>
+        <p:txBody>
+          <a:bodyPr rtlCol="0" anchor="ctr"/>
+          <a:lstStyle/>
+          <a:p>
+            <a:pPr algn="ctr"/>
+          </a:p>
+        </p:txBody>
+      </p:sp>
+      <p:sp>
+        <p:nvSpPr>
+          <p:cNvPr id="3" name="TextBox 2"/>
+          <p:cNvSpPr txBox="1"/>
+          <p:nvPr/>
+        </p:nvSpPr>
+        <p:spPr>
+          <a:xfrm>
+            <a:off x="10607040" y="320040"/>
+            <a:ext cx="1371600" cy="365760"/>
+          </a:xfrm>
+          <a:prstGeom prst="rect">
+            <a:avLst/>
+          </a:prstGeom>
+          <a:noFill/>
+        </p:spPr>
+        <p:txBody>
+          <a:bodyPr wrap="square">
+            <a:spAutoFit/>
+          </a:bodyPr>
+          <a:lstStyle/>
+          <a:p>
+            <a:pPr algn="r"/>
+            <a:r>
+              <a:rPr sz="1000" b="1" i="0">
+                <a:solidFill>
+                  <a:srgbClr val="64748B"/>
+                </a:solidFill>
+                <a:latin typeface="Montserrat"/>
+              </a:rPr>
+              <a:t>016 / 021</a:t>
+            </a:r>
+          </a:p>
+        </p:txBody>
+      </p:sp>
+      <p:sp>
+        <p:nvSpPr>
+          <p:cNvPr id="4" name="TextBox 3"/>
+          <p:cNvSpPr txBox="1"/>
+          <p:nvPr/>
+        </p:nvSpPr>
+        <p:spPr>
+          <a:xfrm>
+            <a:off x="457200" y="6419088"/>
+            <a:ext cx="8229600" cy="365760"/>
+          </a:xfrm>
+          <a:prstGeom prst="rect">
+            <a:avLst/>
+          </a:prstGeom>
+          <a:noFill/>
+        </p:spPr>
+        <p:txBody>
+          <a:bodyPr wrap="square">
+            <a:spAutoFit/>
+          </a:bodyPr>
+          <a:lstStyle/>
+          <a:p>
+            <a:r>
+              <a:rPr sz="900" b="0" i="0">
+                <a:solidFill>
+                  <a:srgbClr val="64748B"/>
+                </a:solidFill>
+                <a:latin typeface="Montserrat"/>
+              </a:rPr>
+              <a:t>Curso Gas B · Tema 10 · UNE 60670-3</a:t>
+            </a:r>
+          </a:p>
+        </p:txBody>
+      </p:sp>
+      <p:sp>
+        <p:nvSpPr>
+          <p:cNvPr id="5" name="TextBox 4"/>
+          <p:cNvSpPr txBox="1"/>
+          <p:nvPr/>
+        </p:nvSpPr>
+        <p:spPr>
+          <a:xfrm>
+            <a:off x="822960" y="457200"/>
+            <a:ext cx="10058400" cy="365760"/>
+          </a:xfrm>
+          <a:prstGeom prst="rect">
+            <a:avLst/>
+          </a:prstGeom>
+          <a:noFill/>
+        </p:spPr>
+        <p:txBody>
+          <a:bodyPr wrap="square">
+            <a:spAutoFit/>
+          </a:bodyPr>
+          <a:lstStyle/>
+          <a:p>
+            <a:r>
+              <a:rPr sz="1300" b="1" i="0">
+                <a:solidFill>
+                  <a:srgbClr val="E8801A"/>
+                </a:solidFill>
+                <a:latin typeface="Montserrat"/>
+              </a:rPr>
+              <a:t>UNIONES MECÁNICAS · DESMONTABLES</a:t>
+            </a:r>
+          </a:p>
+        </p:txBody>
+      </p:sp>
+      <p:sp>
+        <p:nvSpPr>
+          <p:cNvPr id="6" name="TextBox 5"/>
+          <p:cNvSpPr txBox="1"/>
+          <p:nvPr/>
+        </p:nvSpPr>
+        <p:spPr>
+          <a:xfrm>
+            <a:off x="822960" y="868680"/>
+            <a:ext cx="10515600" cy="914400"/>
+          </a:xfrm>
+          <a:prstGeom prst="rect">
+            <a:avLst/>
+          </a:prstGeom>
+          <a:noFill/>
+        </p:spPr>
+        <p:txBody>
+          <a:bodyPr wrap="square">
+            <a:spAutoFit/>
+          </a:bodyPr>
+          <a:lstStyle/>
+          <a:p>
+            <a:r>
+              <a:rPr sz="2800" b="1" i="0">
+                <a:solidFill>
+                  <a:srgbClr val="1E2761"/>
+                </a:solidFill>
+                <a:latin typeface="Montserrat"/>
+              </a:rPr>
+              <a:t>Desmontables: se vuelven a abrir</a:t>
+            </a:r>
+          </a:p>
+        </p:txBody>
+      </p:sp>
+      <p:sp>
+        <p:nvSpPr>
+          <p:cNvPr id="7" name="Rectangle 6"/>
+          <p:cNvSpPr/>
+          <p:nvPr/>
+        </p:nvSpPr>
+        <p:spPr>
+          <a:xfrm>
+            <a:off x="868680" y="1627632"/>
+            <a:ext cx="2011680" cy="73152"/>
+          </a:xfrm>
+          <a:prstGeom prst="rect">
             <a:avLst/>
           </a:prstGeom>
           <a:solidFill>
@@ -7423,8 +8660,8 @@
         </p:nvSpPr>
         <p:spPr>
           <a:xfrm>
-            <a:off x="1051560" y="5623560"/>
-            <a:ext cx="10058400" cy="640080"/>
+            <a:off x="822960" y="1965960"/>
+            <a:ext cx="5029200" cy="4206240"/>
           </a:xfrm>
           <a:prstGeom prst="rect">
             <a:avLst/>
@@ -7437,14 +8674,196 @@
           </a:bodyPr>
           <a:lstStyle/>
           <a:p>
-            <a:r>
-              <a:rPr sz="1500" b="1" i="1">
-                <a:solidFill>
-                  <a:srgbClr val="1E2761"/>
-                </a:solidFill>
-                <a:latin typeface="Montserrat"/>
-              </a:rPr>
-              <a:t>Has cerrado la Parte 3 entera: ya lees una instalación material a material y unión a unión.</a:t>
+            <a:pPr>
+              <a:spcAft>
+                <a:spcPts val="1100"/>
+              </a:spcAft>
+            </a:pPr>
+            <a:r>
+              <a:rPr sz="1600" b="1" i="0">
+                <a:solidFill>
+                  <a:srgbClr val="E8801A"/>
+                </a:solidFill>
+                <a:latin typeface="Montserrat"/>
+              </a:rPr>
+              <a:t>▸  </a:t>
+            </a:r>
+            <a:r>
+              <a:rPr sz="1600" b="0" i="0">
+                <a:solidFill>
+                  <a:srgbClr val="1B2330"/>
+                </a:solidFill>
+                <a:latin typeface="Montserrat"/>
+              </a:rPr>
+              <a:t>Junta plana, bridas y metal-metal</a:t>
+            </a:r>
+          </a:p>
+          <a:p>
+            <a:pPr>
+              <a:spcAft>
+                <a:spcPts val="1100"/>
+              </a:spcAft>
+            </a:pPr>
+            <a:r>
+              <a:rPr sz="1600" b="1" i="0">
+                <a:solidFill>
+                  <a:srgbClr val="E8801A"/>
+                </a:solidFill>
+                <a:latin typeface="Montserrat"/>
+              </a:rPr>
+              <a:t>▸  </a:t>
+            </a:r>
+            <a:r>
+              <a:rPr sz="1600" b="0" i="0">
+                <a:solidFill>
+                  <a:srgbClr val="1B2330"/>
+                </a:solidFill>
+                <a:latin typeface="Montserrat"/>
+              </a:rPr>
+              <a:t>Junta plana: elementos pequeños</a:t>
+            </a:r>
+          </a:p>
+          <a:p>
+            <a:pPr>
+              <a:spcAft>
+                <a:spcPts val="1100"/>
+              </a:spcAft>
+            </a:pPr>
+            <a:r>
+              <a:rPr sz="1600" b="1" i="0">
+                <a:solidFill>
+                  <a:srgbClr val="E8801A"/>
+                </a:solidFill>
+                <a:latin typeface="Montserrat"/>
+              </a:rPr>
+              <a:t>▸  </a:t>
+            </a:r>
+            <a:r>
+              <a:rPr sz="1600" b="0" i="0">
+                <a:solidFill>
+                  <a:srgbClr val="1B2330"/>
+                </a:solidFill>
+                <a:latin typeface="Montserrat"/>
+              </a:rPr>
+              <a:t>Bridas: diámetros mayores</a:t>
+            </a:r>
+          </a:p>
+          <a:p>
+            <a:pPr>
+              <a:spcAft>
+                <a:spcPts val="1100"/>
+              </a:spcAft>
+            </a:pPr>
+            <a:r>
+              <a:rPr sz="1600" b="1" i="0">
+                <a:solidFill>
+                  <a:srgbClr val="E8801A"/>
+                </a:solidFill>
+                <a:latin typeface="Montserrat"/>
+              </a:rPr>
+              <a:t>▸  </a:t>
+            </a:r>
+            <a:r>
+              <a:rPr sz="1600" b="0" i="0">
+                <a:solidFill>
+                  <a:srgbClr val="1B2330"/>
+                </a:solidFill>
+                <a:latin typeface="Montserrat"/>
+              </a:rPr>
+              <a:t>Metal-metal solo en conjuntos de regulación</a:t>
+            </a:r>
+          </a:p>
+        </p:txBody>
+      </p:sp>
+      <p:sp>
+        <p:nvSpPr>
+          <p:cNvPr id="9" name="imgph" descr="IMGQ:flanged gas pipe connection bolts"/>
+          <p:cNvSpPr/>
+          <p:nvPr/>
+        </p:nvSpPr>
+        <p:spPr>
+          <a:xfrm>
+            <a:off x="6080760" y="1965960"/>
+            <a:ext cx="5303520" cy="4572000"/>
+          </a:xfrm>
+          <a:prstGeom prst="roundRect">
+            <a:avLst/>
+          </a:prstGeom>
+          <a:solidFill>
+            <a:srgbClr val="F3F6FB"/>
+          </a:solidFill>
+          <a:ln w="12700">
+            <a:solidFill>
+              <a:srgbClr val="C7D2E6"/>
+            </a:solidFill>
+          </a:ln>
+          <a:effectLst/>
+        </p:spPr>
+        <p:style>
+          <a:lnRef idx="1">
+            <a:schemeClr val="accent1"/>
+          </a:lnRef>
+          <a:fillRef idx="3">
+            <a:schemeClr val="accent1"/>
+          </a:fillRef>
+          <a:effectRef idx="2">
+            <a:schemeClr val="accent1"/>
+          </a:effectRef>
+          <a:fontRef idx="minor">
+            <a:schemeClr val="lt1"/>
+          </a:fontRef>
+        </p:style>
+        <p:txBody>
+          <a:bodyPr rtlCol="0" anchor="ctr"/>
+          <a:lstStyle/>
+          <a:p>
+            <a:pPr algn="ctr"/>
+          </a:p>
+        </p:txBody>
+      </p:sp>
+      <p:sp>
+        <p:nvSpPr>
+          <p:cNvPr id="10" name="TextBox 9"/>
+          <p:cNvSpPr txBox="1"/>
+          <p:nvPr/>
+        </p:nvSpPr>
+        <p:spPr>
+          <a:xfrm>
+            <a:off x="6355080" y="3611880"/>
+            <a:ext cx="4754880" cy="1280160"/>
+          </a:xfrm>
+          <a:prstGeom prst="rect">
+            <a:avLst/>
+          </a:prstGeom>
+          <a:noFill/>
+        </p:spPr>
+        <p:txBody>
+          <a:bodyPr wrap="square">
+            <a:spAutoFit/>
+          </a:bodyPr>
+          <a:lstStyle/>
+          <a:p>
+            <a:pPr algn="ctr"/>
+            <a:r>
+              <a:rPr sz="1400" b="1" i="0">
+                <a:solidFill>
+                  <a:srgbClr val="64748B"/>
+                </a:solidFill>
+                <a:latin typeface="Montserrat"/>
+              </a:rPr>
+              <a:t>IMAGEN</a:t>
+            </a:r>
+          </a:p>
+          <a:p>
+            <a:pPr algn="ctr"/>
+            <a:r>
+              <a:rPr sz="1100" b="0" i="1">
+                <a:solidFill>
+                  <a:srgbClr val="64748B"/>
+                </a:solidFill>
+                <a:latin typeface="Montserrat"/>
+              </a:rPr>
+              <a:t>flanged gas pipe connection bolts</a:t>
             </a:r>
           </a:p>
         </p:txBody>
@@ -7454,6 +8873,1767 @@
   <p:clrMapOvr>
     <a:masterClrMapping/>
   </p:clrMapOvr>
+  <mc:AlternateContent xmlns:mc="http://schemas.openxmlformats.org/markup-compatibility/2006">
+    <mc:Choice xmlns:p14="http://schemas.microsoft.com/office/powerpoint/2010/main" Requires="p14">
+      <p:transition spd="med" p14:dur="700">
+        <p14:cube dir="r"/>
+      </p:transition>
+    </mc:Choice>
+    <mc:Fallback>
+      <p:transition spd="med">
+        <p:push dir="r"/>
+      </p:transition>
+    </mc:Fallback>
+  </mc:AlternateContent>
+</p:sld>
+</file>
+
+<file path=ppt/slides/slide17.xml><?xml version="1.0" encoding="utf-8"?>
+<p:sld xmlns:a="http://schemas.openxmlformats.org/drawingml/2006/main" xmlns:p="http://schemas.openxmlformats.org/presentationml/2006/main" xmlns:r="http://schemas.openxmlformats.org/officeDocument/2006/relationships">
+  <p:cSld>
+    <p:spTree>
+      <p:nvGrpSpPr>
+        <p:cNvPr id="1" name=""/>
+        <p:cNvGrpSpPr/>
+        <p:nvPr/>
+      </p:nvGrpSpPr>
+      <p:grpSpPr/>
+      <p:sp>
+        <p:nvSpPr>
+          <p:cNvPr id="2" name="Rectangle 1"/>
+          <p:cNvSpPr/>
+          <p:nvPr/>
+        </p:nvSpPr>
+        <p:spPr>
+          <a:xfrm>
+            <a:off x="0" y="0"/>
+            <a:ext cx="12191695" cy="6858000"/>
+          </a:xfrm>
+          <a:prstGeom prst="rect">
+            <a:avLst/>
+          </a:prstGeom>
+          <a:solidFill>
+            <a:srgbClr val="FFFFFF"/>
+          </a:solidFill>
+          <a:ln>
+            <a:noFill/>
+          </a:ln>
+          <a:effectLst/>
+        </p:spPr>
+        <p:style>
+          <a:lnRef idx="1">
+            <a:schemeClr val="accent1"/>
+          </a:lnRef>
+          <a:fillRef idx="3">
+            <a:schemeClr val="accent1"/>
+          </a:fillRef>
+          <a:effectRef idx="2">
+            <a:schemeClr val="accent1"/>
+          </a:effectRef>
+          <a:fontRef idx="minor">
+            <a:schemeClr val="lt1"/>
+          </a:fontRef>
+        </p:style>
+        <p:txBody>
+          <a:bodyPr rtlCol="0" anchor="ctr"/>
+          <a:lstStyle/>
+          <a:p>
+            <a:pPr algn="ctr"/>
+          </a:p>
+        </p:txBody>
+      </p:sp>
+      <p:sp>
+        <p:nvSpPr>
+          <p:cNvPr id="3" name="TextBox 2"/>
+          <p:cNvSpPr txBox="1"/>
+          <p:nvPr/>
+        </p:nvSpPr>
+        <p:spPr>
+          <a:xfrm>
+            <a:off x="10607040" y="320040"/>
+            <a:ext cx="1371600" cy="365760"/>
+          </a:xfrm>
+          <a:prstGeom prst="rect">
+            <a:avLst/>
+          </a:prstGeom>
+          <a:noFill/>
+        </p:spPr>
+        <p:txBody>
+          <a:bodyPr wrap="square">
+            <a:spAutoFit/>
+          </a:bodyPr>
+          <a:lstStyle/>
+          <a:p>
+            <a:pPr algn="r"/>
+            <a:r>
+              <a:rPr sz="1000" b="1" i="0">
+                <a:solidFill>
+                  <a:srgbClr val="64748B"/>
+                </a:solidFill>
+                <a:latin typeface="Montserrat"/>
+              </a:rPr>
+              <a:t>017 / 021</a:t>
+            </a:r>
+          </a:p>
+        </p:txBody>
+      </p:sp>
+      <p:sp>
+        <p:nvSpPr>
+          <p:cNvPr id="4" name="TextBox 3"/>
+          <p:cNvSpPr txBox="1"/>
+          <p:nvPr/>
+        </p:nvSpPr>
+        <p:spPr>
+          <a:xfrm>
+            <a:off x="457200" y="6419088"/>
+            <a:ext cx="8229600" cy="365760"/>
+          </a:xfrm>
+          <a:prstGeom prst="rect">
+            <a:avLst/>
+          </a:prstGeom>
+          <a:noFill/>
+        </p:spPr>
+        <p:txBody>
+          <a:bodyPr wrap="square">
+            <a:spAutoFit/>
+          </a:bodyPr>
+          <a:lstStyle/>
+          <a:p>
+            <a:r>
+              <a:rPr sz="900" b="0" i="0">
+                <a:solidFill>
+                  <a:srgbClr val="64748B"/>
+                </a:solidFill>
+                <a:latin typeface="Montserrat"/>
+              </a:rPr>
+              <a:t>Curso Gas B · Tema 10 · UNE 60670-3</a:t>
+            </a:r>
+          </a:p>
+        </p:txBody>
+      </p:sp>
+      <p:sp>
+        <p:nvSpPr>
+          <p:cNvPr id="5" name="TextBox 4"/>
+          <p:cNvSpPr txBox="1"/>
+          <p:nvPr/>
+        </p:nvSpPr>
+        <p:spPr>
+          <a:xfrm>
+            <a:off x="822960" y="457200"/>
+            <a:ext cx="10058400" cy="365760"/>
+          </a:xfrm>
+          <a:prstGeom prst="rect">
+            <a:avLst/>
+          </a:prstGeom>
+          <a:noFill/>
+        </p:spPr>
+        <p:txBody>
+          <a:bodyPr wrap="square">
+            <a:spAutoFit/>
+          </a:bodyPr>
+          <a:lstStyle/>
+          <a:p>
+            <a:r>
+              <a:rPr sz="1300" b="1" i="0">
+                <a:solidFill>
+                  <a:srgbClr val="E8801A"/>
+                </a:solidFill>
+                <a:latin typeface="Montserrat"/>
+              </a:rPr>
+              <a:t>UNIONES MECÁNICAS · NO DESMONTABLES</a:t>
+            </a:r>
+          </a:p>
+        </p:txBody>
+      </p:sp>
+      <p:sp>
+        <p:nvSpPr>
+          <p:cNvPr id="6" name="TextBox 5"/>
+          <p:cNvSpPr txBox="1"/>
+          <p:nvPr/>
+        </p:nvSpPr>
+        <p:spPr>
+          <a:xfrm>
+            <a:off x="822960" y="868680"/>
+            <a:ext cx="10515600" cy="914400"/>
+          </a:xfrm>
+          <a:prstGeom prst="rect">
+            <a:avLst/>
+          </a:prstGeom>
+          <a:noFill/>
+        </p:spPr>
+        <p:txBody>
+          <a:bodyPr wrap="square">
+            <a:spAutoFit/>
+          </a:bodyPr>
+          <a:lstStyle/>
+          <a:p>
+            <a:r>
+              <a:rPr sz="2800" b="1" i="0">
+                <a:solidFill>
+                  <a:srgbClr val="1E2761"/>
+                </a:solidFill>
+                <a:latin typeface="Montserrat"/>
+              </a:rPr>
+              <a:t>No desmontables: quedan fijas</a:t>
+            </a:r>
+          </a:p>
+        </p:txBody>
+      </p:sp>
+      <p:sp>
+        <p:nvSpPr>
+          <p:cNvPr id="7" name="Rectangle 6"/>
+          <p:cNvSpPr/>
+          <p:nvPr/>
+        </p:nvSpPr>
+        <p:spPr>
+          <a:xfrm>
+            <a:off x="868680" y="1627632"/>
+            <a:ext cx="2011680" cy="73152"/>
+          </a:xfrm>
+          <a:prstGeom prst="rect">
+            <a:avLst/>
+          </a:prstGeom>
+          <a:solidFill>
+            <a:srgbClr val="E8801A"/>
+          </a:solidFill>
+          <a:ln>
+            <a:noFill/>
+          </a:ln>
+          <a:effectLst/>
+        </p:spPr>
+        <p:style>
+          <a:lnRef idx="1">
+            <a:schemeClr val="accent1"/>
+          </a:lnRef>
+          <a:fillRef idx="3">
+            <a:schemeClr val="accent1"/>
+          </a:fillRef>
+          <a:effectRef idx="2">
+            <a:schemeClr val="accent1"/>
+          </a:effectRef>
+          <a:fontRef idx="minor">
+            <a:schemeClr val="lt1"/>
+          </a:fontRef>
+        </p:style>
+        <p:txBody>
+          <a:bodyPr rtlCol="0" anchor="ctr"/>
+          <a:lstStyle/>
+          <a:p>
+            <a:pPr algn="ctr"/>
+          </a:p>
+        </p:txBody>
+      </p:sp>
+      <p:sp>
+        <p:nvSpPr>
+          <p:cNvPr id="8" name="TextBox 7"/>
+          <p:cNvSpPr txBox="1"/>
+          <p:nvPr/>
+        </p:nvSpPr>
+        <p:spPr>
+          <a:xfrm>
+            <a:off x="6355080" y="1965960"/>
+            <a:ext cx="5029200" cy="4206240"/>
+          </a:xfrm>
+          <a:prstGeom prst="rect">
+            <a:avLst/>
+          </a:prstGeom>
+          <a:noFill/>
+        </p:spPr>
+        <p:txBody>
+          <a:bodyPr wrap="square">
+            <a:spAutoFit/>
+          </a:bodyPr>
+          <a:lstStyle/>
+          <a:p>
+            <a:pPr>
+              <a:spcAft>
+                <a:spcPts val="1100"/>
+              </a:spcAft>
+            </a:pPr>
+            <a:r>
+              <a:rPr sz="1600" b="1" i="0">
+                <a:solidFill>
+                  <a:srgbClr val="E8801A"/>
+                </a:solidFill>
+                <a:latin typeface="Montserrat"/>
+              </a:rPr>
+              <a:t>▸  </a:t>
+            </a:r>
+            <a:r>
+              <a:rPr sz="1600" b="0" i="0">
+                <a:solidFill>
+                  <a:srgbClr val="1B2330"/>
+                </a:solidFill>
+                <a:latin typeface="Montserrat"/>
+              </a:rPr>
+              <a:t>Roscadas (UNE 19500 / UNE-EN 10242)</a:t>
+            </a:r>
+          </a:p>
+          <a:p>
+            <a:pPr>
+              <a:spcAft>
+                <a:spcPts val="1100"/>
+              </a:spcAft>
+            </a:pPr>
+            <a:r>
+              <a:rPr sz="1600" b="1" i="0">
+                <a:solidFill>
+                  <a:srgbClr val="E8801A"/>
+                </a:solidFill>
+                <a:latin typeface="Montserrat"/>
+              </a:rPr>
+              <a:t>▸  </a:t>
+            </a:r>
+            <a:r>
+              <a:rPr sz="1600" b="0" i="0">
+                <a:solidFill>
+                  <a:srgbClr val="1B2330"/>
+                </a:solidFill>
+                <a:latin typeface="Montserrat"/>
+              </a:rPr>
+              <a:t>Press-fitting radial y axial</a:t>
+            </a:r>
+          </a:p>
+          <a:p>
+            <a:pPr>
+              <a:spcAft>
+                <a:spcPts val="1100"/>
+              </a:spcAft>
+            </a:pPr>
+            <a:r>
+              <a:rPr sz="1600" b="1" i="0">
+                <a:solidFill>
+                  <a:srgbClr val="E8801A"/>
+                </a:solidFill>
+                <a:latin typeface="Montserrat"/>
+              </a:rPr>
+              <a:t>▸  </a:t>
+            </a:r>
+            <a:r>
+              <a:rPr sz="1600" b="0" i="0">
+                <a:solidFill>
+                  <a:srgbClr val="1B2330"/>
+                </a:solidFill>
+                <a:latin typeface="Montserrat"/>
+              </a:rPr>
+              <a:t>Multicapa y corrugado flexible</a:t>
+            </a:r>
+          </a:p>
+          <a:p>
+            <a:pPr>
+              <a:spcAft>
+                <a:spcPts val="1100"/>
+              </a:spcAft>
+            </a:pPr>
+            <a:r>
+              <a:rPr sz="1600" b="1" i="0">
+                <a:solidFill>
+                  <a:srgbClr val="E8801A"/>
+                </a:solidFill>
+                <a:latin typeface="Montserrat"/>
+              </a:rPr>
+              <a:t>▸  </a:t>
+            </a:r>
+            <a:r>
+              <a:rPr sz="1600" b="0" i="0">
+                <a:solidFill>
+                  <a:srgbClr val="1B2330"/>
+                </a:solidFill>
+                <a:latin typeface="Montserrat"/>
+              </a:rPr>
+              <a:t>Junta tórica UNE-EN 549; hasta 5 bar</a:t>
+            </a:r>
+          </a:p>
+        </p:txBody>
+      </p:sp>
+      <p:sp>
+        <p:nvSpPr>
+          <p:cNvPr id="9" name="imgph" descr="IMGQ:press fitting tool crimping gas pipe"/>
+          <p:cNvSpPr/>
+          <p:nvPr/>
+        </p:nvSpPr>
+        <p:spPr>
+          <a:xfrm>
+            <a:off x="822960" y="1965960"/>
+            <a:ext cx="5303520" cy="4572000"/>
+          </a:xfrm>
+          <a:prstGeom prst="roundRect">
+            <a:avLst/>
+          </a:prstGeom>
+          <a:solidFill>
+            <a:srgbClr val="F3F6FB"/>
+          </a:solidFill>
+          <a:ln w="12700">
+            <a:solidFill>
+              <a:srgbClr val="C7D2E6"/>
+            </a:solidFill>
+          </a:ln>
+          <a:effectLst/>
+        </p:spPr>
+        <p:style>
+          <a:lnRef idx="1">
+            <a:schemeClr val="accent1"/>
+          </a:lnRef>
+          <a:fillRef idx="3">
+            <a:schemeClr val="accent1"/>
+          </a:fillRef>
+          <a:effectRef idx="2">
+            <a:schemeClr val="accent1"/>
+          </a:effectRef>
+          <a:fontRef idx="minor">
+            <a:schemeClr val="lt1"/>
+          </a:fontRef>
+        </p:style>
+        <p:txBody>
+          <a:bodyPr rtlCol="0" anchor="ctr"/>
+          <a:lstStyle/>
+          <a:p>
+            <a:pPr algn="ctr"/>
+          </a:p>
+        </p:txBody>
+      </p:sp>
+      <p:sp>
+        <p:nvSpPr>
+          <p:cNvPr id="10" name="TextBox 9"/>
+          <p:cNvSpPr txBox="1"/>
+          <p:nvPr/>
+        </p:nvSpPr>
+        <p:spPr>
+          <a:xfrm>
+            <a:off x="1097280" y="3611880"/>
+            <a:ext cx="4754880" cy="1280160"/>
+          </a:xfrm>
+          <a:prstGeom prst="rect">
+            <a:avLst/>
+          </a:prstGeom>
+          <a:noFill/>
+        </p:spPr>
+        <p:txBody>
+          <a:bodyPr wrap="square">
+            <a:spAutoFit/>
+          </a:bodyPr>
+          <a:lstStyle/>
+          <a:p>
+            <a:pPr algn="ctr"/>
+            <a:r>
+              <a:rPr sz="1400" b="1" i="0">
+                <a:solidFill>
+                  <a:srgbClr val="64748B"/>
+                </a:solidFill>
+                <a:latin typeface="Montserrat"/>
+              </a:rPr>
+              <a:t>IMAGEN</a:t>
+            </a:r>
+          </a:p>
+          <a:p>
+            <a:pPr algn="ctr"/>
+            <a:r>
+              <a:rPr sz="1100" b="0" i="1">
+                <a:solidFill>
+                  <a:srgbClr val="64748B"/>
+                </a:solidFill>
+                <a:latin typeface="Montserrat"/>
+              </a:rPr>
+              <a:t>press fitting tool crimping gas pipe</a:t>
+            </a:r>
+          </a:p>
+        </p:txBody>
+      </p:sp>
+    </p:spTree>
+  </p:cSld>
+  <p:clrMapOvr>
+    <a:masterClrMapping/>
+  </p:clrMapOvr>
+  <mc:AlternateContent xmlns:mc="http://schemas.openxmlformats.org/markup-compatibility/2006">
+    <mc:Choice xmlns:p14="http://schemas.microsoft.com/office/powerpoint/2010/main" Requires="p14">
+      <p:transition spd="med" p14:dur="700">
+        <p14:cube dir="l"/>
+      </p:transition>
+    </mc:Choice>
+    <mc:Fallback>
+      <p:transition spd="med">
+        <p:push dir="l"/>
+      </p:transition>
+    </mc:Fallback>
+  </mc:AlternateContent>
+</p:sld>
+</file>
+
+<file path=ppt/slides/slide18.xml><?xml version="1.0" encoding="utf-8"?>
+<p:sld xmlns:a="http://schemas.openxmlformats.org/drawingml/2006/main" xmlns:p="http://schemas.openxmlformats.org/presentationml/2006/main" xmlns:r="http://schemas.openxmlformats.org/officeDocument/2006/relationships">
+  <p:cSld>
+    <p:spTree>
+      <p:nvGrpSpPr>
+        <p:cNvPr id="1" name=""/>
+        <p:cNvGrpSpPr/>
+        <p:nvPr/>
+      </p:nvGrpSpPr>
+      <p:grpSpPr/>
+      <p:sp>
+        <p:nvSpPr>
+          <p:cNvPr id="2" name="Rectangle 1"/>
+          <p:cNvSpPr/>
+          <p:nvPr/>
+        </p:nvSpPr>
+        <p:spPr>
+          <a:xfrm>
+            <a:off x="0" y="0"/>
+            <a:ext cx="12191695" cy="6858000"/>
+          </a:xfrm>
+          <a:prstGeom prst="rect">
+            <a:avLst/>
+          </a:prstGeom>
+          <a:solidFill>
+            <a:srgbClr val="FFFFFF"/>
+          </a:solidFill>
+          <a:ln>
+            <a:noFill/>
+          </a:ln>
+          <a:effectLst/>
+        </p:spPr>
+        <p:style>
+          <a:lnRef idx="1">
+            <a:schemeClr val="accent1"/>
+          </a:lnRef>
+          <a:fillRef idx="3">
+            <a:schemeClr val="accent1"/>
+          </a:fillRef>
+          <a:effectRef idx="2">
+            <a:schemeClr val="accent1"/>
+          </a:effectRef>
+          <a:fontRef idx="minor">
+            <a:schemeClr val="lt1"/>
+          </a:fontRef>
+        </p:style>
+        <p:txBody>
+          <a:bodyPr rtlCol="0" anchor="ctr"/>
+          <a:lstStyle/>
+          <a:p>
+            <a:pPr algn="ctr"/>
+          </a:p>
+        </p:txBody>
+      </p:sp>
+      <p:sp>
+        <p:nvSpPr>
+          <p:cNvPr id="3" name="TextBox 2"/>
+          <p:cNvSpPr txBox="1"/>
+          <p:nvPr/>
+        </p:nvSpPr>
+        <p:spPr>
+          <a:xfrm>
+            <a:off x="10607040" y="320040"/>
+            <a:ext cx="1371600" cy="365760"/>
+          </a:xfrm>
+          <a:prstGeom prst="rect">
+            <a:avLst/>
+          </a:prstGeom>
+          <a:noFill/>
+        </p:spPr>
+        <p:txBody>
+          <a:bodyPr wrap="square">
+            <a:spAutoFit/>
+          </a:bodyPr>
+          <a:lstStyle/>
+          <a:p>
+            <a:pPr algn="r"/>
+            <a:r>
+              <a:rPr sz="1000" b="1" i="0">
+                <a:solidFill>
+                  <a:srgbClr val="64748B"/>
+                </a:solidFill>
+                <a:latin typeface="Montserrat"/>
+              </a:rPr>
+              <a:t>018 / 021</a:t>
+            </a:r>
+          </a:p>
+        </p:txBody>
+      </p:sp>
+      <p:sp>
+        <p:nvSpPr>
+          <p:cNvPr id="4" name="TextBox 3"/>
+          <p:cNvSpPr txBox="1"/>
+          <p:nvPr/>
+        </p:nvSpPr>
+        <p:spPr>
+          <a:xfrm>
+            <a:off x="457200" y="6419088"/>
+            <a:ext cx="8229600" cy="365760"/>
+          </a:xfrm>
+          <a:prstGeom prst="rect">
+            <a:avLst/>
+          </a:prstGeom>
+          <a:noFill/>
+        </p:spPr>
+        <p:txBody>
+          <a:bodyPr wrap="square">
+            <a:spAutoFit/>
+          </a:bodyPr>
+          <a:lstStyle/>
+          <a:p>
+            <a:r>
+              <a:rPr sz="900" b="0" i="0">
+                <a:solidFill>
+                  <a:srgbClr val="64748B"/>
+                </a:solidFill>
+                <a:latin typeface="Montserrat"/>
+              </a:rPr>
+              <a:t>Curso Gas B · Tema 10 · UNE 60670-3</a:t>
+            </a:r>
+          </a:p>
+        </p:txBody>
+      </p:sp>
+      <p:sp>
+        <p:nvSpPr>
+          <p:cNvPr id="5" name="Rectangle 4"/>
+          <p:cNvSpPr/>
+          <p:nvPr/>
+        </p:nvSpPr>
+        <p:spPr>
+          <a:xfrm>
+            <a:off x="0" y="0"/>
+            <a:ext cx="12191695" cy="1143000"/>
+          </a:xfrm>
+          <a:prstGeom prst="rect">
+            <a:avLst/>
+          </a:prstGeom>
+          <a:solidFill>
+            <a:srgbClr val="E8801A"/>
+          </a:solidFill>
+          <a:ln>
+            <a:noFill/>
+          </a:ln>
+          <a:effectLst/>
+        </p:spPr>
+        <p:style>
+          <a:lnRef idx="1">
+            <a:schemeClr val="accent1"/>
+          </a:lnRef>
+          <a:fillRef idx="3">
+            <a:schemeClr val="accent1"/>
+          </a:fillRef>
+          <a:effectRef idx="2">
+            <a:schemeClr val="accent1"/>
+          </a:effectRef>
+          <a:fontRef idx="minor">
+            <a:schemeClr val="lt1"/>
+          </a:fontRef>
+        </p:style>
+        <p:txBody>
+          <a:bodyPr rtlCol="0" anchor="ctr"/>
+          <a:lstStyle/>
+          <a:p>
+            <a:pPr algn="ctr"/>
+          </a:p>
+        </p:txBody>
+      </p:sp>
+      <p:sp>
+        <p:nvSpPr>
+          <p:cNvPr id="6" name="TextBox 5"/>
+          <p:cNvSpPr txBox="1"/>
+          <p:nvPr/>
+        </p:nvSpPr>
+        <p:spPr>
+          <a:xfrm>
+            <a:off x="822960" y="274320"/>
+            <a:ext cx="10515600" cy="640080"/>
+          </a:xfrm>
+          <a:prstGeom prst="rect">
+            <a:avLst/>
+          </a:prstGeom>
+          <a:noFill/>
+        </p:spPr>
+        <p:txBody>
+          <a:bodyPr wrap="square">
+            <a:spAutoFit/>
+          </a:bodyPr>
+          <a:lstStyle/>
+          <a:p>
+            <a:r>
+              <a:rPr sz="2400" b="1" i="0">
+                <a:solidFill>
+                  <a:srgbClr val="FFFFFF"/>
+                </a:solidFill>
+                <a:latin typeface="Montserrat"/>
+              </a:rPr>
+              <a:t>⚡  PREGUNTA RÁPIDA</a:t>
+            </a:r>
+          </a:p>
+        </p:txBody>
+      </p:sp>
+      <p:sp>
+        <p:nvSpPr>
+          <p:cNvPr id="7" name="TextBox 6"/>
+          <p:cNvSpPr txBox="1"/>
+          <p:nvPr/>
+        </p:nvSpPr>
+        <p:spPr>
+          <a:xfrm>
+            <a:off x="822960" y="1508760"/>
+            <a:ext cx="10515600" cy="1371600"/>
+          </a:xfrm>
+          <a:prstGeom prst="rect">
+            <a:avLst/>
+          </a:prstGeom>
+          <a:noFill/>
+        </p:spPr>
+        <p:txBody>
+          <a:bodyPr wrap="square">
+            <a:spAutoFit/>
+          </a:bodyPr>
+          <a:lstStyle/>
+          <a:p>
+            <a:r>
+              <a:rPr sz="2400" b="1" i="0">
+                <a:solidFill>
+                  <a:srgbClr val="1E2761"/>
+                </a:solidFill>
+                <a:latin typeface="Montserrat"/>
+              </a:rPr>
+              <a:t>¿Hasta qué MOP se pueden utilizar las uniones mecánicas (roscadas, press-fitting, bridas...)?</a:t>
+            </a:r>
+          </a:p>
+        </p:txBody>
+      </p:sp>
+      <p:sp>
+        <p:nvSpPr>
+          <p:cNvPr id="8" name="Rounded Rectangle 7"/>
+          <p:cNvSpPr/>
+          <p:nvPr/>
+        </p:nvSpPr>
+        <p:spPr>
+          <a:xfrm>
+            <a:off x="822960" y="3291840"/>
+            <a:ext cx="4983480" cy="1143000"/>
+          </a:xfrm>
+          <a:prstGeom prst="roundRect">
+            <a:avLst/>
+          </a:prstGeom>
+          <a:solidFill>
+            <a:srgbClr val="F3F6FB"/>
+          </a:solidFill>
+          <a:ln w="12700">
+            <a:solidFill>
+              <a:srgbClr val="C7D2E6"/>
+            </a:solidFill>
+          </a:ln>
+          <a:effectLst/>
+        </p:spPr>
+        <p:style>
+          <a:lnRef idx="1">
+            <a:schemeClr val="accent1"/>
+          </a:lnRef>
+          <a:fillRef idx="3">
+            <a:schemeClr val="accent1"/>
+          </a:fillRef>
+          <a:effectRef idx="2">
+            <a:schemeClr val="accent1"/>
+          </a:effectRef>
+          <a:fontRef idx="minor">
+            <a:schemeClr val="lt1"/>
+          </a:fontRef>
+        </p:style>
+        <p:txBody>
+          <a:bodyPr rtlCol="0" anchor="ctr"/>
+          <a:lstStyle/>
+          <a:p>
+            <a:pPr algn="ctr"/>
+          </a:p>
+        </p:txBody>
+      </p:sp>
+      <p:sp>
+        <p:nvSpPr>
+          <p:cNvPr id="9" name="Rectangle 8"/>
+          <p:cNvSpPr/>
+          <p:nvPr/>
+        </p:nvSpPr>
+        <p:spPr>
+          <a:xfrm>
+            <a:off x="822960" y="3291840"/>
+            <a:ext cx="640080" cy="1143000"/>
+          </a:xfrm>
+          <a:prstGeom prst="rect">
+            <a:avLst/>
+          </a:prstGeom>
+          <a:solidFill>
+            <a:srgbClr val="1E2761"/>
+          </a:solidFill>
+          <a:ln>
+            <a:noFill/>
+          </a:ln>
+          <a:effectLst/>
+        </p:spPr>
+        <p:style>
+          <a:lnRef idx="1">
+            <a:schemeClr val="accent1"/>
+          </a:lnRef>
+          <a:fillRef idx="3">
+            <a:schemeClr val="accent1"/>
+          </a:fillRef>
+          <a:effectRef idx="2">
+            <a:schemeClr val="accent1"/>
+          </a:effectRef>
+          <a:fontRef idx="minor">
+            <a:schemeClr val="lt1"/>
+          </a:fontRef>
+        </p:style>
+        <p:txBody>
+          <a:bodyPr rtlCol="0" anchor="ctr"/>
+          <a:lstStyle/>
+          <a:p>
+            <a:pPr algn="ctr"/>
+          </a:p>
+        </p:txBody>
+      </p:sp>
+      <p:sp>
+        <p:nvSpPr>
+          <p:cNvPr id="10" name="TextBox 9"/>
+          <p:cNvSpPr txBox="1"/>
+          <p:nvPr/>
+        </p:nvSpPr>
+        <p:spPr>
+          <a:xfrm>
+            <a:off x="822960" y="3611880"/>
+            <a:ext cx="640080" cy="548640"/>
+          </a:xfrm>
+          <a:prstGeom prst="rect">
+            <a:avLst/>
+          </a:prstGeom>
+          <a:noFill/>
+        </p:spPr>
+        <p:txBody>
+          <a:bodyPr wrap="square">
+            <a:spAutoFit/>
+          </a:bodyPr>
+          <a:lstStyle/>
+          <a:p>
+            <a:pPr algn="ctr"/>
+            <a:r>
+              <a:rPr sz="2200" b="1" i="0">
+                <a:solidFill>
+                  <a:srgbClr val="FFFFFF"/>
+                </a:solidFill>
+                <a:latin typeface="Montserrat"/>
+              </a:rPr>
+              <a:t>A</a:t>
+            </a:r>
+          </a:p>
+        </p:txBody>
+      </p:sp>
+      <p:sp>
+        <p:nvSpPr>
+          <p:cNvPr id="11" name="TextBox 10"/>
+          <p:cNvSpPr txBox="1"/>
+          <p:nvPr/>
+        </p:nvSpPr>
+        <p:spPr>
+          <a:xfrm>
+            <a:off x="1600200" y="3474720"/>
+            <a:ext cx="4114800" cy="868680"/>
+          </a:xfrm>
+          <a:prstGeom prst="rect">
+            <a:avLst/>
+          </a:prstGeom>
+          <a:noFill/>
+        </p:spPr>
+        <p:txBody>
+          <a:bodyPr wrap="square">
+            <a:spAutoFit/>
+          </a:bodyPr>
+          <a:lstStyle/>
+          <a:p>
+            <a:r>
+              <a:rPr sz="1400" b="0" i="0">
+                <a:solidFill>
+                  <a:srgbClr val="1B2330"/>
+                </a:solidFill>
+                <a:latin typeface="Montserrat"/>
+              </a:rPr>
+              <a:t>Hasta 0,05 bar</a:t>
+            </a:r>
+          </a:p>
+        </p:txBody>
+      </p:sp>
+      <p:sp>
+        <p:nvSpPr>
+          <p:cNvPr id="12" name="Rounded Rectangle 11"/>
+          <p:cNvSpPr/>
+          <p:nvPr/>
+        </p:nvSpPr>
+        <p:spPr>
+          <a:xfrm>
+            <a:off x="6355080" y="3291840"/>
+            <a:ext cx="4983480" cy="1143000"/>
+          </a:xfrm>
+          <a:prstGeom prst="roundRect">
+            <a:avLst/>
+          </a:prstGeom>
+          <a:solidFill>
+            <a:srgbClr val="F3F6FB"/>
+          </a:solidFill>
+          <a:ln w="12700">
+            <a:solidFill>
+              <a:srgbClr val="C7D2E6"/>
+            </a:solidFill>
+          </a:ln>
+          <a:effectLst/>
+        </p:spPr>
+        <p:style>
+          <a:lnRef idx="1">
+            <a:schemeClr val="accent1"/>
+          </a:lnRef>
+          <a:fillRef idx="3">
+            <a:schemeClr val="accent1"/>
+          </a:fillRef>
+          <a:effectRef idx="2">
+            <a:schemeClr val="accent1"/>
+          </a:effectRef>
+          <a:fontRef idx="minor">
+            <a:schemeClr val="lt1"/>
+          </a:fontRef>
+        </p:style>
+        <p:txBody>
+          <a:bodyPr rtlCol="0" anchor="ctr"/>
+          <a:lstStyle/>
+          <a:p>
+            <a:pPr algn="ctr"/>
+          </a:p>
+        </p:txBody>
+      </p:sp>
+      <p:sp>
+        <p:nvSpPr>
+          <p:cNvPr id="13" name="Rectangle 12"/>
+          <p:cNvSpPr/>
+          <p:nvPr/>
+        </p:nvSpPr>
+        <p:spPr>
+          <a:xfrm>
+            <a:off x="6355080" y="3291840"/>
+            <a:ext cx="640080" cy="1143000"/>
+          </a:xfrm>
+          <a:prstGeom prst="rect">
+            <a:avLst/>
+          </a:prstGeom>
+          <a:solidFill>
+            <a:srgbClr val="1E2761"/>
+          </a:solidFill>
+          <a:ln>
+            <a:noFill/>
+          </a:ln>
+          <a:effectLst/>
+        </p:spPr>
+        <p:style>
+          <a:lnRef idx="1">
+            <a:schemeClr val="accent1"/>
+          </a:lnRef>
+          <a:fillRef idx="3">
+            <a:schemeClr val="accent1"/>
+          </a:fillRef>
+          <a:effectRef idx="2">
+            <a:schemeClr val="accent1"/>
+          </a:effectRef>
+          <a:fontRef idx="minor">
+            <a:schemeClr val="lt1"/>
+          </a:fontRef>
+        </p:style>
+        <p:txBody>
+          <a:bodyPr rtlCol="0" anchor="ctr"/>
+          <a:lstStyle/>
+          <a:p>
+            <a:pPr algn="ctr"/>
+          </a:p>
+        </p:txBody>
+      </p:sp>
+      <p:sp>
+        <p:nvSpPr>
+          <p:cNvPr id="14" name="TextBox 13"/>
+          <p:cNvSpPr txBox="1"/>
+          <p:nvPr/>
+        </p:nvSpPr>
+        <p:spPr>
+          <a:xfrm>
+            <a:off x="6355080" y="3611880"/>
+            <a:ext cx="640080" cy="548640"/>
+          </a:xfrm>
+          <a:prstGeom prst="rect">
+            <a:avLst/>
+          </a:prstGeom>
+          <a:noFill/>
+        </p:spPr>
+        <p:txBody>
+          <a:bodyPr wrap="square">
+            <a:spAutoFit/>
+          </a:bodyPr>
+          <a:lstStyle/>
+          <a:p>
+            <a:pPr algn="ctr"/>
+            <a:r>
+              <a:rPr sz="2200" b="1" i="0">
+                <a:solidFill>
+                  <a:srgbClr val="FFFFFF"/>
+                </a:solidFill>
+                <a:latin typeface="Montserrat"/>
+              </a:rPr>
+              <a:t>B</a:t>
+            </a:r>
+          </a:p>
+        </p:txBody>
+      </p:sp>
+      <p:sp>
+        <p:nvSpPr>
+          <p:cNvPr id="15" name="TextBox 14"/>
+          <p:cNvSpPr txBox="1"/>
+          <p:nvPr/>
+        </p:nvSpPr>
+        <p:spPr>
+          <a:xfrm>
+            <a:off x="7132320" y="3474720"/>
+            <a:ext cx="4114800" cy="868680"/>
+          </a:xfrm>
+          <a:prstGeom prst="rect">
+            <a:avLst/>
+          </a:prstGeom>
+          <a:noFill/>
+        </p:spPr>
+        <p:txBody>
+          <a:bodyPr wrap="square">
+            <a:spAutoFit/>
+          </a:bodyPr>
+          <a:lstStyle/>
+          <a:p>
+            <a:r>
+              <a:rPr sz="1400" b="0" i="0">
+                <a:solidFill>
+                  <a:srgbClr val="1B2330"/>
+                </a:solidFill>
+                <a:latin typeface="Montserrat"/>
+              </a:rPr>
+              <a:t>Hasta 0,4 bar</a:t>
+            </a:r>
+          </a:p>
+        </p:txBody>
+      </p:sp>
+      <p:sp>
+        <p:nvSpPr>
+          <p:cNvPr id="16" name="Rounded Rectangle 15"/>
+          <p:cNvSpPr/>
+          <p:nvPr/>
+        </p:nvSpPr>
+        <p:spPr>
+          <a:xfrm>
+            <a:off x="822960" y="4617720"/>
+            <a:ext cx="4983480" cy="1143000"/>
+          </a:xfrm>
+          <a:prstGeom prst="roundRect">
+            <a:avLst/>
+          </a:prstGeom>
+          <a:solidFill>
+            <a:srgbClr val="F3F6FB"/>
+          </a:solidFill>
+          <a:ln w="12700">
+            <a:solidFill>
+              <a:srgbClr val="C7D2E6"/>
+            </a:solidFill>
+          </a:ln>
+          <a:effectLst/>
+        </p:spPr>
+        <p:style>
+          <a:lnRef idx="1">
+            <a:schemeClr val="accent1"/>
+          </a:lnRef>
+          <a:fillRef idx="3">
+            <a:schemeClr val="accent1"/>
+          </a:fillRef>
+          <a:effectRef idx="2">
+            <a:schemeClr val="accent1"/>
+          </a:effectRef>
+          <a:fontRef idx="minor">
+            <a:schemeClr val="lt1"/>
+          </a:fontRef>
+        </p:style>
+        <p:txBody>
+          <a:bodyPr rtlCol="0" anchor="ctr"/>
+          <a:lstStyle/>
+          <a:p>
+            <a:pPr algn="ctr"/>
+          </a:p>
+        </p:txBody>
+      </p:sp>
+      <p:sp>
+        <p:nvSpPr>
+          <p:cNvPr id="17" name="Rectangle 16"/>
+          <p:cNvSpPr/>
+          <p:nvPr/>
+        </p:nvSpPr>
+        <p:spPr>
+          <a:xfrm>
+            <a:off x="822960" y="4617720"/>
+            <a:ext cx="640080" cy="1143000"/>
+          </a:xfrm>
+          <a:prstGeom prst="rect">
+            <a:avLst/>
+          </a:prstGeom>
+          <a:solidFill>
+            <a:srgbClr val="1E2761"/>
+          </a:solidFill>
+          <a:ln>
+            <a:noFill/>
+          </a:ln>
+          <a:effectLst/>
+        </p:spPr>
+        <p:style>
+          <a:lnRef idx="1">
+            <a:schemeClr val="accent1"/>
+          </a:lnRef>
+          <a:fillRef idx="3">
+            <a:schemeClr val="accent1"/>
+          </a:fillRef>
+          <a:effectRef idx="2">
+            <a:schemeClr val="accent1"/>
+          </a:effectRef>
+          <a:fontRef idx="minor">
+            <a:schemeClr val="lt1"/>
+          </a:fontRef>
+        </p:style>
+        <p:txBody>
+          <a:bodyPr rtlCol="0" anchor="ctr"/>
+          <a:lstStyle/>
+          <a:p>
+            <a:pPr algn="ctr"/>
+          </a:p>
+        </p:txBody>
+      </p:sp>
+      <p:sp>
+        <p:nvSpPr>
+          <p:cNvPr id="18" name="TextBox 17"/>
+          <p:cNvSpPr txBox="1"/>
+          <p:nvPr/>
+        </p:nvSpPr>
+        <p:spPr>
+          <a:xfrm>
+            <a:off x="822960" y="4937760"/>
+            <a:ext cx="640080" cy="548640"/>
+          </a:xfrm>
+          <a:prstGeom prst="rect">
+            <a:avLst/>
+          </a:prstGeom>
+          <a:noFill/>
+        </p:spPr>
+        <p:txBody>
+          <a:bodyPr wrap="square">
+            <a:spAutoFit/>
+          </a:bodyPr>
+          <a:lstStyle/>
+          <a:p>
+            <a:pPr algn="ctr"/>
+            <a:r>
+              <a:rPr sz="2200" b="1" i="0">
+                <a:solidFill>
+                  <a:srgbClr val="FFFFFF"/>
+                </a:solidFill>
+                <a:latin typeface="Montserrat"/>
+              </a:rPr>
+              <a:t>C</a:t>
+            </a:r>
+          </a:p>
+        </p:txBody>
+      </p:sp>
+      <p:sp>
+        <p:nvSpPr>
+          <p:cNvPr id="19" name="TextBox 18"/>
+          <p:cNvSpPr txBox="1"/>
+          <p:nvPr/>
+        </p:nvSpPr>
+        <p:spPr>
+          <a:xfrm>
+            <a:off x="1600200" y="4800600"/>
+            <a:ext cx="4114800" cy="868680"/>
+          </a:xfrm>
+          <a:prstGeom prst="rect">
+            <a:avLst/>
+          </a:prstGeom>
+          <a:noFill/>
+        </p:spPr>
+        <p:txBody>
+          <a:bodyPr wrap="square">
+            <a:spAutoFit/>
+          </a:bodyPr>
+          <a:lstStyle/>
+          <a:p>
+            <a:r>
+              <a:rPr sz="1400" b="0" i="0">
+                <a:solidFill>
+                  <a:srgbClr val="1B2330"/>
+                </a:solidFill>
+                <a:latin typeface="Montserrat"/>
+              </a:rPr>
+              <a:t>Hasta 2 bar</a:t>
+            </a:r>
+          </a:p>
+        </p:txBody>
+      </p:sp>
+      <p:sp>
+        <p:nvSpPr>
+          <p:cNvPr id="20" name="Rounded Rectangle 19"/>
+          <p:cNvSpPr/>
+          <p:nvPr/>
+        </p:nvSpPr>
+        <p:spPr>
+          <a:xfrm>
+            <a:off x="6355080" y="4617720"/>
+            <a:ext cx="4983480" cy="1143000"/>
+          </a:xfrm>
+          <a:prstGeom prst="roundRect">
+            <a:avLst/>
+          </a:prstGeom>
+          <a:solidFill>
+            <a:srgbClr val="F3F6FB"/>
+          </a:solidFill>
+          <a:ln w="12700">
+            <a:solidFill>
+              <a:srgbClr val="C7D2E6"/>
+            </a:solidFill>
+          </a:ln>
+          <a:effectLst/>
+        </p:spPr>
+        <p:style>
+          <a:lnRef idx="1">
+            <a:schemeClr val="accent1"/>
+          </a:lnRef>
+          <a:fillRef idx="3">
+            <a:schemeClr val="accent1"/>
+          </a:fillRef>
+          <a:effectRef idx="2">
+            <a:schemeClr val="accent1"/>
+          </a:effectRef>
+          <a:fontRef idx="minor">
+            <a:schemeClr val="lt1"/>
+          </a:fontRef>
+        </p:style>
+        <p:txBody>
+          <a:bodyPr rtlCol="0" anchor="ctr"/>
+          <a:lstStyle/>
+          <a:p>
+            <a:pPr algn="ctr"/>
+          </a:p>
+        </p:txBody>
+      </p:sp>
+      <p:sp>
+        <p:nvSpPr>
+          <p:cNvPr id="21" name="Rectangle 20"/>
+          <p:cNvSpPr/>
+          <p:nvPr/>
+        </p:nvSpPr>
+        <p:spPr>
+          <a:xfrm>
+            <a:off x="6355080" y="4617720"/>
+            <a:ext cx="640080" cy="1143000"/>
+          </a:xfrm>
+          <a:prstGeom prst="rect">
+            <a:avLst/>
+          </a:prstGeom>
+          <a:solidFill>
+            <a:srgbClr val="1E2761"/>
+          </a:solidFill>
+          <a:ln>
+            <a:noFill/>
+          </a:ln>
+          <a:effectLst/>
+        </p:spPr>
+        <p:style>
+          <a:lnRef idx="1">
+            <a:schemeClr val="accent1"/>
+          </a:lnRef>
+          <a:fillRef idx="3">
+            <a:schemeClr val="accent1"/>
+          </a:fillRef>
+          <a:effectRef idx="2">
+            <a:schemeClr val="accent1"/>
+          </a:effectRef>
+          <a:fontRef idx="minor">
+            <a:schemeClr val="lt1"/>
+          </a:fontRef>
+        </p:style>
+        <p:txBody>
+          <a:bodyPr rtlCol="0" anchor="ctr"/>
+          <a:lstStyle/>
+          <a:p>
+            <a:pPr algn="ctr"/>
+          </a:p>
+        </p:txBody>
+      </p:sp>
+      <p:sp>
+        <p:nvSpPr>
+          <p:cNvPr id="22" name="TextBox 21"/>
+          <p:cNvSpPr txBox="1"/>
+          <p:nvPr/>
+        </p:nvSpPr>
+        <p:spPr>
+          <a:xfrm>
+            <a:off x="6355080" y="4937760"/>
+            <a:ext cx="640080" cy="548640"/>
+          </a:xfrm>
+          <a:prstGeom prst="rect">
+            <a:avLst/>
+          </a:prstGeom>
+          <a:noFill/>
+        </p:spPr>
+        <p:txBody>
+          <a:bodyPr wrap="square">
+            <a:spAutoFit/>
+          </a:bodyPr>
+          <a:lstStyle/>
+          <a:p>
+            <a:pPr algn="ctr"/>
+            <a:r>
+              <a:rPr sz="2200" b="1" i="0">
+                <a:solidFill>
+                  <a:srgbClr val="FFFFFF"/>
+                </a:solidFill>
+                <a:latin typeface="Montserrat"/>
+              </a:rPr>
+              <a:t>D</a:t>
+            </a:r>
+          </a:p>
+        </p:txBody>
+      </p:sp>
+      <p:sp>
+        <p:nvSpPr>
+          <p:cNvPr id="23" name="TextBox 22"/>
+          <p:cNvSpPr txBox="1"/>
+          <p:nvPr/>
+        </p:nvSpPr>
+        <p:spPr>
+          <a:xfrm>
+            <a:off x="7132320" y="4800600"/>
+            <a:ext cx="4114800" cy="868680"/>
+          </a:xfrm>
+          <a:prstGeom prst="rect">
+            <a:avLst/>
+          </a:prstGeom>
+          <a:noFill/>
+        </p:spPr>
+        <p:txBody>
+          <a:bodyPr wrap="square">
+            <a:spAutoFit/>
+          </a:bodyPr>
+          <a:lstStyle/>
+          <a:p>
+            <a:r>
+              <a:rPr sz="1400" b="0" i="0">
+                <a:solidFill>
+                  <a:srgbClr val="1B2330"/>
+                </a:solidFill>
+                <a:latin typeface="Montserrat"/>
+              </a:rPr>
+              <a:t>Hasta 5 bar</a:t>
+            </a:r>
+          </a:p>
+        </p:txBody>
+      </p:sp>
+    </p:spTree>
+  </p:cSld>
+  <p:clrMapOvr>
+    <a:masterClrMapping/>
+  </p:clrMapOvr>
+  <mc:AlternateContent xmlns:mc="http://schemas.openxmlformats.org/markup-compatibility/2006">
+    <mc:Choice xmlns:p14="http://schemas.microsoft.com/office/powerpoint/2010/main" Requires="p14">
+      <p:transition spd="med" p14:dur="700">
+        <p14:cube dir="r"/>
+      </p:transition>
+    </mc:Choice>
+    <mc:Fallback>
+      <p:transition spd="med">
+        <p:push dir="r"/>
+      </p:transition>
+    </mc:Fallback>
+  </mc:AlternateContent>
+</p:sld>
+</file>
+
+<file path=ppt/slides/slide19.xml><?xml version="1.0" encoding="utf-8"?>
+<p:sld xmlns:a="http://schemas.openxmlformats.org/drawingml/2006/main" xmlns:p="http://schemas.openxmlformats.org/presentationml/2006/main" xmlns:r="http://schemas.openxmlformats.org/officeDocument/2006/relationships">
+  <p:cSld>
+    <p:spTree>
+      <p:nvGrpSpPr>
+        <p:cNvPr id="1" name=""/>
+        <p:cNvGrpSpPr/>
+        <p:nvPr/>
+      </p:nvGrpSpPr>
+      <p:grpSpPr/>
+      <p:sp>
+        <p:nvSpPr>
+          <p:cNvPr id="2" name="Rectangle 1"/>
+          <p:cNvSpPr/>
+          <p:nvPr/>
+        </p:nvSpPr>
+        <p:spPr>
+          <a:xfrm>
+            <a:off x="0" y="0"/>
+            <a:ext cx="12191695" cy="6858000"/>
+          </a:xfrm>
+          <a:prstGeom prst="rect">
+            <a:avLst/>
+          </a:prstGeom>
+          <a:solidFill>
+            <a:srgbClr val="FFFFFF"/>
+          </a:solidFill>
+          <a:ln>
+            <a:noFill/>
+          </a:ln>
+          <a:effectLst/>
+        </p:spPr>
+        <p:style>
+          <a:lnRef idx="1">
+            <a:schemeClr val="accent1"/>
+          </a:lnRef>
+          <a:fillRef idx="3">
+            <a:schemeClr val="accent1"/>
+          </a:fillRef>
+          <a:effectRef idx="2">
+            <a:schemeClr val="accent1"/>
+          </a:effectRef>
+          <a:fontRef idx="minor">
+            <a:schemeClr val="lt1"/>
+          </a:fontRef>
+        </p:style>
+        <p:txBody>
+          <a:bodyPr rtlCol="0" anchor="ctr"/>
+          <a:lstStyle/>
+          <a:p>
+            <a:pPr algn="ctr"/>
+          </a:p>
+        </p:txBody>
+      </p:sp>
+      <p:sp>
+        <p:nvSpPr>
+          <p:cNvPr id="3" name="TextBox 2"/>
+          <p:cNvSpPr txBox="1"/>
+          <p:nvPr/>
+        </p:nvSpPr>
+        <p:spPr>
+          <a:xfrm>
+            <a:off x="10607040" y="320040"/>
+            <a:ext cx="1371600" cy="365760"/>
+          </a:xfrm>
+          <a:prstGeom prst="rect">
+            <a:avLst/>
+          </a:prstGeom>
+          <a:noFill/>
+        </p:spPr>
+        <p:txBody>
+          <a:bodyPr wrap="square">
+            <a:spAutoFit/>
+          </a:bodyPr>
+          <a:lstStyle/>
+          <a:p>
+            <a:pPr algn="r"/>
+            <a:r>
+              <a:rPr sz="1000" b="1" i="0">
+                <a:solidFill>
+                  <a:srgbClr val="64748B"/>
+                </a:solidFill>
+                <a:latin typeface="Montserrat"/>
+              </a:rPr>
+              <a:t>019 / 021</a:t>
+            </a:r>
+          </a:p>
+        </p:txBody>
+      </p:sp>
+      <p:sp>
+        <p:nvSpPr>
+          <p:cNvPr id="4" name="TextBox 3"/>
+          <p:cNvSpPr txBox="1"/>
+          <p:nvPr/>
+        </p:nvSpPr>
+        <p:spPr>
+          <a:xfrm>
+            <a:off x="457200" y="6419088"/>
+            <a:ext cx="8229600" cy="365760"/>
+          </a:xfrm>
+          <a:prstGeom prst="rect">
+            <a:avLst/>
+          </a:prstGeom>
+          <a:noFill/>
+        </p:spPr>
+        <p:txBody>
+          <a:bodyPr wrap="square">
+            <a:spAutoFit/>
+          </a:bodyPr>
+          <a:lstStyle/>
+          <a:p>
+            <a:r>
+              <a:rPr sz="900" b="0" i="0">
+                <a:solidFill>
+                  <a:srgbClr val="64748B"/>
+                </a:solidFill>
+                <a:latin typeface="Montserrat"/>
+              </a:rPr>
+              <a:t>Curso Gas B · Tema 10 · UNE 60670-3</a:t>
+            </a:r>
+          </a:p>
+        </p:txBody>
+      </p:sp>
+      <p:sp>
+        <p:nvSpPr>
+          <p:cNvPr id="5" name="Rectangle 4"/>
+          <p:cNvSpPr/>
+          <p:nvPr/>
+        </p:nvSpPr>
+        <p:spPr>
+          <a:xfrm>
+            <a:off x="0" y="0"/>
+            <a:ext cx="12191695" cy="1143000"/>
+          </a:xfrm>
+          <a:prstGeom prst="rect">
+            <a:avLst/>
+          </a:prstGeom>
+          <a:solidFill>
+            <a:srgbClr val="1E8E4B"/>
+          </a:solidFill>
+          <a:ln>
+            <a:noFill/>
+          </a:ln>
+          <a:effectLst/>
+        </p:spPr>
+        <p:style>
+          <a:lnRef idx="1">
+            <a:schemeClr val="accent1"/>
+          </a:lnRef>
+          <a:fillRef idx="3">
+            <a:schemeClr val="accent1"/>
+          </a:fillRef>
+          <a:effectRef idx="2">
+            <a:schemeClr val="accent1"/>
+          </a:effectRef>
+          <a:fontRef idx="minor">
+            <a:schemeClr val="lt1"/>
+          </a:fontRef>
+        </p:style>
+        <p:txBody>
+          <a:bodyPr rtlCol="0" anchor="ctr"/>
+          <a:lstStyle/>
+          <a:p>
+            <a:pPr algn="ctr"/>
+          </a:p>
+        </p:txBody>
+      </p:sp>
+      <p:sp>
+        <p:nvSpPr>
+          <p:cNvPr id="6" name="TextBox 5"/>
+          <p:cNvSpPr txBox="1"/>
+          <p:nvPr/>
+        </p:nvSpPr>
+        <p:spPr>
+          <a:xfrm>
+            <a:off x="822960" y="274320"/>
+            <a:ext cx="10515600" cy="640080"/>
+          </a:xfrm>
+          <a:prstGeom prst="rect">
+            <a:avLst/>
+          </a:prstGeom>
+          <a:noFill/>
+        </p:spPr>
+        <p:txBody>
+          <a:bodyPr wrap="square">
+            <a:spAutoFit/>
+          </a:bodyPr>
+          <a:lstStyle/>
+          <a:p>
+            <a:r>
+              <a:rPr sz="2400" b="1" i="0">
+                <a:solidFill>
+                  <a:srgbClr val="FFFFFF"/>
+                </a:solidFill>
+                <a:latin typeface="Montserrat"/>
+              </a:rPr>
+              <a:t>✔  RESPUESTA:  D</a:t>
+            </a:r>
+          </a:p>
+        </p:txBody>
+      </p:sp>
+      <p:sp>
+        <p:nvSpPr>
+          <p:cNvPr id="7" name="TextBox 6"/>
+          <p:cNvSpPr txBox="1"/>
+          <p:nvPr/>
+        </p:nvSpPr>
+        <p:spPr>
+          <a:xfrm>
+            <a:off x="822960" y="1417320"/>
+            <a:ext cx="10515600" cy="914400"/>
+          </a:xfrm>
+          <a:prstGeom prst="rect">
+            <a:avLst/>
+          </a:prstGeom>
+          <a:noFill/>
+        </p:spPr>
+        <p:txBody>
+          <a:bodyPr wrap="square">
+            <a:spAutoFit/>
+          </a:bodyPr>
+          <a:lstStyle/>
+          <a:p>
+            <a:r>
+              <a:rPr sz="1800" b="1" i="0">
+                <a:solidFill>
+                  <a:srgbClr val="64748B"/>
+                </a:solidFill>
+                <a:latin typeface="Montserrat"/>
+              </a:rPr>
+              <a:t>¿Hasta qué MOP se pueden utilizar las uniones mecánicas (roscadas, press-fitting, bridas...)?</a:t>
+            </a:r>
+          </a:p>
+        </p:txBody>
+      </p:sp>
+      <p:sp>
+        <p:nvSpPr>
+          <p:cNvPr id="8" name="Rounded Rectangle 7"/>
+          <p:cNvSpPr/>
+          <p:nvPr/>
+        </p:nvSpPr>
+        <p:spPr>
+          <a:xfrm>
+            <a:off x="822960" y="2514600"/>
+            <a:ext cx="10515600" cy="914400"/>
+          </a:xfrm>
+          <a:prstGeom prst="roundRect">
+            <a:avLst/>
+          </a:prstGeom>
+          <a:solidFill>
+            <a:srgbClr val="E9F6EE"/>
+          </a:solidFill>
+          <a:ln w="12700">
+            <a:solidFill>
+              <a:srgbClr val="1E8E4B"/>
+            </a:solidFill>
+          </a:ln>
+          <a:effectLst/>
+        </p:spPr>
+        <p:style>
+          <a:lnRef idx="1">
+            <a:schemeClr val="accent1"/>
+          </a:lnRef>
+          <a:fillRef idx="3">
+            <a:schemeClr val="accent1"/>
+          </a:fillRef>
+          <a:effectRef idx="2">
+            <a:schemeClr val="accent1"/>
+          </a:effectRef>
+          <a:fontRef idx="minor">
+            <a:schemeClr val="lt1"/>
+          </a:fontRef>
+        </p:style>
+        <p:txBody>
+          <a:bodyPr rtlCol="0" anchor="ctr"/>
+          <a:lstStyle/>
+          <a:p>
+            <a:pPr algn="ctr"/>
+          </a:p>
+        </p:txBody>
+      </p:sp>
+      <p:sp>
+        <p:nvSpPr>
+          <p:cNvPr id="9" name="TextBox 8"/>
+          <p:cNvSpPr txBox="1"/>
+          <p:nvPr/>
+        </p:nvSpPr>
+        <p:spPr>
+          <a:xfrm>
+            <a:off x="1097280" y="2697480"/>
+            <a:ext cx="10058400" cy="640080"/>
+          </a:xfrm>
+          <a:prstGeom prst="rect">
+            <a:avLst/>
+          </a:prstGeom>
+          <a:noFill/>
+        </p:spPr>
+        <p:txBody>
+          <a:bodyPr wrap="square">
+            <a:spAutoFit/>
+          </a:bodyPr>
+          <a:lstStyle/>
+          <a:p>
+            <a:r>
+              <a:rPr sz="1800" b="1" i="0">
+                <a:solidFill>
+                  <a:srgbClr val="1E8E4B"/>
+                </a:solidFill>
+                <a:latin typeface="Montserrat"/>
+              </a:rPr>
+              <a:t>D.  </a:t>
+            </a:r>
+            <a:r>
+              <a:rPr sz="1800" b="1" i="0">
+                <a:solidFill>
+                  <a:srgbClr val="1E2761"/>
+                </a:solidFill>
+                <a:latin typeface="Montserrat"/>
+              </a:rPr>
+              <a:t>Hasta 5 bar</a:t>
+            </a:r>
+          </a:p>
+        </p:txBody>
+      </p:sp>
+      <p:sp>
+        <p:nvSpPr>
+          <p:cNvPr id="10" name="TextBox 9"/>
+          <p:cNvSpPr txBox="1"/>
+          <p:nvPr/>
+        </p:nvSpPr>
+        <p:spPr>
+          <a:xfrm>
+            <a:off x="822960" y="3749039"/>
+            <a:ext cx="10515600" cy="2194560"/>
+          </a:xfrm>
+          <a:prstGeom prst="rect">
+            <a:avLst/>
+          </a:prstGeom>
+          <a:noFill/>
+        </p:spPr>
+        <p:txBody>
+          <a:bodyPr wrap="square">
+            <a:spAutoFit/>
+          </a:bodyPr>
+          <a:lstStyle/>
+          <a:p>
+            <a:r>
+              <a:rPr sz="1500" b="1" i="0">
+                <a:solidFill>
+                  <a:srgbClr val="E8801A"/>
+                </a:solidFill>
+                <a:latin typeface="Montserrat"/>
+              </a:rPr>
+              <a:t>Por qué:  </a:t>
+            </a:r>
+            <a:r>
+              <a:rPr sz="1500" b="0" i="0">
+                <a:solidFill>
+                  <a:srgbClr val="1B2330"/>
+                </a:solidFill>
+                <a:latin typeface="Montserrat"/>
+              </a:rPr>
+              <a:t>Todas las uniones mecánicas, desmontables y no desmontables, se admiten hasta una MOP de 5 bar, el mismo tope de aplicación de toda la norma.</a:t>
+            </a:r>
+          </a:p>
+        </p:txBody>
+      </p:sp>
+    </p:spTree>
+  </p:cSld>
+  <p:clrMapOvr>
+    <a:masterClrMapping/>
+  </p:clrMapOvr>
+  <mc:AlternateContent xmlns:mc="http://schemas.openxmlformats.org/markup-compatibility/2006">
+    <mc:Choice xmlns:p14="http://schemas.microsoft.com/office/powerpoint/2010/main" Requires="p14">
+      <p:transition spd="med" p14:dur="700">
+        <p14:cube dir="l"/>
+      </p:transition>
+    </mc:Choice>
+    <mc:Fallback>
+      <p:transition spd="med">
+        <p:push dir="l"/>
+      </p:transition>
+    </mc:Fallback>
+  </mc:AlternateContent>
 </p:sld>
 </file>
 
@@ -7541,7 +10721,7 @@
                 </a:solidFill>
                 <a:latin typeface="Montserrat"/>
               </a:rPr>
-              <a:t>002 / 015</a:t>
+              <a:t>002 / 021</a:t>
             </a:r>
           </a:p>
         </p:txBody>
@@ -7616,7 +10796,7 @@
       </p:sp>
       <p:sp>
         <p:nvSpPr>
-          <p:cNvPr id="6" name="Rounded Rectangle 5"/>
+          <p:cNvPr id="6" name="Rectangle 5"/>
           <p:cNvSpPr/>
           <p:nvPr/>
         </p:nvSpPr>
@@ -7625,7 +10805,7 @@
             <a:off x="868680" y="1234440"/>
             <a:ext cx="1463040" cy="73152"/>
           </a:xfrm>
-          <a:prstGeom prst="roundRect">
+          <a:prstGeom prst="rect">
             <a:avLst/>
           </a:prstGeom>
           <a:solidFill>
@@ -7706,14 +10886,58 @@
       </p:sp>
       <p:sp>
         <p:nvSpPr>
-          <p:cNvPr id="8" name="TextBox 7"/>
+          <p:cNvPr id="8" name="Rectangle 7"/>
+          <p:cNvSpPr/>
+          <p:nvPr/>
+        </p:nvSpPr>
+        <p:spPr>
+          <a:xfrm>
+            <a:off x="822960" y="2011680"/>
+            <a:ext cx="3017520" cy="128016"/>
+          </a:xfrm>
+          <a:prstGeom prst="rect">
+            <a:avLst/>
+          </a:prstGeom>
+          <a:solidFill>
+            <a:srgbClr val="E8801A"/>
+          </a:solidFill>
+          <a:ln>
+            <a:noFill/>
+          </a:ln>
+          <a:effectLst/>
+        </p:spPr>
+        <p:style>
+          <a:lnRef idx="1">
+            <a:schemeClr val="accent1"/>
+          </a:lnRef>
+          <a:fillRef idx="3">
+            <a:schemeClr val="accent1"/>
+          </a:fillRef>
+          <a:effectRef idx="2">
+            <a:schemeClr val="accent1"/>
+          </a:effectRef>
+          <a:fontRef idx="minor">
+            <a:schemeClr val="lt1"/>
+          </a:fontRef>
+        </p:style>
+        <p:txBody>
+          <a:bodyPr rtlCol="0" anchor="ctr"/>
+          <a:lstStyle/>
+          <a:p>
+            <a:pPr algn="ctr"/>
+          </a:p>
+        </p:txBody>
+      </p:sp>
+      <p:sp>
+        <p:nvSpPr>
+          <p:cNvPr id="9" name="TextBox 8"/>
           <p:cNvSpPr txBox="1"/>
           <p:nvPr/>
         </p:nvSpPr>
         <p:spPr>
           <a:xfrm>
-            <a:off x="822960" y="2331720"/>
-            <a:ext cx="3017520" cy="1463040"/>
+            <a:off x="822960" y="2377440"/>
+            <a:ext cx="3017520" cy="1371600"/>
           </a:xfrm>
           <a:prstGeom prst="rect">
             <a:avLst/>
@@ -7728,7 +10952,7 @@
           <a:p>
             <a:pPr algn="ctr"/>
             <a:r>
-              <a:rPr sz="6000" b="1" i="0">
+              <a:rPr sz="5800" b="1" i="0">
                 <a:solidFill>
                   <a:srgbClr val="1E2761"/>
                 </a:solidFill>
@@ -7741,13 +10965,13 @@
       </p:sp>
       <p:sp>
         <p:nvSpPr>
-          <p:cNvPr id="9" name="TextBox 8"/>
+          <p:cNvPr id="10" name="TextBox 9"/>
           <p:cNvSpPr txBox="1"/>
           <p:nvPr/>
         </p:nvSpPr>
         <p:spPr>
           <a:xfrm>
-            <a:off x="1051560" y="3611880"/>
+            <a:off x="1051560" y="3657600"/>
             <a:ext cx="2560320" cy="1005840"/>
           </a:xfrm>
           <a:prstGeom prst="rect">
@@ -7776,7 +11000,7 @@
       </p:sp>
       <p:sp>
         <p:nvSpPr>
-          <p:cNvPr id="10" name="Rounded Rectangle 9"/>
+          <p:cNvPr id="11" name="Rounded Rectangle 10"/>
           <p:cNvSpPr/>
           <p:nvPr/>
         </p:nvSpPr>
@@ -7822,14 +11046,58 @@
       </p:sp>
       <p:sp>
         <p:nvSpPr>
-          <p:cNvPr id="11" name="TextBox 10"/>
+          <p:cNvPr id="12" name="Rectangle 11"/>
+          <p:cNvSpPr/>
+          <p:nvPr/>
+        </p:nvSpPr>
+        <p:spPr>
+          <a:xfrm>
+            <a:off x="4617720" y="2011680"/>
+            <a:ext cx="3017520" cy="128016"/>
+          </a:xfrm>
+          <a:prstGeom prst="rect">
+            <a:avLst/>
+          </a:prstGeom>
+          <a:solidFill>
+            <a:srgbClr val="E8801A"/>
+          </a:solidFill>
+          <a:ln>
+            <a:noFill/>
+          </a:ln>
+          <a:effectLst/>
+        </p:spPr>
+        <p:style>
+          <a:lnRef idx="1">
+            <a:schemeClr val="accent1"/>
+          </a:lnRef>
+          <a:fillRef idx="3">
+            <a:schemeClr val="accent1"/>
+          </a:fillRef>
+          <a:effectRef idx="2">
+            <a:schemeClr val="accent1"/>
+          </a:effectRef>
+          <a:fontRef idx="minor">
+            <a:schemeClr val="lt1"/>
+          </a:fontRef>
+        </p:style>
+        <p:txBody>
+          <a:bodyPr rtlCol="0" anchor="ctr"/>
+          <a:lstStyle/>
+          <a:p>
+            <a:pPr algn="ctr"/>
+          </a:p>
+        </p:txBody>
+      </p:sp>
+      <p:sp>
+        <p:nvSpPr>
+          <p:cNvPr id="13" name="TextBox 12"/>
           <p:cNvSpPr txBox="1"/>
           <p:nvPr/>
         </p:nvSpPr>
         <p:spPr>
           <a:xfrm>
-            <a:off x="4617720" y="2331720"/>
-            <a:ext cx="3017520" cy="1463040"/>
+            <a:off x="4617720" y="2377440"/>
+            <a:ext cx="3017520" cy="1371600"/>
           </a:xfrm>
           <a:prstGeom prst="rect">
             <a:avLst/>
@@ -7844,7 +11112,7 @@
           <a:p>
             <a:pPr algn="ctr"/>
             <a:r>
-              <a:rPr sz="6000" b="1" i="0">
+              <a:rPr sz="5800" b="1" i="0">
                 <a:solidFill>
                   <a:srgbClr val="1E2761"/>
                 </a:solidFill>
@@ -7857,13 +11125,13 @@
       </p:sp>
       <p:sp>
         <p:nvSpPr>
-          <p:cNvPr id="12" name="TextBox 11"/>
+          <p:cNvPr id="14" name="TextBox 13"/>
           <p:cNvSpPr txBox="1"/>
           <p:nvPr/>
         </p:nvSpPr>
         <p:spPr>
           <a:xfrm>
-            <a:off x="4846320" y="3611880"/>
+            <a:off x="4846320" y="3657600"/>
             <a:ext cx="2560320" cy="1005840"/>
           </a:xfrm>
           <a:prstGeom prst="rect">
@@ -7892,7 +11160,7 @@
       </p:sp>
       <p:sp>
         <p:nvSpPr>
-          <p:cNvPr id="13" name="Rounded Rectangle 12"/>
+          <p:cNvPr id="15" name="Rounded Rectangle 14"/>
           <p:cNvSpPr/>
           <p:nvPr/>
         </p:nvSpPr>
@@ -7938,14 +11206,58 @@
       </p:sp>
       <p:sp>
         <p:nvSpPr>
-          <p:cNvPr id="14" name="TextBox 13"/>
+          <p:cNvPr id="16" name="Rectangle 15"/>
+          <p:cNvSpPr/>
+          <p:nvPr/>
+        </p:nvSpPr>
+        <p:spPr>
+          <a:xfrm>
+            <a:off x="8412480" y="2011680"/>
+            <a:ext cx="3017520" cy="128016"/>
+          </a:xfrm>
+          <a:prstGeom prst="rect">
+            <a:avLst/>
+          </a:prstGeom>
+          <a:solidFill>
+            <a:srgbClr val="E8801A"/>
+          </a:solidFill>
+          <a:ln>
+            <a:noFill/>
+          </a:ln>
+          <a:effectLst/>
+        </p:spPr>
+        <p:style>
+          <a:lnRef idx="1">
+            <a:schemeClr val="accent1"/>
+          </a:lnRef>
+          <a:fillRef idx="3">
+            <a:schemeClr val="accent1"/>
+          </a:fillRef>
+          <a:effectRef idx="2">
+            <a:schemeClr val="accent1"/>
+          </a:effectRef>
+          <a:fontRef idx="minor">
+            <a:schemeClr val="lt1"/>
+          </a:fontRef>
+        </p:style>
+        <p:txBody>
+          <a:bodyPr rtlCol="0" anchor="ctr"/>
+          <a:lstStyle/>
+          <a:p>
+            <a:pPr algn="ctr"/>
+          </a:p>
+        </p:txBody>
+      </p:sp>
+      <p:sp>
+        <p:nvSpPr>
+          <p:cNvPr id="17" name="TextBox 16"/>
           <p:cNvSpPr txBox="1"/>
           <p:nvPr/>
         </p:nvSpPr>
         <p:spPr>
           <a:xfrm>
-            <a:off x="8412480" y="2331720"/>
-            <a:ext cx="3017520" cy="1463040"/>
+            <a:off x="8412480" y="2377440"/>
+            <a:ext cx="3017520" cy="1371600"/>
           </a:xfrm>
           <a:prstGeom prst="rect">
             <a:avLst/>
@@ -7960,7 +11272,7 @@
           <a:p>
             <a:pPr algn="ctr"/>
             <a:r>
-              <a:rPr sz="6000" b="1" i="0">
+              <a:rPr sz="5800" b="1" i="0">
                 <a:solidFill>
                   <a:srgbClr val="1E2761"/>
                 </a:solidFill>
@@ -7973,13 +11285,13 @@
       </p:sp>
       <p:sp>
         <p:nvSpPr>
-          <p:cNvPr id="15" name="TextBox 14"/>
+          <p:cNvPr id="18" name="TextBox 17"/>
           <p:cNvSpPr txBox="1"/>
           <p:nvPr/>
         </p:nvSpPr>
         <p:spPr>
           <a:xfrm>
-            <a:off x="8641080" y="3611880"/>
+            <a:off x="8641080" y="3657600"/>
             <a:ext cx="2560320" cy="1005840"/>
           </a:xfrm>
           <a:prstGeom prst="rect">
@@ -8011,6 +11323,876 @@
   <p:clrMapOvr>
     <a:masterClrMapping/>
   </p:clrMapOvr>
+  <mc:AlternateContent xmlns:mc="http://schemas.openxmlformats.org/markup-compatibility/2006">
+    <mc:Choice xmlns:p14="http://schemas.microsoft.com/office/powerpoint/2010/main" Requires="p14">
+      <p:transition spd="med" p14:dur="700">
+        <p14:cube dir="r"/>
+      </p:transition>
+    </mc:Choice>
+    <mc:Fallback>
+      <p:transition spd="med">
+        <p:push dir="r"/>
+      </p:transition>
+    </mc:Fallback>
+  </mc:AlternateContent>
+</p:sld>
+</file>
+
+<file path=ppt/slides/slide20.xml><?xml version="1.0" encoding="utf-8"?>
+<p:sld xmlns:a="http://schemas.openxmlformats.org/drawingml/2006/main" xmlns:p="http://schemas.openxmlformats.org/presentationml/2006/main" xmlns:r="http://schemas.openxmlformats.org/officeDocument/2006/relationships">
+  <p:cSld>
+    <p:spTree>
+      <p:nvGrpSpPr>
+        <p:cNvPr id="1" name=""/>
+        <p:cNvGrpSpPr/>
+        <p:nvPr/>
+      </p:nvGrpSpPr>
+      <p:grpSpPr/>
+      <p:sp>
+        <p:nvSpPr>
+          <p:cNvPr id="2" name="Rectangle 1"/>
+          <p:cNvSpPr/>
+          <p:nvPr/>
+        </p:nvSpPr>
+        <p:spPr>
+          <a:xfrm>
+            <a:off x="0" y="0"/>
+            <a:ext cx="12191695" cy="6858000"/>
+          </a:xfrm>
+          <a:prstGeom prst="rect">
+            <a:avLst/>
+          </a:prstGeom>
+          <a:solidFill>
+            <a:srgbClr val="FFFFFF"/>
+          </a:solidFill>
+          <a:ln>
+            <a:noFill/>
+          </a:ln>
+          <a:effectLst/>
+        </p:spPr>
+        <p:style>
+          <a:lnRef idx="1">
+            <a:schemeClr val="accent1"/>
+          </a:lnRef>
+          <a:fillRef idx="3">
+            <a:schemeClr val="accent1"/>
+          </a:fillRef>
+          <a:effectRef idx="2">
+            <a:schemeClr val="accent1"/>
+          </a:effectRef>
+          <a:fontRef idx="minor">
+            <a:schemeClr val="lt1"/>
+          </a:fontRef>
+        </p:style>
+        <p:txBody>
+          <a:bodyPr rtlCol="0" anchor="ctr"/>
+          <a:lstStyle/>
+          <a:p>
+            <a:pPr algn="ctr"/>
+          </a:p>
+        </p:txBody>
+      </p:sp>
+      <p:sp>
+        <p:nvSpPr>
+          <p:cNvPr id="3" name="TextBox 2"/>
+          <p:cNvSpPr txBox="1"/>
+          <p:nvPr/>
+        </p:nvSpPr>
+        <p:spPr>
+          <a:xfrm>
+            <a:off x="10607040" y="320040"/>
+            <a:ext cx="1371600" cy="365760"/>
+          </a:xfrm>
+          <a:prstGeom prst="rect">
+            <a:avLst/>
+          </a:prstGeom>
+          <a:noFill/>
+        </p:spPr>
+        <p:txBody>
+          <a:bodyPr wrap="square">
+            <a:spAutoFit/>
+          </a:bodyPr>
+          <a:lstStyle/>
+          <a:p>
+            <a:pPr algn="r"/>
+            <a:r>
+              <a:rPr sz="1000" b="1" i="0">
+                <a:solidFill>
+                  <a:srgbClr val="64748B"/>
+                </a:solidFill>
+                <a:latin typeface="Montserrat"/>
+              </a:rPr>
+              <a:t>020 / 021</a:t>
+            </a:r>
+          </a:p>
+        </p:txBody>
+      </p:sp>
+      <p:sp>
+        <p:nvSpPr>
+          <p:cNvPr id="4" name="TextBox 3"/>
+          <p:cNvSpPr txBox="1"/>
+          <p:nvPr/>
+        </p:nvSpPr>
+        <p:spPr>
+          <a:xfrm>
+            <a:off x="457200" y="6419088"/>
+            <a:ext cx="8229600" cy="365760"/>
+          </a:xfrm>
+          <a:prstGeom prst="rect">
+            <a:avLst/>
+          </a:prstGeom>
+          <a:noFill/>
+        </p:spPr>
+        <p:txBody>
+          <a:bodyPr wrap="square">
+            <a:spAutoFit/>
+          </a:bodyPr>
+          <a:lstStyle/>
+          <a:p>
+            <a:r>
+              <a:rPr sz="900" b="0" i="0">
+                <a:solidFill>
+                  <a:srgbClr val="64748B"/>
+                </a:solidFill>
+                <a:latin typeface="Montserrat"/>
+              </a:rPr>
+              <a:t>Curso Gas B · Tema 10 · UNE 60670-3</a:t>
+            </a:r>
+          </a:p>
+        </p:txBody>
+      </p:sp>
+      <p:sp>
+        <p:nvSpPr>
+          <p:cNvPr id="5" name="TextBox 4"/>
+          <p:cNvSpPr txBox="1"/>
+          <p:nvPr/>
+        </p:nvSpPr>
+        <p:spPr>
+          <a:xfrm>
+            <a:off x="822960" y="457200"/>
+            <a:ext cx="10058400" cy="365760"/>
+          </a:xfrm>
+          <a:prstGeom prst="rect">
+            <a:avLst/>
+          </a:prstGeom>
+          <a:noFill/>
+        </p:spPr>
+        <p:txBody>
+          <a:bodyPr wrap="square">
+            <a:spAutoFit/>
+          </a:bodyPr>
+          <a:lstStyle/>
+          <a:p>
+            <a:r>
+              <a:rPr sz="1300" b="1" i="0">
+                <a:solidFill>
+                  <a:srgbClr val="E8801A"/>
+                </a:solidFill>
+                <a:latin typeface="Montserrat"/>
+              </a:rPr>
+              <a:t>TRANSICIÓN PE-METAL · OTRAS</a:t>
+            </a:r>
+          </a:p>
+        </p:txBody>
+      </p:sp>
+      <p:sp>
+        <p:nvSpPr>
+          <p:cNvPr id="6" name="TextBox 5"/>
+          <p:cNvSpPr txBox="1"/>
+          <p:nvPr/>
+        </p:nvSpPr>
+        <p:spPr>
+          <a:xfrm>
+            <a:off x="822960" y="868680"/>
+            <a:ext cx="10515600" cy="914400"/>
+          </a:xfrm>
+          <a:prstGeom prst="rect">
+            <a:avLst/>
+          </a:prstGeom>
+          <a:noFill/>
+        </p:spPr>
+        <p:txBody>
+          <a:bodyPr wrap="square">
+            <a:spAutoFit/>
+          </a:bodyPr>
+          <a:lstStyle/>
+          <a:p>
+            <a:r>
+              <a:rPr sz="2800" b="1" i="0">
+                <a:solidFill>
+                  <a:srgbClr val="1E2761"/>
+                </a:solidFill>
+                <a:latin typeface="Montserrat"/>
+              </a:rPr>
+              <a:t>Enlaces PE-metal y otras uniones</a:t>
+            </a:r>
+          </a:p>
+        </p:txBody>
+      </p:sp>
+      <p:sp>
+        <p:nvSpPr>
+          <p:cNvPr id="7" name="Rectangle 6"/>
+          <p:cNvSpPr/>
+          <p:nvPr/>
+        </p:nvSpPr>
+        <p:spPr>
+          <a:xfrm>
+            <a:off x="868680" y="1627632"/>
+            <a:ext cx="2011680" cy="73152"/>
+          </a:xfrm>
+          <a:prstGeom prst="rect">
+            <a:avLst/>
+          </a:prstGeom>
+          <a:solidFill>
+            <a:srgbClr val="E8801A"/>
+          </a:solidFill>
+          <a:ln>
+            <a:noFill/>
+          </a:ln>
+          <a:effectLst/>
+        </p:spPr>
+        <p:style>
+          <a:lnRef idx="1">
+            <a:schemeClr val="accent1"/>
+          </a:lnRef>
+          <a:fillRef idx="3">
+            <a:schemeClr val="accent1"/>
+          </a:fillRef>
+          <a:effectRef idx="2">
+            <a:schemeClr val="accent1"/>
+          </a:effectRef>
+          <a:fontRef idx="minor">
+            <a:schemeClr val="lt1"/>
+          </a:fontRef>
+        </p:style>
+        <p:txBody>
+          <a:bodyPr rtlCol="0" anchor="ctr"/>
+          <a:lstStyle/>
+          <a:p>
+            <a:pPr algn="ctr"/>
+          </a:p>
+        </p:txBody>
+      </p:sp>
+      <p:sp>
+        <p:nvSpPr>
+          <p:cNvPr id="8" name="TextBox 7"/>
+          <p:cNvSpPr txBox="1"/>
+          <p:nvPr/>
+        </p:nvSpPr>
+        <p:spPr>
+          <a:xfrm>
+            <a:off x="822960" y="1965960"/>
+            <a:ext cx="5029200" cy="4206240"/>
+          </a:xfrm>
+          <a:prstGeom prst="rect">
+            <a:avLst/>
+          </a:prstGeom>
+          <a:noFill/>
+        </p:spPr>
+        <p:txBody>
+          <a:bodyPr wrap="square">
+            <a:spAutoFit/>
+          </a:bodyPr>
+          <a:lstStyle/>
+          <a:p>
+            <a:pPr>
+              <a:spcAft>
+                <a:spcPts val="1100"/>
+              </a:spcAft>
+            </a:pPr>
+            <a:r>
+              <a:rPr sz="1600" b="1" i="0">
+                <a:solidFill>
+                  <a:srgbClr val="E8801A"/>
+                </a:solidFill>
+                <a:latin typeface="Montserrat"/>
+              </a:rPr>
+              <a:t>▸  </a:t>
+            </a:r>
+            <a:r>
+              <a:rPr sz="1600" b="0" i="0">
+                <a:solidFill>
+                  <a:srgbClr val="1B2330"/>
+                </a:solidFill>
+                <a:latin typeface="Montserrat"/>
+              </a:rPr>
+              <a:t>Desmontable → UNE 60405-1 y -3</a:t>
+            </a:r>
+          </a:p>
+          <a:p>
+            <a:pPr>
+              <a:spcAft>
+                <a:spcPts val="1100"/>
+              </a:spcAft>
+            </a:pPr>
+            <a:r>
+              <a:rPr sz="1600" b="1" i="0">
+                <a:solidFill>
+                  <a:srgbClr val="E8801A"/>
+                </a:solidFill>
+                <a:latin typeface="Montserrat"/>
+              </a:rPr>
+              <a:t>▸  </a:t>
+            </a:r>
+            <a:r>
+              <a:rPr sz="1600" b="0" i="0">
+                <a:solidFill>
+                  <a:srgbClr val="1B2330"/>
+                </a:solidFill>
+                <a:latin typeface="Montserrat"/>
+              </a:rPr>
+              <a:t>Fijo → UNE 60405-1 y -2</a:t>
+            </a:r>
+          </a:p>
+          <a:p>
+            <a:pPr>
+              <a:spcAft>
+                <a:spcPts val="1100"/>
+              </a:spcAft>
+            </a:pPr>
+            <a:r>
+              <a:rPr sz="1600" b="1" i="0">
+                <a:solidFill>
+                  <a:srgbClr val="E8801A"/>
+                </a:solidFill>
+                <a:latin typeface="Montserrat"/>
+              </a:rPr>
+              <a:t>▸  </a:t>
+            </a:r>
+            <a:r>
+              <a:rPr sz="1600" b="0" i="0">
+                <a:solidFill>
+                  <a:srgbClr val="1B2330"/>
+                </a:solidFill>
+                <a:latin typeface="Montserrat"/>
+              </a:rPr>
+              <a:t>No confundas desmontable con fijo</a:t>
+            </a:r>
+          </a:p>
+          <a:p>
+            <a:pPr>
+              <a:spcAft>
+                <a:spcPts val="1100"/>
+              </a:spcAft>
+            </a:pPr>
+            <a:r>
+              <a:rPr sz="1600" b="1" i="0">
+                <a:solidFill>
+                  <a:srgbClr val="E8801A"/>
+                </a:solidFill>
+                <a:latin typeface="Montserrat"/>
+              </a:rPr>
+              <a:t>▸  </a:t>
+            </a:r>
+            <a:r>
+              <a:rPr sz="1600" b="0" i="0">
+                <a:solidFill>
+                  <a:srgbClr val="1B2330"/>
+                </a:solidFill>
+                <a:latin typeface="Montserrat"/>
+              </a:rPr>
+              <a:t>Otras aceptadas: UNE-EN 1775</a:t>
+            </a:r>
+          </a:p>
+        </p:txBody>
+      </p:sp>
+      <p:sp>
+        <p:nvSpPr>
+          <p:cNvPr id="9" name="imgph" descr="IMGQ:polyethylene to metal transition fitting"/>
+          <p:cNvSpPr/>
+          <p:nvPr/>
+        </p:nvSpPr>
+        <p:spPr>
+          <a:xfrm>
+            <a:off x="6080760" y="1965960"/>
+            <a:ext cx="5303520" cy="4572000"/>
+          </a:xfrm>
+          <a:prstGeom prst="roundRect">
+            <a:avLst/>
+          </a:prstGeom>
+          <a:solidFill>
+            <a:srgbClr val="F3F6FB"/>
+          </a:solidFill>
+          <a:ln w="12700">
+            <a:solidFill>
+              <a:srgbClr val="C7D2E6"/>
+            </a:solidFill>
+          </a:ln>
+          <a:effectLst/>
+        </p:spPr>
+        <p:style>
+          <a:lnRef idx="1">
+            <a:schemeClr val="accent1"/>
+          </a:lnRef>
+          <a:fillRef idx="3">
+            <a:schemeClr val="accent1"/>
+          </a:fillRef>
+          <a:effectRef idx="2">
+            <a:schemeClr val="accent1"/>
+          </a:effectRef>
+          <a:fontRef idx="minor">
+            <a:schemeClr val="lt1"/>
+          </a:fontRef>
+        </p:style>
+        <p:txBody>
+          <a:bodyPr rtlCol="0" anchor="ctr"/>
+          <a:lstStyle/>
+          <a:p>
+            <a:pPr algn="ctr"/>
+          </a:p>
+        </p:txBody>
+      </p:sp>
+      <p:sp>
+        <p:nvSpPr>
+          <p:cNvPr id="10" name="TextBox 9"/>
+          <p:cNvSpPr txBox="1"/>
+          <p:nvPr/>
+        </p:nvSpPr>
+        <p:spPr>
+          <a:xfrm>
+            <a:off x="6355080" y="3611880"/>
+            <a:ext cx="4754880" cy="1280160"/>
+          </a:xfrm>
+          <a:prstGeom prst="rect">
+            <a:avLst/>
+          </a:prstGeom>
+          <a:noFill/>
+        </p:spPr>
+        <p:txBody>
+          <a:bodyPr wrap="square">
+            <a:spAutoFit/>
+          </a:bodyPr>
+          <a:lstStyle/>
+          <a:p>
+            <a:pPr algn="ctr"/>
+            <a:r>
+              <a:rPr sz="1400" b="1" i="0">
+                <a:solidFill>
+                  <a:srgbClr val="64748B"/>
+                </a:solidFill>
+                <a:latin typeface="Montserrat"/>
+              </a:rPr>
+              <a:t>IMAGEN</a:t>
+            </a:r>
+          </a:p>
+          <a:p>
+            <a:pPr algn="ctr"/>
+            <a:r>
+              <a:rPr sz="1100" b="0" i="1">
+                <a:solidFill>
+                  <a:srgbClr val="64748B"/>
+                </a:solidFill>
+                <a:latin typeface="Montserrat"/>
+              </a:rPr>
+              <a:t>polyethylene to metal transition fitting</a:t>
+            </a:r>
+          </a:p>
+        </p:txBody>
+      </p:sp>
+    </p:spTree>
+  </p:cSld>
+  <p:clrMapOvr>
+    <a:masterClrMapping/>
+  </p:clrMapOvr>
+  <mc:AlternateContent xmlns:mc="http://schemas.openxmlformats.org/markup-compatibility/2006">
+    <mc:Choice xmlns:p14="http://schemas.microsoft.com/office/powerpoint/2010/main" Requires="p14">
+      <p:transition spd="med" p14:dur="700">
+        <p14:cube dir="r"/>
+      </p:transition>
+    </mc:Choice>
+    <mc:Fallback>
+      <p:transition spd="med">
+        <p:push dir="r"/>
+      </p:transition>
+    </mc:Fallback>
+  </mc:AlternateContent>
+</p:sld>
+</file>
+
+<file path=ppt/slides/slide21.xml><?xml version="1.0" encoding="utf-8"?>
+<p:sld xmlns:a="http://schemas.openxmlformats.org/drawingml/2006/main" xmlns:p="http://schemas.openxmlformats.org/presentationml/2006/main" xmlns:r="http://schemas.openxmlformats.org/officeDocument/2006/relationships">
+  <p:cSld>
+    <p:spTree>
+      <p:nvGrpSpPr>
+        <p:cNvPr id="1" name=""/>
+        <p:cNvGrpSpPr/>
+        <p:nvPr/>
+      </p:nvGrpSpPr>
+      <p:grpSpPr/>
+      <p:sp>
+        <p:nvSpPr>
+          <p:cNvPr id="2" name="Rectangle 1"/>
+          <p:cNvSpPr/>
+          <p:nvPr/>
+        </p:nvSpPr>
+        <p:spPr>
+          <a:xfrm>
+            <a:off x="0" y="0"/>
+            <a:ext cx="12191695" cy="6858000"/>
+          </a:xfrm>
+          <a:prstGeom prst="rect">
+            <a:avLst/>
+          </a:prstGeom>
+          <a:solidFill>
+            <a:srgbClr val="1E2761"/>
+          </a:solidFill>
+          <a:ln>
+            <a:noFill/>
+          </a:ln>
+          <a:effectLst/>
+        </p:spPr>
+        <p:style>
+          <a:lnRef idx="1">
+            <a:schemeClr val="accent1"/>
+          </a:lnRef>
+          <a:fillRef idx="3">
+            <a:schemeClr val="accent1"/>
+          </a:fillRef>
+          <a:effectRef idx="2">
+            <a:schemeClr val="accent1"/>
+          </a:effectRef>
+          <a:fontRef idx="minor">
+            <a:schemeClr val="lt1"/>
+          </a:fontRef>
+        </p:style>
+        <p:txBody>
+          <a:bodyPr rtlCol="0" anchor="ctr"/>
+          <a:lstStyle/>
+          <a:p>
+            <a:pPr algn="ctr"/>
+          </a:p>
+        </p:txBody>
+      </p:sp>
+      <p:sp>
+        <p:nvSpPr>
+          <p:cNvPr id="3" name="TextBox 2"/>
+          <p:cNvSpPr txBox="1"/>
+          <p:nvPr/>
+        </p:nvSpPr>
+        <p:spPr>
+          <a:xfrm>
+            <a:off x="822960" y="640080"/>
+            <a:ext cx="10515600" cy="457200"/>
+          </a:xfrm>
+          <a:prstGeom prst="rect">
+            <a:avLst/>
+          </a:prstGeom>
+          <a:noFill/>
+        </p:spPr>
+        <p:txBody>
+          <a:bodyPr wrap="square">
+            <a:spAutoFit/>
+          </a:bodyPr>
+          <a:lstStyle/>
+          <a:p>
+            <a:r>
+              <a:rPr sz="1400" b="1" i="0">
+                <a:solidFill>
+                  <a:srgbClr val="F4A24C"/>
+                </a:solidFill>
+                <a:latin typeface="Montserrat"/>
+              </a:rPr>
+              <a:t>LO QUE YA DOMINAS</a:t>
+            </a:r>
+          </a:p>
+        </p:txBody>
+      </p:sp>
+      <p:sp>
+        <p:nvSpPr>
+          <p:cNvPr id="4" name="Rectangle 3"/>
+          <p:cNvSpPr/>
+          <p:nvPr/>
+        </p:nvSpPr>
+        <p:spPr>
+          <a:xfrm>
+            <a:off x="868680" y="1051560"/>
+            <a:ext cx="1463040" cy="82296"/>
+          </a:xfrm>
+          <a:prstGeom prst="rect">
+            <a:avLst/>
+          </a:prstGeom>
+          <a:solidFill>
+            <a:srgbClr val="E8801A"/>
+          </a:solidFill>
+          <a:ln>
+            <a:noFill/>
+          </a:ln>
+          <a:effectLst/>
+        </p:spPr>
+        <p:style>
+          <a:lnRef idx="1">
+            <a:schemeClr val="accent1"/>
+          </a:lnRef>
+          <a:fillRef idx="3">
+            <a:schemeClr val="accent1"/>
+          </a:fillRef>
+          <a:effectRef idx="2">
+            <a:schemeClr val="accent1"/>
+          </a:effectRef>
+          <a:fontRef idx="minor">
+            <a:schemeClr val="lt1"/>
+          </a:fontRef>
+        </p:style>
+        <p:txBody>
+          <a:bodyPr rtlCol="0" anchor="ctr"/>
+          <a:lstStyle/>
+          <a:p>
+            <a:pPr algn="ctr"/>
+          </a:p>
+        </p:txBody>
+      </p:sp>
+      <p:sp>
+        <p:nvSpPr>
+          <p:cNvPr id="5" name="TextBox 4"/>
+          <p:cNvSpPr txBox="1"/>
+          <p:nvPr/>
+        </p:nvSpPr>
+        <p:spPr>
+          <a:xfrm>
+            <a:off x="822960" y="1234440"/>
+            <a:ext cx="10515600" cy="1097280"/>
+          </a:xfrm>
+          <a:prstGeom prst="rect">
+            <a:avLst/>
+          </a:prstGeom>
+          <a:noFill/>
+        </p:spPr>
+        <p:txBody>
+          <a:bodyPr wrap="square">
+            <a:spAutoFit/>
+          </a:bodyPr>
+          <a:lstStyle/>
+          <a:p>
+            <a:r>
+              <a:rPr sz="3400" b="1" i="0">
+                <a:solidFill>
+                  <a:srgbClr val="FFFFFF"/>
+                </a:solidFill>
+                <a:latin typeface="Montserrat"/>
+              </a:rPr>
+              <a:t>Ya sabes por qué no fuga una instalación</a:t>
+            </a:r>
+          </a:p>
+        </p:txBody>
+      </p:sp>
+      <p:sp>
+        <p:nvSpPr>
+          <p:cNvPr id="6" name="TextBox 5"/>
+          <p:cNvSpPr txBox="1"/>
+          <p:nvPr/>
+        </p:nvSpPr>
+        <p:spPr>
+          <a:xfrm>
+            <a:off x="822960" y="2606040"/>
+            <a:ext cx="10515600" cy="2743200"/>
+          </a:xfrm>
+          <a:prstGeom prst="rect">
+            <a:avLst/>
+          </a:prstGeom>
+          <a:noFill/>
+        </p:spPr>
+        <p:txBody>
+          <a:bodyPr wrap="square">
+            <a:spAutoFit/>
+          </a:bodyPr>
+          <a:lstStyle/>
+          <a:p>
+            <a:pPr>
+              <a:spcAft>
+                <a:spcPts val="1200"/>
+              </a:spcAft>
+            </a:pPr>
+            <a:r>
+              <a:rPr sz="2000" b="1" i="0">
+                <a:solidFill>
+                  <a:srgbClr val="F4A24C"/>
+                </a:solidFill>
+                <a:latin typeface="Montserrat"/>
+              </a:rPr>
+              <a:t>✓  </a:t>
+            </a:r>
+            <a:r>
+              <a:rPr sz="1900" b="0" i="0">
+                <a:solidFill>
+                  <a:srgbClr val="FFFFFF"/>
+                </a:solidFill>
+                <a:latin typeface="Montserrat"/>
+              </a:rPr>
+              <a:t>Estanquidad: la única regla que manda</a:t>
+            </a:r>
+          </a:p>
+          <a:p>
+            <a:pPr>
+              <a:spcAft>
+                <a:spcPts val="1200"/>
+              </a:spcAft>
+            </a:pPr>
+            <a:r>
+              <a:rPr sz="2000" b="1" i="0">
+                <a:solidFill>
+                  <a:srgbClr val="F4A24C"/>
+                </a:solidFill>
+                <a:latin typeface="Montserrat"/>
+              </a:rPr>
+              <a:t>✓  </a:t>
+            </a:r>
+            <a:r>
+              <a:rPr sz="1900" b="0" i="0">
+                <a:solidFill>
+                  <a:srgbClr val="FFFFFF"/>
+                </a:solidFill>
+                <a:latin typeface="Montserrat"/>
+              </a:rPr>
+              <a:t>Frontera blanda / fuerte en 0,05 bar</a:t>
+            </a:r>
+          </a:p>
+          <a:p>
+            <a:pPr>
+              <a:spcAft>
+                <a:spcPts val="1200"/>
+              </a:spcAft>
+            </a:pPr>
+            <a:r>
+              <a:rPr sz="2000" b="1" i="0">
+                <a:solidFill>
+                  <a:srgbClr val="F4A24C"/>
+                </a:solidFill>
+                <a:latin typeface="Montserrat"/>
+              </a:rPr>
+              <a:t>✓  </a:t>
+            </a:r>
+            <a:r>
+              <a:rPr sz="1900" b="0" i="0">
+                <a:solidFill>
+                  <a:srgbClr val="FFFFFF"/>
+                </a:solidFill>
+                <a:latin typeface="Montserrat"/>
+              </a:rPr>
+              <a:t>Fusión: 220 – 450 – 850 °C</a:t>
+            </a:r>
+          </a:p>
+          <a:p>
+            <a:pPr>
+              <a:spcAft>
+                <a:spcPts val="1200"/>
+              </a:spcAft>
+            </a:pPr>
+            <a:r>
+              <a:rPr sz="2000" b="1" i="0">
+                <a:solidFill>
+                  <a:srgbClr val="F4A24C"/>
+                </a:solidFill>
+                <a:latin typeface="Montserrat"/>
+              </a:rPr>
+              <a:t>✓  </a:t>
+            </a:r>
+            <a:r>
+              <a:rPr sz="1900" b="0" i="0">
+                <a:solidFill>
+                  <a:srgbClr val="FFFFFF"/>
+                </a:solidFill>
+                <a:latin typeface="Montserrat"/>
+              </a:rPr>
+              <a:t>Metales distintos: siempre el traductor</a:t>
+            </a:r>
+          </a:p>
+        </p:txBody>
+      </p:sp>
+      <p:sp>
+        <p:nvSpPr>
+          <p:cNvPr id="7" name="Rounded Rectangle 6"/>
+          <p:cNvSpPr/>
+          <p:nvPr/>
+        </p:nvSpPr>
+        <p:spPr>
+          <a:xfrm>
+            <a:off x="822960" y="5532120"/>
+            <a:ext cx="10515600" cy="822960"/>
+          </a:xfrm>
+          <a:prstGeom prst="roundRect">
+            <a:avLst/>
+          </a:prstGeom>
+          <a:solidFill>
+            <a:srgbClr val="E8801A"/>
+          </a:solidFill>
+          <a:ln>
+            <a:noFill/>
+          </a:ln>
+          <a:effectLst/>
+        </p:spPr>
+        <p:style>
+          <a:lnRef idx="1">
+            <a:schemeClr val="accent1"/>
+          </a:lnRef>
+          <a:fillRef idx="3">
+            <a:schemeClr val="accent1"/>
+          </a:fillRef>
+          <a:effectRef idx="2">
+            <a:schemeClr val="accent1"/>
+          </a:effectRef>
+          <a:fontRef idx="minor">
+            <a:schemeClr val="lt1"/>
+          </a:fontRef>
+        </p:style>
+        <p:txBody>
+          <a:bodyPr rtlCol="0" anchor="ctr"/>
+          <a:lstStyle/>
+          <a:p>
+            <a:pPr algn="ctr"/>
+          </a:p>
+        </p:txBody>
+      </p:sp>
+      <p:sp>
+        <p:nvSpPr>
+          <p:cNvPr id="8" name="TextBox 7"/>
+          <p:cNvSpPr txBox="1"/>
+          <p:nvPr/>
+        </p:nvSpPr>
+        <p:spPr>
+          <a:xfrm>
+            <a:off x="1051560" y="5623560"/>
+            <a:ext cx="10058400" cy="640080"/>
+          </a:xfrm>
+          <a:prstGeom prst="rect">
+            <a:avLst/>
+          </a:prstGeom>
+          <a:noFill/>
+        </p:spPr>
+        <p:txBody>
+          <a:bodyPr wrap="square">
+            <a:spAutoFit/>
+          </a:bodyPr>
+          <a:lstStyle/>
+          <a:p>
+            <a:r>
+              <a:rPr sz="1500" b="1" i="1">
+                <a:solidFill>
+                  <a:srgbClr val="1E2761"/>
+                </a:solidFill>
+                <a:latin typeface="Montserrat"/>
+              </a:rPr>
+              <a:t>Has cerrado la Parte 3 entera: ya lees una instalación material a material y unión a unión.</a:t>
+            </a:r>
+          </a:p>
+        </p:txBody>
+      </p:sp>
+    </p:spTree>
+  </p:cSld>
+  <p:clrMapOvr>
+    <a:masterClrMapping/>
+  </p:clrMapOvr>
+  <mc:AlternateContent xmlns:mc="http://schemas.openxmlformats.org/markup-compatibility/2006">
+    <mc:Choice xmlns:p14="http://schemas.microsoft.com/office/powerpoint/2010/main" Requires="p14">
+      <p:transition spd="med" p14:dur="700">
+        <p14:cube dir="l"/>
+      </p:transition>
+    </mc:Choice>
+    <mc:Fallback>
+      <p:transition spd="med">
+        <p:push dir="l"/>
+      </p:transition>
+    </mc:Fallback>
+  </mc:AlternateContent>
 </p:sld>
 </file>
 
@@ -8098,7 +12280,7 @@
                 </a:solidFill>
                 <a:latin typeface="Montserrat"/>
               </a:rPr>
-              <a:t>003 / 015</a:t>
+              <a:t>003 / 021</a:t>
             </a:r>
           </a:p>
         </p:txBody>
@@ -8207,7 +12389,7 @@
       </p:sp>
       <p:sp>
         <p:nvSpPr>
-          <p:cNvPr id="7" name="Rounded Rectangle 6"/>
+          <p:cNvPr id="7" name="Rectangle 6"/>
           <p:cNvSpPr/>
           <p:nvPr/>
         </p:nvSpPr>
@@ -8216,7 +12398,7 @@
             <a:off x="868680" y="1673352"/>
             <a:ext cx="2011680" cy="73152"/>
           </a:xfrm>
-          <a:prstGeom prst="roundRect">
+          <a:prstGeom prst="rect">
             <a:avLst/>
           </a:prstGeom>
           <a:solidFill>
@@ -8377,6 +12559,18 @@
   <p:clrMapOvr>
     <a:masterClrMapping/>
   </p:clrMapOvr>
+  <mc:AlternateContent xmlns:mc="http://schemas.openxmlformats.org/markup-compatibility/2006">
+    <mc:Choice xmlns:p14="http://schemas.microsoft.com/office/powerpoint/2010/main" Requires="p14">
+      <p:transition spd="med" p14:dur="700">
+        <p14:cube dir="l"/>
+      </p:transition>
+    </mc:Choice>
+    <mc:Fallback>
+      <p:transition spd="med">
+        <p:push dir="l"/>
+      </p:transition>
+    </mc:Fallback>
+  </mc:AlternateContent>
 </p:sld>
 </file>
 
@@ -8464,7 +12658,7 @@
                 </a:solidFill>
                 <a:latin typeface="Montserrat"/>
               </a:rPr>
-              <a:t>004 / 015</a:t>
+              <a:t>004 / 021</a:t>
             </a:r>
           </a:p>
         </p:txBody>
@@ -8573,7 +12767,7 @@
       </p:sp>
       <p:sp>
         <p:nvSpPr>
-          <p:cNvPr id="7" name="Rounded Rectangle 6"/>
+          <p:cNvPr id="7" name="Rectangle 6"/>
           <p:cNvSpPr/>
           <p:nvPr/>
         </p:nvSpPr>
@@ -8582,7 +12776,7 @@
             <a:off x="868680" y="1627632"/>
             <a:ext cx="2011680" cy="73152"/>
           </a:xfrm>
-          <a:prstGeom prst="roundRect">
+          <a:prstGeom prst="rect">
             <a:avLst/>
           </a:prstGeom>
           <a:solidFill>
@@ -8624,7 +12818,7 @@
         <p:spPr>
           <a:xfrm>
             <a:off x="822960" y="1965960"/>
-            <a:ext cx="4983480" cy="4206240"/>
+            <a:ext cx="5029200" cy="4206240"/>
           </a:xfrm>
           <a:prstGeom prst="rect">
             <a:avLst/>
@@ -8746,8 +12940,8 @@
         </p:nvSpPr>
         <p:spPr>
           <a:xfrm>
-            <a:off x="5806440" y="1051560"/>
-            <a:ext cx="5298947" cy="4629150"/>
+            <a:off x="6080760" y="1965960"/>
+            <a:ext cx="5303520" cy="4572000"/>
           </a:xfrm>
           <a:prstGeom prst="roundRect">
             <a:avLst/>
@@ -8792,8 +12986,8 @@
         </p:nvSpPr>
         <p:spPr>
           <a:xfrm>
-            <a:off x="6080760" y="2726055"/>
-            <a:ext cx="4750307" cy="1280160"/>
+            <a:off x="6355080" y="3611880"/>
+            <a:ext cx="4754880" cy="1280160"/>
           </a:xfrm>
           <a:prstGeom prst="rect">
             <a:avLst/>
@@ -8814,7 +13008,7 @@
                 </a:solidFill>
                 <a:latin typeface="Montserrat"/>
               </a:rPr>
-              <a:t>IMAGEN REALISTA</a:t>
+              <a:t>IMAGEN</a:t>
             </a:r>
           </a:p>
           <a:p>
@@ -8836,6 +13030,18 @@
   <p:clrMapOvr>
     <a:masterClrMapping/>
   </p:clrMapOvr>
+  <mc:AlternateContent xmlns:mc="http://schemas.openxmlformats.org/markup-compatibility/2006">
+    <mc:Choice xmlns:p14="http://schemas.microsoft.com/office/powerpoint/2010/main" Requires="p14">
+      <p:transition spd="med" p14:dur="700">
+        <p14:cube dir="r"/>
+      </p:transition>
+    </mc:Choice>
+    <mc:Fallback>
+      <p:transition spd="med">
+        <p:push dir="r"/>
+      </p:transition>
+    </mc:Fallback>
+  </mc:AlternateContent>
 </p:sld>
 </file>
 
@@ -8923,7 +13129,7 @@
                 </a:solidFill>
                 <a:latin typeface="Montserrat"/>
               </a:rPr>
-              <a:t>005 / 015</a:t>
+              <a:t>005 / 021</a:t>
             </a:r>
           </a:p>
         </p:txBody>
@@ -9032,7 +13238,7 @@
       </p:sp>
       <p:sp>
         <p:nvSpPr>
-          <p:cNvPr id="7" name="Rounded Rectangle 6"/>
+          <p:cNvPr id="7" name="Rectangle 6"/>
           <p:cNvSpPr/>
           <p:nvPr/>
         </p:nvSpPr>
@@ -9041,7 +13247,7 @@
             <a:off x="868680" y="1627632"/>
             <a:ext cx="2011680" cy="73152"/>
           </a:xfrm>
-          <a:prstGeom prst="roundRect">
+          <a:prstGeom prst="rect">
             <a:avLst/>
           </a:prstGeom>
           <a:solidFill>
@@ -9082,8 +13288,8 @@
         </p:nvSpPr>
         <p:spPr>
           <a:xfrm>
-            <a:off x="822960" y="1965960"/>
-            <a:ext cx="4983480" cy="4206240"/>
+            <a:off x="6355080" y="1965960"/>
+            <a:ext cx="5029200" cy="4206240"/>
           </a:xfrm>
           <a:prstGeom prst="rect">
             <a:avLst/>
@@ -9205,8 +13411,8 @@
         </p:nvSpPr>
         <p:spPr>
           <a:xfrm>
-            <a:off x="5806440" y="1051560"/>
-            <a:ext cx="5298947" cy="4629150"/>
+            <a:off x="822960" y="1965960"/>
+            <a:ext cx="5303520" cy="4572000"/>
           </a:xfrm>
           <a:prstGeom prst="roundRect">
             <a:avLst/>
@@ -9251,8 +13457,8 @@
         </p:nvSpPr>
         <p:spPr>
           <a:xfrm>
-            <a:off x="6080760" y="2726055"/>
-            <a:ext cx="4750307" cy="1280160"/>
+            <a:off x="1097280" y="3611880"/>
+            <a:ext cx="4754880" cy="1280160"/>
           </a:xfrm>
           <a:prstGeom prst="rect">
             <a:avLst/>
@@ -9273,7 +13479,7 @@
                 </a:solidFill>
                 <a:latin typeface="Montserrat"/>
               </a:rPr>
-              <a:t>IMAGEN REALISTA</a:t>
+              <a:t>IMAGEN</a:t>
             </a:r>
           </a:p>
           <a:p>
@@ -9295,6 +13501,18 @@
   <p:clrMapOvr>
     <a:masterClrMapping/>
   </p:clrMapOvr>
+  <mc:AlternateContent xmlns:mc="http://schemas.openxmlformats.org/markup-compatibility/2006">
+    <mc:Choice xmlns:p14="http://schemas.microsoft.com/office/powerpoint/2010/main" Requires="p14">
+      <p:transition spd="med" p14:dur="700">
+        <p14:cube dir="l"/>
+      </p:transition>
+    </mc:Choice>
+    <mc:Fallback>
+      <p:transition spd="med">
+        <p:push dir="l"/>
+      </p:transition>
+    </mc:Fallback>
+  </mc:AlternateContent>
 </p:sld>
 </file>
 
@@ -9382,7 +13600,7 @@
                 </a:solidFill>
                 <a:latin typeface="Montserrat"/>
               </a:rPr>
-              <a:t>006 / 015</a:t>
+              <a:t>006 / 021</a:t>
             </a:r>
           </a:p>
         </p:txBody>
@@ -9491,7 +13709,7 @@
       </p:sp>
       <p:sp>
         <p:nvSpPr>
-          <p:cNvPr id="7" name="Rounded Rectangle 6"/>
+          <p:cNvPr id="7" name="Rectangle 6"/>
           <p:cNvSpPr/>
           <p:nvPr/>
         </p:nvSpPr>
@@ -9500,7 +13718,7 @@
             <a:off x="868680" y="1627632"/>
             <a:ext cx="2011680" cy="73152"/>
           </a:xfrm>
-          <a:prstGeom prst="roundRect">
+          <a:prstGeom prst="rect">
             <a:avLst/>
           </a:prstGeom>
           <a:solidFill>
@@ -9542,7 +13760,7 @@
         <p:spPr>
           <a:xfrm>
             <a:off x="822960" y="1965960"/>
-            <a:ext cx="4983480" cy="4206240"/>
+            <a:ext cx="5029200" cy="4206240"/>
           </a:xfrm>
           <a:prstGeom prst="rect">
             <a:avLst/>
@@ -9664,8 +13882,8 @@
         </p:nvSpPr>
         <p:spPr>
           <a:xfrm>
-            <a:off x="5806440" y="1051560"/>
-            <a:ext cx="5298947" cy="4629150"/>
+            <a:off x="6080760" y="1965960"/>
+            <a:ext cx="5303520" cy="4572000"/>
           </a:xfrm>
           <a:prstGeom prst="roundRect">
             <a:avLst/>
@@ -9710,8 +13928,8 @@
         </p:nvSpPr>
         <p:spPr>
           <a:xfrm>
-            <a:off x="6080760" y="2726055"/>
-            <a:ext cx="4750307" cy="1280160"/>
+            <a:off x="6355080" y="3611880"/>
+            <a:ext cx="4754880" cy="1280160"/>
           </a:xfrm>
           <a:prstGeom prst="rect">
             <a:avLst/>
@@ -9732,7 +13950,7 @@
                 </a:solidFill>
                 <a:latin typeface="Montserrat"/>
               </a:rPr>
-              <a:t>IMAGEN REALISTA</a:t>
+              <a:t>IMAGEN</a:t>
             </a:r>
           </a:p>
           <a:p>
@@ -9754,6 +13972,18 @@
   <p:clrMapOvr>
     <a:masterClrMapping/>
   </p:clrMapOvr>
+  <mc:AlternateContent xmlns:mc="http://schemas.openxmlformats.org/markup-compatibility/2006">
+    <mc:Choice xmlns:p14="http://schemas.microsoft.com/office/powerpoint/2010/main" Requires="p14">
+      <p:transition spd="med" p14:dur="700">
+        <p14:cube dir="r"/>
+      </p:transition>
+    </mc:Choice>
+    <mc:Fallback>
+      <p:transition spd="med">
+        <p:push dir="r"/>
+      </p:transition>
+    </mc:Fallback>
+  </mc:AlternateContent>
 </p:sld>
 </file>
 
@@ -9841,7 +14071,7 @@
                 </a:solidFill>
                 <a:latin typeface="Montserrat"/>
               </a:rPr>
-              <a:t>007 / 015</a:t>
+              <a:t>007 / 021</a:t>
             </a:r>
           </a:p>
         </p:txBody>
@@ -9882,84 +14112,16 @@
       </p:sp>
       <p:sp>
         <p:nvSpPr>
-          <p:cNvPr id="5" name="TextBox 4"/>
-          <p:cNvSpPr txBox="1"/>
-          <p:nvPr/>
-        </p:nvSpPr>
-        <p:spPr>
-          <a:xfrm>
-            <a:off x="822960" y="457200"/>
-            <a:ext cx="10058400" cy="365760"/>
-          </a:xfrm>
-          <a:prstGeom prst="rect">
-            <a:avLst/>
-          </a:prstGeom>
-          <a:noFill/>
-        </p:spPr>
-        <p:txBody>
-          <a:bodyPr wrap="square">
-            <a:spAutoFit/>
-          </a:bodyPr>
-          <a:lstStyle/>
-          <a:p>
-            <a:r>
-              <a:rPr sz="1300" b="1" i="0">
-                <a:solidFill>
-                  <a:srgbClr val="E8801A"/>
-                </a:solidFill>
-                <a:latin typeface="Montserrat"/>
-              </a:rPr>
-              <a:t>SOLDADURA · POLIETILENO</a:t>
-            </a:r>
-          </a:p>
-        </p:txBody>
-      </p:sp>
-      <p:sp>
-        <p:nvSpPr>
-          <p:cNvPr id="6" name="TextBox 5"/>
-          <p:cNvSpPr txBox="1"/>
-          <p:nvPr/>
-        </p:nvSpPr>
-        <p:spPr>
-          <a:xfrm>
-            <a:off x="822960" y="868680"/>
-            <a:ext cx="10515600" cy="914400"/>
-          </a:xfrm>
-          <a:prstGeom prst="rect">
-            <a:avLst/>
-          </a:prstGeom>
-          <a:noFill/>
-        </p:spPr>
-        <p:txBody>
-          <a:bodyPr wrap="square">
-            <a:spAutoFit/>
-          </a:bodyPr>
-          <a:lstStyle/>
-          <a:p>
-            <a:r>
-              <a:rPr sz="2800" b="1" i="0">
-                <a:solidFill>
-                  <a:srgbClr val="1E2761"/>
-                </a:solidFill>
-                <a:latin typeface="Montserrat"/>
-              </a:rPr>
-              <a:t>Polietileno con polietileno</a:t>
-            </a:r>
-          </a:p>
-        </p:txBody>
-      </p:sp>
-      <p:sp>
-        <p:nvSpPr>
-          <p:cNvPr id="7" name="Rounded Rectangle 6"/>
+          <p:cNvPr id="5" name="Rectangle 4"/>
           <p:cNvSpPr/>
           <p:nvPr/>
         </p:nvSpPr>
         <p:spPr>
           <a:xfrm>
-            <a:off x="868680" y="1627632"/>
-            <a:ext cx="2011680" cy="73152"/>
-          </a:xfrm>
-          <a:prstGeom prst="roundRect">
+            <a:off x="0" y="0"/>
+            <a:ext cx="12191695" cy="1143000"/>
+          </a:xfrm>
+          <a:prstGeom prst="rect">
             <a:avLst/>
           </a:prstGeom>
           <a:solidFill>
@@ -9994,14 +14156,14 @@
       </p:sp>
       <p:sp>
         <p:nvSpPr>
-          <p:cNvPr id="8" name="TextBox 7"/>
+          <p:cNvPr id="6" name="TextBox 5"/>
           <p:cNvSpPr txBox="1"/>
           <p:nvPr/>
         </p:nvSpPr>
         <p:spPr>
           <a:xfrm>
-            <a:off x="822960" y="1965960"/>
-            <a:ext cx="4983480" cy="4206240"/>
+            <a:off x="822960" y="274320"/>
+            <a:ext cx="10515600" cy="640080"/>
           </a:xfrm>
           <a:prstGeom prst="rect">
             <a:avLst/>
@@ -10014,117 +14176,62 @@
           </a:bodyPr>
           <a:lstStyle/>
           <a:p>
-            <a:pPr>
-              <a:spcAft>
-                <a:spcPts val="1100"/>
-              </a:spcAft>
-            </a:pPr>
-            <a:r>
-              <a:rPr sz="1600" b="1" i="0">
-                <a:solidFill>
-                  <a:srgbClr val="E8801A"/>
-                </a:solidFill>
-                <a:latin typeface="Montserrat"/>
-              </a:rPr>
-              <a:t>▸  </a:t>
-            </a:r>
-            <a:r>
-              <a:rPr sz="1600" b="0" i="0">
-                <a:solidFill>
-                  <a:srgbClr val="1B2330"/>
-                </a:solidFill>
-                <a:latin typeface="Montserrat"/>
-              </a:rPr>
-              <a:t>Preferentemente por electrofusión</a:t>
-            </a:r>
-          </a:p>
-          <a:p>
-            <a:pPr>
-              <a:spcAft>
-                <a:spcPts val="1100"/>
-              </a:spcAft>
-            </a:pPr>
-            <a:r>
-              <a:rPr sz="1600" b="1" i="0">
-                <a:solidFill>
-                  <a:srgbClr val="E8801A"/>
-                </a:solidFill>
-                <a:latin typeface="Montserrat"/>
-              </a:rPr>
-              <a:t>▸  </a:t>
-            </a:r>
-            <a:r>
-              <a:rPr sz="1600" b="0" i="0">
-                <a:solidFill>
-                  <a:srgbClr val="1B2330"/>
-                </a:solidFill>
-                <a:latin typeface="Montserrat"/>
-              </a:rPr>
-              <a:t>A tope si DN ≥ 110</a:t>
-            </a:r>
-          </a:p>
-          <a:p>
-            <a:pPr>
-              <a:spcAft>
-                <a:spcPts val="1100"/>
-              </a:spcAft>
-            </a:pPr>
-            <a:r>
-              <a:rPr sz="1600" b="1" i="0">
-                <a:solidFill>
-                  <a:srgbClr val="E8801A"/>
-                </a:solidFill>
-                <a:latin typeface="Montserrat"/>
-              </a:rPr>
-              <a:t>▸  </a:t>
-            </a:r>
-            <a:r>
-              <a:rPr sz="1600" b="0" i="0">
-                <a:solidFill>
-                  <a:srgbClr val="1B2330"/>
-                </a:solidFill>
-                <a:latin typeface="Montserrat"/>
-              </a:rPr>
-              <a:t>Accesorios compatibles con el tubo</a:t>
-            </a:r>
-          </a:p>
-          <a:p>
-            <a:pPr>
-              <a:spcAft>
-                <a:spcPts val="1100"/>
-              </a:spcAft>
-            </a:pPr>
-            <a:r>
-              <a:rPr sz="1600" b="1" i="0">
-                <a:solidFill>
-                  <a:srgbClr val="E8801A"/>
-                </a:solidFill>
-                <a:latin typeface="Montserrat"/>
-              </a:rPr>
-              <a:t>▸  </a:t>
-            </a:r>
-            <a:r>
-              <a:rPr sz="1600" b="0" i="0">
-                <a:solidFill>
-                  <a:srgbClr val="1B2330"/>
-                </a:solidFill>
-                <a:latin typeface="Montserrat"/>
-              </a:rPr>
-              <a:t>Se funde el material consigo mismo</a:t>
-            </a:r>
-          </a:p>
-        </p:txBody>
-      </p:sp>
-      <p:sp>
-        <p:nvSpPr>
-          <p:cNvPr id="9" name="imgph" descr="IMGQ:polyethylene pipe electrofusion welding"/>
+            <a:r>
+              <a:rPr sz="2400" b="1" i="0">
+                <a:solidFill>
+                  <a:srgbClr val="FFFFFF"/>
+                </a:solidFill>
+                <a:latin typeface="Montserrat"/>
+              </a:rPr>
+              <a:t>⚡  PREGUNTA RÁPIDA</a:t>
+            </a:r>
+          </a:p>
+        </p:txBody>
+      </p:sp>
+      <p:sp>
+        <p:nvSpPr>
+          <p:cNvPr id="7" name="TextBox 6"/>
+          <p:cNvSpPr txBox="1"/>
+          <p:nvPr/>
+        </p:nvSpPr>
+        <p:spPr>
+          <a:xfrm>
+            <a:off x="822960" y="1508760"/>
+            <a:ext cx="10515600" cy="1371600"/>
+          </a:xfrm>
+          <a:prstGeom prst="rect">
+            <a:avLst/>
+          </a:prstGeom>
+          <a:noFill/>
+        </p:spPr>
+        <p:txBody>
+          <a:bodyPr wrap="square">
+            <a:spAutoFit/>
+          </a:bodyPr>
+          <a:lstStyle/>
+          <a:p>
+            <a:r>
+              <a:rPr sz="2400" b="1" i="0">
+                <a:solidFill>
+                  <a:srgbClr val="1E2761"/>
+                </a:solidFill>
+                <a:latin typeface="Montserrat"/>
+              </a:rPr>
+              <a:t>¿A partir de qué presión es obligatoria siempre la soldadura fuerte?</a:t>
+            </a:r>
+          </a:p>
+        </p:txBody>
+      </p:sp>
+      <p:sp>
+        <p:nvSpPr>
+          <p:cNvPr id="8" name="Rounded Rectangle 7"/>
           <p:cNvSpPr/>
           <p:nvPr/>
         </p:nvSpPr>
         <p:spPr>
           <a:xfrm>
-            <a:off x="5806440" y="1051560"/>
-            <a:ext cx="5298947" cy="4629150"/>
+            <a:off x="822960" y="3291840"/>
+            <a:ext cx="4983480" cy="1143000"/>
           </a:xfrm>
           <a:prstGeom prst="roundRect">
             <a:avLst/>
@@ -10163,14 +14270,58 @@
       </p:sp>
       <p:sp>
         <p:nvSpPr>
+          <p:cNvPr id="9" name="Rectangle 8"/>
+          <p:cNvSpPr/>
+          <p:nvPr/>
+        </p:nvSpPr>
+        <p:spPr>
+          <a:xfrm>
+            <a:off x="822960" y="3291840"/>
+            <a:ext cx="640080" cy="1143000"/>
+          </a:xfrm>
+          <a:prstGeom prst="rect">
+            <a:avLst/>
+          </a:prstGeom>
+          <a:solidFill>
+            <a:srgbClr val="1E2761"/>
+          </a:solidFill>
+          <a:ln>
+            <a:noFill/>
+          </a:ln>
+          <a:effectLst/>
+        </p:spPr>
+        <p:style>
+          <a:lnRef idx="1">
+            <a:schemeClr val="accent1"/>
+          </a:lnRef>
+          <a:fillRef idx="3">
+            <a:schemeClr val="accent1"/>
+          </a:fillRef>
+          <a:effectRef idx="2">
+            <a:schemeClr val="accent1"/>
+          </a:effectRef>
+          <a:fontRef idx="minor">
+            <a:schemeClr val="lt1"/>
+          </a:fontRef>
+        </p:style>
+        <p:txBody>
+          <a:bodyPr rtlCol="0" anchor="ctr"/>
+          <a:lstStyle/>
+          <a:p>
+            <a:pPr algn="ctr"/>
+          </a:p>
+        </p:txBody>
+      </p:sp>
+      <p:sp>
+        <p:nvSpPr>
           <p:cNvPr id="10" name="TextBox 9"/>
           <p:cNvSpPr txBox="1"/>
           <p:nvPr/>
         </p:nvSpPr>
         <p:spPr>
           <a:xfrm>
-            <a:off x="6080760" y="2726055"/>
-            <a:ext cx="4750307" cy="1280160"/>
+            <a:off x="822960" y="3611880"/>
+            <a:ext cx="640080" cy="548640"/>
           </a:xfrm>
           <a:prstGeom prst="rect">
             <a:avLst/>
@@ -10185,25 +14336,524 @@
           <a:p>
             <a:pPr algn="ctr"/>
             <a:r>
-              <a:rPr sz="1400" b="1" i="0">
-                <a:solidFill>
-                  <a:srgbClr val="64748B"/>
-                </a:solidFill>
-                <a:latin typeface="Montserrat"/>
-              </a:rPr>
-              <a:t>IMAGEN REALISTA</a:t>
-            </a:r>
-          </a:p>
+              <a:rPr sz="2200" b="1" i="0">
+                <a:solidFill>
+                  <a:srgbClr val="FFFFFF"/>
+                </a:solidFill>
+                <a:latin typeface="Montserrat"/>
+              </a:rPr>
+              <a:t>A</a:t>
+            </a:r>
+          </a:p>
+        </p:txBody>
+      </p:sp>
+      <p:sp>
+        <p:nvSpPr>
+          <p:cNvPr id="11" name="TextBox 10"/>
+          <p:cNvSpPr txBox="1"/>
+          <p:nvPr/>
+        </p:nvSpPr>
+        <p:spPr>
+          <a:xfrm>
+            <a:off x="1600200" y="3474720"/>
+            <a:ext cx="4114800" cy="868680"/>
+          </a:xfrm>
+          <a:prstGeom prst="rect">
+            <a:avLst/>
+          </a:prstGeom>
+          <a:noFill/>
+        </p:spPr>
+        <p:txBody>
+          <a:bodyPr wrap="square">
+            <a:spAutoFit/>
+          </a:bodyPr>
+          <a:lstStyle/>
+          <a:p>
+            <a:r>
+              <a:rPr sz="1400" b="0" i="0">
+                <a:solidFill>
+                  <a:srgbClr val="1B2330"/>
+                </a:solidFill>
+                <a:latin typeface="Montserrat"/>
+              </a:rPr>
+              <a:t>Por encima de 0,05 bar</a:t>
+            </a:r>
+          </a:p>
+        </p:txBody>
+      </p:sp>
+      <p:sp>
+        <p:nvSpPr>
+          <p:cNvPr id="12" name="Rounded Rectangle 11"/>
+          <p:cNvSpPr/>
+          <p:nvPr/>
+        </p:nvSpPr>
+        <p:spPr>
+          <a:xfrm>
+            <a:off x="6355080" y="3291840"/>
+            <a:ext cx="4983480" cy="1143000"/>
+          </a:xfrm>
+          <a:prstGeom prst="roundRect">
+            <a:avLst/>
+          </a:prstGeom>
+          <a:solidFill>
+            <a:srgbClr val="F3F6FB"/>
+          </a:solidFill>
+          <a:ln w="12700">
+            <a:solidFill>
+              <a:srgbClr val="C7D2E6"/>
+            </a:solidFill>
+          </a:ln>
+          <a:effectLst/>
+        </p:spPr>
+        <p:style>
+          <a:lnRef idx="1">
+            <a:schemeClr val="accent1"/>
+          </a:lnRef>
+          <a:fillRef idx="3">
+            <a:schemeClr val="accent1"/>
+          </a:fillRef>
+          <a:effectRef idx="2">
+            <a:schemeClr val="accent1"/>
+          </a:effectRef>
+          <a:fontRef idx="minor">
+            <a:schemeClr val="lt1"/>
+          </a:fontRef>
+        </p:style>
+        <p:txBody>
+          <a:bodyPr rtlCol="0" anchor="ctr"/>
+          <a:lstStyle/>
           <a:p>
             <a:pPr algn="ctr"/>
-            <a:r>
-              <a:rPr sz="1100" b="0" i="1">
-                <a:solidFill>
-                  <a:srgbClr val="64748B"/>
-                </a:solidFill>
-                <a:latin typeface="Montserrat"/>
-              </a:rPr>
-              <a:t>polyethylene pipe electrofusion welding</a:t>
+          </a:p>
+        </p:txBody>
+      </p:sp>
+      <p:sp>
+        <p:nvSpPr>
+          <p:cNvPr id="13" name="Rectangle 12"/>
+          <p:cNvSpPr/>
+          <p:nvPr/>
+        </p:nvSpPr>
+        <p:spPr>
+          <a:xfrm>
+            <a:off x="6355080" y="3291840"/>
+            <a:ext cx="640080" cy="1143000"/>
+          </a:xfrm>
+          <a:prstGeom prst="rect">
+            <a:avLst/>
+          </a:prstGeom>
+          <a:solidFill>
+            <a:srgbClr val="1E2761"/>
+          </a:solidFill>
+          <a:ln>
+            <a:noFill/>
+          </a:ln>
+          <a:effectLst/>
+        </p:spPr>
+        <p:style>
+          <a:lnRef idx="1">
+            <a:schemeClr val="accent1"/>
+          </a:lnRef>
+          <a:fillRef idx="3">
+            <a:schemeClr val="accent1"/>
+          </a:fillRef>
+          <a:effectRef idx="2">
+            <a:schemeClr val="accent1"/>
+          </a:effectRef>
+          <a:fontRef idx="minor">
+            <a:schemeClr val="lt1"/>
+          </a:fontRef>
+        </p:style>
+        <p:txBody>
+          <a:bodyPr rtlCol="0" anchor="ctr"/>
+          <a:lstStyle/>
+          <a:p>
+            <a:pPr algn="ctr"/>
+          </a:p>
+        </p:txBody>
+      </p:sp>
+      <p:sp>
+        <p:nvSpPr>
+          <p:cNvPr id="14" name="TextBox 13"/>
+          <p:cNvSpPr txBox="1"/>
+          <p:nvPr/>
+        </p:nvSpPr>
+        <p:spPr>
+          <a:xfrm>
+            <a:off x="6355080" y="3611880"/>
+            <a:ext cx="640080" cy="548640"/>
+          </a:xfrm>
+          <a:prstGeom prst="rect">
+            <a:avLst/>
+          </a:prstGeom>
+          <a:noFill/>
+        </p:spPr>
+        <p:txBody>
+          <a:bodyPr wrap="square">
+            <a:spAutoFit/>
+          </a:bodyPr>
+          <a:lstStyle/>
+          <a:p>
+            <a:pPr algn="ctr"/>
+            <a:r>
+              <a:rPr sz="2200" b="1" i="0">
+                <a:solidFill>
+                  <a:srgbClr val="FFFFFF"/>
+                </a:solidFill>
+                <a:latin typeface="Montserrat"/>
+              </a:rPr>
+              <a:t>B</a:t>
+            </a:r>
+          </a:p>
+        </p:txBody>
+      </p:sp>
+      <p:sp>
+        <p:nvSpPr>
+          <p:cNvPr id="15" name="TextBox 14"/>
+          <p:cNvSpPr txBox="1"/>
+          <p:nvPr/>
+        </p:nvSpPr>
+        <p:spPr>
+          <a:xfrm>
+            <a:off x="7132320" y="3474720"/>
+            <a:ext cx="4114800" cy="868680"/>
+          </a:xfrm>
+          <a:prstGeom prst="rect">
+            <a:avLst/>
+          </a:prstGeom>
+          <a:noFill/>
+        </p:spPr>
+        <p:txBody>
+          <a:bodyPr wrap="square">
+            <a:spAutoFit/>
+          </a:bodyPr>
+          <a:lstStyle/>
+          <a:p>
+            <a:r>
+              <a:rPr sz="1400" b="0" i="0">
+                <a:solidFill>
+                  <a:srgbClr val="1B2330"/>
+                </a:solidFill>
+                <a:latin typeface="Montserrat"/>
+              </a:rPr>
+              <a:t>Por encima de 0,15 bar</a:t>
+            </a:r>
+          </a:p>
+        </p:txBody>
+      </p:sp>
+      <p:sp>
+        <p:nvSpPr>
+          <p:cNvPr id="16" name="Rounded Rectangle 15"/>
+          <p:cNvSpPr/>
+          <p:nvPr/>
+        </p:nvSpPr>
+        <p:spPr>
+          <a:xfrm>
+            <a:off x="822960" y="4617720"/>
+            <a:ext cx="4983480" cy="1143000"/>
+          </a:xfrm>
+          <a:prstGeom prst="roundRect">
+            <a:avLst/>
+          </a:prstGeom>
+          <a:solidFill>
+            <a:srgbClr val="F3F6FB"/>
+          </a:solidFill>
+          <a:ln w="12700">
+            <a:solidFill>
+              <a:srgbClr val="C7D2E6"/>
+            </a:solidFill>
+          </a:ln>
+          <a:effectLst/>
+        </p:spPr>
+        <p:style>
+          <a:lnRef idx="1">
+            <a:schemeClr val="accent1"/>
+          </a:lnRef>
+          <a:fillRef idx="3">
+            <a:schemeClr val="accent1"/>
+          </a:fillRef>
+          <a:effectRef idx="2">
+            <a:schemeClr val="accent1"/>
+          </a:effectRef>
+          <a:fontRef idx="minor">
+            <a:schemeClr val="lt1"/>
+          </a:fontRef>
+        </p:style>
+        <p:txBody>
+          <a:bodyPr rtlCol="0" anchor="ctr"/>
+          <a:lstStyle/>
+          <a:p>
+            <a:pPr algn="ctr"/>
+          </a:p>
+        </p:txBody>
+      </p:sp>
+      <p:sp>
+        <p:nvSpPr>
+          <p:cNvPr id="17" name="Rectangle 16"/>
+          <p:cNvSpPr/>
+          <p:nvPr/>
+        </p:nvSpPr>
+        <p:spPr>
+          <a:xfrm>
+            <a:off x="822960" y="4617720"/>
+            <a:ext cx="640080" cy="1143000"/>
+          </a:xfrm>
+          <a:prstGeom prst="rect">
+            <a:avLst/>
+          </a:prstGeom>
+          <a:solidFill>
+            <a:srgbClr val="1E2761"/>
+          </a:solidFill>
+          <a:ln>
+            <a:noFill/>
+          </a:ln>
+          <a:effectLst/>
+        </p:spPr>
+        <p:style>
+          <a:lnRef idx="1">
+            <a:schemeClr val="accent1"/>
+          </a:lnRef>
+          <a:fillRef idx="3">
+            <a:schemeClr val="accent1"/>
+          </a:fillRef>
+          <a:effectRef idx="2">
+            <a:schemeClr val="accent1"/>
+          </a:effectRef>
+          <a:fontRef idx="minor">
+            <a:schemeClr val="lt1"/>
+          </a:fontRef>
+        </p:style>
+        <p:txBody>
+          <a:bodyPr rtlCol="0" anchor="ctr"/>
+          <a:lstStyle/>
+          <a:p>
+            <a:pPr algn="ctr"/>
+          </a:p>
+        </p:txBody>
+      </p:sp>
+      <p:sp>
+        <p:nvSpPr>
+          <p:cNvPr id="18" name="TextBox 17"/>
+          <p:cNvSpPr txBox="1"/>
+          <p:nvPr/>
+        </p:nvSpPr>
+        <p:spPr>
+          <a:xfrm>
+            <a:off x="822960" y="4937760"/>
+            <a:ext cx="640080" cy="548640"/>
+          </a:xfrm>
+          <a:prstGeom prst="rect">
+            <a:avLst/>
+          </a:prstGeom>
+          <a:noFill/>
+        </p:spPr>
+        <p:txBody>
+          <a:bodyPr wrap="square">
+            <a:spAutoFit/>
+          </a:bodyPr>
+          <a:lstStyle/>
+          <a:p>
+            <a:pPr algn="ctr"/>
+            <a:r>
+              <a:rPr sz="2200" b="1" i="0">
+                <a:solidFill>
+                  <a:srgbClr val="FFFFFF"/>
+                </a:solidFill>
+                <a:latin typeface="Montserrat"/>
+              </a:rPr>
+              <a:t>C</a:t>
+            </a:r>
+          </a:p>
+        </p:txBody>
+      </p:sp>
+      <p:sp>
+        <p:nvSpPr>
+          <p:cNvPr id="19" name="TextBox 18"/>
+          <p:cNvSpPr txBox="1"/>
+          <p:nvPr/>
+        </p:nvSpPr>
+        <p:spPr>
+          <a:xfrm>
+            <a:off x="1600200" y="4800600"/>
+            <a:ext cx="4114800" cy="868680"/>
+          </a:xfrm>
+          <a:prstGeom prst="rect">
+            <a:avLst/>
+          </a:prstGeom>
+          <a:noFill/>
+        </p:spPr>
+        <p:txBody>
+          <a:bodyPr wrap="square">
+            <a:spAutoFit/>
+          </a:bodyPr>
+          <a:lstStyle/>
+          <a:p>
+            <a:r>
+              <a:rPr sz="1400" b="0" i="0">
+                <a:solidFill>
+                  <a:srgbClr val="1B2330"/>
+                </a:solidFill>
+                <a:latin typeface="Montserrat"/>
+              </a:rPr>
+              <a:t>Por encima de 0,4 bar</a:t>
+            </a:r>
+          </a:p>
+        </p:txBody>
+      </p:sp>
+      <p:sp>
+        <p:nvSpPr>
+          <p:cNvPr id="20" name="Rounded Rectangle 19"/>
+          <p:cNvSpPr/>
+          <p:nvPr/>
+        </p:nvSpPr>
+        <p:spPr>
+          <a:xfrm>
+            <a:off x="6355080" y="4617720"/>
+            <a:ext cx="4983480" cy="1143000"/>
+          </a:xfrm>
+          <a:prstGeom prst="roundRect">
+            <a:avLst/>
+          </a:prstGeom>
+          <a:solidFill>
+            <a:srgbClr val="F3F6FB"/>
+          </a:solidFill>
+          <a:ln w="12700">
+            <a:solidFill>
+              <a:srgbClr val="C7D2E6"/>
+            </a:solidFill>
+          </a:ln>
+          <a:effectLst/>
+        </p:spPr>
+        <p:style>
+          <a:lnRef idx="1">
+            <a:schemeClr val="accent1"/>
+          </a:lnRef>
+          <a:fillRef idx="3">
+            <a:schemeClr val="accent1"/>
+          </a:fillRef>
+          <a:effectRef idx="2">
+            <a:schemeClr val="accent1"/>
+          </a:effectRef>
+          <a:fontRef idx="minor">
+            <a:schemeClr val="lt1"/>
+          </a:fontRef>
+        </p:style>
+        <p:txBody>
+          <a:bodyPr rtlCol="0" anchor="ctr"/>
+          <a:lstStyle/>
+          <a:p>
+            <a:pPr algn="ctr"/>
+          </a:p>
+        </p:txBody>
+      </p:sp>
+      <p:sp>
+        <p:nvSpPr>
+          <p:cNvPr id="21" name="Rectangle 20"/>
+          <p:cNvSpPr/>
+          <p:nvPr/>
+        </p:nvSpPr>
+        <p:spPr>
+          <a:xfrm>
+            <a:off x="6355080" y="4617720"/>
+            <a:ext cx="640080" cy="1143000"/>
+          </a:xfrm>
+          <a:prstGeom prst="rect">
+            <a:avLst/>
+          </a:prstGeom>
+          <a:solidFill>
+            <a:srgbClr val="1E2761"/>
+          </a:solidFill>
+          <a:ln>
+            <a:noFill/>
+          </a:ln>
+          <a:effectLst/>
+        </p:spPr>
+        <p:style>
+          <a:lnRef idx="1">
+            <a:schemeClr val="accent1"/>
+          </a:lnRef>
+          <a:fillRef idx="3">
+            <a:schemeClr val="accent1"/>
+          </a:fillRef>
+          <a:effectRef idx="2">
+            <a:schemeClr val="accent1"/>
+          </a:effectRef>
+          <a:fontRef idx="minor">
+            <a:schemeClr val="lt1"/>
+          </a:fontRef>
+        </p:style>
+        <p:txBody>
+          <a:bodyPr rtlCol="0" anchor="ctr"/>
+          <a:lstStyle/>
+          <a:p>
+            <a:pPr algn="ctr"/>
+          </a:p>
+        </p:txBody>
+      </p:sp>
+      <p:sp>
+        <p:nvSpPr>
+          <p:cNvPr id="22" name="TextBox 21"/>
+          <p:cNvSpPr txBox="1"/>
+          <p:nvPr/>
+        </p:nvSpPr>
+        <p:spPr>
+          <a:xfrm>
+            <a:off x="6355080" y="4937760"/>
+            <a:ext cx="640080" cy="548640"/>
+          </a:xfrm>
+          <a:prstGeom prst="rect">
+            <a:avLst/>
+          </a:prstGeom>
+          <a:noFill/>
+        </p:spPr>
+        <p:txBody>
+          <a:bodyPr wrap="square">
+            <a:spAutoFit/>
+          </a:bodyPr>
+          <a:lstStyle/>
+          <a:p>
+            <a:pPr algn="ctr"/>
+            <a:r>
+              <a:rPr sz="2200" b="1" i="0">
+                <a:solidFill>
+                  <a:srgbClr val="FFFFFF"/>
+                </a:solidFill>
+                <a:latin typeface="Montserrat"/>
+              </a:rPr>
+              <a:t>D</a:t>
+            </a:r>
+          </a:p>
+        </p:txBody>
+      </p:sp>
+      <p:sp>
+        <p:nvSpPr>
+          <p:cNvPr id="23" name="TextBox 22"/>
+          <p:cNvSpPr txBox="1"/>
+          <p:nvPr/>
+        </p:nvSpPr>
+        <p:spPr>
+          <a:xfrm>
+            <a:off x="7132320" y="4800600"/>
+            <a:ext cx="4114800" cy="868680"/>
+          </a:xfrm>
+          <a:prstGeom prst="rect">
+            <a:avLst/>
+          </a:prstGeom>
+          <a:noFill/>
+        </p:spPr>
+        <p:txBody>
+          <a:bodyPr wrap="square">
+            <a:spAutoFit/>
+          </a:bodyPr>
+          <a:lstStyle/>
+          <a:p>
+            <a:r>
+              <a:rPr sz="1400" b="0" i="0">
+                <a:solidFill>
+                  <a:srgbClr val="1B2330"/>
+                </a:solidFill>
+                <a:latin typeface="Montserrat"/>
+              </a:rPr>
+              <a:t>Por encima de 2 bar</a:t>
             </a:r>
           </a:p>
         </p:txBody>
@@ -10213,6 +14863,18 @@
   <p:clrMapOvr>
     <a:masterClrMapping/>
   </p:clrMapOvr>
+  <mc:AlternateContent xmlns:mc="http://schemas.openxmlformats.org/markup-compatibility/2006">
+    <mc:Choice xmlns:p14="http://schemas.microsoft.com/office/powerpoint/2010/main" Requires="p14">
+      <p:transition spd="med" p14:dur="700">
+        <p14:cube dir="l"/>
+      </p:transition>
+    </mc:Choice>
+    <mc:Fallback>
+      <p:transition spd="med">
+        <p:push dir="l"/>
+      </p:transition>
+    </mc:Fallback>
+  </mc:AlternateContent>
 </p:sld>
 </file>
 
@@ -10300,7 +14962,7 @@
                 </a:solidFill>
                 <a:latin typeface="Montserrat"/>
               </a:rPr>
-              <a:t>008 / 015</a:t>
+              <a:t>008 / 021</a:t>
             </a:r>
           </a:p>
         </p:txBody>
@@ -10341,88 +15003,20 @@
       </p:sp>
       <p:sp>
         <p:nvSpPr>
-          <p:cNvPr id="5" name="TextBox 4"/>
-          <p:cNvSpPr txBox="1"/>
-          <p:nvPr/>
-        </p:nvSpPr>
-        <p:spPr>
-          <a:xfrm>
-            <a:off x="822960" y="457200"/>
-            <a:ext cx="10058400" cy="365760"/>
-          </a:xfrm>
-          <a:prstGeom prst="rect">
-            <a:avLst/>
-          </a:prstGeom>
-          <a:noFill/>
-        </p:spPr>
-        <p:txBody>
-          <a:bodyPr wrap="square">
-            <a:spAutoFit/>
-          </a:bodyPr>
-          <a:lstStyle/>
-          <a:p>
-            <a:r>
-              <a:rPr sz="1300" b="1" i="0">
-                <a:solidFill>
-                  <a:srgbClr val="E8801A"/>
-                </a:solidFill>
-                <a:latin typeface="Montserrat"/>
-              </a:rPr>
-              <a:t>SOLDADURA · ACERO</a:t>
-            </a:r>
-          </a:p>
-        </p:txBody>
-      </p:sp>
-      <p:sp>
-        <p:nvSpPr>
-          <p:cNvPr id="6" name="TextBox 5"/>
-          <p:cNvSpPr txBox="1"/>
-          <p:nvPr/>
-        </p:nvSpPr>
-        <p:spPr>
-          <a:xfrm>
-            <a:off x="822960" y="868680"/>
-            <a:ext cx="10515600" cy="914400"/>
-          </a:xfrm>
-          <a:prstGeom prst="rect">
-            <a:avLst/>
-          </a:prstGeom>
-          <a:noFill/>
-        </p:spPr>
-        <p:txBody>
-          <a:bodyPr wrap="square">
-            <a:spAutoFit/>
-          </a:bodyPr>
-          <a:lstStyle/>
-          <a:p>
-            <a:r>
-              <a:rPr sz="2800" b="1" i="0">
-                <a:solidFill>
-                  <a:srgbClr val="1E2761"/>
-                </a:solidFill>
-                <a:latin typeface="Montserrat"/>
-              </a:rPr>
-              <a:t>Acero con acero</a:t>
-            </a:r>
-          </a:p>
-        </p:txBody>
-      </p:sp>
-      <p:sp>
-        <p:nvSpPr>
-          <p:cNvPr id="7" name="Rounded Rectangle 6"/>
+          <p:cNvPr id="5" name="Rectangle 4"/>
           <p:cNvSpPr/>
           <p:nvPr/>
         </p:nvSpPr>
         <p:spPr>
           <a:xfrm>
-            <a:off x="868680" y="1627632"/>
-            <a:ext cx="2011680" cy="73152"/>
-          </a:xfrm>
-          <a:prstGeom prst="roundRect">
+            <a:off x="0" y="0"/>
+            <a:ext cx="12191695" cy="1143000"/>
+          </a:xfrm>
+          <a:prstGeom prst="rect">
             <a:avLst/>
           </a:prstGeom>
           <a:solidFill>
-            <a:srgbClr val="E8801A"/>
+            <a:srgbClr val="1E8E4B"/>
           </a:solidFill>
           <a:ln>
             <a:noFill/>
@@ -10453,14 +15047,14 @@
       </p:sp>
       <p:sp>
         <p:nvSpPr>
-          <p:cNvPr id="8" name="TextBox 7"/>
+          <p:cNvPr id="6" name="TextBox 5"/>
           <p:cNvSpPr txBox="1"/>
           <p:nvPr/>
         </p:nvSpPr>
         <p:spPr>
           <a:xfrm>
-            <a:off x="822960" y="1965960"/>
-            <a:ext cx="4983480" cy="4206240"/>
+            <a:off x="822960" y="274320"/>
+            <a:ext cx="10515600" cy="640080"/>
           </a:xfrm>
           <a:prstGeom prst="rect">
             <a:avLst/>
@@ -10473,127 +15067,72 @@
           </a:bodyPr>
           <a:lstStyle/>
           <a:p>
-            <a:pPr>
-              <a:spcAft>
-                <a:spcPts val="1100"/>
-              </a:spcAft>
-            </a:pPr>
-            <a:r>
-              <a:rPr sz="1600" b="1" i="0">
-                <a:solidFill>
-                  <a:srgbClr val="E8801A"/>
-                </a:solidFill>
-                <a:latin typeface="Montserrat"/>
-              </a:rPr>
-              <a:t>▸  </a:t>
-            </a:r>
-            <a:r>
-              <a:rPr sz="1600" b="0" i="0">
-                <a:solidFill>
-                  <a:srgbClr val="1B2330"/>
-                </a:solidFill>
-                <a:latin typeface="Montserrat"/>
-              </a:rPr>
-              <a:t>Soldadura a tope por arco eléctrico</a:t>
-            </a:r>
-          </a:p>
-          <a:p>
-            <a:pPr>
-              <a:spcAft>
-                <a:spcPts val="1100"/>
-              </a:spcAft>
-            </a:pPr>
-            <a:r>
-              <a:rPr sz="1600" b="1" i="0">
-                <a:solidFill>
-                  <a:srgbClr val="E8801A"/>
-                </a:solidFill>
-                <a:latin typeface="Montserrat"/>
-              </a:rPr>
-              <a:t>▸  </a:t>
-            </a:r>
-            <a:r>
-              <a:rPr sz="1600" b="0" i="0">
-                <a:solidFill>
-                  <a:srgbClr val="1B2330"/>
-                </a:solidFill>
-                <a:latin typeface="Montserrat"/>
-              </a:rPr>
-              <a:t>Oxiacetilénica solo si DN ≤ 50</a:t>
-            </a:r>
-          </a:p>
-          <a:p>
-            <a:pPr>
-              <a:spcAft>
-                <a:spcPts val="1100"/>
-              </a:spcAft>
-            </a:pPr>
-            <a:r>
-              <a:rPr sz="1600" b="1" i="0">
-                <a:solidFill>
-                  <a:srgbClr val="E8801A"/>
-                </a:solidFill>
-                <a:latin typeface="Montserrat"/>
-              </a:rPr>
-              <a:t>▸  </a:t>
-            </a:r>
-            <a:r>
-              <a:rPr sz="1600" b="0" i="0">
-                <a:solidFill>
-                  <a:srgbClr val="1B2330"/>
-                </a:solidFill>
-                <a:latin typeface="Montserrat"/>
-              </a:rPr>
-              <a:t>Sin mandril interno al curvar</a:t>
-            </a:r>
-          </a:p>
-          <a:p>
-            <a:pPr>
-              <a:spcAft>
-                <a:spcPts val="1100"/>
-              </a:spcAft>
-            </a:pPr>
-            <a:r>
-              <a:rPr sz="1600" b="1" i="0">
-                <a:solidFill>
-                  <a:srgbClr val="E8801A"/>
-                </a:solidFill>
-                <a:latin typeface="Montserrat"/>
-              </a:rPr>
-              <a:t>▸  </a:t>
-            </a:r>
-            <a:r>
-              <a:rPr sz="1600" b="0" i="0">
-                <a:solidFill>
-                  <a:srgbClr val="1B2330"/>
-                </a:solidFill>
-                <a:latin typeface="Montserrat"/>
-              </a:rPr>
-              <a:t>Accesorios soldados o roscados</a:t>
-            </a:r>
-          </a:p>
-        </p:txBody>
-      </p:sp>
-      <p:sp>
-        <p:nvSpPr>
-          <p:cNvPr id="9" name="imgph" descr="IMGQ:arc welding steel pipe joint sparks"/>
+            <a:r>
+              <a:rPr sz="2400" b="1" i="0">
+                <a:solidFill>
+                  <a:srgbClr val="FFFFFF"/>
+                </a:solidFill>
+                <a:latin typeface="Montserrat"/>
+              </a:rPr>
+              <a:t>✔  RESPUESTA:  A</a:t>
+            </a:r>
+          </a:p>
+        </p:txBody>
+      </p:sp>
+      <p:sp>
+        <p:nvSpPr>
+          <p:cNvPr id="7" name="TextBox 6"/>
+          <p:cNvSpPr txBox="1"/>
+          <p:nvPr/>
+        </p:nvSpPr>
+        <p:spPr>
+          <a:xfrm>
+            <a:off x="822960" y="1417320"/>
+            <a:ext cx="10515600" cy="914400"/>
+          </a:xfrm>
+          <a:prstGeom prst="rect">
+            <a:avLst/>
+          </a:prstGeom>
+          <a:noFill/>
+        </p:spPr>
+        <p:txBody>
+          <a:bodyPr wrap="square">
+            <a:spAutoFit/>
+          </a:bodyPr>
+          <a:lstStyle/>
+          <a:p>
+            <a:r>
+              <a:rPr sz="1800" b="1" i="0">
+                <a:solidFill>
+                  <a:srgbClr val="64748B"/>
+                </a:solidFill>
+                <a:latin typeface="Montserrat"/>
+              </a:rPr>
+              <a:t>¿A partir de qué presión es obligatoria siempre la soldadura fuerte?</a:t>
+            </a:r>
+          </a:p>
+        </p:txBody>
+      </p:sp>
+      <p:sp>
+        <p:nvSpPr>
+          <p:cNvPr id="8" name="Rounded Rectangle 7"/>
           <p:cNvSpPr/>
           <p:nvPr/>
         </p:nvSpPr>
         <p:spPr>
           <a:xfrm>
-            <a:off x="5806440" y="1051560"/>
-            <a:ext cx="5298947" cy="4629150"/>
+            <a:off x="822960" y="2514600"/>
+            <a:ext cx="10515600" cy="914400"/>
           </a:xfrm>
           <a:prstGeom prst="roundRect">
             <a:avLst/>
           </a:prstGeom>
           <a:solidFill>
-            <a:srgbClr val="F3F6FB"/>
+            <a:srgbClr val="E9F6EE"/>
           </a:solidFill>
           <a:ln w="12700">
             <a:solidFill>
-              <a:srgbClr val="C7D2E6"/>
+              <a:srgbClr val="1E8E4B"/>
             </a:solidFill>
           </a:ln>
           <a:effectLst/>
@@ -10622,14 +15161,14 @@
       </p:sp>
       <p:sp>
         <p:nvSpPr>
-          <p:cNvPr id="10" name="TextBox 9"/>
+          <p:cNvPr id="9" name="TextBox 8"/>
           <p:cNvSpPr txBox="1"/>
           <p:nvPr/>
         </p:nvSpPr>
         <p:spPr>
           <a:xfrm>
-            <a:off x="6080760" y="2726055"/>
-            <a:ext cx="4750307" cy="1280160"/>
+            <a:off x="1097280" y="2697480"/>
+            <a:ext cx="10058400" cy="640080"/>
           </a:xfrm>
           <a:prstGeom prst="rect">
             <a:avLst/>
@@ -10642,27 +15181,66 @@
           </a:bodyPr>
           <a:lstStyle/>
           <a:p>
-            <a:pPr algn="ctr"/>
-            <a:r>
-              <a:rPr sz="1400" b="1" i="0">
-                <a:solidFill>
-                  <a:srgbClr val="64748B"/>
-                </a:solidFill>
-                <a:latin typeface="Montserrat"/>
-              </a:rPr>
-              <a:t>IMAGEN REALISTA</a:t>
-            </a:r>
-          </a:p>
-          <a:p>
-            <a:pPr algn="ctr"/>
-            <a:r>
-              <a:rPr sz="1100" b="0" i="1">
-                <a:solidFill>
-                  <a:srgbClr val="64748B"/>
-                </a:solidFill>
-                <a:latin typeface="Montserrat"/>
-              </a:rPr>
-              <a:t>arc welding steel pipe joint sparks</a:t>
+            <a:r>
+              <a:rPr sz="1800" b="1" i="0">
+                <a:solidFill>
+                  <a:srgbClr val="1E8E4B"/>
+                </a:solidFill>
+                <a:latin typeface="Montserrat"/>
+              </a:rPr>
+              <a:t>A.  </a:t>
+            </a:r>
+            <a:r>
+              <a:rPr sz="1800" b="1" i="0">
+                <a:solidFill>
+                  <a:srgbClr val="1E2761"/>
+                </a:solidFill>
+                <a:latin typeface="Montserrat"/>
+              </a:rPr>
+              <a:t>Por encima de 0,05 bar</a:t>
+            </a:r>
+          </a:p>
+        </p:txBody>
+      </p:sp>
+      <p:sp>
+        <p:nvSpPr>
+          <p:cNvPr id="10" name="TextBox 9"/>
+          <p:cNvSpPr txBox="1"/>
+          <p:nvPr/>
+        </p:nvSpPr>
+        <p:spPr>
+          <a:xfrm>
+            <a:off x="822960" y="3749039"/>
+            <a:ext cx="10515600" cy="2194560"/>
+          </a:xfrm>
+          <a:prstGeom prst="rect">
+            <a:avLst/>
+          </a:prstGeom>
+          <a:noFill/>
+        </p:spPr>
+        <p:txBody>
+          <a:bodyPr wrap="square">
+            <a:spAutoFit/>
+          </a:bodyPr>
+          <a:lstStyle/>
+          <a:p>
+            <a:r>
+              <a:rPr sz="1500" b="1" i="0">
+                <a:solidFill>
+                  <a:srgbClr val="E8801A"/>
+                </a:solidFill>
+                <a:latin typeface="Montserrat"/>
+              </a:rPr>
+              <a:t>Por qué:  </a:t>
+            </a:r>
+            <a:r>
+              <a:rPr sz="1500" b="0" i="0">
+                <a:solidFill>
+                  <a:srgbClr val="1B2330"/>
+                </a:solidFill>
+                <a:latin typeface="Montserrat"/>
+              </a:rPr>
+              <a:t>Por encima de 0,05 bar la soldadura debe ser siempre fuerte; la blanda solo se admite hasta 0,05 bar en uso doméstico o cocina tipo A ≤ 30 kW. Y en aparcamiento cerrado, fuerte aunque la presión sea baja.</a:t>
             </a:r>
           </a:p>
         </p:txBody>
@@ -10672,6 +15250,18 @@
   <p:clrMapOvr>
     <a:masterClrMapping/>
   </p:clrMapOvr>
+  <mc:AlternateContent xmlns:mc="http://schemas.openxmlformats.org/markup-compatibility/2006">
+    <mc:Choice xmlns:p14="http://schemas.microsoft.com/office/powerpoint/2010/main" Requires="p14">
+      <p:transition spd="med" p14:dur="700">
+        <p14:cube dir="r"/>
+      </p:transition>
+    </mc:Choice>
+    <mc:Fallback>
+      <p:transition spd="med">
+        <p:push dir="r"/>
+      </p:transition>
+    </mc:Fallback>
+  </mc:AlternateContent>
 </p:sld>
 </file>
 
@@ -10759,7 +15349,7 @@
                 </a:solidFill>
                 <a:latin typeface="Montserrat"/>
               </a:rPr>
-              <a:t>009 / 015</a:t>
+              <a:t>009 / 021</a:t>
             </a:r>
           </a:p>
         </p:txBody>
@@ -10827,7 +15417,7 @@
                 </a:solidFill>
                 <a:latin typeface="Montserrat"/>
               </a:rPr>
-              <a:t>SOLDADURA · COBRE E INOX</a:t>
+              <a:t>SOLDADURA · POLIETILENO</a:t>
             </a:r>
           </a:p>
         </p:txBody>
@@ -10861,14 +15451,14 @@
                 </a:solidFill>
                 <a:latin typeface="Montserrat"/>
               </a:rPr>
-              <a:t>Capilaridad: cobre e inoxidable</a:t>
-            </a:r>
-          </a:p>
-        </p:txBody>
-      </p:sp>
-      <p:sp>
-        <p:nvSpPr>
-          <p:cNvPr id="7" name="Rounded Rectangle 6"/>
+              <a:t>Polietileno con polietileno</a:t>
+            </a:r>
+          </a:p>
+        </p:txBody>
+      </p:sp>
+      <p:sp>
+        <p:nvSpPr>
+          <p:cNvPr id="7" name="Rectangle 6"/>
           <p:cNvSpPr/>
           <p:nvPr/>
         </p:nvSpPr>
@@ -10877,7 +15467,7 @@
             <a:off x="868680" y="1627632"/>
             <a:ext cx="2011680" cy="73152"/>
           </a:xfrm>
-          <a:prstGeom prst="roundRect">
+          <a:prstGeom prst="rect">
             <a:avLst/>
           </a:prstGeom>
           <a:solidFill>
@@ -10918,8 +15508,8 @@
         </p:nvSpPr>
         <p:spPr>
           <a:xfrm>
-            <a:off x="822960" y="1965960"/>
-            <a:ext cx="4983480" cy="4206240"/>
+            <a:off x="6355080" y="1965960"/>
+            <a:ext cx="5029200" cy="4206240"/>
           </a:xfrm>
           <a:prstGeom prst="rect">
             <a:avLst/>
@@ -10953,7 +15543,7 @@
                 </a:solidFill>
                 <a:latin typeface="Montserrat"/>
               </a:rPr>
-              <a:t>Unión por soldadura capilar</a:t>
+              <a:t>Preferentemente por electrofusión</a:t>
             </a:r>
           </a:p>
           <a:p>
@@ -10978,7 +15568,7 @@
                 </a:solidFill>
                 <a:latin typeface="Montserrat"/>
               </a:rPr>
-              <a:t>Fuerte 450 °C · blanda 220 °C</a:t>
+              <a:t>A tope si DN ≥ 110</a:t>
             </a:r>
           </a:p>
           <a:p>
@@ -11003,7 +15593,7 @@
                 </a:solidFill>
                 <a:latin typeface="Montserrat"/>
               </a:rPr>
-              <a:t>Prohibido el estaño-plomo</a:t>
+              <a:t>Accesorios compatibles con el tubo</a:t>
             </a:r>
           </a:p>
           <a:p>
@@ -11028,21 +15618,21 @@
                 </a:solidFill>
                 <a:latin typeface="Montserrat"/>
               </a:rPr>
-              <a:t>No abocardar (salvo baterías de contadores)</a:t>
-            </a:r>
-          </a:p>
-        </p:txBody>
-      </p:sp>
-      <p:sp>
-        <p:nvSpPr>
-          <p:cNvPr id="9" name="imgph" descr="IMGQ:capillary solder copper fitting joint"/>
+              <a:t>Se funde el material consigo mismo</a:t>
+            </a:r>
+          </a:p>
+        </p:txBody>
+      </p:sp>
+      <p:sp>
+        <p:nvSpPr>
+          <p:cNvPr id="9" name="imgph" descr="IMGQ:polyethylene pipe electrofusion welding"/>
           <p:cNvSpPr/>
           <p:nvPr/>
         </p:nvSpPr>
         <p:spPr>
           <a:xfrm>
-            <a:off x="5806440" y="1051560"/>
-            <a:ext cx="5298947" cy="4629150"/>
+            <a:off x="822960" y="1965960"/>
+            <a:ext cx="5303520" cy="4572000"/>
           </a:xfrm>
           <a:prstGeom prst="roundRect">
             <a:avLst/>
@@ -11087,8 +15677,8 @@
         </p:nvSpPr>
         <p:spPr>
           <a:xfrm>
-            <a:off x="6080760" y="2726055"/>
-            <a:ext cx="4750307" cy="1280160"/>
+            <a:off x="1097280" y="3611880"/>
+            <a:ext cx="4754880" cy="1280160"/>
           </a:xfrm>
           <a:prstGeom prst="rect">
             <a:avLst/>
@@ -11109,7 +15699,7 @@
                 </a:solidFill>
                 <a:latin typeface="Montserrat"/>
               </a:rPr>
-              <a:t>IMAGEN REALISTA</a:t>
+              <a:t>IMAGEN</a:t>
             </a:r>
           </a:p>
           <a:p>
@@ -11121,7 +15711,7 @@
                 </a:solidFill>
                 <a:latin typeface="Montserrat"/>
               </a:rPr>
-              <a:t>capillary solder copper fitting joint</a:t>
+              <a:t>polyethylene pipe electrofusion welding</a:t>
             </a:r>
           </a:p>
         </p:txBody>
@@ -11131,6 +15721,18 @@
   <p:clrMapOvr>
     <a:masterClrMapping/>
   </p:clrMapOvr>
+  <mc:AlternateContent xmlns:mc="http://schemas.openxmlformats.org/markup-compatibility/2006">
+    <mc:Choice xmlns:p14="http://schemas.microsoft.com/office/powerpoint/2010/main" Requires="p14">
+      <p:transition spd="med" p14:dur="700">
+        <p14:cube dir="l"/>
+      </p:transition>
+    </mc:Choice>
+    <mc:Fallback>
+      <p:transition spd="med">
+        <p:push dir="l"/>
+      </p:transition>
+    </mc:Fallback>
+  </mc:AlternateContent>
 </p:sld>
 </file>
 

--- a/Curso Gas B/10 - UNE 60670 - Tuberias, accesorios y uniones/10 - UNE 60670 - Tuberias, accesorios y uniones - Vídeo 3.pptx
+++ b/Curso Gas B/10 - UNE 60670 - Tuberias, accesorios y uniones/10 - UNE 60670 - Tuberias, accesorios y uniones - Vídeo 3.pptx
@@ -822,12 +822,12 @@
           <a:lstStyle/>
           <a:p>
             <a:r>
-              <a:t>N1: Pregunta de las que caen seguro. Cobre con acero, ¿se pueden soldar directamente el uno al otro?</a:t>
-            </a:r>
-          </a:p>
-          <a:p>
-            <a:r>
-              <a:t>N2: Recuerda la regla del traductor: entre metales distintos siempre va algo por medio.</a:t>
+              <a:t>N1: Pregunta de las que caen seguro. Para unir un tubo de cobre con uno de acero, la norma exige... ¿qué? Te leo las cuatro opciones. Opción A, soldarlos directamente por capilaridad. Opción B, intercalar un accesorio de aleación de cobre. Opción C, unirlos con una junta de elastómero. Opción D, usar soldadura blanda de estaño-plomo. Piénsalo.</a:t>
+            </a:r>
+          </a:p>
+          <a:p>
+            <a:r>
+              <a:t>N2: Una pista: recuerda la regla del traductor; entre metales distintos siempre va algo por medio.</a:t>
             </a:r>
           </a:p>
         </p:txBody>
@@ -897,12 +897,12 @@
           <a:lstStyle/>
           <a:p>
             <a:r>
-              <a:t>N1: ¿Por qué no directo?</a:t>
-            </a:r>
-          </a:p>
-          <a:p>
-            <a:r>
-              <a:t>N2: Porque dos metales distintos con humedad forman una pila, un par galvánico, y uno se corroe hasta que la junta fuga. Por eso se mete de intermediario un accesorio de aleación de cobre, el traductor. Si ves 'unión directa de cobre y acero', es falsa.</a:t>
+              <a:t>N2: La respuesta correcta es la opción B: intercalar un accesorio de aleación de cobre. ¿Por qué no directo? Porque dos metales distintos con humedad forman una pila, lo que se llama un par galvánico, y uno se corroe hasta que la junta fuga. Por eso se mete de intermediario ese accesorio de aleación de cobre, el traductor, que se suelda al acero a tope por bordón a ochocientos cincuenta grados. El truco: si ves 'unión directa de cobre y acero', es falsa; y el estaño-plomo está prohibido por tóxico, así que la opción D también cae.</a:t>
+            </a:r>
+          </a:p>
+          <a:p>
+            <a:r>
+              <a:t>N1: Metales distintos, siempre el traductor por medio.</a:t>
             </a:r>
           </a:p>
         </p:txBody>
@@ -1197,12 +1197,12 @@
           <a:lstStyle/>
           <a:p>
             <a:r>
-              <a:t>N1: Una tapa que vale para todas las mecánicas. ¿Hasta qué presión se pueden usar?</a:t>
-            </a:r>
-          </a:p>
-          <a:p>
-            <a:r>
-              <a:t>N2: Coincide con el techo de aplicación de toda esta norma; piensa en el valor más alto de la escalera.</a:t>
+              <a:t>N1: Una tapa que vale para todas las uniones mecánicas: roscadas, press-fitting, bridas... Pregunta: ¿hasta qué MOP se pueden utilizar? Escucha las opciones. Opción A, hasta cero coma cero cinco bar. Opción B, hasta cero coma cuatro bar. Opción C, hasta dos bar. Opción D, hasta cinco bar. Piensa un momento.</a:t>
+            </a:r>
+          </a:p>
+          <a:p>
+            <a:r>
+              <a:t>N2: Una pista: coincide con el techo de aplicación de toda esta norma; piensa en el valor más alto de la escalera.</a:t>
             </a:r>
           </a:p>
         </p:txBody>
@@ -1272,12 +1272,12 @@
           <a:lstStyle/>
           <a:p>
             <a:r>
-              <a:t>N1: ¿Por qué ese tope y no otro?</a:t>
-            </a:r>
-          </a:p>
-          <a:p>
-            <a:r>
-              <a:t>N2: Porque es el límite de aplicación de toda la norma seis-cero-seis-siete-cero, y las uniones mecánicas no van más allá. Da igual que sean desmontables o no desmontables: todas, hasta cinco bar.</a:t>
+              <a:t>N2: La respuesta correcta es la opción D: hasta cinco bar. ¿Por qué ese tope y no otro? Porque cinco bar es el límite de aplicación de toda la norma seis-cero-seis-siete-cero, y las uniones mecánicas no van más allá. Da igual que sean desmontables, como las bridas, o no desmontables, como el press-fitting o las roscadas: todas comparten el mismo tope. El truco: cualquier opción por debajo de cinco bar se queda corta.</a:t>
+            </a:r>
+          </a:p>
+          <a:p>
+            <a:r>
+              <a:t>N1: Uniones mecánicas, todas hasta cinco bar.</a:t>
             </a:r>
           </a:p>
         </p:txBody>
@@ -1873,12 +1873,12 @@
           <a:lstStyle/>
           <a:p>
             <a:r>
-              <a:t>N1: La frontera de oro del vídeo. ¿A partir de qué presión te obligan a soldadura fuerte sí o sí?</a:t>
-            </a:r>
-          </a:p>
-          <a:p>
-            <a:r>
-              <a:t>N2: Es el escalón más bajo de la escalera de presiones; piensa en cero coma cero cinco bar.</a:t>
+              <a:t>N1: La frontera de oro del vídeo. Pregunta: ¿a partir de qué presión es obligatoria siempre la soldadura fuerte? Escucha las opciones. Opción A, por encima de cero coma cero cinco bar. Opción B, por encima de cero coma quince bar. Opción C, por encima de cero coma cuatro bar. Opción D, por encima de dos bar. Tómate un segundo.</a:t>
+            </a:r>
+          </a:p>
+          <a:p>
+            <a:r>
+              <a:t>N2: Una pista: es el escalón más bajo de la escalera de presiones; piensa en cero coma cero cinco bar.</a:t>
             </a:r>
           </a:p>
         </p:txBody>
@@ -1948,12 +1948,12 @@
           <a:lstStyle/>
           <a:p>
             <a:r>
-              <a:t>N1: ¿Por qué justo en ese punto?</a:t>
-            </a:r>
-          </a:p>
-          <a:p>
-            <a:r>
-              <a:t>N2: Porque la soldadura fuerte, hecha a mucha más temperatura, aguanta el calor de un incendio muchísimo mejor que la blanda. Por encima de cero coma cero cinco bar, siempre fuerte. Y ojo al matiz: en un aparcamiento cerrado es fuerte aunque la presión sea baja, porque es zona de riesgo.</a:t>
+              <a:t>N2: La respuesta correcta es la opción A: por encima de cero coma cero cinco bar. ¿Por qué justo en ese punto? Porque la soldadura fuerte, hecha a mucha más temperatura, aguanta el calor de un incendio muchísimo mejor que la blanda. Por encima de cero coma cero cinco bar, siempre fuerte; la blanda solo se admite hasta ahí, y en uso doméstico o cocina de tipo A de hasta treinta kilovatios. El truco: en un aparcamiento cerrado es fuerte aunque la presión sea baja, porque es zona de riesgo de incendio.</a:t>
+            </a:r>
+          </a:p>
+          <a:p>
+            <a:r>
+              <a:t>N1: Por encima de cero coma cero cinco, fuerte sí o sí.</a:t>
             </a:r>
           </a:p>
         </p:txBody>
